--- a/presentation/DYNATREK_成果発表.pptx
+++ b/presentation/DYNATREK_成果発表.pptx
@@ -509,9 +509,9 @@
           <a:p>
             <a:r>
               <a:rPr lang="en-US" dirty="0"/>
-              <a:t>インターンのテーマは、銀行が持っているデータを分析して価値に変えるプロセスを学ぶことでした。
-出発点は、あいち銀行様の「預金の増減を調べたい」というご相談です。ただ、行内のデータは項目が多く、見たい条件でまとめて取り出すのが簡単ではありません。そこで使ったのがDYNATREKです。
-「では、実際にどんなことができるのか」──本発表では、その一例として私が行った分析を紹介します。</a:t>
+              <a:t>本インターンのテーマは、銀行が持っているデータを分析して、どのような価値に変えていくかのプロセスを学ぶことでした。
+行内のデータは項目が多く、見たい条件でまとめて取り出すのが簡単ではありません。そこで使ったのがDYNATREKです。
+今回は、その活用例として「預金の増減を知りたい」といった問いを想定し、実際にどこまで答えを出せるのかを確かめてみました。本発表は、その活用例の一つになります。</a:t>
             </a:r>
             <a:endParaRPr lang="en-US" dirty="0"/>
           </a:p>
@@ -1617,7 +1617,7 @@
                 <a:ea typeface="Meiryo" pitchFamily="34" charset="-122"/>
                 <a:cs typeface="Meiryo" pitchFamily="34" charset="-120"/>
               </a:rPr>
-              <a:t>き っ か け</a:t>
+              <a:t>位 置 づ け</a:t>
             </a:r>
             <a:endParaRPr lang="en-US" sz="1050" dirty="0"/>
           </a:p>
@@ -1656,7 +1656,7 @@
                 <a:ea typeface="Meiryo" pitchFamily="34" charset="-122"/>
                 <a:cs typeface="Meiryo" pitchFamily="34" charset="-120"/>
               </a:rPr>
-              <a:t>「預金の増減を調べたい」という相談から</a:t>
+              <a:t>「預金の増減を知りたい」を想定した、DYNATREKの活用例</a:t>
             </a:r>
             <a:endParaRPr lang="en-US" sz="2600" dirty="0"/>
           </a:p>
@@ -1695,7 +1695,7 @@
                 <a:ea typeface="Meiryo" pitchFamily="34" charset="-122"/>
                 <a:cs typeface="Meiryo" pitchFamily="34" charset="-120"/>
               </a:rPr>
-              <a:t>本インターンのテーマ：銀行内で保有する各種データを分析し、どのような価値に変換していくかのプロセスを学ぶ</a:t>
+              <a:t>本インターンのテーマ ── 銀行内で保有する各種データを分析し、どのような価値に変換していくかのプロセスを学ぶ</a:t>
             </a:r>
             <a:endParaRPr lang="en-US" sz="1250" dirty="0"/>
           </a:p>
@@ -1800,7 +1800,7 @@
                 <a:ea typeface="Meiryo" pitchFamily="34" charset="-122"/>
                 <a:cs typeface="Meiryo" pitchFamily="34" charset="-120"/>
               </a:rPr>
-              <a:t>あいち銀行様からのご相談</a:t>
+              <a:t>行内のデータ</a:t>
             </a:r>
             <a:endParaRPr lang="en-US" sz="1050" dirty="0"/>
           </a:p>
@@ -1815,7 +1815,7 @@
         <p:spPr>
           <a:xfrm>
             <a:off x="914400" y="2276856"/>
-            <a:ext cx="5440680" cy="457200"/>
+            <a:ext cx="5440680" cy="530352"/>
           </a:xfrm>
           <a:prstGeom prst="rect">
             <a:avLst/>
@@ -1842,7 +1842,7 @@
                 <a:ea typeface="Meiryo" pitchFamily="34" charset="-122"/>
                 <a:cs typeface="Meiryo" pitchFamily="34" charset="-120"/>
               </a:rPr>
-              <a:t>「預金の増減を調べたい」</a:t>
+              <a:t>項目が多く、見たい条件でまとめて取り出す手段がない</a:t>
             </a:r>
             <a:endParaRPr lang="en-US" sz="1350" dirty="0"/>
           </a:p>
@@ -1933,7 +1933,7 @@
                 <a:ea typeface="Meiryo" pitchFamily="34" charset="-122"/>
                 <a:cs typeface="Meiryo" pitchFamily="34" charset="-120"/>
               </a:rPr>
-              <a:t>ところが</a:t>
+              <a:t>DYNATREK</a:t>
             </a:r>
             <a:endParaRPr lang="en-US" sz="1050" dirty="0"/>
           </a:p>
@@ -1948,7 +1948,7 @@
         <p:spPr>
           <a:xfrm>
             <a:off x="914400" y="3493008"/>
-            <a:ext cx="5440680" cy="457200"/>
+            <a:ext cx="5440680" cy="530352"/>
           </a:xfrm>
           <a:prstGeom prst="rect">
             <a:avLst/>
@@ -1975,7 +1975,7 @@
                 <a:ea typeface="Meiryo" pitchFamily="34" charset="-122"/>
                 <a:cs typeface="Meiryo" pitchFamily="34" charset="-120"/>
               </a:rPr>
-              <a:t>行内のデータは項目が多く、見たい条件でまとめて取り出す手段がない</a:t>
+              <a:t>条件を指定して、必要なデータを集計・表示できるツール</a:t>
             </a:r>
             <a:endParaRPr lang="en-US" sz="1350" dirty="0"/>
           </a:p>
@@ -2066,7 +2066,7 @@
                 <a:ea typeface="Meiryo" pitchFamily="34" charset="-122"/>
                 <a:cs typeface="Meiryo" pitchFamily="34" charset="-120"/>
               </a:rPr>
-              <a:t>そこで</a:t>
+              <a:t>今回の想定</a:t>
             </a:r>
             <a:endParaRPr lang="en-US" sz="1050" dirty="0"/>
           </a:p>
@@ -2081,7 +2081,7 @@
         <p:spPr>
           <a:xfrm>
             <a:off x="914400" y="4709160"/>
-            <a:ext cx="5440680" cy="457200"/>
+            <a:ext cx="5440680" cy="530352"/>
           </a:xfrm>
           <a:prstGeom prst="rect">
             <a:avLst/>
@@ -2108,7 +2108,7 @@
                 <a:ea typeface="Meiryo" pitchFamily="34" charset="-122"/>
                 <a:cs typeface="Meiryo" pitchFamily="34" charset="-120"/>
               </a:rPr>
-              <a:t>DYNATREK ── 条件を指定して、必要なデータを集計・表示できるツール</a:t>
+              <a:t>例えば「預金の増減を知りたい」という問いに、どこまで答えられるか</a:t>
             </a:r>
             <a:endParaRPr lang="en-US" sz="1350" dirty="0"/>
           </a:p>
@@ -2177,7 +2177,7 @@
                 <a:ea typeface="Meiryo" pitchFamily="34" charset="-122"/>
                 <a:cs typeface="Meiryo" pitchFamily="34" charset="-120"/>
               </a:rPr>
-              <a:t>例えば、</a:t>
+              <a:t>では、実際に</a:t>
             </a:r>
             <a:endParaRPr lang="en-US" sz="2300" dirty="0"/>
           </a:p>
@@ -2197,7 +2197,7 @@
                 <a:ea typeface="Meiryo" pitchFamily="34" charset="-122"/>
                 <a:cs typeface="Meiryo" pitchFamily="34" charset="-120"/>
               </a:rPr>
-              <a:t>どんなことが</a:t>
+              <a:t>どこまで</a:t>
             </a:r>
             <a:endParaRPr lang="en-US" sz="2300" dirty="0"/>
           </a:p>
@@ -2217,7 +2217,7 @@
                 <a:ea typeface="Meiryo" pitchFamily="34" charset="-122"/>
                 <a:cs typeface="Meiryo" pitchFamily="34" charset="-120"/>
               </a:rPr>
-              <a:t>できるのか？</a:t>
+              <a:t>分かるのか</a:t>
             </a:r>
             <a:endParaRPr lang="en-US" sz="2300" dirty="0"/>
           </a:p>
@@ -2284,7 +2284,7 @@
                 <a:ea typeface="Meiryo" pitchFamily="34" charset="-122"/>
                 <a:cs typeface="Meiryo" pitchFamily="34" charset="-120"/>
               </a:rPr>
-              <a:t>本発表では、その一例として</a:t>
+              <a:t>本発表は、</a:t>
             </a:r>
             <a:endParaRPr lang="en-US" sz="1400" dirty="0"/>
           </a:p>
@@ -2304,7 +2304,7 @@
                 <a:ea typeface="Meiryo" pitchFamily="34" charset="-122"/>
                 <a:cs typeface="Meiryo" pitchFamily="34" charset="-120"/>
               </a:rPr>
-              <a:t>私が行った分析を紹介します</a:t>
+              <a:t>その活用例の一つ</a:t>
             </a:r>
             <a:endParaRPr lang="en-US" sz="1400" dirty="0"/>
           </a:p>
@@ -2517,7 +2517,7 @@
                 <a:ea typeface="Meiryo" pitchFamily="34" charset="-122"/>
                 <a:cs typeface="Meiryo" pitchFamily="34" charset="-120"/>
               </a:rPr>
-              <a:t>今回のテーマは、あいち銀行様が経営計画で掲げている方向と重なっています。</a:t>
+              <a:t>今回取り上げたのは非対面チャネルの利用状況。あいち銀行様が経営計画で掲げる方向と重なるテーマ</a:t>
             </a:r>
             <a:endParaRPr lang="en-US" sz="1250" dirty="0"/>
           </a:p>
@@ -3542,7 +3542,7 @@
                 <a:ea typeface="Meiryo" pitchFamily="34" charset="-122"/>
                 <a:cs typeface="Meiryo" pitchFamily="34" charset="-120"/>
               </a:rPr>
-              <a:t>背景をふまえて、今回の分析の目的を次のように置きました。</a:t>
+              <a:t>背景をふまえ、今回の分析の目的を次のように置いた</a:t>
             </a:r>
             <a:endParaRPr lang="en-US" sz="1250" dirty="0"/>
           </a:p>
@@ -4115,7 +4115,7 @@
                 <a:ea typeface="Meiryo" pitchFamily="34" charset="-122"/>
                 <a:cs typeface="Meiryo" pitchFamily="34" charset="-120"/>
               </a:rPr>
-              <a:t>分析に使ったデータと、DYNATREKで扱えるようにするまでの準備です。</a:t>
+              <a:t>分析に使ったデータと、DYNATREKで扱える形にするまでの準備</a:t>
             </a:r>
             <a:endParaRPr lang="en-US" sz="1250" dirty="0"/>
           </a:p>
@@ -5067,7 +5067,7 @@
                 <a:ea typeface="Meiryo" pitchFamily="34" charset="-122"/>
                 <a:cs typeface="Meiryo" pitchFamily="34" charset="-120"/>
               </a:rPr>
-              <a:t>まず、IBで行われた取引の件数を、2つの期間で比べました。</a:t>
+              <a:t>まず、IBで行われた取引の件数を2つの期間で比較</a:t>
             </a:r>
             <a:endParaRPr lang="en-US" sz="1250" dirty="0"/>
           </a:p>
@@ -5817,7 +5817,7 @@
                 <a:ea typeface="Meiryo" pitchFamily="34" charset="-122"/>
                 <a:cs typeface="Meiryo" pitchFamily="34" charset="-120"/>
               </a:rPr>
-              <a:t>件数が増えた理由が「取引全体の増加」ではないことを確かめるため、ATM側も見ました。</a:t>
+              <a:t>増加の理由が「取引全体の増加」ではないことを確かめるため、ATM側も確認</a:t>
             </a:r>
             <a:endParaRPr lang="en-US" sz="1250" dirty="0"/>
           </a:p>
@@ -6587,7 +6587,7 @@
                 <a:ea typeface="Meiryo" pitchFamily="34" charset="-122"/>
                 <a:cs typeface="Meiryo" pitchFamily="34" charset="-120"/>
               </a:rPr>
-              <a:t>「増えた」の次に知りたくなるのは「誰が使うようになったのか」です。今回は年代を5つに分けて調べました。</a:t>
+              <a:t>「増えた」の次に知りたくなるのは「誰が使うようになったのか」。今回は年代を5つに分けて確認</a:t>
             </a:r>
             <a:endParaRPr lang="en-US" sz="1250" dirty="0"/>
           </a:p>
@@ -7782,7 +7782,7 @@
                 <a:ea typeface="Meiryo" pitchFamily="34" charset="-122"/>
                 <a:cs typeface="Meiryo" pitchFamily="34" charset="-120"/>
               </a:rPr>
-              <a:t>今回のワークで行ったことを、ひとつの流れにまとめます。</a:t>
+              <a:t>今回のワークで行ったことを、ひとつの流れにまとめる</a:t>
             </a:r>
             <a:endParaRPr lang="en-US" sz="1250" dirty="0"/>
           </a:p>
@@ -7968,7 +7968,7 @@
                 <a:ea typeface="Meiryo" pitchFamily="34" charset="-122"/>
                 <a:cs typeface="Meiryo" pitchFamily="34" charset="-120"/>
               </a:rPr>
-              <a:t>預金やIBの動きを</a:t>
+              <a:t>「預金の増減を</a:t>
             </a:r>
             <a:endParaRPr lang="en-US" sz="1150" dirty="0"/>
           </a:p>
@@ -7988,7 +7988,7 @@
                 <a:ea typeface="Meiryo" pitchFamily="34" charset="-122"/>
                 <a:cs typeface="Meiryo" pitchFamily="34" charset="-120"/>
               </a:rPr>
-              <a:t>知りたい</a:t>
+              <a:t>知りたい」と想定</a:t>
             </a:r>
             <a:endParaRPr lang="en-US" sz="1150" dirty="0"/>
           </a:p>
@@ -8861,7 +8861,7 @@
                 <a:ea typeface="Meiryo" pitchFamily="34" charset="-122"/>
                 <a:cs typeface="Meiryo" pitchFamily="34" charset="-120"/>
               </a:rPr>
-              <a:t>今回のワークで学んだのは、この一連のプロセスです</a:t>
+              <a:t>今回のワークで学んだのは、この一連のプロセス</a:t>
             </a:r>
             <a:endParaRPr lang="en-US" sz="1250" dirty="0"/>
           </a:p>

--- a/presentation/DYNATREK_成果発表.pptx
+++ b/presentation/DYNATREK_成果発表.pptx
@@ -510,8 +510,8 @@
             <a:r>
               <a:rPr lang="en-US" dirty="0"/>
               <a:t>本インターンのテーマは、銀行が持っているデータを分析して、どのような価値に変えていくかのプロセスを学ぶことでした。
-行内のデータは項目が多く、見たい条件でまとめて取り出すのが簡単ではありません。そこで使ったのがDYNATREKです。
-今回は、その活用例として「預金の増減を知りたい」といった問いを想定し、実際にどこまで答えを出せるのかを確かめてみました。本発表は、その活用例の一つになります。</a:t>
+銀行には日々の取引データが蓄積されていますが、項目が多く、知りたい切り口でまとめて取り出すのは簡単ではありません。そこで使ったのがDYNATREKです。条件を指定するだけで、必要なデータを集計して表示できます。
+「預金の増減はどうか」「IBはどれだけ使われているか」──こうした問いを一つ立てて、データから答えを出すところまで実際に通してみました。その流れを紹介します。</a:t>
             </a:r>
             <a:endParaRPr lang="en-US" dirty="0"/>
           </a:p>
@@ -599,10 +599,10 @@
           <a:p>
             <a:r>
               <a:rPr lang="en-US" dirty="0"/>
-              <a:t>あいちフィナンシャルグループの第2次中期経営計画では、基本戦略のひとつに「DX戦略の加速化」が掲げられ、その重点施策として、バンキングアプリやインターネット支店といった非対面チャネルの有効活用が挙げられています。
-その非対面チャネルのひとつがインターネットバンキング、IBです。
-【作成時の注意】重点施策の番号（⑦）と本文の表現は、計画の原本で確認してから記入すること。番号が確認できない場合は「重点施策のひとつ」と書けば事実関係は崩れない。
-※KPIの数値には触れない（今回はKPIに沿った分析をしていないため）。</a:t>
+              <a:t>では、どの問いを選んだか。銀行が実際に力を入れている領域から選びました。
+あいちフィナンシャルグループの第2次中期経営計画では、基本戦略のひとつに「DX戦略の加速化」が掲げられ、その重点施策として、バンキングアプリやインターネット支店といった非対面チャネルの有効活用が挙げられています。
+非対面チャネルのひとつがインターネットバンキング、IBです。これがどれだけ使われるようになったかは、計画の狙いがどこまで進んでいるかを示す手がかりになります。
+【作成時】重点施策の番号と本文は計画の原本で確認して記入する。確認できなければ「重点施策のひとつ」と書けば事実関係は崩れない。KPIの数値には触れない。</a:t>
             </a:r>
             <a:endParaRPr lang="en-US" dirty="0"/>
           </a:p>
@@ -690,9 +690,9 @@
           <a:p>
             <a:r>
               <a:rPr lang="en-US" dirty="0"/>
-              <a:t>背景をふまえて、目的はシンプルに置きました。2025年と2026年の同じ時期を比べて、IBの利用件数がどれだけ増えたかを確認することです。
-比べ方は、同じ4〜6月どうし。時期によって取引の量は変わるので、同じ季節どうしで比べます。
-もうひとつ、IBの件数だけを見るのではなく、ATMで行われている「IBでもできる取引」も合わせて見ることにしました。理由は結果のところで説明します。</a:t>
+              <a:t>背景をふまえて、確かめることをこう定めました。2025年と2026年の同じ時期を比べて、IBの利用件数がどれだけ増えたかを確認することです。
+比べ方は同じ4〜6月どうし。月によって取引の量は変わるので、同じ季節どうしで比べます。
+もうひとつ、IBの件数だけでなく、ATMで行われている「IBでも代替できる取引」も合わせて見ることにしました。理由は結果のところで説明します。</a:t>
             </a:r>
             <a:endParaRPr lang="en-US" dirty="0"/>
           </a:p>
@@ -782,7 +782,7 @@
               <a:rPr lang="en-US" dirty="0"/>
               <a:t>使ったデータは、2025年と2026年の4月・5月・6月です。
 元になったのは取引履歴（流動）で、そこから入出金テーブルを作成し、DYNATREKで条件を指定して集計できる形にしました。
-取引履歴そのままだと項目が多く目的のデータを追いにくいので、この準備が必要でした。逆に、一度この形にしてしまえば、以降は条件を指定するだけで色々な角度から見られるようになります。</a:t>
+取引履歴そのままでは項目が多く、目的のデータを追いにくい。逆に、一度この形にしてしまえば、以降は条件を指定するだけでいろいろな角度から見られるようになります。</a:t>
             </a:r>
             <a:endParaRPr lang="en-US" dirty="0"/>
           </a:p>
@@ -872,8 +872,8 @@
               <a:rPr lang="en-US" dirty="0"/>
               <a:t>まずIBの利用件数です。2025年の4〜6月と、2026年の4〜6月を比べました。
 （記入した数値を読み上げる）
-1年間で件数は増えています。月別に見ても、同じ傾向が出ています。
-──ただ、これだけで「IBが広がった」と言い切れるかというと、そうではありません。次のスライドで、もうひとつの見方を足します。</a:t>
+1年間で件数は増えています。月別に見ても同じ傾向です。
+ただ、これだけでIBが広がったと言い切ることはできません。取引そのものが増えただけ、という可能性が残るからです。そこで、もうひとつの見方を足しました。</a:t>
             </a:r>
             <a:endParaRPr lang="en-US" dirty="0"/>
           </a:p>
@@ -961,10 +961,10 @@
           <a:p>
             <a:r>
               <a:rPr lang="en-US" dirty="0"/>
-              <a:t>IBの件数が増えても、それが「取引そのものが増えただけ」なら、IBが広がったとは言えません。
-そこで、ATMで行われている取引のうち、IBでも同じことができるもの──振込や振替など──に絞って件数を見ました。
+              <a:t>IBでも同じことができる取引──振込や振替など──に絞って、ATM側の件数を見ました。
 （記入した数値を読み上げる）
-こちらは減っています。IBが増え、ATM側が減っている。同じ取引がIBへ移りつつある、と読めます。
+こちらは減っています。IBが増え、ATM側が減っている。つまり、同じ取引がIBへ移りつつあると読めます。
+片方だけを見ていたら「増えた」で終わっていましたが、比べる相手を置いたことで、一歩踏み込んだ言い方ができるようになりました。
 ※「IBでも行える取引」に何を含めたかは質疑で聞かれやすいので、口頭でも一度言っておく。</a:t>
             </a:r>
             <a:endParaRPr lang="en-US" dirty="0"/>
@@ -1053,11 +1053,11 @@
           <a:p>
             <a:r>
               <a:rPr lang="en-US" dirty="0"/>
-              <a:t>IBが増えていることが分かると、銀行側が次に知りたくなるのは「では、どの年代で増えているのか」です。これも同じテーブルに年代の条件を足すだけで確認できました。
+              <a:t>IBへ移りつつあることが分かると、次に知りたくなるのは「では、誰が使うようになったのか」です。これも同じテーブルに年代の条件を足すだけで確認できました。
 年代は5つに分けています。未成年、若手成人、働き手①、働き手②、高齢者です。
 （読み取りを説明する）
 ここまで分かると、伸びていない年代にどう案内するか、といった具体的な打ち手の話ができるようになります。
-【作成時の注意】施策の2行は、実際の読み取りに合わせて書き換えること。</a:t>
+【作成時】打ち手の2行は、実際の読み取りに合わせて書き換えること。</a:t>
             </a:r>
             <a:endParaRPr lang="en-US" dirty="0"/>
           </a:p>
@@ -1146,7 +1146,7 @@
             <a:r>
               <a:rPr lang="en-US" dirty="0"/>
               <a:t>最後に、今回の流れをまとめます。
-「預金やIBの動きを知りたい」という問いから始まり、取引履歴（流動）から入出金テーブルを整え、IBが増えATM側が減っていることを確かめ、さらに年代別まで深掘りして、最後は誰にどう案内するかという打ち手の検討まで進みました。
+「IBの利用は広がっているか」という問いを立て、取引履歴（流動）から入出金テーブルを整え、IBが増えATM側が減っていることを確かめ、さらに年代別まで深掘りして、最後は誰にどう案内するかという打ち手の検討まで進みました。
 行内にあるデータも、条件を指定して見られる形に整えれば、業務上の問いに答えて、次の施策を考える材料になります。今回のワークで学んだのは、この一連のプロセスです。</a:t>
             </a:r>
             <a:endParaRPr lang="en-US" dirty="0"/>
@@ -1617,7 +1617,7 @@
                 <a:ea typeface="Meiryo" pitchFamily="34" charset="-122"/>
                 <a:cs typeface="Meiryo" pitchFamily="34" charset="-120"/>
               </a:rPr>
-              <a:t>位 置 づ け</a:t>
+              <a:t>は じ め に</a:t>
             </a:r>
             <a:endParaRPr lang="en-US" sz="1050" dirty="0"/>
           </a:p>
@@ -1656,7 +1656,7 @@
                 <a:ea typeface="Meiryo" pitchFamily="34" charset="-122"/>
                 <a:cs typeface="Meiryo" pitchFamily="34" charset="-120"/>
               </a:rPr>
-              <a:t>「預金の増減を知りたい」を想定した、DYNATREKの活用例</a:t>
+              <a:t>データはあっても答えはすぐに出ない</a:t>
             </a:r>
             <a:endParaRPr lang="en-US" sz="2600" dirty="0"/>
           </a:p>
@@ -1776,7 +1776,7 @@
         <p:spPr>
           <a:xfrm>
             <a:off x="914400" y="2011680"/>
-            <a:ext cx="5440680" cy="219456"/>
+            <a:ext cx="5440680" cy="237744"/>
           </a:xfrm>
           <a:prstGeom prst="rect">
             <a:avLst/>
@@ -1800,7 +1800,7 @@
                 <a:ea typeface="Meiryo" pitchFamily="34" charset="-122"/>
                 <a:cs typeface="Meiryo" pitchFamily="34" charset="-120"/>
               </a:rPr>
-              <a:t>行内のデータ</a:t>
+              <a:t>現 状</a:t>
             </a:r>
             <a:endParaRPr lang="en-US" sz="1050" dirty="0"/>
           </a:p>
@@ -1815,7 +1815,7 @@
         <p:spPr>
           <a:xfrm>
             <a:off x="914400" y="2276856"/>
-            <a:ext cx="5440680" cy="530352"/>
+            <a:ext cx="5440680" cy="502920"/>
           </a:xfrm>
           <a:prstGeom prst="rect">
             <a:avLst/>
@@ -1842,7 +1842,7 @@
                 <a:ea typeface="Meiryo" pitchFamily="34" charset="-122"/>
                 <a:cs typeface="Meiryo" pitchFamily="34" charset="-120"/>
               </a:rPr>
-              <a:t>項目が多く、見たい条件でまとめて取り出す手段がない</a:t>
+              <a:t>銀行には、日々の取引データが蓄積されている</a:t>
             </a:r>
             <a:endParaRPr lang="en-US" sz="1350" dirty="0"/>
           </a:p>
@@ -1909,7 +1909,7 @@
         <p:spPr>
           <a:xfrm>
             <a:off x="914400" y="3227832"/>
-            <a:ext cx="5440680" cy="219456"/>
+            <a:ext cx="5440680" cy="237744"/>
           </a:xfrm>
           <a:prstGeom prst="rect">
             <a:avLst/>
@@ -1933,7 +1933,7 @@
                 <a:ea typeface="Meiryo" pitchFamily="34" charset="-122"/>
                 <a:cs typeface="Meiryo" pitchFamily="34" charset="-120"/>
               </a:rPr>
-              <a:t>DYNATREK</a:t>
+              <a:t>課 題</a:t>
             </a:r>
             <a:endParaRPr lang="en-US" sz="1050" dirty="0"/>
           </a:p>
@@ -1948,7 +1948,7 @@
         <p:spPr>
           <a:xfrm>
             <a:off x="914400" y="3493008"/>
-            <a:ext cx="5440680" cy="530352"/>
+            <a:ext cx="5440680" cy="502920"/>
           </a:xfrm>
           <a:prstGeom prst="rect">
             <a:avLst/>
@@ -1975,7 +1975,7 @@
                 <a:ea typeface="Meiryo" pitchFamily="34" charset="-122"/>
                 <a:cs typeface="Meiryo" pitchFamily="34" charset="-120"/>
               </a:rPr>
-              <a:t>条件を指定して、必要なデータを集計・表示できるツール</a:t>
+              <a:t>項目が多く、知りたい切り口でまとめて取り出すのは容易ではない</a:t>
             </a:r>
             <a:endParaRPr lang="en-US" sz="1350" dirty="0"/>
           </a:p>
@@ -2042,7 +2042,7 @@
         <p:spPr>
           <a:xfrm>
             <a:off x="914400" y="4443984"/>
-            <a:ext cx="5440680" cy="219456"/>
+            <a:ext cx="5440680" cy="237744"/>
           </a:xfrm>
           <a:prstGeom prst="rect">
             <a:avLst/>
@@ -2066,7 +2066,7 @@
                 <a:ea typeface="Meiryo" pitchFamily="34" charset="-122"/>
                 <a:cs typeface="Meiryo" pitchFamily="34" charset="-120"/>
               </a:rPr>
-              <a:t>今回の想定</a:t>
+              <a:t>道 具</a:t>
             </a:r>
             <a:endParaRPr lang="en-US" sz="1050" dirty="0"/>
           </a:p>
@@ -2081,7 +2081,7 @@
         <p:spPr>
           <a:xfrm>
             <a:off x="914400" y="4709160"/>
-            <a:ext cx="5440680" cy="530352"/>
+            <a:ext cx="5440680" cy="502920"/>
           </a:xfrm>
           <a:prstGeom prst="rect">
             <a:avLst/>
@@ -2108,7 +2108,7 @@
                 <a:ea typeface="Meiryo" pitchFamily="34" charset="-122"/>
                 <a:cs typeface="Meiryo" pitchFamily="34" charset="-120"/>
               </a:rPr>
-              <a:t>例えば「預金の増減を知りたい」という問いに、どこまで答えられるか</a:t>
+              <a:t>DYNATREK ── 条件を指定するだけで、必要なデータを集計・表示できる</a:t>
             </a:r>
             <a:endParaRPr lang="en-US" sz="1350" dirty="0"/>
           </a:p>
@@ -2149,8 +2149,47 @@
         </p:nvSpPr>
         <p:spPr>
           <a:xfrm>
-            <a:off x="7333488" y="2240280"/>
-            <a:ext cx="3849624" cy="1600200"/>
+            <a:off x="7351776" y="2212848"/>
+            <a:ext cx="3813048" cy="237744"/>
+          </a:xfrm>
+          <a:prstGeom prst="rect">
+            <a:avLst/>
+          </a:prstGeom>
+          <a:noFill/>
+          <a:ln/>
+        </p:spPr>
+        <p:txBody>
+          <a:bodyPr wrap="square" lIns="0" tIns="0" rIns="0" bIns="0" rtlCol="0" anchor="ctr"/>
+          <a:lstStyle/>
+          <a:p>
+            <a:pPr indent="0" marL="0">
+              <a:buNone/>
+            </a:pPr>
+            <a:r>
+              <a:rPr lang="en-US" sz="1050" b="1" spc="100" kern="0" dirty="0">
+                <a:solidFill>
+                  <a:srgbClr val="B4551F"/>
+                </a:solidFill>
+                <a:latin typeface="Meiryo" pitchFamily="34" charset="0"/>
+                <a:ea typeface="Meiryo" pitchFamily="34" charset="-122"/>
+                <a:cs typeface="Meiryo" pitchFamily="34" charset="-120"/>
+              </a:rPr>
+              <a:t>例 え ば</a:t>
+            </a:r>
+            <a:endParaRPr lang="en-US" sz="1050" dirty="0"/>
+          </a:p>
+        </p:txBody>
+      </p:sp>
+      <p:sp>
+        <p:nvSpPr>
+          <p:cNvPr id="21" name="Text 19"/>
+          <p:cNvSpPr txBox="1"/>
+          <p:nvPr/>
+        </p:nvSpPr>
+        <p:spPr>
+          <a:xfrm>
+            <a:off x="7351776" y="2542032"/>
+            <a:ext cx="3813048" cy="1005840"/>
           </a:xfrm>
           <a:prstGeom prst="rect">
             <a:avLst/>
@@ -2164,12 +2203,12 @@
           <a:p>
             <a:pPr indent="0" marL="0">
               <a:lnSpc>
-                <a:spcPts val="3800"/>
+                <a:spcPts val="3200"/>
               </a:lnSpc>
               <a:buNone/>
             </a:pPr>
             <a:r>
-              <a:rPr lang="en-US" sz="2300" b="1" dirty="0">
+              <a:rPr lang="en-US" sz="1800" b="1" dirty="0">
                 <a:solidFill>
                   <a:srgbClr val="B4551F"/>
                 </a:solidFill>
@@ -2177,19 +2216,19 @@
                 <a:ea typeface="Meiryo" pitchFamily="34" charset="-122"/>
                 <a:cs typeface="Meiryo" pitchFamily="34" charset="-120"/>
               </a:rPr>
-              <a:t>では、実際に</a:t>
-            </a:r>
-            <a:endParaRPr lang="en-US" sz="2300" dirty="0"/>
+              <a:t>預金の増減はどうか</a:t>
+            </a:r>
+            <a:endParaRPr lang="en-US" sz="1800" dirty="0"/>
           </a:p>
           <a:p>
             <a:pPr indent="0" marL="0">
               <a:lnSpc>
-                <a:spcPts val="3800"/>
+                <a:spcPts val="3200"/>
               </a:lnSpc>
               <a:buNone/>
             </a:pPr>
             <a:r>
-              <a:rPr lang="en-US" sz="2300" b="1" dirty="0">
+              <a:rPr lang="en-US" sz="1800" b="1" dirty="0">
                 <a:solidFill>
                   <a:srgbClr val="B4551F"/>
                 </a:solidFill>
@@ -2197,42 +2236,22 @@
                 <a:ea typeface="Meiryo" pitchFamily="34" charset="-122"/>
                 <a:cs typeface="Meiryo" pitchFamily="34" charset="-120"/>
               </a:rPr>
-              <a:t>どこまで</a:t>
-            </a:r>
-            <a:endParaRPr lang="en-US" sz="2300" dirty="0"/>
-          </a:p>
-          <a:p>
-            <a:pPr indent="0" marL="0">
-              <a:lnSpc>
-                <a:spcPts val="3800"/>
-              </a:lnSpc>
-              <a:buNone/>
-            </a:pPr>
-            <a:r>
-              <a:rPr lang="en-US" sz="2300" b="1" dirty="0">
-                <a:solidFill>
-                  <a:srgbClr val="B4551F"/>
-                </a:solidFill>
-                <a:latin typeface="Meiryo" pitchFamily="34" charset="0"/>
-                <a:ea typeface="Meiryo" pitchFamily="34" charset="-122"/>
-                <a:cs typeface="Meiryo" pitchFamily="34" charset="-120"/>
-              </a:rPr>
-              <a:t>分かるのか</a:t>
-            </a:r>
-            <a:endParaRPr lang="en-US" sz="2300" dirty="0"/>
-          </a:p>
-        </p:txBody>
-      </p:sp>
-      <p:sp>
-        <p:nvSpPr>
-          <p:cNvPr id="21" name="Shape 19"/>
+              <a:t>IBはどれだけ使われているか</a:t>
+            </a:r>
+            <a:endParaRPr lang="en-US" sz="1800" dirty="0"/>
+          </a:p>
+        </p:txBody>
+      </p:sp>
+      <p:sp>
+        <p:nvSpPr>
+          <p:cNvPr id="22" name="Shape 20"/>
           <p:cNvSpPr/>
           <p:nvPr/>
         </p:nvSpPr>
         <p:spPr>
           <a:xfrm>
-            <a:off x="7333488" y="3950208"/>
-            <a:ext cx="3849624" cy="10973"/>
+            <a:off x="7351776" y="3785616"/>
+            <a:ext cx="3813048" cy="10973"/>
           </a:xfrm>
           <a:prstGeom prst="rect">
             <a:avLst/>
@@ -2250,14 +2269,14 @@
       </p:sp>
       <p:sp>
         <p:nvSpPr>
-          <p:cNvPr id="22" name="Text 20"/>
-          <p:cNvSpPr txBox="1"/>
-          <p:nvPr/>
-        </p:nvSpPr>
-        <p:spPr>
-          <a:xfrm>
-            <a:off x="7333488" y="4224528"/>
-            <a:ext cx="3849624" cy="731520"/>
+          <p:cNvPr id="23" name="Text 21"/>
+          <p:cNvSpPr txBox="1"/>
+          <p:nvPr/>
+        </p:nvSpPr>
+        <p:spPr>
+          <a:xfrm>
+            <a:off x="7351776" y="4096512"/>
+            <a:ext cx="3813048" cy="868680"/>
           </a:xfrm>
           <a:prstGeom prst="rect">
             <a:avLst/>
@@ -2271,12 +2290,12 @@
           <a:p>
             <a:pPr indent="0" marL="0">
               <a:lnSpc>
-                <a:spcPts val="2400"/>
+                <a:spcPts val="2200"/>
               </a:lnSpc>
               <a:buNone/>
             </a:pPr>
             <a:r>
-              <a:rPr lang="en-US" sz="1400" dirty="0">
+              <a:rPr lang="en-US" sz="1350" dirty="0">
                 <a:solidFill>
                   <a:srgbClr val="1A2B33"/>
                 </a:solidFill>
@@ -2284,19 +2303,19 @@
                 <a:ea typeface="Meiryo" pitchFamily="34" charset="-122"/>
                 <a:cs typeface="Meiryo" pitchFamily="34" charset="-120"/>
               </a:rPr>
-              <a:t>本発表は、</a:t>
-            </a:r>
-            <a:endParaRPr lang="en-US" sz="1400" dirty="0"/>
+              <a:t>本ワークでは、こうした問いを一つ立て、</a:t>
+            </a:r>
+            <a:endParaRPr lang="en-US" sz="1350" dirty="0"/>
           </a:p>
           <a:p>
             <a:pPr indent="0" marL="0">
               <a:lnSpc>
-                <a:spcPts val="2400"/>
+                <a:spcPts val="2200"/>
               </a:lnSpc>
               <a:buNone/>
             </a:pPr>
             <a:r>
-              <a:rPr lang="en-US" sz="1400" dirty="0">
+              <a:rPr lang="en-US" sz="1350" dirty="0">
                 <a:solidFill>
                   <a:srgbClr val="1A2B33"/>
                 </a:solidFill>
@@ -2304,9 +2323,9 @@
                 <a:ea typeface="Meiryo" pitchFamily="34" charset="-122"/>
                 <a:cs typeface="Meiryo" pitchFamily="34" charset="-120"/>
               </a:rPr>
-              <a:t>その活用例の一つ</a:t>
-            </a:r>
-            <a:endParaRPr lang="en-US" sz="1400" dirty="0"/>
+              <a:t>データから答えを出すまでを実際に通した</a:t>
+            </a:r>
+            <a:endParaRPr lang="en-US" sz="1350" dirty="0"/>
           </a:p>
         </p:txBody>
       </p:sp>
@@ -2478,7 +2497,7 @@
                 <a:ea typeface="Meiryo" pitchFamily="34" charset="-122"/>
                 <a:cs typeface="Meiryo" pitchFamily="34" charset="-120"/>
               </a:rPr>
-              <a:t>非対面チャネルの利用拡大は、経営計画上の狙いでもある</a:t>
+              <a:t>非対面チャネルの利用拡大という狙い</a:t>
             </a:r>
             <a:endParaRPr lang="en-US" sz="2600" dirty="0"/>
           </a:p>
@@ -2517,7 +2536,7 @@
                 <a:ea typeface="Meiryo" pitchFamily="34" charset="-122"/>
                 <a:cs typeface="Meiryo" pitchFamily="34" charset="-120"/>
               </a:rPr>
-              <a:t>今回取り上げたのは非対面チャネルの利用状況。あいち銀行様が経営計画で掲げる方向と重なるテーマ</a:t>
+              <a:t>数ある問いのうち、銀行が実際に力を入れている領域からテーマを選んだ</a:t>
             </a:r>
             <a:endParaRPr lang="en-US" sz="1250" dirty="0"/>
           </a:p>
@@ -2598,7 +2617,7 @@
         <p:spPr>
           <a:xfrm>
             <a:off x="896112" y="1993392"/>
-            <a:ext cx="1463040" cy="219456"/>
+            <a:ext cx="1645920" cy="237744"/>
           </a:xfrm>
           <a:prstGeom prst="rect">
             <a:avLst/>
@@ -2728,7 +2747,7 @@
         <p:spPr>
           <a:xfrm>
             <a:off x="1216152" y="2953512"/>
-            <a:ext cx="1463040" cy="219456"/>
+            <a:ext cx="1645920" cy="237744"/>
           </a:xfrm>
           <a:prstGeom prst="rect">
             <a:avLst/>
@@ -2858,7 +2877,7 @@
         <p:spPr>
           <a:xfrm>
             <a:off x="1536192" y="3913632"/>
-            <a:ext cx="1463040" cy="219456"/>
+            <a:ext cx="1645920" cy="237744"/>
           </a:xfrm>
           <a:prstGeom prst="rect">
             <a:avLst/>
@@ -3002,7 +3021,7 @@
         <p:spPr>
           <a:xfrm>
             <a:off x="7543800" y="2057400"/>
-            <a:ext cx="3730752" cy="274320"/>
+            <a:ext cx="3730752" cy="237744"/>
           </a:xfrm>
           <a:prstGeom prst="rect">
             <a:avLst/>
@@ -3503,7 +3522,7 @@
                 <a:ea typeface="Meiryo" pitchFamily="34" charset="-122"/>
                 <a:cs typeface="Meiryo" pitchFamily="34" charset="-120"/>
               </a:rPr>
-              <a:t>IBの利用がどれだけ増えたかを、データで確かめる</a:t>
+              <a:t>IBの利用がどれだけ広がったかを確かめる</a:t>
             </a:r>
             <a:endParaRPr lang="en-US" sz="2600" dirty="0"/>
           </a:p>
@@ -3542,7 +3561,7 @@
                 <a:ea typeface="Meiryo" pitchFamily="34" charset="-122"/>
                 <a:cs typeface="Meiryo" pitchFamily="34" charset="-120"/>
               </a:rPr>
-              <a:t>背景をふまえ、今回の分析の目的を次のように置いた</a:t>
+              <a:t>背景をふまえ、今回のワークで確かめることを次のように定めた</a:t>
             </a:r>
             <a:endParaRPr lang="en-US" sz="1250" dirty="0"/>
           </a:p>
@@ -3752,7 +3771,7 @@
                 <a:ea typeface="Meiryo" pitchFamily="34" charset="-122"/>
                 <a:cs typeface="Meiryo" pitchFamily="34" charset="-120"/>
               </a:rPr>
-              <a:t>比べ方</a:t>
+              <a:t>比 べ 方</a:t>
             </a:r>
             <a:endParaRPr lang="en-US" sz="1050" dirty="0"/>
           </a:p>
@@ -3794,7 +3813,7 @@
                 <a:ea typeface="Meiryo" pitchFamily="34" charset="-122"/>
                 <a:cs typeface="Meiryo" pitchFamily="34" charset="-120"/>
               </a:rPr>
-              <a:t>同じ4〜6月どうしを比べることで、時期による取引量の差の影響を避ける</a:t>
+              <a:t>同じ4〜6月どうしを比べ、時期による取引量の差を避ける</a:t>
             </a:r>
             <a:endParaRPr lang="en-US" sz="1350" dirty="0"/>
           </a:p>
@@ -3860,7 +3879,7 @@
                 <a:ea typeface="Meiryo" pitchFamily="34" charset="-122"/>
                 <a:cs typeface="Meiryo" pitchFamily="34" charset="-120"/>
               </a:rPr>
-              <a:t>見る対象</a:t>
+              <a:t>見 る 対 象</a:t>
             </a:r>
             <a:endParaRPr lang="en-US" sz="1050" dirty="0"/>
           </a:p>
@@ -3902,7 +3921,7 @@
                 <a:ea typeface="Meiryo" pitchFamily="34" charset="-122"/>
                 <a:cs typeface="Meiryo" pitchFamily="34" charset="-120"/>
               </a:rPr>
-              <a:t>IBの件数だけでなく、ATMで行われている「IBでも代替できる取引」も合わせて見る</a:t>
+              <a:t>IBの件数に加え、ATMでの「IBでも代替できる取引」も合わせて見る</a:t>
             </a:r>
             <a:endParaRPr lang="en-US" sz="1350" dirty="0"/>
           </a:p>
@@ -4037,7 +4056,7 @@
                 <a:ea typeface="Meiryo" pitchFamily="34" charset="-122"/>
                 <a:cs typeface="Meiryo" pitchFamily="34" charset="-120"/>
               </a:rPr>
-              <a:t>使 用 し た デ ー タ</a:t>
+              <a:t>使 用 デ ー タ</a:t>
             </a:r>
             <a:endParaRPr lang="en-US" sz="1050" dirty="0"/>
           </a:p>
@@ -4076,7 +4095,7 @@
                 <a:ea typeface="Meiryo" pitchFamily="34" charset="-122"/>
                 <a:cs typeface="Meiryo" pitchFamily="34" charset="-120"/>
               </a:rPr>
-              <a:t>取引履歴（流動）から入出金テーブルを作成した</a:t>
+              <a:t>取引履歴（流動）から入出金テーブルを作成</a:t>
             </a:r>
             <a:endParaRPr lang="en-US" sz="2600" dirty="0"/>
           </a:p>
@@ -4486,7 +4505,7 @@
                 <a:ea typeface="Meiryo" pitchFamily="34" charset="-122"/>
                 <a:cs typeface="Meiryo" pitchFamily="34" charset="-120"/>
               </a:rPr>
-              <a:t>分析</a:t>
+              <a:t>分 析</a:t>
             </a:r>
             <a:endParaRPr lang="en-US" sz="1050" dirty="0"/>
           </a:p>
@@ -4590,7 +4609,7 @@
         <p:spPr>
           <a:xfrm>
             <a:off x="1005840" y="3913632"/>
-            <a:ext cx="1645920" cy="237744"/>
+            <a:ext cx="1737360" cy="237744"/>
           </a:xfrm>
           <a:prstGeom prst="rect">
             <a:avLst/>
@@ -5028,7 +5047,7 @@
                 <a:ea typeface="Meiryo" pitchFamily="34" charset="-122"/>
                 <a:cs typeface="Meiryo" pitchFamily="34" charset="-120"/>
               </a:rPr>
-              <a:t>IBの利用件数は増えていた</a:t>
+              <a:t>IBの利用件数は増加していた</a:t>
             </a:r>
             <a:endParaRPr lang="en-US" sz="2600" dirty="0"/>
           </a:p>
@@ -5147,8 +5166,8 @@
         </p:nvSpPr>
         <p:spPr>
           <a:xfrm>
-            <a:off x="640080" y="3072384"/>
-            <a:ext cx="5989320" cy="310896"/>
+            <a:off x="640080" y="3090672"/>
+            <a:ext cx="5989320" cy="292608"/>
           </a:xfrm>
           <a:prstGeom prst="rect">
             <a:avLst/>
@@ -5187,7 +5206,7 @@
         <p:spPr>
           <a:xfrm>
             <a:off x="914400" y="3438144"/>
-            <a:ext cx="5440680" cy="731520"/>
+            <a:ext cx="5440680" cy="685800"/>
           </a:xfrm>
           <a:prstGeom prst="rect">
             <a:avLst/>
@@ -5561,11 +5580,11 @@
             </a:avLst>
           </a:prstGeom>
           <a:solidFill>
-            <a:srgbClr val="E2EEF0"/>
+            <a:srgbClr val="F3F6F7"/>
           </a:solidFill>
           <a:ln w="12700">
             <a:solidFill>
-              <a:srgbClr val="E2EEF0"/>
+              <a:srgbClr val="F3F6F7"/>
             </a:solidFill>
             <a:prstDash val="solid"/>
           </a:ln>
@@ -5598,13 +5617,13 @@
             <a:r>
               <a:rPr lang="en-US" sz="1400" b="1" dirty="0">
                 <a:solidFill>
-                  <a:srgbClr val="0F5A6B"/>
-                </a:solidFill>
-                <a:latin typeface="Meiryo" pitchFamily="34" charset="0"/>
-                <a:ea typeface="Meiryo" pitchFamily="34" charset="-122"/>
-                <a:cs typeface="Meiryo" pitchFamily="34" charset="-120"/>
-              </a:rPr>
-              <a:t>IBの利用件数は、1年間で増加していた</a:t>
+                  <a:srgbClr val="1A2B33"/>
+                </a:solidFill>
+                <a:latin typeface="Meiryo" pitchFamily="34" charset="0"/>
+                <a:ea typeface="Meiryo" pitchFamily="34" charset="-122"/>
+                <a:cs typeface="Meiryo" pitchFamily="34" charset="-120"/>
+              </a:rPr>
+              <a:t>ただし件数の増加だけでは、取引そのものが増えた可能性を否定できない</a:t>
             </a:r>
             <a:endParaRPr lang="en-US" sz="1400" dirty="0"/>
           </a:p>
@@ -5778,7 +5797,7 @@
                 <a:ea typeface="Meiryo" pitchFamily="34" charset="-122"/>
                 <a:cs typeface="Meiryo" pitchFamily="34" charset="-120"/>
               </a:rPr>
-              <a:t>ATMのうち、IBでもできる取引は減っていた</a:t>
+              <a:t>ATMでIBに代替できる取引は減少していた</a:t>
             </a:r>
             <a:endParaRPr lang="en-US" sz="2600" dirty="0"/>
           </a:p>
@@ -5817,7 +5836,7 @@
                 <a:ea typeface="Meiryo" pitchFamily="34" charset="-122"/>
                 <a:cs typeface="Meiryo" pitchFamily="34" charset="-120"/>
               </a:rPr>
-              <a:t>増加の理由が「取引全体の増加」ではないことを確かめるため、ATM側も確認</a:t>
+              <a:t>IBへ移っているのかどうかを判断するため、ATM側の同種の取引も確認</a:t>
             </a:r>
             <a:endParaRPr lang="en-US" sz="1250" dirty="0"/>
           </a:p>
@@ -5897,8 +5916,8 @@
         </p:nvSpPr>
         <p:spPr>
           <a:xfrm>
-            <a:off x="640080" y="3072384"/>
-            <a:ext cx="5989320" cy="310896"/>
+            <a:off x="640080" y="3090672"/>
+            <a:ext cx="5989320" cy="292608"/>
           </a:xfrm>
           <a:prstGeom prst="rect">
             <a:avLst/>
@@ -5937,7 +5956,7 @@
         <p:spPr>
           <a:xfrm>
             <a:off x="914400" y="3438144"/>
-            <a:ext cx="5440680" cy="731520"/>
+            <a:ext cx="5440680" cy="685800"/>
           </a:xfrm>
           <a:prstGeom prst="rect">
             <a:avLst/>
@@ -6006,7 +6025,7 @@
         <p:spPr>
           <a:xfrm>
             <a:off x="7223760" y="2011680"/>
-            <a:ext cx="1828800" cy="219456"/>
+            <a:ext cx="1828800" cy="237744"/>
           </a:xfrm>
           <a:prstGeom prst="rect">
             <a:avLst/>
@@ -6374,7 +6393,7 @@
                 <a:ea typeface="Meiryo" pitchFamily="34" charset="-122"/>
                 <a:cs typeface="Meiryo" pitchFamily="34" charset="-120"/>
               </a:rPr>
-              <a:t>IBは増え、ATM側は減っている　→　同じ取引がIBへ移りつつあると読める</a:t>
+              <a:t>IBは増加、ATM側は減少　→　同じ取引がIBへ移りつつあると読める</a:t>
             </a:r>
             <a:endParaRPr lang="en-US" sz="1400" dirty="0"/>
           </a:p>
@@ -6509,7 +6528,7 @@
                 <a:ea typeface="Meiryo" pitchFamily="34" charset="-122"/>
                 <a:cs typeface="Meiryo" pitchFamily="34" charset="-120"/>
               </a:rPr>
-              <a:t>深 掘 り</a:t>
+              <a:t>考 察</a:t>
             </a:r>
             <a:endParaRPr lang="en-US" sz="1050" dirty="0"/>
           </a:p>
@@ -6548,7 +6567,7 @@
                 <a:ea typeface="Meiryo" pitchFamily="34" charset="-122"/>
                 <a:cs typeface="Meiryo" pitchFamily="34" charset="-120"/>
               </a:rPr>
-              <a:t>では、どの年代でIBの利用が増えたのか</a:t>
+              <a:t>どの年代で利用が広がったのか</a:t>
             </a:r>
             <a:endParaRPr lang="en-US" sz="2600" dirty="0"/>
           </a:p>
@@ -6587,7 +6606,7 @@
                 <a:ea typeface="Meiryo" pitchFamily="34" charset="-122"/>
                 <a:cs typeface="Meiryo" pitchFamily="34" charset="-120"/>
               </a:rPr>
-              <a:t>「増えた」の次に知りたくなるのは「誰が使うようになったのか」。今回は年代を5つに分けて確認</a:t>
+              <a:t>全体の動きが分かった次に知りたくなるのは「誰が使うようになったのか」。今回は年代を5つに分けて確認</a:t>
             </a:r>
             <a:endParaRPr lang="en-US" sz="1250" dirty="0"/>
           </a:p>
@@ -6640,12 +6659,12 @@
         </p:nvSpPr>
         <p:spPr>
           <a:xfrm>
-            <a:off x="640080" y="1828800"/>
-            <a:ext cx="1993392" cy="713232"/>
+            <a:off x="640080" y="1874520"/>
+            <a:ext cx="1993392" cy="676656"/>
           </a:xfrm>
           <a:prstGeom prst="roundRect">
             <a:avLst>
-              <a:gd name="adj" fmla="val 6410"/>
+              <a:gd name="adj" fmla="val 6757"/>
             </a:avLst>
           </a:prstGeom>
           <a:solidFill>
@@ -6667,7 +6686,7 @@
         </p:nvSpPr>
         <p:spPr>
           <a:xfrm>
-            <a:off x="640080" y="1938528"/>
+            <a:off x="640080" y="1965960"/>
             <a:ext cx="1993392" cy="256032"/>
           </a:xfrm>
           <a:prstGeom prst="rect">
@@ -6706,7 +6725,7 @@
         </p:nvSpPr>
         <p:spPr>
           <a:xfrm>
-            <a:off x="640080" y="2212848"/>
+            <a:off x="640080" y="2240280"/>
             <a:ext cx="1993392" cy="237744"/>
           </a:xfrm>
           <a:prstGeom prst="rect">
@@ -6745,12 +6764,12 @@
         </p:nvSpPr>
         <p:spPr>
           <a:xfrm>
-            <a:off x="2862072" y="1828800"/>
-            <a:ext cx="1993392" cy="713232"/>
+            <a:off x="2862072" y="1874520"/>
+            <a:ext cx="1993392" cy="676656"/>
           </a:xfrm>
           <a:prstGeom prst="roundRect">
             <a:avLst>
-              <a:gd name="adj" fmla="val 6410"/>
+              <a:gd name="adj" fmla="val 6757"/>
             </a:avLst>
           </a:prstGeom>
           <a:solidFill>
@@ -6772,7 +6791,7 @@
         </p:nvSpPr>
         <p:spPr>
           <a:xfrm>
-            <a:off x="2862072" y="1938528"/>
+            <a:off x="2862072" y="1965960"/>
             <a:ext cx="1993392" cy="256032"/>
           </a:xfrm>
           <a:prstGeom prst="rect">
@@ -6811,7 +6830,7 @@
         </p:nvSpPr>
         <p:spPr>
           <a:xfrm>
-            <a:off x="2862072" y="2212848"/>
+            <a:off x="2862072" y="2240280"/>
             <a:ext cx="1993392" cy="237744"/>
           </a:xfrm>
           <a:prstGeom prst="rect">
@@ -6850,12 +6869,12 @@
         </p:nvSpPr>
         <p:spPr>
           <a:xfrm>
-            <a:off x="5084064" y="1828800"/>
-            <a:ext cx="1993392" cy="713232"/>
+            <a:off x="5084064" y="1874520"/>
+            <a:ext cx="1993392" cy="676656"/>
           </a:xfrm>
           <a:prstGeom prst="roundRect">
             <a:avLst>
-              <a:gd name="adj" fmla="val 6410"/>
+              <a:gd name="adj" fmla="val 6757"/>
             </a:avLst>
           </a:prstGeom>
           <a:solidFill>
@@ -6877,7 +6896,7 @@
         </p:nvSpPr>
         <p:spPr>
           <a:xfrm>
-            <a:off x="5084064" y="1938528"/>
+            <a:off x="5084064" y="1965960"/>
             <a:ext cx="1993392" cy="256032"/>
           </a:xfrm>
           <a:prstGeom prst="rect">
@@ -6916,7 +6935,7 @@
         </p:nvSpPr>
         <p:spPr>
           <a:xfrm>
-            <a:off x="5084064" y="2212848"/>
+            <a:off x="5084064" y="2240280"/>
             <a:ext cx="1993392" cy="237744"/>
           </a:xfrm>
           <a:prstGeom prst="rect">
@@ -6955,12 +6974,12 @@
         </p:nvSpPr>
         <p:spPr>
           <a:xfrm>
-            <a:off x="7306056" y="1828800"/>
-            <a:ext cx="1993392" cy="713232"/>
+            <a:off x="7306056" y="1874520"/>
+            <a:ext cx="1993392" cy="676656"/>
           </a:xfrm>
           <a:prstGeom prst="roundRect">
             <a:avLst>
-              <a:gd name="adj" fmla="val 6410"/>
+              <a:gd name="adj" fmla="val 6757"/>
             </a:avLst>
           </a:prstGeom>
           <a:solidFill>
@@ -6982,7 +7001,7 @@
         </p:nvSpPr>
         <p:spPr>
           <a:xfrm>
-            <a:off x="7306056" y="1938528"/>
+            <a:off x="7306056" y="1965960"/>
             <a:ext cx="1993392" cy="256032"/>
           </a:xfrm>
           <a:prstGeom prst="rect">
@@ -7021,7 +7040,7 @@
         </p:nvSpPr>
         <p:spPr>
           <a:xfrm>
-            <a:off x="7306056" y="2212848"/>
+            <a:off x="7306056" y="2240280"/>
             <a:ext cx="1993392" cy="237744"/>
           </a:xfrm>
           <a:prstGeom prst="rect">
@@ -7060,12 +7079,12 @@
         </p:nvSpPr>
         <p:spPr>
           <a:xfrm>
-            <a:off x="9528048" y="1828800"/>
-            <a:ext cx="1993392" cy="713232"/>
+            <a:off x="9528048" y="1874520"/>
+            <a:ext cx="1993392" cy="676656"/>
           </a:xfrm>
           <a:prstGeom prst="roundRect">
             <a:avLst>
-              <a:gd name="adj" fmla="val 6410"/>
+              <a:gd name="adj" fmla="val 6757"/>
             </a:avLst>
           </a:prstGeom>
           <a:solidFill>
@@ -7087,7 +7106,7 @@
         </p:nvSpPr>
         <p:spPr>
           <a:xfrm>
-            <a:off x="9528048" y="1938528"/>
+            <a:off x="9528048" y="1965960"/>
             <a:ext cx="1993392" cy="256032"/>
           </a:xfrm>
           <a:prstGeom prst="rect">
@@ -7126,7 +7145,7 @@
         </p:nvSpPr>
         <p:spPr>
           <a:xfrm>
-            <a:off x="9528048" y="2212848"/>
+            <a:off x="9528048" y="2240280"/>
             <a:ext cx="1993392" cy="237744"/>
           </a:xfrm>
           <a:prstGeom prst="rect">
@@ -7165,12 +7184,12 @@
         </p:nvSpPr>
         <p:spPr>
           <a:xfrm>
-            <a:off x="640080" y="2788920"/>
-            <a:ext cx="5989320" cy="2377440"/>
+            <a:off x="640080" y="2724912"/>
+            <a:ext cx="5989320" cy="2331720"/>
           </a:xfrm>
           <a:prstGeom prst="roundRect">
             <a:avLst>
-              <a:gd name="adj" fmla="val 1923"/>
+              <a:gd name="adj" fmla="val 1961"/>
             </a:avLst>
           </a:prstGeom>
           <a:solidFill>
@@ -7192,8 +7211,8 @@
         </p:nvSpPr>
         <p:spPr>
           <a:xfrm>
-            <a:off x="640080" y="3575304"/>
-            <a:ext cx="5989320" cy="310896"/>
+            <a:off x="640080" y="3506724"/>
+            <a:ext cx="5989320" cy="292608"/>
           </a:xfrm>
           <a:prstGeom prst="rect">
             <a:avLst/>
@@ -7231,8 +7250,8 @@
         </p:nvSpPr>
         <p:spPr>
           <a:xfrm>
-            <a:off x="914400" y="3941064"/>
-            <a:ext cx="5440680" cy="731520"/>
+            <a:off x="914400" y="3854196"/>
+            <a:ext cx="5440680" cy="685800"/>
           </a:xfrm>
           <a:prstGeom prst="rect">
             <a:avLst/>
@@ -7273,12 +7292,12 @@
         </p:nvSpPr>
         <p:spPr>
           <a:xfrm>
-            <a:off x="6967728" y="2788920"/>
-            <a:ext cx="4581144" cy="804672"/>
+            <a:off x="6967728" y="2724912"/>
+            <a:ext cx="4581144" cy="868680"/>
           </a:xfrm>
           <a:prstGeom prst="roundRect">
             <a:avLst>
-              <a:gd name="adj" fmla="val 5682"/>
+              <a:gd name="adj" fmla="val 5263"/>
             </a:avLst>
           </a:prstGeom>
           <a:solidFill>
@@ -7300,7 +7319,7 @@
         </p:nvSpPr>
         <p:spPr>
           <a:xfrm>
-            <a:off x="7187184" y="2926080"/>
+            <a:off x="7187184" y="2862072"/>
             <a:ext cx="4142232" cy="237744"/>
           </a:xfrm>
           <a:prstGeom prst="rect">
@@ -7339,8 +7358,8 @@
         </p:nvSpPr>
         <p:spPr>
           <a:xfrm>
-            <a:off x="7187184" y="3191256"/>
-            <a:ext cx="4142232" cy="274320"/>
+            <a:off x="7187184" y="3127248"/>
+            <a:ext cx="4142232" cy="338328"/>
           </a:xfrm>
           <a:prstGeom prst="rect">
             <a:avLst/>
@@ -7381,12 +7400,12 @@
         </p:nvSpPr>
         <p:spPr>
           <a:xfrm>
-            <a:off x="6967728" y="3749040"/>
-            <a:ext cx="4581144" cy="1417320"/>
+            <a:off x="6967728" y="3776472"/>
+            <a:ext cx="4581144" cy="1280160"/>
           </a:xfrm>
           <a:prstGeom prst="roundRect">
             <a:avLst>
-              <a:gd name="adj" fmla="val 3226"/>
+              <a:gd name="adj" fmla="val 3571"/>
             </a:avLst>
           </a:prstGeom>
           <a:solidFill>
@@ -7408,7 +7427,7 @@
         </p:nvSpPr>
         <p:spPr>
           <a:xfrm>
-            <a:off x="7223760" y="3886200"/>
+            <a:off x="7223760" y="3913632"/>
             <a:ext cx="4069080" cy="237744"/>
           </a:xfrm>
           <a:prstGeom prst="rect">
@@ -7433,7 +7452,7 @@
                 <a:ea typeface="Meiryo" pitchFamily="34" charset="-122"/>
                 <a:cs typeface="Meiryo" pitchFamily="34" charset="-120"/>
               </a:rPr>
-              <a:t>次 に 考 え ら れ る 施 策</a:t>
+              <a:t>こ こ か ら 考 え ら れ る 打 ち 手</a:t>
             </a:r>
             <a:endParaRPr lang="en-US" sz="1050" dirty="0"/>
           </a:p>
@@ -7447,8 +7466,8 @@
         </p:nvSpPr>
         <p:spPr>
           <a:xfrm>
-            <a:off x="7223760" y="4142232"/>
-            <a:ext cx="4069080" cy="960120"/>
+            <a:off x="7223760" y="4169664"/>
+            <a:ext cx="4069080" cy="822960"/>
           </a:xfrm>
           <a:prstGeom prst="rect">
             <a:avLst/>
@@ -7517,12 +7536,12 @@
         </p:nvSpPr>
         <p:spPr>
           <a:xfrm>
-            <a:off x="640080" y="5394960"/>
-            <a:ext cx="10911535" cy="603504"/>
+            <a:off x="640080" y="5285232"/>
+            <a:ext cx="10911535" cy="621792"/>
           </a:xfrm>
           <a:prstGeom prst="roundRect">
             <a:avLst>
-              <a:gd name="adj" fmla="val 7576"/>
+              <a:gd name="adj" fmla="val 7353"/>
             </a:avLst>
           </a:prstGeom>
           <a:solidFill>
@@ -7544,8 +7563,8 @@
         </p:nvSpPr>
         <p:spPr>
           <a:xfrm>
-            <a:off x="914400" y="5394960"/>
-            <a:ext cx="10362895" cy="603504"/>
+            <a:off x="914400" y="5285232"/>
+            <a:ext cx="10362895" cy="621792"/>
           </a:xfrm>
           <a:prstGeom prst="rect">
             <a:avLst/>
@@ -7569,7 +7588,7 @@
                 <a:ea typeface="Meiryo" pitchFamily="34" charset="-122"/>
                 <a:cs typeface="Meiryo" pitchFamily="34" charset="-120"/>
               </a:rPr>
-              <a:t>年代まで分かると、「誰に、どう案内するか」という具体的な打ち手まで考えられる</a:t>
+              <a:t>年代まで分かると、誰にどう案内するかという具体的な打ち手まで検討できる</a:t>
             </a:r>
             <a:endParaRPr lang="en-US" sz="1400" dirty="0"/>
           </a:p>
@@ -7743,7 +7762,7 @@
                 <a:ea typeface="Meiryo" pitchFamily="34" charset="-122"/>
                 <a:cs typeface="Meiryo" pitchFamily="34" charset="-120"/>
               </a:rPr>
-              <a:t>データを「次の一手」に変えるまで</a:t>
+              <a:t>データを次の一手につなげるまで</a:t>
             </a:r>
             <a:endParaRPr lang="en-US" sz="2600" dirty="0"/>
           </a:p>
@@ -7901,8 +7920,8 @@
         </p:nvSpPr>
         <p:spPr>
           <a:xfrm>
-            <a:off x="640080" y="2679192"/>
-            <a:ext cx="1929384" cy="274320"/>
+            <a:off x="694944" y="2679192"/>
+            <a:ext cx="1819656" cy="274320"/>
           </a:xfrm>
           <a:prstGeom prst="rect">
             <a:avLst/>
@@ -7918,7 +7937,7 @@
               <a:buNone/>
             </a:pPr>
             <a:r>
-              <a:rPr lang="en-US" sz="1300" b="1" spc="80" kern="0" dirty="0">
+              <a:rPr lang="en-US" sz="1150" b="1" spc="40" kern="0" dirty="0">
                 <a:solidFill>
                   <a:srgbClr val="1A2B33"/>
                 </a:solidFill>
@@ -7926,9 +7945,9 @@
                 <a:ea typeface="Meiryo" pitchFamily="34" charset="-122"/>
                 <a:cs typeface="Meiryo" pitchFamily="34" charset="-120"/>
               </a:rPr>
-              <a:t>問 う</a:t>
-            </a:r>
-            <a:endParaRPr lang="en-US" sz="1300" dirty="0"/>
+              <a:t>問 い を 立 て る</a:t>
+            </a:r>
+            <a:endParaRPr lang="en-US" sz="1150" dirty="0"/>
           </a:p>
         </p:txBody>
       </p:sp>
@@ -7968,7 +7987,7 @@
                 <a:ea typeface="Meiryo" pitchFamily="34" charset="-122"/>
                 <a:cs typeface="Meiryo" pitchFamily="34" charset="-120"/>
               </a:rPr>
-              <a:t>「預金の増減を</a:t>
+              <a:t>「IBの利用は</a:t>
             </a:r>
             <a:endParaRPr lang="en-US" sz="1150" dirty="0"/>
           </a:p>
@@ -7988,7 +8007,7 @@
                 <a:ea typeface="Meiryo" pitchFamily="34" charset="-122"/>
                 <a:cs typeface="Meiryo" pitchFamily="34" charset="-120"/>
               </a:rPr>
-              <a:t>知りたい」と想定</a:t>
+              <a:t>広がっているか」</a:t>
             </a:r>
             <a:endParaRPr lang="en-US" sz="1150" dirty="0"/>
           </a:p>
@@ -8093,8 +8112,8 @@
         </p:nvSpPr>
         <p:spPr>
           <a:xfrm>
-            <a:off x="2880360" y="2679192"/>
-            <a:ext cx="1929384" cy="274320"/>
+            <a:off x="2935224" y="2679192"/>
+            <a:ext cx="1819656" cy="274320"/>
           </a:xfrm>
           <a:prstGeom prst="rect">
             <a:avLst/>
@@ -8110,7 +8129,7 @@
               <a:buNone/>
             </a:pPr>
             <a:r>
-              <a:rPr lang="en-US" sz="1300" b="1" spc="80" kern="0" dirty="0">
+              <a:rPr lang="en-US" sz="1150" b="1" spc="40" kern="0" dirty="0">
                 <a:solidFill>
                   <a:srgbClr val="1A2B33"/>
                 </a:solidFill>
@@ -8120,7 +8139,7 @@
               </a:rPr>
               <a:t>整 え る</a:t>
             </a:r>
-            <a:endParaRPr lang="en-US" sz="1300" dirty="0"/>
+            <a:endParaRPr lang="en-US" sz="1150" dirty="0"/>
           </a:p>
         </p:txBody>
       </p:sp>
@@ -8285,8 +8304,8 @@
         </p:nvSpPr>
         <p:spPr>
           <a:xfrm>
-            <a:off x="5120640" y="2679192"/>
-            <a:ext cx="1929384" cy="274320"/>
+            <a:off x="5175504" y="2679192"/>
+            <a:ext cx="1819656" cy="274320"/>
           </a:xfrm>
           <a:prstGeom prst="rect">
             <a:avLst/>
@@ -8302,7 +8321,7 @@
               <a:buNone/>
             </a:pPr>
             <a:r>
-              <a:rPr lang="en-US" sz="1300" b="1" spc="80" kern="0" dirty="0">
+              <a:rPr lang="en-US" sz="1150" b="1" spc="40" kern="0" dirty="0">
                 <a:solidFill>
                   <a:srgbClr val="1A2B33"/>
                 </a:solidFill>
@@ -8312,7 +8331,7 @@
               </a:rPr>
               <a:t>確 か め る</a:t>
             </a:r>
-            <a:endParaRPr lang="en-US" sz="1300" dirty="0"/>
+            <a:endParaRPr lang="en-US" sz="1150" dirty="0"/>
           </a:p>
         </p:txBody>
       </p:sp>
@@ -8477,8 +8496,8 @@
         </p:nvSpPr>
         <p:spPr>
           <a:xfrm>
-            <a:off x="7360920" y="2679192"/>
-            <a:ext cx="1929384" cy="274320"/>
+            <a:off x="7415784" y="2679192"/>
+            <a:ext cx="1819656" cy="274320"/>
           </a:xfrm>
           <a:prstGeom prst="rect">
             <a:avLst/>
@@ -8494,7 +8513,7 @@
               <a:buNone/>
             </a:pPr>
             <a:r>
-              <a:rPr lang="en-US" sz="1300" b="1" spc="80" kern="0" dirty="0">
+              <a:rPr lang="en-US" sz="1150" b="1" spc="40" kern="0" dirty="0">
                 <a:solidFill>
                   <a:srgbClr val="1A2B33"/>
                 </a:solidFill>
@@ -8504,7 +8523,7 @@
               </a:rPr>
               <a:t>深 掘 る</a:t>
             </a:r>
-            <a:endParaRPr lang="en-US" sz="1300" dirty="0"/>
+            <a:endParaRPr lang="en-US" sz="1150" dirty="0"/>
           </a:p>
         </p:txBody>
       </p:sp>
@@ -8669,8 +8688,8 @@
         </p:nvSpPr>
         <p:spPr>
           <a:xfrm>
-            <a:off x="9601200" y="2679192"/>
-            <a:ext cx="1929384" cy="274320"/>
+            <a:off x="9656064" y="2679192"/>
+            <a:ext cx="1819656" cy="274320"/>
           </a:xfrm>
           <a:prstGeom prst="rect">
             <a:avLst/>
@@ -8686,7 +8705,7 @@
               <a:buNone/>
             </a:pPr>
             <a:r>
-              <a:rPr lang="en-US" sz="1300" b="1" spc="80" kern="0" dirty="0">
+              <a:rPr lang="en-US" sz="1150" b="1" spc="40" kern="0" dirty="0">
                 <a:solidFill>
                   <a:srgbClr val="FFFFFF"/>
                 </a:solidFill>
@@ -8696,7 +8715,7 @@
               </a:rPr>
               <a:t>次 の 一 手</a:t>
             </a:r>
-            <a:endParaRPr lang="en-US" sz="1300" dirty="0"/>
+            <a:endParaRPr lang="en-US" sz="1150" dirty="0"/>
           </a:p>
         </p:txBody>
       </p:sp>

--- a/presentation/DYNATREK_成果発表.pptx
+++ b/presentation/DYNATREK_成果発表.pptx
@@ -13,9 +13,10 @@
     <p:sldId id="261" r:id="rId7"/>
     <p:sldId id="262" r:id="rId8"/>
     <p:sldId id="263" r:id="rId9"/>
+    <p:sldId id="264" r:id="rId10"/>
   </p:sldIdLst>
   <p:notesMasterIdLst>
-    <p:notesMasterId r:id="rId10"/>
+    <p:notesMasterId r:id="rId11"/>
   </p:notesMasterIdLst>
   <p:sldSz cx="12192000" cy="6858000"/>
   <p:notesSz cx="6858000" cy="12192000"/>
@@ -870,10 +871,9 @@
           <a:p>
             <a:r>
               <a:rPr lang="en-US" dirty="0"/>
-              <a:t>まずIBの利用件数です。2025年の4〜6月と、2026年の4〜6月を比べました。
-（記入した数値を読み上げる）
-1年間で件数は増えています。月別に見ても同じ傾向です。
-ただ、これだけでIBが広がったと言い切ることはできません。取引そのものが増えただけ、という可能性が残るからです。そこで、もうひとつの見方を足しました。</a:t>
+              <a:t>実際の画面です。左で、期間やチャネル、取引の種類といった条件を指定します。すると右のように、その条件で集計された結果がそのまま出てきます。
+ここは長く説明しません。お伝えしたいのは、一度テーブルを整えてしまえば、あとは条件を変えるだけで別の切り口でも確認できる、という点です。この後の分析は、すべてこの繰り返しになります。
+【作成時】スクリーンショット②が結果スライドのグラフと同じものになる場合は、②には集計表など別の出力を貼るか、②を小さめに配置して重複感を避ける。</a:t>
             </a:r>
             <a:endParaRPr lang="en-US" dirty="0"/>
           </a:p>
@@ -961,11 +961,10 @@
           <a:p>
             <a:r>
               <a:rPr lang="en-US" dirty="0"/>
-              <a:t>IBでも同じことができる取引──振込や振替など──に絞って、ATM側の件数を見ました。
+              <a:t>まずIBの利用件数です。2025年の4〜6月と、2026年の4〜6月を比べました。
 （記入した数値を読み上げる）
-こちらは減っています。IBが増え、ATM側が減っている。つまり、同じ取引がIBへ移りつつあると読めます。
-片方だけを見ていたら「増えた」で終わっていましたが、比べる相手を置いたことで、一歩踏み込んだ言い方ができるようになりました。
-※「IBでも行える取引」に何を含めたかは質疑で聞かれやすいので、口頭でも一度言っておく。</a:t>
+1年間で件数は増えています。月別に見ても同じ傾向です。
+ただ、これだけでIBが広がったと言い切ることはできません。取引そのものが増えただけ、という可能性が残るからです。そこで、もうひとつの見方を足しました。</a:t>
             </a:r>
             <a:endParaRPr lang="en-US" dirty="0"/>
           </a:p>
@@ -1053,11 +1052,11 @@
           <a:p>
             <a:r>
               <a:rPr lang="en-US" dirty="0"/>
-              <a:t>IBへ移りつつあることが分かると、次に知りたくなるのは「では、誰が使うようになったのか」です。これも同じテーブルに年代の条件を足すだけで確認できました。
-年代は5つに分けています。未成年、若手成人、働き手①、働き手②、高齢者です。
-（読み取りを説明する）
-ここまで分かると、伸びていない年代にどう案内するか、といった具体的な打ち手の話ができるようになります。
-【作成時】打ち手の2行は、実際の読み取りに合わせて書き換えること。</a:t>
+              <a:t>IBでも同じことができる取引──振込や振替など──に絞って、ATM側の件数を見ました。
+（記入した数値を読み上げる）
+こちらは減っています。IBが増え、ATM側が減っている。つまり、同じ取引がIBへ移りつつあると読めます。
+片方だけを見ていたら「増えた」で終わっていましたが、比べる相手を置いたことで、一歩踏み込んだ言い方ができるようになりました。
+※「IBでも行える取引」に何を含めたかは質疑で聞かれやすいので、口頭でも一度言っておく。</a:t>
             </a:r>
             <a:endParaRPr lang="en-US" dirty="0"/>
           </a:p>
@@ -1145,9 +1144,11 @@
           <a:p>
             <a:r>
               <a:rPr lang="en-US" dirty="0"/>
-              <a:t>最後に、今回の流れをまとめます。
-「IBの利用は広がっているか」という問いを立て、取引履歴（流動）から入出金テーブルを整え、IBが増えATM側が減っていることを確かめ、さらに年代別まで深掘りして、最後は誰にどう案内するかという打ち手の検討まで進みました。
-行内にあるデータも、条件を指定して見られる形に整えれば、業務上の問いに答えて、次の施策を考える材料になります。今回のワークで学んだのは、この一連のプロセスです。</a:t>
+              <a:t>IBへ移りつつあることが分かると、次に知りたくなるのは「では、誰が使うようになったのか」です。これも同じテーブルに年代の条件を足すだけで確認できました。
+年代は5つに分けています。未成年、若手成人、働き手①、働き手②、高齢者です。
+（読み取りを説明する）
+ここまで分かると、伸びていない年代にどう案内するか、といった具体的な打ち手の話ができるようになります。
+【作成時】打ち手の2行は、実際の読み取りに合わせて書き換えること。</a:t>
             </a:r>
             <a:endParaRPr lang="en-US" dirty="0"/>
           </a:p>
@@ -1171,6 +1172,96 @@
             <a:fld id="{F7021451-1387-4CA6-816F-3879F97B5CBC}" type="slidenum">
               <a:rPr lang="en-US"/>
               <a:t>8</a:t>
+            </a:fld>
+            <a:endParaRPr lang="en-US"/>
+          </a:p>
+        </p:txBody>
+      </p:sp>
+    </p:spTree>
+    <p:extLst>
+      <p:ext uri="{BB962C8B-B14F-4D97-AF65-F5344CB8AC3E}">
+        <p14:creationId xmlns:p14="http://schemas.microsoft.com/office/powerpoint/2010/main" val="1024086991"/>
+      </p:ext>
+    </p:extLst>
+  </p:cSld>
+  <p:clrMapOvr>
+    <a:masterClrMapping/>
+  </p:clrMapOvr>
+</p:notes>
+</file>
+
+<file path=ppt/notesSlides/notesSlide9.xml><?xml version="1.0" encoding="utf-8"?>
+<p:notes xmlns:a="http://schemas.openxmlformats.org/drawingml/2006/main" xmlns:r="http://schemas.openxmlformats.org/officeDocument/2006/relationships" xmlns:p="http://schemas.openxmlformats.org/presentationml/2006/main">
+  <p:cSld>
+    <p:spTree>
+      <p:nvGrpSpPr>
+        <p:cNvPr id="1" name=""/>
+        <p:cNvGrpSpPr/>
+        <p:nvPr/>
+      </p:nvGrpSpPr>
+      <p:grpSpPr>
+        <a:xfrm>
+          <a:off x="0" y="0"/>
+          <a:ext cx="0" cy="0"/>
+          <a:chOff x="0" y="0"/>
+          <a:chExt cx="0" cy="0"/>
+        </a:xfrm>
+      </p:grpSpPr>
+      <p:sp>
+        <p:nvSpPr>
+          <p:cNvPr id="2" name="Slide Image Placeholder 1"/>
+          <p:cNvSpPr>
+            <a:spLocks noGrp="1" noRot="1" noChangeAspect="1"/>
+          </p:cNvSpPr>
+          <p:nvPr>
+            <p:ph type="sldImg"/>
+          </p:nvPr>
+        </p:nvSpPr>
+        <p:spPr/>
+      </p:sp>
+      <p:sp>
+        <p:nvSpPr>
+          <p:cNvPr id="3" name="Notes Placeholder 2"/>
+          <p:cNvSpPr>
+            <a:spLocks noGrp="1"/>
+          </p:cNvSpPr>
+          <p:nvPr>
+            <p:ph type="body" idx="1"/>
+          </p:nvPr>
+        </p:nvSpPr>
+        <p:spPr/>
+        <p:txBody>
+          <a:bodyPr/>
+          <a:lstStyle/>
+          <a:p>
+            <a:r>
+              <a:rPr lang="en-US" dirty="0"/>
+              <a:t>最後に、今回の流れをまとめます。
+「IBの利用は広がっているか」という問いを立て、取引履歴（流動）から入出金テーブルを整え、IBが増えATM側が減っていることを確かめ、さらに年代別まで深掘りして、最後は誰にどう案内するかという打ち手の検討まで進みました。
+行内にあるデータも、条件を指定して見られる形に整えれば、業務上の問いに答えて、次の施策を考える材料になります。今回のワークで学んだのは、この一連のプロセスです。</a:t>
+            </a:r>
+            <a:endParaRPr lang="en-US" dirty="0"/>
+          </a:p>
+        </p:txBody>
+      </p:sp>
+      <p:sp>
+        <p:nvSpPr>
+          <p:cNvPr id="4" name="Slide Number Placeholder 3"/>
+          <p:cNvSpPr>
+            <a:spLocks noGrp="1"/>
+          </p:cNvSpPr>
+          <p:nvPr>
+            <p:ph type="sldNum" sz="quarter" idx="10"/>
+          </p:nvPr>
+        </p:nvSpPr>
+        <p:spPr/>
+        <p:txBody>
+          <a:bodyPr/>
+          <a:lstStyle/>
+          <a:p>
+            <a:fld id="{F7021451-1387-4CA6-816F-3879F97B5CBC}" type="slidenum">
+              <a:rPr lang="en-US"/>
+              <a:t>9</a:t>
             </a:fld>
             <a:endParaRPr lang="en-US"/>
           </a:p>
@@ -3813,7 +3904,27 @@
                 <a:ea typeface="Meiryo" pitchFamily="34" charset="-122"/>
                 <a:cs typeface="Meiryo" pitchFamily="34" charset="-120"/>
               </a:rPr>
-              <a:t>同じ4〜6月どうしを比べ、時期による取引量の差を避ける</a:t>
+              <a:t>同じ4〜6月どうしを比べ、</a:t>
+            </a:r>
+            <a:endParaRPr lang="en-US" sz="1350" dirty="0"/>
+          </a:p>
+          <a:p>
+            <a:pPr indent="0" marL="0">
+              <a:lnSpc>
+                <a:spcPts val="2200"/>
+              </a:lnSpc>
+              <a:buNone/>
+            </a:pPr>
+            <a:r>
+              <a:rPr lang="en-US" sz="1350" dirty="0">
+                <a:solidFill>
+                  <a:srgbClr val="1A2B33"/>
+                </a:solidFill>
+                <a:latin typeface="Meiryo" pitchFamily="34" charset="0"/>
+                <a:ea typeface="Meiryo" pitchFamily="34" charset="-122"/>
+                <a:cs typeface="Meiryo" pitchFamily="34" charset="-120"/>
+              </a:rPr>
+              <a:t>時期による取引量の差を避ける</a:t>
             </a:r>
             <a:endParaRPr lang="en-US" sz="1350" dirty="0"/>
           </a:p>
@@ -3921,7 +4032,27 @@
                 <a:ea typeface="Meiryo" pitchFamily="34" charset="-122"/>
                 <a:cs typeface="Meiryo" pitchFamily="34" charset="-120"/>
               </a:rPr>
-              <a:t>IBの件数に加え、ATMでの「IBでも代替できる取引」も合わせて見る</a:t>
+              <a:t>IBの件数に加え、</a:t>
+            </a:r>
+            <a:endParaRPr lang="en-US" sz="1350" dirty="0"/>
+          </a:p>
+          <a:p>
+            <a:pPr indent="0" marL="0">
+              <a:lnSpc>
+                <a:spcPts val="2200"/>
+              </a:lnSpc>
+              <a:buNone/>
+            </a:pPr>
+            <a:r>
+              <a:rPr lang="en-US" sz="1350" dirty="0">
+                <a:solidFill>
+                  <a:srgbClr val="1A2B33"/>
+                </a:solidFill>
+                <a:latin typeface="Meiryo" pitchFamily="34" charset="0"/>
+                <a:ea typeface="Meiryo" pitchFamily="34" charset="-122"/>
+                <a:cs typeface="Meiryo" pitchFamily="34" charset="-120"/>
+              </a:rPr>
+              <a:t>ATM側の「IBでも代替できる取引」も見る</a:t>
             </a:r>
             <a:endParaRPr lang="en-US" sz="1350" dirty="0"/>
           </a:p>
@@ -5008,7 +5139,7 @@
                 <a:ea typeface="Meiryo" pitchFamily="34" charset="-122"/>
                 <a:cs typeface="Meiryo" pitchFamily="34" charset="-120"/>
               </a:rPr>
-              <a:t>結 果 ①</a:t>
+              <a:t>分 析 方 法</a:t>
             </a:r>
             <a:endParaRPr lang="en-US" sz="1050" dirty="0"/>
           </a:p>
@@ -5047,7 +5178,7 @@
                 <a:ea typeface="Meiryo" pitchFamily="34" charset="-122"/>
                 <a:cs typeface="Meiryo" pitchFamily="34" charset="-120"/>
               </a:rPr>
-              <a:t>IBの利用件数は増加していた</a:t>
+              <a:t>条件を指定して必要な集計を取り出す</a:t>
             </a:r>
             <a:endParaRPr lang="en-US" sz="2600" dirty="0"/>
           </a:p>
@@ -5086,7 +5217,7 @@
                 <a:ea typeface="Meiryo" pitchFamily="34" charset="-122"/>
                 <a:cs typeface="Meiryo" pitchFamily="34" charset="-120"/>
               </a:rPr>
-              <a:t>まず、IBで行われた取引の件数を2つの期間で比較</a:t>
+              <a:t>作成した入出金テーブルに対し、画面上で条件を指定するだけで集計結果が得られる</a:t>
             </a:r>
             <a:endParaRPr lang="en-US" sz="1250" dirty="0"/>
           </a:p>
@@ -5140,11 +5271,11 @@
         <p:spPr>
           <a:xfrm>
             <a:off x="640080" y="1874520"/>
-            <a:ext cx="5989320" cy="3200400"/>
+            <a:ext cx="5029200" cy="2926080"/>
           </a:xfrm>
           <a:prstGeom prst="roundRect">
             <a:avLst>
-              <a:gd name="adj" fmla="val 1429"/>
+              <a:gd name="adj" fmla="val 1563"/>
             </a:avLst>
           </a:prstGeom>
           <a:solidFill>
@@ -5166,8 +5297,8 @@
         </p:nvSpPr>
         <p:spPr>
           <a:xfrm>
-            <a:off x="640080" y="3090672"/>
-            <a:ext cx="5989320" cy="292608"/>
+            <a:off x="640080" y="2953512"/>
+            <a:ext cx="5029200" cy="292608"/>
           </a:xfrm>
           <a:prstGeom prst="rect">
             <a:avLst/>
@@ -5191,7 +5322,7 @@
                 <a:ea typeface="Meiryo" pitchFamily="34" charset="-122"/>
                 <a:cs typeface="Meiryo" pitchFamily="34" charset="-120"/>
               </a:rPr>
-              <a:t>グラフ貼付エリア</a:t>
+              <a:t>スクリーンショット ①</a:t>
             </a:r>
             <a:endParaRPr lang="en-US" sz="1300" dirty="0"/>
           </a:p>
@@ -5205,8 +5336,8 @@
         </p:nvSpPr>
         <p:spPr>
           <a:xfrm>
-            <a:off x="914400" y="3438144"/>
-            <a:ext cx="5440680" cy="685800"/>
+            <a:off x="914400" y="3300984"/>
+            <a:ext cx="4480560" cy="685800"/>
           </a:xfrm>
           <a:prstGeom prst="rect">
             <a:avLst/>
@@ -5233,7 +5364,27 @@
                 <a:ea typeface="Meiryo" pitchFamily="34" charset="-122"/>
                 <a:cs typeface="Meiryo" pitchFamily="34" charset="-120"/>
               </a:rPr>
-              <a:t>IBの利用件数（2025年4〜6月 / 2026年4〜6月）</a:t>
+              <a:t>DYNATREKの条件設定画面</a:t>
+            </a:r>
+            <a:endParaRPr lang="en-US" sz="1100" dirty="0"/>
+          </a:p>
+          <a:p>
+            <a:pPr algn="ctr" indent="0" marL="0">
+              <a:lnSpc>
+                <a:spcPts val="1700"/>
+              </a:lnSpc>
+              <a:buNone/>
+            </a:pPr>
+            <a:r>
+              <a:rPr lang="en-US" sz="1100" dirty="0">
+                <a:solidFill>
+                  <a:srgbClr val="8497A0"/>
+                </a:solidFill>
+                <a:latin typeface="Meiryo" pitchFamily="34" charset="0"/>
+                <a:ea typeface="Meiryo" pitchFamily="34" charset="-122"/>
+                <a:cs typeface="Meiryo" pitchFamily="34" charset="-120"/>
+              </a:rPr>
+              <a:t>（期間・チャネル・取引種別などを指定）</a:t>
             </a:r>
             <a:endParaRPr lang="en-US" sz="1100" dirty="0"/>
           </a:p>
@@ -5247,20 +5398,20 @@
         </p:nvSpPr>
         <p:spPr>
           <a:xfrm>
-            <a:off x="6967728" y="1874520"/>
-            <a:ext cx="4581144" cy="960120"/>
+            <a:off x="6522415" y="1874520"/>
+            <a:ext cx="5029200" cy="2926080"/>
           </a:xfrm>
           <a:prstGeom prst="roundRect">
             <a:avLst>
-              <a:gd name="adj" fmla="val 4762"/>
+              <a:gd name="adj" fmla="val 1563"/>
             </a:avLst>
           </a:prstGeom>
           <a:solidFill>
-            <a:srgbClr val="F8EBE1"/>
+            <a:srgbClr val="E2EEF0"/>
           </a:solidFill>
           <a:ln w="15875">
             <a:solidFill>
-              <a:srgbClr val="D9A97F"/>
+              <a:srgbClr val="A8C7CC"/>
             </a:solidFill>
             <a:prstDash val="dash"/>
           </a:ln>
@@ -5274,34 +5425,34 @@
         </p:nvSpPr>
         <p:spPr>
           <a:xfrm>
-            <a:off x="7187184" y="2011680"/>
-            <a:ext cx="4142232" cy="237744"/>
-          </a:xfrm>
-          <a:prstGeom prst="rect">
-            <a:avLst/>
-          </a:prstGeom>
-          <a:noFill/>
-          <a:ln/>
-        </p:spPr>
-        <p:txBody>
-          <a:bodyPr wrap="square" lIns="0" tIns="0" rIns="0" bIns="0" rtlCol="0" anchor="ctr"/>
-          <a:lstStyle/>
-          <a:p>
-            <a:pPr indent="0" marL="0">
-              <a:buNone/>
-            </a:pPr>
-            <a:r>
-              <a:rPr lang="en-US" sz="1050" b="1" spc="80" kern="0" dirty="0">
-                <a:solidFill>
-                  <a:srgbClr val="B4551F"/>
-                </a:solidFill>
-                <a:latin typeface="Meiryo" pitchFamily="34" charset="0"/>
-                <a:ea typeface="Meiryo" pitchFamily="34" charset="-122"/>
-                <a:cs typeface="Meiryo" pitchFamily="34" charset="-120"/>
-              </a:rPr>
-              <a:t>件 数</a:t>
-            </a:r>
-            <a:endParaRPr lang="en-US" sz="1050" dirty="0"/>
+            <a:off x="6522415" y="2953512"/>
+            <a:ext cx="5029200" cy="292608"/>
+          </a:xfrm>
+          <a:prstGeom prst="rect">
+            <a:avLst/>
+          </a:prstGeom>
+          <a:noFill/>
+          <a:ln/>
+        </p:spPr>
+        <p:txBody>
+          <a:bodyPr wrap="square" lIns="0" tIns="0" rIns="0" bIns="0" rtlCol="0" anchor="ctr"/>
+          <a:lstStyle/>
+          <a:p>
+            <a:pPr algn="ctr" indent="0" marL="0">
+              <a:buNone/>
+            </a:pPr>
+            <a:r>
+              <a:rPr lang="en-US" sz="1300" b="1" dirty="0">
+                <a:solidFill>
+                  <a:srgbClr val="0F5A6B"/>
+                </a:solidFill>
+                <a:latin typeface="Meiryo" pitchFamily="34" charset="0"/>
+                <a:ea typeface="Meiryo" pitchFamily="34" charset="-122"/>
+                <a:cs typeface="Meiryo" pitchFamily="34" charset="-120"/>
+              </a:rPr>
+              <a:t>スクリーンショット ②</a:t>
+            </a:r>
+            <a:endParaRPr lang="en-US" sz="1300" dirty="0"/>
           </a:p>
         </p:txBody>
       </p:sp>
@@ -5313,37 +5464,37 @@
         </p:nvSpPr>
         <p:spPr>
           <a:xfrm>
-            <a:off x="7187184" y="2276856"/>
-            <a:ext cx="4142232" cy="429768"/>
-          </a:xfrm>
-          <a:prstGeom prst="rect">
-            <a:avLst/>
-          </a:prstGeom>
-          <a:noFill/>
-          <a:ln/>
-        </p:spPr>
-        <p:txBody>
-          <a:bodyPr wrap="square" lIns="0" tIns="0" rIns="0" bIns="0" rtlCol="0" anchor="ctr"/>
-          <a:lstStyle/>
-          <a:p>
-            <a:pPr indent="0" marL="0">
+            <a:off x="6796735" y="3300984"/>
+            <a:ext cx="4480560" cy="685800"/>
+          </a:xfrm>
+          <a:prstGeom prst="rect">
+            <a:avLst/>
+          </a:prstGeom>
+          <a:noFill/>
+          <a:ln/>
+        </p:spPr>
+        <p:txBody>
+          <a:bodyPr wrap="square" lIns="0" tIns="0" rIns="0" bIns="0" rtlCol="0" anchor="ctr"/>
+          <a:lstStyle/>
+          <a:p>
+            <a:pPr algn="ctr" indent="0" marL="0">
               <a:lnSpc>
                 <a:spcPts val="1700"/>
               </a:lnSpc>
               <a:buNone/>
             </a:pPr>
             <a:r>
-              <a:rPr lang="en-US" sz="1150" dirty="0">
-                <a:solidFill>
-                  <a:srgbClr val="A2795C"/>
-                </a:solidFill>
-                <a:latin typeface="Meiryo" pitchFamily="34" charset="0"/>
-                <a:ea typeface="Meiryo" pitchFamily="34" charset="-122"/>
-                <a:cs typeface="Meiryo" pitchFamily="34" charset="-120"/>
-              </a:rPr>
-              <a:t>2025年4〜6月 合計 ◯◯件 → 2026年4〜6月 合計 ◯◯件</a:t>
-            </a:r>
-            <a:endParaRPr lang="en-US" sz="1150" dirty="0"/>
+              <a:rPr lang="en-US" sz="1100" dirty="0">
+                <a:solidFill>
+                  <a:srgbClr val="8497A0"/>
+                </a:solidFill>
+                <a:latin typeface="Meiryo" pitchFamily="34" charset="0"/>
+                <a:ea typeface="Meiryo" pitchFamily="34" charset="-122"/>
+                <a:cs typeface="Meiryo" pitchFamily="34" charset="-120"/>
+              </a:rPr>
+              <a:t>指定した条件で出力された集計結果</a:t>
+            </a:r>
+            <a:endParaRPr lang="en-US" sz="1100" dirty="0"/>
           </a:p>
         </p:txBody>
       </p:sp>
@@ -5355,228 +5506,115 @@
         </p:nvSpPr>
         <p:spPr>
           <a:xfrm>
-            <a:off x="6967728" y="2999232"/>
-            <a:ext cx="4581144" cy="960120"/>
+            <a:off x="5797296" y="3154680"/>
+            <a:ext cx="594360" cy="365760"/>
+          </a:xfrm>
+          <a:prstGeom prst="rightArrow">
+            <a:avLst/>
+          </a:prstGeom>
+          <a:solidFill>
+            <a:srgbClr val="0F5A6B"/>
+          </a:solidFill>
+          <a:ln w="12700">
+            <a:solidFill>
+              <a:srgbClr val="0F5A6B"/>
+            </a:solidFill>
+            <a:prstDash val="solid"/>
+          </a:ln>
+        </p:spPr>
+      </p:sp>
+      <p:sp>
+        <p:nvSpPr>
+          <p:cNvPr id="15" name="Text 13"/>
+          <p:cNvSpPr txBox="1"/>
+          <p:nvPr/>
+        </p:nvSpPr>
+        <p:spPr>
+          <a:xfrm>
+            <a:off x="640080" y="4946904"/>
+            <a:ext cx="5029200" cy="274320"/>
+          </a:xfrm>
+          <a:prstGeom prst="rect">
+            <a:avLst/>
+          </a:prstGeom>
+          <a:noFill/>
+          <a:ln/>
+        </p:spPr>
+        <p:txBody>
+          <a:bodyPr wrap="square" lIns="0" tIns="0" rIns="0" bIns="0" rtlCol="0" anchor="ctr"/>
+          <a:lstStyle/>
+          <a:p>
+            <a:pPr algn="ctr" indent="0" marL="0">
+              <a:buNone/>
+            </a:pPr>
+            <a:r>
+              <a:rPr lang="en-US" sz="1300" b="1" dirty="0">
+                <a:solidFill>
+                  <a:srgbClr val="1A2B33"/>
+                </a:solidFill>
+                <a:latin typeface="Meiryo" pitchFamily="34" charset="0"/>
+                <a:ea typeface="Meiryo" pitchFamily="34" charset="-122"/>
+                <a:cs typeface="Meiryo" pitchFamily="34" charset="-120"/>
+              </a:rPr>
+              <a:t>条件を指定する</a:t>
+            </a:r>
+            <a:endParaRPr lang="en-US" sz="1300" dirty="0"/>
+          </a:p>
+        </p:txBody>
+      </p:sp>
+      <p:sp>
+        <p:nvSpPr>
+          <p:cNvPr id="16" name="Text 14"/>
+          <p:cNvSpPr txBox="1"/>
+          <p:nvPr/>
+        </p:nvSpPr>
+        <p:spPr>
+          <a:xfrm>
+            <a:off x="6522415" y="4946904"/>
+            <a:ext cx="5029200" cy="274320"/>
+          </a:xfrm>
+          <a:prstGeom prst="rect">
+            <a:avLst/>
+          </a:prstGeom>
+          <a:noFill/>
+          <a:ln/>
+        </p:spPr>
+        <p:txBody>
+          <a:bodyPr wrap="square" lIns="0" tIns="0" rIns="0" bIns="0" rtlCol="0" anchor="ctr"/>
+          <a:lstStyle/>
+          <a:p>
+            <a:pPr algn="ctr" indent="0" marL="0">
+              <a:buNone/>
+            </a:pPr>
+            <a:r>
+              <a:rPr lang="en-US" sz="1300" b="1" dirty="0">
+                <a:solidFill>
+                  <a:srgbClr val="0F5A6B"/>
+                </a:solidFill>
+                <a:latin typeface="Meiryo" pitchFamily="34" charset="0"/>
+                <a:ea typeface="Meiryo" pitchFamily="34" charset="-122"/>
+                <a:cs typeface="Meiryo" pitchFamily="34" charset="-120"/>
+              </a:rPr>
+              <a:t>そのまま集計結果が出る</a:t>
+            </a:r>
+            <a:endParaRPr lang="en-US" sz="1300" dirty="0"/>
+          </a:p>
+        </p:txBody>
+      </p:sp>
+      <p:sp>
+        <p:nvSpPr>
+          <p:cNvPr id="17" name="Shape 15"/>
+          <p:cNvSpPr/>
+          <p:nvPr/>
+        </p:nvSpPr>
+        <p:spPr>
+          <a:xfrm>
+            <a:off x="640080" y="5440680"/>
+            <a:ext cx="10911535" cy="566928"/>
           </a:xfrm>
           <a:prstGeom prst="roundRect">
             <a:avLst>
-              <a:gd name="adj" fmla="val 4762"/>
-            </a:avLst>
-          </a:prstGeom>
-          <a:solidFill>
-            <a:srgbClr val="F8EBE1"/>
-          </a:solidFill>
-          <a:ln w="15875">
-            <a:solidFill>
-              <a:srgbClr val="D9A97F"/>
-            </a:solidFill>
-            <a:prstDash val="dash"/>
-          </a:ln>
-        </p:spPr>
-      </p:sp>
-      <p:sp>
-        <p:nvSpPr>
-          <p:cNvPr id="15" name="Text 13"/>
-          <p:cNvSpPr txBox="1"/>
-          <p:nvPr/>
-        </p:nvSpPr>
-        <p:spPr>
-          <a:xfrm>
-            <a:off x="7187184" y="3136392"/>
-            <a:ext cx="4142232" cy="237744"/>
-          </a:xfrm>
-          <a:prstGeom prst="rect">
-            <a:avLst/>
-          </a:prstGeom>
-          <a:noFill/>
-          <a:ln/>
-        </p:spPr>
-        <p:txBody>
-          <a:bodyPr wrap="square" lIns="0" tIns="0" rIns="0" bIns="0" rtlCol="0" anchor="ctr"/>
-          <a:lstStyle/>
-          <a:p>
-            <a:pPr indent="0" marL="0">
-              <a:buNone/>
-            </a:pPr>
-            <a:r>
-              <a:rPr lang="en-US" sz="1050" b="1" spc="80" kern="0" dirty="0">
-                <a:solidFill>
-                  <a:srgbClr val="B4551F"/>
-                </a:solidFill>
-                <a:latin typeface="Meiryo" pitchFamily="34" charset="0"/>
-                <a:ea typeface="Meiryo" pitchFamily="34" charset="-122"/>
-                <a:cs typeface="Meiryo" pitchFamily="34" charset="-120"/>
-              </a:rPr>
-              <a:t>変 化</a:t>
-            </a:r>
-            <a:endParaRPr lang="en-US" sz="1050" dirty="0"/>
-          </a:p>
-        </p:txBody>
-      </p:sp>
-      <p:sp>
-        <p:nvSpPr>
-          <p:cNvPr id="16" name="Text 14"/>
-          <p:cNvSpPr txBox="1"/>
-          <p:nvPr/>
-        </p:nvSpPr>
-        <p:spPr>
-          <a:xfrm>
-            <a:off x="7187184" y="3401568"/>
-            <a:ext cx="4142232" cy="429768"/>
-          </a:xfrm>
-          <a:prstGeom prst="rect">
-            <a:avLst/>
-          </a:prstGeom>
-          <a:noFill/>
-          <a:ln/>
-        </p:spPr>
-        <p:txBody>
-          <a:bodyPr wrap="square" lIns="0" tIns="0" rIns="0" bIns="0" rtlCol="0" anchor="ctr"/>
-          <a:lstStyle/>
-          <a:p>
-            <a:pPr indent="0" marL="0">
-              <a:lnSpc>
-                <a:spcPts val="1700"/>
-              </a:lnSpc>
-              <a:buNone/>
-            </a:pPr>
-            <a:r>
-              <a:rPr lang="en-US" sz="1150" dirty="0">
-                <a:solidFill>
-                  <a:srgbClr val="A2795C"/>
-                </a:solidFill>
-                <a:latin typeface="Meiryo" pitchFamily="34" charset="0"/>
-                <a:ea typeface="Meiryo" pitchFamily="34" charset="-122"/>
-                <a:cs typeface="Meiryo" pitchFamily="34" charset="-120"/>
-              </a:rPr>
-              <a:t>1年間で ＋◯◯件（＋◯◯％）</a:t>
-            </a:r>
-            <a:endParaRPr lang="en-US" sz="1150" dirty="0"/>
-          </a:p>
-        </p:txBody>
-      </p:sp>
-      <p:sp>
-        <p:nvSpPr>
-          <p:cNvPr id="17" name="Shape 15"/>
-          <p:cNvSpPr/>
-          <p:nvPr/>
-        </p:nvSpPr>
-        <p:spPr>
-          <a:xfrm>
-            <a:off x="6967728" y="4123944"/>
-            <a:ext cx="4581144" cy="950976"/>
-          </a:xfrm>
-          <a:prstGeom prst="roundRect">
-            <a:avLst>
-              <a:gd name="adj" fmla="val 4808"/>
-            </a:avLst>
-          </a:prstGeom>
-          <a:solidFill>
-            <a:srgbClr val="F8EBE1"/>
-          </a:solidFill>
-          <a:ln w="15875">
-            <a:solidFill>
-              <a:srgbClr val="D9A97F"/>
-            </a:solidFill>
-            <a:prstDash val="dash"/>
-          </a:ln>
-        </p:spPr>
-      </p:sp>
-      <p:sp>
-        <p:nvSpPr>
-          <p:cNvPr id="18" name="Text 16"/>
-          <p:cNvSpPr txBox="1"/>
-          <p:nvPr/>
-        </p:nvSpPr>
-        <p:spPr>
-          <a:xfrm>
-            <a:off x="7187184" y="4261104"/>
-            <a:ext cx="4142232" cy="237744"/>
-          </a:xfrm>
-          <a:prstGeom prst="rect">
-            <a:avLst/>
-          </a:prstGeom>
-          <a:noFill/>
-          <a:ln/>
-        </p:spPr>
-        <p:txBody>
-          <a:bodyPr wrap="square" lIns="0" tIns="0" rIns="0" bIns="0" rtlCol="0" anchor="ctr"/>
-          <a:lstStyle/>
-          <a:p>
-            <a:pPr indent="0" marL="0">
-              <a:buNone/>
-            </a:pPr>
-            <a:r>
-              <a:rPr lang="en-US" sz="1050" b="1" spc="80" kern="0" dirty="0">
-                <a:solidFill>
-                  <a:srgbClr val="B4551F"/>
-                </a:solidFill>
-                <a:latin typeface="Meiryo" pitchFamily="34" charset="0"/>
-                <a:ea typeface="Meiryo" pitchFamily="34" charset="-122"/>
-                <a:cs typeface="Meiryo" pitchFamily="34" charset="-120"/>
-              </a:rPr>
-              <a:t>月 別 の 傾 向</a:t>
-            </a:r>
-            <a:endParaRPr lang="en-US" sz="1050" dirty="0"/>
-          </a:p>
-        </p:txBody>
-      </p:sp>
-      <p:sp>
-        <p:nvSpPr>
-          <p:cNvPr id="19" name="Text 17"/>
-          <p:cNvSpPr txBox="1"/>
-          <p:nvPr/>
-        </p:nvSpPr>
-        <p:spPr>
-          <a:xfrm>
-            <a:off x="7187184" y="4526280"/>
-            <a:ext cx="4142232" cy="420624"/>
-          </a:xfrm>
-          <a:prstGeom prst="rect">
-            <a:avLst/>
-          </a:prstGeom>
-          <a:noFill/>
-          <a:ln/>
-        </p:spPr>
-        <p:txBody>
-          <a:bodyPr wrap="square" lIns="0" tIns="0" rIns="0" bIns="0" rtlCol="0" anchor="ctr"/>
-          <a:lstStyle/>
-          <a:p>
-            <a:pPr indent="0" marL="0">
-              <a:lnSpc>
-                <a:spcPts val="1700"/>
-              </a:lnSpc>
-              <a:buNone/>
-            </a:pPr>
-            <a:r>
-              <a:rPr lang="en-US" sz="1150" dirty="0">
-                <a:solidFill>
-                  <a:srgbClr val="A2795C"/>
-                </a:solidFill>
-                <a:latin typeface="Meiryo" pitchFamily="34" charset="0"/>
-                <a:ea typeface="Meiryo" pitchFamily="34" charset="-122"/>
-                <a:cs typeface="Meiryo" pitchFamily="34" charset="-120"/>
-              </a:rPr>
-              <a:t>4月・5月・6月それぞれ増えているか／特に伸びた月はどこか</a:t>
-            </a:r>
-            <a:endParaRPr lang="en-US" sz="1150" dirty="0"/>
-          </a:p>
-        </p:txBody>
-      </p:sp>
-      <p:sp>
-        <p:nvSpPr>
-          <p:cNvPr id="20" name="Shape 18"/>
-          <p:cNvSpPr/>
-          <p:nvPr/>
-        </p:nvSpPr>
-        <p:spPr>
-          <a:xfrm>
-            <a:off x="640080" y="5349240"/>
-            <a:ext cx="10911535" cy="621792"/>
-          </a:xfrm>
-          <a:prstGeom prst="roundRect">
-            <a:avLst>
-              <a:gd name="adj" fmla="val 7353"/>
+              <a:gd name="adj" fmla="val 8065"/>
             </a:avLst>
           </a:prstGeom>
           <a:solidFill>
@@ -5592,14 +5630,14 @@
       </p:sp>
       <p:sp>
         <p:nvSpPr>
-          <p:cNvPr id="21" name="Text 19"/>
-          <p:cNvSpPr txBox="1"/>
-          <p:nvPr/>
-        </p:nvSpPr>
-        <p:spPr>
-          <a:xfrm>
-            <a:off x="914400" y="5349240"/>
-            <a:ext cx="10362895" cy="621792"/>
+          <p:cNvPr id="18" name="Text 16"/>
+          <p:cNvSpPr txBox="1"/>
+          <p:nvPr/>
+        </p:nvSpPr>
+        <p:spPr>
+          <a:xfrm>
+            <a:off x="914400" y="5440680"/>
+            <a:ext cx="10362895" cy="566928"/>
           </a:xfrm>
           <a:prstGeom prst="rect">
             <a:avLst/>
@@ -5623,7 +5661,7 @@
                 <a:ea typeface="Meiryo" pitchFamily="34" charset="-122"/>
                 <a:cs typeface="Meiryo" pitchFamily="34" charset="-120"/>
               </a:rPr>
-              <a:t>ただし件数の増加だけでは、取引そのものが増えた可能性を否定できない</a:t>
+              <a:t>一度テーブルを整えれば、条件を変えるだけで別の切り口でも確認できる</a:t>
             </a:r>
             <a:endParaRPr lang="en-US" sz="1400" dirty="0"/>
           </a:p>
@@ -5758,7 +5796,7 @@
                 <a:ea typeface="Meiryo" pitchFamily="34" charset="-122"/>
                 <a:cs typeface="Meiryo" pitchFamily="34" charset="-120"/>
               </a:rPr>
-              <a:t>結 果 ②</a:t>
+              <a:t>結 果 ①</a:t>
             </a:r>
             <a:endParaRPr lang="en-US" sz="1050" dirty="0"/>
           </a:p>
@@ -5797,7 +5835,7 @@
                 <a:ea typeface="Meiryo" pitchFamily="34" charset="-122"/>
                 <a:cs typeface="Meiryo" pitchFamily="34" charset="-120"/>
               </a:rPr>
-              <a:t>ATMでIBに代替できる取引は減少していた</a:t>
+              <a:t>IBの利用件数は増加していた</a:t>
             </a:r>
             <a:endParaRPr lang="en-US" sz="2600" dirty="0"/>
           </a:p>
@@ -5836,7 +5874,7 @@
                 <a:ea typeface="Meiryo" pitchFamily="34" charset="-122"/>
                 <a:cs typeface="Meiryo" pitchFamily="34" charset="-120"/>
               </a:rPr>
-              <a:t>IBへ移っているのかどうかを判断するため、ATM側の同種の取引も確認</a:t>
+              <a:t>まず、IBで行われた取引の件数を2つの期間で比較</a:t>
             </a:r>
             <a:endParaRPr lang="en-US" sz="1250" dirty="0"/>
           </a:p>
@@ -5983,7 +6021,7 @@
                 <a:ea typeface="Meiryo" pitchFamily="34" charset="-122"/>
                 <a:cs typeface="Meiryo" pitchFamily="34" charset="-120"/>
               </a:rPr>
-              <a:t>ATMでのIB代替可能な取引の件数（2025年4〜6月 / 2026年4〜6月）</a:t>
+              <a:t>IBの利用件数（2025年4〜6月 / 2026年4〜6月）</a:t>
             </a:r>
             <a:endParaRPr lang="en-US" sz="1100" dirty="0"/>
           </a:p>
@@ -5998,134 +6036,6 @@
         <p:spPr>
           <a:xfrm>
             <a:off x="6967728" y="1874520"/>
-            <a:ext cx="4581144" cy="960120"/>
-          </a:xfrm>
-          <a:prstGeom prst="roundRect">
-            <a:avLst>
-              <a:gd name="adj" fmla="val 4762"/>
-            </a:avLst>
-          </a:prstGeom>
-          <a:solidFill>
-            <a:srgbClr val="F3F6F7"/>
-          </a:solidFill>
-          <a:ln w="9525">
-            <a:solidFill>
-              <a:srgbClr val="F3F6F7"/>
-            </a:solidFill>
-            <a:prstDash val="solid"/>
-          </a:ln>
-        </p:spPr>
-      </p:sp>
-      <p:sp>
-        <p:nvSpPr>
-          <p:cNvPr id="12" name="Text 10"/>
-          <p:cNvSpPr txBox="1"/>
-          <p:nvPr/>
-        </p:nvSpPr>
-        <p:spPr>
-          <a:xfrm>
-            <a:off x="7223760" y="2011680"/>
-            <a:ext cx="1828800" cy="237744"/>
-          </a:xfrm>
-          <a:prstGeom prst="rect">
-            <a:avLst/>
-          </a:prstGeom>
-          <a:noFill/>
-          <a:ln/>
-        </p:spPr>
-        <p:txBody>
-          <a:bodyPr wrap="square" lIns="0" tIns="0" rIns="0" bIns="0" rtlCol="0" anchor="ctr"/>
-          <a:lstStyle/>
-          <a:p>
-            <a:pPr indent="0" marL="0">
-              <a:buNone/>
-            </a:pPr>
-            <a:r>
-              <a:rPr lang="en-US" sz="1000" b="1" spc="100" kern="0" dirty="0">
-                <a:solidFill>
-                  <a:srgbClr val="8497A0"/>
-                </a:solidFill>
-                <a:latin typeface="Meiryo" pitchFamily="34" charset="0"/>
-                <a:ea typeface="Meiryo" pitchFamily="34" charset="-122"/>
-                <a:cs typeface="Meiryo" pitchFamily="34" charset="-120"/>
-              </a:rPr>
-              <a:t>対 象</a:t>
-            </a:r>
-            <a:endParaRPr lang="en-US" sz="1000" dirty="0"/>
-          </a:p>
-        </p:txBody>
-      </p:sp>
-      <p:sp>
-        <p:nvSpPr>
-          <p:cNvPr id="13" name="Text 11"/>
-          <p:cNvSpPr txBox="1"/>
-          <p:nvPr/>
-        </p:nvSpPr>
-        <p:spPr>
-          <a:xfrm>
-            <a:off x="7223760" y="2249424"/>
-            <a:ext cx="4069080" cy="502920"/>
-          </a:xfrm>
-          <a:prstGeom prst="rect">
-            <a:avLst/>
-          </a:prstGeom>
-          <a:noFill/>
-          <a:ln/>
-        </p:spPr>
-        <p:txBody>
-          <a:bodyPr wrap="square" lIns="0" tIns="0" rIns="0" bIns="0" rtlCol="0" anchor="ctr"/>
-          <a:lstStyle/>
-          <a:p>
-            <a:pPr indent="0" marL="0">
-              <a:lnSpc>
-                <a:spcPts val="1700"/>
-              </a:lnSpc>
-              <a:buNone/>
-            </a:pPr>
-            <a:r>
-              <a:rPr lang="en-US" sz="1200" dirty="0">
-                <a:solidFill>
-                  <a:srgbClr val="1A2B33"/>
-                </a:solidFill>
-                <a:latin typeface="Meiryo" pitchFamily="34" charset="0"/>
-                <a:ea typeface="Meiryo" pitchFamily="34" charset="-122"/>
-                <a:cs typeface="Meiryo" pitchFamily="34" charset="-120"/>
-              </a:rPr>
-              <a:t>ATMでの取引のうち、IBでも行えるもの</a:t>
-            </a:r>
-            <a:endParaRPr lang="en-US" sz="1200" dirty="0"/>
-          </a:p>
-          <a:p>
-            <a:pPr indent="0" marL="0">
-              <a:lnSpc>
-                <a:spcPts val="1700"/>
-              </a:lnSpc>
-              <a:buNone/>
-            </a:pPr>
-            <a:r>
-              <a:rPr lang="en-US" sz="1200" dirty="0">
-                <a:solidFill>
-                  <a:srgbClr val="1A2B33"/>
-                </a:solidFill>
-                <a:latin typeface="Meiryo" pitchFamily="34" charset="0"/>
-                <a:ea typeface="Meiryo" pitchFamily="34" charset="-122"/>
-                <a:cs typeface="Meiryo" pitchFamily="34" charset="-120"/>
-              </a:rPr>
-              <a:t>（振込・振替 など）</a:t>
-            </a:r>
-            <a:endParaRPr lang="en-US" sz="1200" dirty="0"/>
-          </a:p>
-        </p:txBody>
-      </p:sp>
-      <p:sp>
-        <p:nvSpPr>
-          <p:cNvPr id="14" name="Shape 12"/>
-          <p:cNvSpPr/>
-          <p:nvPr/>
-        </p:nvSpPr>
-        <p:spPr>
-          <a:xfrm>
-            <a:off x="6967728" y="2999232"/>
             <a:ext cx="4581144" cy="960120"/>
           </a:xfrm>
           <a:prstGeom prst="roundRect">
@@ -6146,13 +6056,13 @@
       </p:sp>
       <p:sp>
         <p:nvSpPr>
-          <p:cNvPr id="15" name="Text 13"/>
-          <p:cNvSpPr txBox="1"/>
-          <p:nvPr/>
-        </p:nvSpPr>
-        <p:spPr>
-          <a:xfrm>
-            <a:off x="7187184" y="3136392"/>
+          <p:cNvPr id="12" name="Text 10"/>
+          <p:cNvSpPr txBox="1"/>
+          <p:nvPr/>
+        </p:nvSpPr>
+        <p:spPr>
+          <a:xfrm>
+            <a:off x="7187184" y="2011680"/>
             <a:ext cx="4142232" cy="237744"/>
           </a:xfrm>
           <a:prstGeom prst="rect">
@@ -6185,13 +6095,13 @@
       </p:sp>
       <p:sp>
         <p:nvSpPr>
-          <p:cNvPr id="16" name="Text 14"/>
-          <p:cNvSpPr txBox="1"/>
-          <p:nvPr/>
-        </p:nvSpPr>
-        <p:spPr>
-          <a:xfrm>
-            <a:off x="7187184" y="3401568"/>
+          <p:cNvPr id="13" name="Text 11"/>
+          <p:cNvSpPr txBox="1"/>
+          <p:nvPr/>
+        </p:nvSpPr>
+        <p:spPr>
+          <a:xfrm>
+            <a:off x="7187184" y="2276856"/>
             <a:ext cx="4142232" cy="429768"/>
           </a:xfrm>
           <a:prstGeom prst="rect">
@@ -6227,18 +6137,18 @@
       </p:sp>
       <p:sp>
         <p:nvSpPr>
-          <p:cNvPr id="17" name="Shape 15"/>
+          <p:cNvPr id="14" name="Shape 12"/>
           <p:cNvSpPr/>
           <p:nvPr/>
         </p:nvSpPr>
         <p:spPr>
           <a:xfrm>
-            <a:off x="6967728" y="4123944"/>
-            <a:ext cx="4581144" cy="950976"/>
+            <a:off x="6967728" y="2999232"/>
+            <a:ext cx="4581144" cy="960120"/>
           </a:xfrm>
           <a:prstGeom prst="roundRect">
             <a:avLst>
-              <a:gd name="adj" fmla="val 4808"/>
+              <a:gd name="adj" fmla="val 4762"/>
             </a:avLst>
           </a:prstGeom>
           <a:solidFill>
@@ -6254,13 +6164,13 @@
       </p:sp>
       <p:sp>
         <p:nvSpPr>
-          <p:cNvPr id="18" name="Text 16"/>
-          <p:cNvSpPr txBox="1"/>
-          <p:nvPr/>
-        </p:nvSpPr>
-        <p:spPr>
-          <a:xfrm>
-            <a:off x="7187184" y="4261104"/>
+          <p:cNvPr id="15" name="Text 13"/>
+          <p:cNvSpPr txBox="1"/>
+          <p:nvPr/>
+        </p:nvSpPr>
+        <p:spPr>
+          <a:xfrm>
+            <a:off x="7187184" y="3136392"/>
             <a:ext cx="4142232" cy="237744"/>
           </a:xfrm>
           <a:prstGeom prst="rect">
@@ -6293,14 +6203,14 @@
       </p:sp>
       <p:sp>
         <p:nvSpPr>
-          <p:cNvPr id="19" name="Text 17"/>
-          <p:cNvSpPr txBox="1"/>
-          <p:nvPr/>
-        </p:nvSpPr>
-        <p:spPr>
-          <a:xfrm>
-            <a:off x="7187184" y="4526280"/>
-            <a:ext cx="4142232" cy="420624"/>
+          <p:cNvPr id="16" name="Text 14"/>
+          <p:cNvSpPr txBox="1"/>
+          <p:nvPr/>
+        </p:nvSpPr>
+        <p:spPr>
+          <a:xfrm>
+            <a:off x="7187184" y="3401568"/>
+            <a:ext cx="4142232" cy="429768"/>
           </a:xfrm>
           <a:prstGeom prst="rect">
             <a:avLst/>
@@ -6327,7 +6237,115 @@
                 <a:ea typeface="Meiryo" pitchFamily="34" charset="-122"/>
                 <a:cs typeface="Meiryo" pitchFamily="34" charset="-120"/>
               </a:rPr>
-              <a:t>1年間で −◯◯件（−◯◯％）</a:t>
+              <a:t>1年間で ＋◯◯件（＋◯◯％）</a:t>
+            </a:r>
+            <a:endParaRPr lang="en-US" sz="1150" dirty="0"/>
+          </a:p>
+        </p:txBody>
+      </p:sp>
+      <p:sp>
+        <p:nvSpPr>
+          <p:cNvPr id="17" name="Shape 15"/>
+          <p:cNvSpPr/>
+          <p:nvPr/>
+        </p:nvSpPr>
+        <p:spPr>
+          <a:xfrm>
+            <a:off x="6967728" y="4123944"/>
+            <a:ext cx="4581144" cy="950976"/>
+          </a:xfrm>
+          <a:prstGeom prst="roundRect">
+            <a:avLst>
+              <a:gd name="adj" fmla="val 4808"/>
+            </a:avLst>
+          </a:prstGeom>
+          <a:solidFill>
+            <a:srgbClr val="F8EBE1"/>
+          </a:solidFill>
+          <a:ln w="15875">
+            <a:solidFill>
+              <a:srgbClr val="D9A97F"/>
+            </a:solidFill>
+            <a:prstDash val="dash"/>
+          </a:ln>
+        </p:spPr>
+      </p:sp>
+      <p:sp>
+        <p:nvSpPr>
+          <p:cNvPr id="18" name="Text 16"/>
+          <p:cNvSpPr txBox="1"/>
+          <p:nvPr/>
+        </p:nvSpPr>
+        <p:spPr>
+          <a:xfrm>
+            <a:off x="7187184" y="4261104"/>
+            <a:ext cx="4142232" cy="237744"/>
+          </a:xfrm>
+          <a:prstGeom prst="rect">
+            <a:avLst/>
+          </a:prstGeom>
+          <a:noFill/>
+          <a:ln/>
+        </p:spPr>
+        <p:txBody>
+          <a:bodyPr wrap="square" lIns="0" tIns="0" rIns="0" bIns="0" rtlCol="0" anchor="ctr"/>
+          <a:lstStyle/>
+          <a:p>
+            <a:pPr indent="0" marL="0">
+              <a:buNone/>
+            </a:pPr>
+            <a:r>
+              <a:rPr lang="en-US" sz="1050" b="1" spc="80" kern="0" dirty="0">
+                <a:solidFill>
+                  <a:srgbClr val="B4551F"/>
+                </a:solidFill>
+                <a:latin typeface="Meiryo" pitchFamily="34" charset="0"/>
+                <a:ea typeface="Meiryo" pitchFamily="34" charset="-122"/>
+                <a:cs typeface="Meiryo" pitchFamily="34" charset="-120"/>
+              </a:rPr>
+              <a:t>月 別 の 傾 向</a:t>
+            </a:r>
+            <a:endParaRPr lang="en-US" sz="1050" dirty="0"/>
+          </a:p>
+        </p:txBody>
+      </p:sp>
+      <p:sp>
+        <p:nvSpPr>
+          <p:cNvPr id="19" name="Text 17"/>
+          <p:cNvSpPr txBox="1"/>
+          <p:nvPr/>
+        </p:nvSpPr>
+        <p:spPr>
+          <a:xfrm>
+            <a:off x="7187184" y="4526280"/>
+            <a:ext cx="4142232" cy="420624"/>
+          </a:xfrm>
+          <a:prstGeom prst="rect">
+            <a:avLst/>
+          </a:prstGeom>
+          <a:noFill/>
+          <a:ln/>
+        </p:spPr>
+        <p:txBody>
+          <a:bodyPr wrap="square" lIns="0" tIns="0" rIns="0" bIns="0" rtlCol="0" anchor="ctr"/>
+          <a:lstStyle/>
+          <a:p>
+            <a:pPr indent="0" marL="0">
+              <a:lnSpc>
+                <a:spcPts val="1700"/>
+              </a:lnSpc>
+              <a:buNone/>
+            </a:pPr>
+            <a:r>
+              <a:rPr lang="en-US" sz="1150" dirty="0">
+                <a:solidFill>
+                  <a:srgbClr val="A2795C"/>
+                </a:solidFill>
+                <a:latin typeface="Meiryo" pitchFamily="34" charset="0"/>
+                <a:ea typeface="Meiryo" pitchFamily="34" charset="-122"/>
+                <a:cs typeface="Meiryo" pitchFamily="34" charset="-120"/>
+              </a:rPr>
+              <a:t>4月・5月・6月それぞれ増えているか／特に伸びた月はどこか</a:t>
             </a:r>
             <a:endParaRPr lang="en-US" sz="1150" dirty="0"/>
           </a:p>
@@ -6350,11 +6368,11 @@
             </a:avLst>
           </a:prstGeom>
           <a:solidFill>
-            <a:srgbClr val="E2EEF0"/>
+            <a:srgbClr val="F3F6F7"/>
           </a:solidFill>
           <a:ln w="12700">
             <a:solidFill>
-              <a:srgbClr val="E2EEF0"/>
+              <a:srgbClr val="F3F6F7"/>
             </a:solidFill>
             <a:prstDash val="solid"/>
           </a:ln>
@@ -6387,13 +6405,13 @@
             <a:r>
               <a:rPr lang="en-US" sz="1400" b="1" dirty="0">
                 <a:solidFill>
-                  <a:srgbClr val="0F5A6B"/>
-                </a:solidFill>
-                <a:latin typeface="Meiryo" pitchFamily="34" charset="0"/>
-                <a:ea typeface="Meiryo" pitchFamily="34" charset="-122"/>
-                <a:cs typeface="Meiryo" pitchFamily="34" charset="-120"/>
-              </a:rPr>
-              <a:t>IBは増加、ATM側は減少　→　同じ取引がIBへ移りつつあると読める</a:t>
+                  <a:srgbClr val="1A2B33"/>
+                </a:solidFill>
+                <a:latin typeface="Meiryo" pitchFamily="34" charset="0"/>
+                <a:ea typeface="Meiryo" pitchFamily="34" charset="-122"/>
+                <a:cs typeface="Meiryo" pitchFamily="34" charset="-120"/>
+              </a:rPr>
+              <a:t>ただし件数の増加だけでは、取引そのものが増えた可能性を否定できない</a:t>
             </a:r>
             <a:endParaRPr lang="en-US" sz="1400" dirty="0"/>
           </a:p>
@@ -6528,7 +6546,7 @@
                 <a:ea typeface="Meiryo" pitchFamily="34" charset="-122"/>
                 <a:cs typeface="Meiryo" pitchFamily="34" charset="-120"/>
               </a:rPr>
-              <a:t>考 察</a:t>
+              <a:t>結 果 ②</a:t>
             </a:r>
             <a:endParaRPr lang="en-US" sz="1050" dirty="0"/>
           </a:p>
@@ -6567,7 +6585,7 @@
                 <a:ea typeface="Meiryo" pitchFamily="34" charset="-122"/>
                 <a:cs typeface="Meiryo" pitchFamily="34" charset="-120"/>
               </a:rPr>
-              <a:t>どの年代で利用が広がったのか</a:t>
+              <a:t>ATMでIBに代替できる取引は減少していた</a:t>
             </a:r>
             <a:endParaRPr lang="en-US" sz="2600" dirty="0"/>
           </a:p>
@@ -6606,7 +6624,7 @@
                 <a:ea typeface="Meiryo" pitchFamily="34" charset="-122"/>
                 <a:cs typeface="Meiryo" pitchFamily="34" charset="-120"/>
               </a:rPr>
-              <a:t>全体の動きが分かった次に知りたくなるのは「誰が使うようになったのか」。今回は年代を5つに分けて確認</a:t>
+              <a:t>IBへ移っているのかどうかを判断するため、ATM側の同種の取引も確認</a:t>
             </a:r>
             <a:endParaRPr lang="en-US" sz="1250" dirty="0"/>
           </a:p>
@@ -6660,11 +6678,119 @@
         <p:spPr>
           <a:xfrm>
             <a:off x="640080" y="1874520"/>
-            <a:ext cx="1993392" cy="676656"/>
+            <a:ext cx="5989320" cy="3200400"/>
           </a:xfrm>
           <a:prstGeom prst="roundRect">
             <a:avLst>
-              <a:gd name="adj" fmla="val 6757"/>
+              <a:gd name="adj" fmla="val 1429"/>
+            </a:avLst>
+          </a:prstGeom>
+          <a:solidFill>
+            <a:srgbClr val="F3F6F7"/>
+          </a:solidFill>
+          <a:ln w="15875">
+            <a:solidFill>
+              <a:srgbClr val="BFCCD1"/>
+            </a:solidFill>
+            <a:prstDash val="dash"/>
+          </a:ln>
+        </p:spPr>
+      </p:sp>
+      <p:sp>
+        <p:nvSpPr>
+          <p:cNvPr id="9" name="Text 7"/>
+          <p:cNvSpPr txBox="1"/>
+          <p:nvPr/>
+        </p:nvSpPr>
+        <p:spPr>
+          <a:xfrm>
+            <a:off x="640080" y="3090672"/>
+            <a:ext cx="5989320" cy="292608"/>
+          </a:xfrm>
+          <a:prstGeom prst="rect">
+            <a:avLst/>
+          </a:prstGeom>
+          <a:noFill/>
+          <a:ln/>
+        </p:spPr>
+        <p:txBody>
+          <a:bodyPr wrap="square" lIns="0" tIns="0" rIns="0" bIns="0" rtlCol="0" anchor="ctr"/>
+          <a:lstStyle/>
+          <a:p>
+            <a:pPr algn="ctr" indent="0" marL="0">
+              <a:buNone/>
+            </a:pPr>
+            <a:r>
+              <a:rPr lang="en-US" sz="1300" b="1" dirty="0">
+                <a:solidFill>
+                  <a:srgbClr val="0F5A6B"/>
+                </a:solidFill>
+                <a:latin typeface="Meiryo" pitchFamily="34" charset="0"/>
+                <a:ea typeface="Meiryo" pitchFamily="34" charset="-122"/>
+                <a:cs typeface="Meiryo" pitchFamily="34" charset="-120"/>
+              </a:rPr>
+              <a:t>グラフ貼付エリア</a:t>
+            </a:r>
+            <a:endParaRPr lang="en-US" sz="1300" dirty="0"/>
+          </a:p>
+        </p:txBody>
+      </p:sp>
+      <p:sp>
+        <p:nvSpPr>
+          <p:cNvPr id="10" name="Text 8"/>
+          <p:cNvSpPr txBox="1"/>
+          <p:nvPr/>
+        </p:nvSpPr>
+        <p:spPr>
+          <a:xfrm>
+            <a:off x="914400" y="3438144"/>
+            <a:ext cx="5440680" cy="685800"/>
+          </a:xfrm>
+          <a:prstGeom prst="rect">
+            <a:avLst/>
+          </a:prstGeom>
+          <a:noFill/>
+          <a:ln/>
+        </p:spPr>
+        <p:txBody>
+          <a:bodyPr wrap="square" lIns="0" tIns="0" rIns="0" bIns="0" rtlCol="0" anchor="ctr"/>
+          <a:lstStyle/>
+          <a:p>
+            <a:pPr algn="ctr" indent="0" marL="0">
+              <a:lnSpc>
+                <a:spcPts val="1700"/>
+              </a:lnSpc>
+              <a:buNone/>
+            </a:pPr>
+            <a:r>
+              <a:rPr lang="en-US" sz="1100" dirty="0">
+                <a:solidFill>
+                  <a:srgbClr val="8497A0"/>
+                </a:solidFill>
+                <a:latin typeface="Meiryo" pitchFamily="34" charset="0"/>
+                <a:ea typeface="Meiryo" pitchFamily="34" charset="-122"/>
+                <a:cs typeface="Meiryo" pitchFamily="34" charset="-120"/>
+              </a:rPr>
+              <a:t>ATMでのIB代替可能な取引の件数（2025年4〜6月 / 2026年4〜6月）</a:t>
+            </a:r>
+            <a:endParaRPr lang="en-US" sz="1100" dirty="0"/>
+          </a:p>
+        </p:txBody>
+      </p:sp>
+      <p:sp>
+        <p:nvSpPr>
+          <p:cNvPr id="11" name="Shape 9"/>
+          <p:cNvSpPr/>
+          <p:nvPr/>
+        </p:nvSpPr>
+        <p:spPr>
+          <a:xfrm>
+            <a:off x="6967728" y="1874520"/>
+            <a:ext cx="4581144" cy="960120"/>
+          </a:xfrm>
+          <a:prstGeom prst="roundRect">
+            <a:avLst>
+              <a:gd name="adj" fmla="val 4762"/>
             </a:avLst>
           </a:prstGeom>
           <a:solidFill>
@@ -6680,69 +6806,30 @@
       </p:sp>
       <p:sp>
         <p:nvSpPr>
-          <p:cNvPr id="9" name="Text 7"/>
-          <p:cNvSpPr txBox="1"/>
-          <p:nvPr/>
-        </p:nvSpPr>
-        <p:spPr>
-          <a:xfrm>
-            <a:off x="640080" y="1965960"/>
-            <a:ext cx="1993392" cy="256032"/>
-          </a:xfrm>
-          <a:prstGeom prst="rect">
-            <a:avLst/>
-          </a:prstGeom>
-          <a:noFill/>
-          <a:ln/>
-        </p:spPr>
-        <p:txBody>
-          <a:bodyPr wrap="square" lIns="0" tIns="0" rIns="0" bIns="0" rtlCol="0" anchor="ctr"/>
-          <a:lstStyle/>
-          <a:p>
-            <a:pPr algn="ctr" indent="0" marL="0">
-              <a:buNone/>
-            </a:pPr>
-            <a:r>
-              <a:rPr lang="en-US" sz="1250" b="1" dirty="0">
-                <a:solidFill>
-                  <a:srgbClr val="1A2B33"/>
-                </a:solidFill>
-                <a:latin typeface="Meiryo" pitchFamily="34" charset="0"/>
-                <a:ea typeface="Meiryo" pitchFamily="34" charset="-122"/>
-                <a:cs typeface="Meiryo" pitchFamily="34" charset="-120"/>
-              </a:rPr>
-              <a:t>未成年</a:t>
-            </a:r>
-            <a:endParaRPr lang="en-US" sz="1250" dirty="0"/>
-          </a:p>
-        </p:txBody>
-      </p:sp>
-      <p:sp>
-        <p:nvSpPr>
-          <p:cNvPr id="10" name="Text 8"/>
-          <p:cNvSpPr txBox="1"/>
-          <p:nvPr/>
-        </p:nvSpPr>
-        <p:spPr>
-          <a:xfrm>
-            <a:off x="640080" y="2240280"/>
-            <a:ext cx="1993392" cy="237744"/>
-          </a:xfrm>
-          <a:prstGeom prst="rect">
-            <a:avLst/>
-          </a:prstGeom>
-          <a:noFill/>
-          <a:ln/>
-        </p:spPr>
-        <p:txBody>
-          <a:bodyPr wrap="square" lIns="0" tIns="0" rIns="0" bIns="0" rtlCol="0" anchor="ctr"/>
-          <a:lstStyle/>
-          <a:p>
-            <a:pPr algn="ctr" indent="0" marL="0">
-              <a:buNone/>
-            </a:pPr>
-            <a:r>
-              <a:rPr lang="en-US" sz="1100" dirty="0">
+          <p:cNvPr id="12" name="Text 10"/>
+          <p:cNvSpPr txBox="1"/>
+          <p:nvPr/>
+        </p:nvSpPr>
+        <p:spPr>
+          <a:xfrm>
+            <a:off x="7223760" y="2011680"/>
+            <a:ext cx="1828800" cy="237744"/>
+          </a:xfrm>
+          <a:prstGeom prst="rect">
+            <a:avLst/>
+          </a:prstGeom>
+          <a:noFill/>
+          <a:ln/>
+        </p:spPr>
+        <p:txBody>
+          <a:bodyPr wrap="square" lIns="0" tIns="0" rIns="0" bIns="0" rtlCol="0" anchor="ctr"/>
+          <a:lstStyle/>
+          <a:p>
+            <a:pPr indent="0" marL="0">
+              <a:buNone/>
+            </a:pPr>
+            <a:r>
+              <a:rPr lang="en-US" sz="1000" b="1" spc="100" kern="0" dirty="0">
                 <a:solidFill>
                   <a:srgbClr val="8497A0"/>
                 </a:solidFill>
@@ -6750,75 +6837,9 @@
                 <a:ea typeface="Meiryo" pitchFamily="34" charset="-122"/>
                 <a:cs typeface="Meiryo" pitchFamily="34" charset="-120"/>
               </a:rPr>
-              <a:t>0〜17歳</a:t>
-            </a:r>
-            <a:endParaRPr lang="en-US" sz="1100" dirty="0"/>
-          </a:p>
-        </p:txBody>
-      </p:sp>
-      <p:sp>
-        <p:nvSpPr>
-          <p:cNvPr id="11" name="Shape 9"/>
-          <p:cNvSpPr/>
-          <p:nvPr/>
-        </p:nvSpPr>
-        <p:spPr>
-          <a:xfrm>
-            <a:off x="2862072" y="1874520"/>
-            <a:ext cx="1993392" cy="676656"/>
-          </a:xfrm>
-          <a:prstGeom prst="roundRect">
-            <a:avLst>
-              <a:gd name="adj" fmla="val 6757"/>
-            </a:avLst>
-          </a:prstGeom>
-          <a:solidFill>
-            <a:srgbClr val="F3F6F7"/>
-          </a:solidFill>
-          <a:ln w="9525">
-            <a:solidFill>
-              <a:srgbClr val="F3F6F7"/>
-            </a:solidFill>
-            <a:prstDash val="solid"/>
-          </a:ln>
-        </p:spPr>
-      </p:sp>
-      <p:sp>
-        <p:nvSpPr>
-          <p:cNvPr id="12" name="Text 10"/>
-          <p:cNvSpPr txBox="1"/>
-          <p:nvPr/>
-        </p:nvSpPr>
-        <p:spPr>
-          <a:xfrm>
-            <a:off x="2862072" y="1965960"/>
-            <a:ext cx="1993392" cy="256032"/>
-          </a:xfrm>
-          <a:prstGeom prst="rect">
-            <a:avLst/>
-          </a:prstGeom>
-          <a:noFill/>
-          <a:ln/>
-        </p:spPr>
-        <p:txBody>
-          <a:bodyPr wrap="square" lIns="0" tIns="0" rIns="0" bIns="0" rtlCol="0" anchor="ctr"/>
-          <a:lstStyle/>
-          <a:p>
-            <a:pPr algn="ctr" indent="0" marL="0">
-              <a:buNone/>
-            </a:pPr>
-            <a:r>
-              <a:rPr lang="en-US" sz="1250" b="1" dirty="0">
-                <a:solidFill>
-                  <a:srgbClr val="1A2B33"/>
-                </a:solidFill>
-                <a:latin typeface="Meiryo" pitchFamily="34" charset="0"/>
-                <a:ea typeface="Meiryo" pitchFamily="34" charset="-122"/>
-                <a:cs typeface="Meiryo" pitchFamily="34" charset="-120"/>
-              </a:rPr>
-              <a:t>若手成人</a:t>
-            </a:r>
-            <a:endParaRPr lang="en-US" sz="1250" dirty="0"/>
+              <a:t>対 象</a:t>
+            </a:r>
+            <a:endParaRPr lang="en-US" sz="1000" dirty="0"/>
           </a:p>
         </p:txBody>
       </p:sp>
@@ -6830,474 +6851,74 @@
         </p:nvSpPr>
         <p:spPr>
           <a:xfrm>
-            <a:off x="2862072" y="2240280"/>
-            <a:ext cx="1993392" cy="237744"/>
-          </a:xfrm>
-          <a:prstGeom prst="rect">
-            <a:avLst/>
-          </a:prstGeom>
-          <a:noFill/>
-          <a:ln/>
-        </p:spPr>
-        <p:txBody>
-          <a:bodyPr wrap="square" lIns="0" tIns="0" rIns="0" bIns="0" rtlCol="0" anchor="ctr"/>
-          <a:lstStyle/>
-          <a:p>
-            <a:pPr algn="ctr" indent="0" marL="0">
-              <a:buNone/>
-            </a:pPr>
-            <a:r>
-              <a:rPr lang="en-US" sz="1100" dirty="0">
-                <a:solidFill>
-                  <a:srgbClr val="8497A0"/>
-                </a:solidFill>
-                <a:latin typeface="Meiryo" pitchFamily="34" charset="0"/>
-                <a:ea typeface="Meiryo" pitchFamily="34" charset="-122"/>
-                <a:cs typeface="Meiryo" pitchFamily="34" charset="-120"/>
-              </a:rPr>
-              <a:t>18〜29歳</a:t>
-            </a:r>
-            <a:endParaRPr lang="en-US" sz="1100" dirty="0"/>
-          </a:p>
-        </p:txBody>
-      </p:sp>
-      <p:sp>
-        <p:nvSpPr>
-          <p:cNvPr id="14" name="Shape 12"/>
-          <p:cNvSpPr/>
-          <p:nvPr/>
-        </p:nvSpPr>
-        <p:spPr>
-          <a:xfrm>
-            <a:off x="5084064" y="1874520"/>
-            <a:ext cx="1993392" cy="676656"/>
-          </a:xfrm>
-          <a:prstGeom prst="roundRect">
-            <a:avLst>
-              <a:gd name="adj" fmla="val 6757"/>
-            </a:avLst>
-          </a:prstGeom>
-          <a:solidFill>
-            <a:srgbClr val="F3F6F7"/>
-          </a:solidFill>
-          <a:ln w="9525">
-            <a:solidFill>
-              <a:srgbClr val="F3F6F7"/>
-            </a:solidFill>
-            <a:prstDash val="solid"/>
-          </a:ln>
-        </p:spPr>
-      </p:sp>
-      <p:sp>
-        <p:nvSpPr>
-          <p:cNvPr id="15" name="Text 13"/>
-          <p:cNvSpPr txBox="1"/>
-          <p:nvPr/>
-        </p:nvSpPr>
-        <p:spPr>
-          <a:xfrm>
-            <a:off x="5084064" y="1965960"/>
-            <a:ext cx="1993392" cy="256032"/>
-          </a:xfrm>
-          <a:prstGeom prst="rect">
-            <a:avLst/>
-          </a:prstGeom>
-          <a:noFill/>
-          <a:ln/>
-        </p:spPr>
-        <p:txBody>
-          <a:bodyPr wrap="square" lIns="0" tIns="0" rIns="0" bIns="0" rtlCol="0" anchor="ctr"/>
-          <a:lstStyle/>
-          <a:p>
-            <a:pPr algn="ctr" indent="0" marL="0">
-              <a:buNone/>
-            </a:pPr>
-            <a:r>
-              <a:rPr lang="en-US" sz="1250" b="1" dirty="0">
-                <a:solidFill>
-                  <a:srgbClr val="1A2B33"/>
-                </a:solidFill>
-                <a:latin typeface="Meiryo" pitchFamily="34" charset="0"/>
-                <a:ea typeface="Meiryo" pitchFamily="34" charset="-122"/>
-                <a:cs typeface="Meiryo" pitchFamily="34" charset="-120"/>
-              </a:rPr>
-              <a:t>働き手①</a:t>
-            </a:r>
-            <a:endParaRPr lang="en-US" sz="1250" dirty="0"/>
-          </a:p>
-        </p:txBody>
-      </p:sp>
-      <p:sp>
-        <p:nvSpPr>
-          <p:cNvPr id="16" name="Text 14"/>
-          <p:cNvSpPr txBox="1"/>
-          <p:nvPr/>
-        </p:nvSpPr>
-        <p:spPr>
-          <a:xfrm>
-            <a:off x="5084064" y="2240280"/>
-            <a:ext cx="1993392" cy="237744"/>
-          </a:xfrm>
-          <a:prstGeom prst="rect">
-            <a:avLst/>
-          </a:prstGeom>
-          <a:noFill/>
-          <a:ln/>
-        </p:spPr>
-        <p:txBody>
-          <a:bodyPr wrap="square" lIns="0" tIns="0" rIns="0" bIns="0" rtlCol="0" anchor="ctr"/>
-          <a:lstStyle/>
-          <a:p>
-            <a:pPr algn="ctr" indent="0" marL="0">
-              <a:buNone/>
-            </a:pPr>
-            <a:r>
-              <a:rPr lang="en-US" sz="1100" dirty="0">
-                <a:solidFill>
-                  <a:srgbClr val="8497A0"/>
-                </a:solidFill>
-                <a:latin typeface="Meiryo" pitchFamily="34" charset="0"/>
-                <a:ea typeface="Meiryo" pitchFamily="34" charset="-122"/>
-                <a:cs typeface="Meiryo" pitchFamily="34" charset="-120"/>
-              </a:rPr>
-              <a:t>30〜44歳</a:t>
-            </a:r>
-            <a:endParaRPr lang="en-US" sz="1100" dirty="0"/>
-          </a:p>
-        </p:txBody>
-      </p:sp>
-      <p:sp>
-        <p:nvSpPr>
-          <p:cNvPr id="17" name="Shape 15"/>
-          <p:cNvSpPr/>
-          <p:nvPr/>
-        </p:nvSpPr>
-        <p:spPr>
-          <a:xfrm>
-            <a:off x="7306056" y="1874520"/>
-            <a:ext cx="1993392" cy="676656"/>
-          </a:xfrm>
-          <a:prstGeom prst="roundRect">
-            <a:avLst>
-              <a:gd name="adj" fmla="val 6757"/>
-            </a:avLst>
-          </a:prstGeom>
-          <a:solidFill>
-            <a:srgbClr val="F3F6F7"/>
-          </a:solidFill>
-          <a:ln w="9525">
-            <a:solidFill>
-              <a:srgbClr val="F3F6F7"/>
-            </a:solidFill>
-            <a:prstDash val="solid"/>
-          </a:ln>
-        </p:spPr>
-      </p:sp>
-      <p:sp>
-        <p:nvSpPr>
-          <p:cNvPr id="18" name="Text 16"/>
-          <p:cNvSpPr txBox="1"/>
-          <p:nvPr/>
-        </p:nvSpPr>
-        <p:spPr>
-          <a:xfrm>
-            <a:off x="7306056" y="1965960"/>
-            <a:ext cx="1993392" cy="256032"/>
-          </a:xfrm>
-          <a:prstGeom prst="rect">
-            <a:avLst/>
-          </a:prstGeom>
-          <a:noFill/>
-          <a:ln/>
-        </p:spPr>
-        <p:txBody>
-          <a:bodyPr wrap="square" lIns="0" tIns="0" rIns="0" bIns="0" rtlCol="0" anchor="ctr"/>
-          <a:lstStyle/>
-          <a:p>
-            <a:pPr algn="ctr" indent="0" marL="0">
-              <a:buNone/>
-            </a:pPr>
-            <a:r>
-              <a:rPr lang="en-US" sz="1250" b="1" dirty="0">
-                <a:solidFill>
-                  <a:srgbClr val="1A2B33"/>
-                </a:solidFill>
-                <a:latin typeface="Meiryo" pitchFamily="34" charset="0"/>
-                <a:ea typeface="Meiryo" pitchFamily="34" charset="-122"/>
-                <a:cs typeface="Meiryo" pitchFamily="34" charset="-120"/>
-              </a:rPr>
-              <a:t>働き手②</a:t>
-            </a:r>
-            <a:endParaRPr lang="en-US" sz="1250" dirty="0"/>
-          </a:p>
-        </p:txBody>
-      </p:sp>
-      <p:sp>
-        <p:nvSpPr>
-          <p:cNvPr id="19" name="Text 17"/>
-          <p:cNvSpPr txBox="1"/>
-          <p:nvPr/>
-        </p:nvSpPr>
-        <p:spPr>
-          <a:xfrm>
-            <a:off x="7306056" y="2240280"/>
-            <a:ext cx="1993392" cy="237744"/>
-          </a:xfrm>
-          <a:prstGeom prst="rect">
-            <a:avLst/>
-          </a:prstGeom>
-          <a:noFill/>
-          <a:ln/>
-        </p:spPr>
-        <p:txBody>
-          <a:bodyPr wrap="square" lIns="0" tIns="0" rIns="0" bIns="0" rtlCol="0" anchor="ctr"/>
-          <a:lstStyle/>
-          <a:p>
-            <a:pPr algn="ctr" indent="0" marL="0">
-              <a:buNone/>
-            </a:pPr>
-            <a:r>
-              <a:rPr lang="en-US" sz="1100" dirty="0">
-                <a:solidFill>
-                  <a:srgbClr val="8497A0"/>
-                </a:solidFill>
-                <a:latin typeface="Meiryo" pitchFamily="34" charset="0"/>
-                <a:ea typeface="Meiryo" pitchFamily="34" charset="-122"/>
-                <a:cs typeface="Meiryo" pitchFamily="34" charset="-120"/>
-              </a:rPr>
-              <a:t>45〜64歳</a:t>
-            </a:r>
-            <a:endParaRPr lang="en-US" sz="1100" dirty="0"/>
-          </a:p>
-        </p:txBody>
-      </p:sp>
-      <p:sp>
-        <p:nvSpPr>
-          <p:cNvPr id="20" name="Shape 18"/>
-          <p:cNvSpPr/>
-          <p:nvPr/>
-        </p:nvSpPr>
-        <p:spPr>
-          <a:xfrm>
-            <a:off x="9528048" y="1874520"/>
-            <a:ext cx="1993392" cy="676656"/>
-          </a:xfrm>
-          <a:prstGeom prst="roundRect">
-            <a:avLst>
-              <a:gd name="adj" fmla="val 6757"/>
-            </a:avLst>
-          </a:prstGeom>
-          <a:solidFill>
-            <a:srgbClr val="F3F6F7"/>
-          </a:solidFill>
-          <a:ln w="9525">
-            <a:solidFill>
-              <a:srgbClr val="F3F6F7"/>
-            </a:solidFill>
-            <a:prstDash val="solid"/>
-          </a:ln>
-        </p:spPr>
-      </p:sp>
-      <p:sp>
-        <p:nvSpPr>
-          <p:cNvPr id="21" name="Text 19"/>
-          <p:cNvSpPr txBox="1"/>
-          <p:nvPr/>
-        </p:nvSpPr>
-        <p:spPr>
-          <a:xfrm>
-            <a:off x="9528048" y="1965960"/>
-            <a:ext cx="1993392" cy="256032"/>
-          </a:xfrm>
-          <a:prstGeom prst="rect">
-            <a:avLst/>
-          </a:prstGeom>
-          <a:noFill/>
-          <a:ln/>
-        </p:spPr>
-        <p:txBody>
-          <a:bodyPr wrap="square" lIns="0" tIns="0" rIns="0" bIns="0" rtlCol="0" anchor="ctr"/>
-          <a:lstStyle/>
-          <a:p>
-            <a:pPr algn="ctr" indent="0" marL="0">
-              <a:buNone/>
-            </a:pPr>
-            <a:r>
-              <a:rPr lang="en-US" sz="1250" b="1" dirty="0">
-                <a:solidFill>
-                  <a:srgbClr val="1A2B33"/>
-                </a:solidFill>
-                <a:latin typeface="Meiryo" pitchFamily="34" charset="0"/>
-                <a:ea typeface="Meiryo" pitchFamily="34" charset="-122"/>
-                <a:cs typeface="Meiryo" pitchFamily="34" charset="-120"/>
-              </a:rPr>
-              <a:t>高齢者</a:t>
-            </a:r>
-            <a:endParaRPr lang="en-US" sz="1250" dirty="0"/>
-          </a:p>
-        </p:txBody>
-      </p:sp>
-      <p:sp>
-        <p:nvSpPr>
-          <p:cNvPr id="22" name="Text 20"/>
-          <p:cNvSpPr txBox="1"/>
-          <p:nvPr/>
-        </p:nvSpPr>
-        <p:spPr>
-          <a:xfrm>
-            <a:off x="9528048" y="2240280"/>
-            <a:ext cx="1993392" cy="237744"/>
-          </a:xfrm>
-          <a:prstGeom prst="rect">
-            <a:avLst/>
-          </a:prstGeom>
-          <a:noFill/>
-          <a:ln/>
-        </p:spPr>
-        <p:txBody>
-          <a:bodyPr wrap="square" lIns="0" tIns="0" rIns="0" bIns="0" rtlCol="0" anchor="ctr"/>
-          <a:lstStyle/>
-          <a:p>
-            <a:pPr algn="ctr" indent="0" marL="0">
-              <a:buNone/>
-            </a:pPr>
-            <a:r>
-              <a:rPr lang="en-US" sz="1100" dirty="0">
-                <a:solidFill>
-                  <a:srgbClr val="8497A0"/>
-                </a:solidFill>
-                <a:latin typeface="Meiryo" pitchFamily="34" charset="0"/>
-                <a:ea typeface="Meiryo" pitchFamily="34" charset="-122"/>
-                <a:cs typeface="Meiryo" pitchFamily="34" charset="-120"/>
-              </a:rPr>
-              <a:t>65歳以上</a:t>
-            </a:r>
-            <a:endParaRPr lang="en-US" sz="1100" dirty="0"/>
-          </a:p>
-        </p:txBody>
-      </p:sp>
-      <p:sp>
-        <p:nvSpPr>
-          <p:cNvPr id="23" name="Shape 21"/>
-          <p:cNvSpPr/>
-          <p:nvPr/>
-        </p:nvSpPr>
-        <p:spPr>
-          <a:xfrm>
-            <a:off x="640080" y="2724912"/>
-            <a:ext cx="5989320" cy="2331720"/>
-          </a:xfrm>
-          <a:prstGeom prst="roundRect">
-            <a:avLst>
-              <a:gd name="adj" fmla="val 1961"/>
-            </a:avLst>
-          </a:prstGeom>
-          <a:solidFill>
-            <a:srgbClr val="F3F6F7"/>
-          </a:solidFill>
-          <a:ln w="15875">
-            <a:solidFill>
-              <a:srgbClr val="BFCCD1"/>
-            </a:solidFill>
-            <a:prstDash val="dash"/>
-          </a:ln>
-        </p:spPr>
-      </p:sp>
-      <p:sp>
-        <p:nvSpPr>
-          <p:cNvPr id="24" name="Text 22"/>
-          <p:cNvSpPr txBox="1"/>
-          <p:nvPr/>
-        </p:nvSpPr>
-        <p:spPr>
-          <a:xfrm>
-            <a:off x="640080" y="3506724"/>
-            <a:ext cx="5989320" cy="292608"/>
-          </a:xfrm>
-          <a:prstGeom prst="rect">
-            <a:avLst/>
-          </a:prstGeom>
-          <a:noFill/>
-          <a:ln/>
-        </p:spPr>
-        <p:txBody>
-          <a:bodyPr wrap="square" lIns="0" tIns="0" rIns="0" bIns="0" rtlCol="0" anchor="ctr"/>
-          <a:lstStyle/>
-          <a:p>
-            <a:pPr algn="ctr" indent="0" marL="0">
-              <a:buNone/>
-            </a:pPr>
-            <a:r>
-              <a:rPr lang="en-US" sz="1300" b="1" dirty="0">
-                <a:solidFill>
-                  <a:srgbClr val="0F5A6B"/>
-                </a:solidFill>
-                <a:latin typeface="Meiryo" pitchFamily="34" charset="0"/>
-                <a:ea typeface="Meiryo" pitchFamily="34" charset="-122"/>
-                <a:cs typeface="Meiryo" pitchFamily="34" charset="-120"/>
-              </a:rPr>
-              <a:t>グラフ貼付エリア</a:t>
-            </a:r>
-            <a:endParaRPr lang="en-US" sz="1300" dirty="0"/>
-          </a:p>
-        </p:txBody>
-      </p:sp>
-      <p:sp>
-        <p:nvSpPr>
-          <p:cNvPr id="25" name="Text 23"/>
-          <p:cNvSpPr txBox="1"/>
-          <p:nvPr/>
-        </p:nvSpPr>
-        <p:spPr>
-          <a:xfrm>
-            <a:off x="914400" y="3854196"/>
-            <a:ext cx="5440680" cy="685800"/>
-          </a:xfrm>
-          <a:prstGeom prst="rect">
-            <a:avLst/>
-          </a:prstGeom>
-          <a:noFill/>
-          <a:ln/>
-        </p:spPr>
-        <p:txBody>
-          <a:bodyPr wrap="square" lIns="0" tIns="0" rIns="0" bIns="0" rtlCol="0" anchor="ctr"/>
-          <a:lstStyle/>
-          <a:p>
-            <a:pPr algn="ctr" indent="0" marL="0">
+            <a:off x="7223760" y="2249424"/>
+            <a:ext cx="4069080" cy="502920"/>
+          </a:xfrm>
+          <a:prstGeom prst="rect">
+            <a:avLst/>
+          </a:prstGeom>
+          <a:noFill/>
+          <a:ln/>
+        </p:spPr>
+        <p:txBody>
+          <a:bodyPr wrap="square" lIns="0" tIns="0" rIns="0" bIns="0" rtlCol="0" anchor="ctr"/>
+          <a:lstStyle/>
+          <a:p>
+            <a:pPr indent="0" marL="0">
               <a:lnSpc>
                 <a:spcPts val="1700"/>
               </a:lnSpc>
               <a:buNone/>
             </a:pPr>
             <a:r>
-              <a:rPr lang="en-US" sz="1100" dirty="0">
-                <a:solidFill>
-                  <a:srgbClr val="8497A0"/>
-                </a:solidFill>
-                <a:latin typeface="Meiryo" pitchFamily="34" charset="0"/>
-                <a:ea typeface="Meiryo" pitchFamily="34" charset="-122"/>
-                <a:cs typeface="Meiryo" pitchFamily="34" charset="-120"/>
-              </a:rPr>
-              <a:t>年代別 IB利用件数の増加率（棒グラフ）</a:t>
-            </a:r>
-            <a:endParaRPr lang="en-US" sz="1100" dirty="0"/>
-          </a:p>
-        </p:txBody>
-      </p:sp>
-      <p:sp>
-        <p:nvSpPr>
-          <p:cNvPr id="26" name="Shape 24"/>
+              <a:rPr lang="en-US" sz="1200" dirty="0">
+                <a:solidFill>
+                  <a:srgbClr val="1A2B33"/>
+                </a:solidFill>
+                <a:latin typeface="Meiryo" pitchFamily="34" charset="0"/>
+                <a:ea typeface="Meiryo" pitchFamily="34" charset="-122"/>
+                <a:cs typeface="Meiryo" pitchFamily="34" charset="-120"/>
+              </a:rPr>
+              <a:t>ATMでの取引のうち、IBでも行えるもの</a:t>
+            </a:r>
+            <a:endParaRPr lang="en-US" sz="1200" dirty="0"/>
+          </a:p>
+          <a:p>
+            <a:pPr indent="0" marL="0">
+              <a:lnSpc>
+                <a:spcPts val="1700"/>
+              </a:lnSpc>
+              <a:buNone/>
+            </a:pPr>
+            <a:r>
+              <a:rPr lang="en-US" sz="1200" dirty="0">
+                <a:solidFill>
+                  <a:srgbClr val="1A2B33"/>
+                </a:solidFill>
+                <a:latin typeface="Meiryo" pitchFamily="34" charset="0"/>
+                <a:ea typeface="Meiryo" pitchFamily="34" charset="-122"/>
+                <a:cs typeface="Meiryo" pitchFamily="34" charset="-120"/>
+              </a:rPr>
+              <a:t>（振込・振替 など）</a:t>
+            </a:r>
+            <a:endParaRPr lang="en-US" sz="1200" dirty="0"/>
+          </a:p>
+        </p:txBody>
+      </p:sp>
+      <p:sp>
+        <p:nvSpPr>
+          <p:cNvPr id="14" name="Shape 12"/>
           <p:cNvSpPr/>
           <p:nvPr/>
         </p:nvSpPr>
         <p:spPr>
           <a:xfrm>
-            <a:off x="6967728" y="2724912"/>
-            <a:ext cx="4581144" cy="868680"/>
+            <a:off x="6967728" y="2999232"/>
+            <a:ext cx="4581144" cy="960120"/>
           </a:xfrm>
           <a:prstGeom prst="roundRect">
             <a:avLst>
-              <a:gd name="adj" fmla="val 5263"/>
+              <a:gd name="adj" fmla="val 4762"/>
             </a:avLst>
           </a:prstGeom>
           <a:solidFill>
@@ -7313,13 +6934,13 @@
       </p:sp>
       <p:sp>
         <p:nvSpPr>
-          <p:cNvPr id="27" name="Text 25"/>
-          <p:cNvSpPr txBox="1"/>
-          <p:nvPr/>
-        </p:nvSpPr>
-        <p:spPr>
-          <a:xfrm>
-            <a:off x="7187184" y="2862072"/>
+          <p:cNvPr id="15" name="Text 13"/>
+          <p:cNvSpPr txBox="1"/>
+          <p:nvPr/>
+        </p:nvSpPr>
+        <p:spPr>
+          <a:xfrm>
+            <a:off x="7187184" y="3136392"/>
             <a:ext cx="4142232" cy="237744"/>
           </a:xfrm>
           <a:prstGeom prst="rect">
@@ -7344,7 +6965,7 @@
                 <a:ea typeface="Meiryo" pitchFamily="34" charset="-122"/>
                 <a:cs typeface="Meiryo" pitchFamily="34" charset="-120"/>
               </a:rPr>
-              <a:t>読 み 取 り</a:t>
+              <a:t>件 数</a:t>
             </a:r>
             <a:endParaRPr lang="en-US" sz="1050" dirty="0"/>
           </a:p>
@@ -7352,14 +6973,14 @@
       </p:sp>
       <p:sp>
         <p:nvSpPr>
-          <p:cNvPr id="28" name="Text 26"/>
-          <p:cNvSpPr txBox="1"/>
-          <p:nvPr/>
-        </p:nvSpPr>
-        <p:spPr>
-          <a:xfrm>
-            <a:off x="7187184" y="3127248"/>
-            <a:ext cx="4142232" cy="338328"/>
+          <p:cNvPr id="16" name="Text 14"/>
+          <p:cNvSpPr txBox="1"/>
+          <p:nvPr/>
+        </p:nvSpPr>
+        <p:spPr>
+          <a:xfrm>
+            <a:off x="7187184" y="3401568"/>
+            <a:ext cx="4142232" cy="429768"/>
           </a:xfrm>
           <a:prstGeom prst="rect">
             <a:avLst/>
@@ -7386,7 +7007,7 @@
                 <a:ea typeface="Meiryo" pitchFamily="34" charset="-122"/>
                 <a:cs typeface="Meiryo" pitchFamily="34" charset="-120"/>
               </a:rPr>
-              <a:t>どの年代の増加率が最も高かったか／他の年代はどうだったか</a:t>
+              <a:t>2025年4〜6月 合計 ◯◯件 → 2026年4〜6月 合計 ◯◯件</a:t>
             </a:r>
             <a:endParaRPr lang="en-US" sz="1150" dirty="0"/>
           </a:p>
@@ -7394,24 +7015,132 @@
       </p:sp>
       <p:sp>
         <p:nvSpPr>
-          <p:cNvPr id="29" name="Shape 27"/>
+          <p:cNvPr id="17" name="Shape 15"/>
           <p:cNvSpPr/>
           <p:nvPr/>
         </p:nvSpPr>
         <p:spPr>
           <a:xfrm>
-            <a:off x="6967728" y="3776472"/>
-            <a:ext cx="4581144" cy="1280160"/>
+            <a:off x="6967728" y="4123944"/>
+            <a:ext cx="4581144" cy="950976"/>
           </a:xfrm>
           <a:prstGeom prst="roundRect">
             <a:avLst>
-              <a:gd name="adj" fmla="val 3571"/>
+              <a:gd name="adj" fmla="val 4808"/>
+            </a:avLst>
+          </a:prstGeom>
+          <a:solidFill>
+            <a:srgbClr val="F8EBE1"/>
+          </a:solidFill>
+          <a:ln w="15875">
+            <a:solidFill>
+              <a:srgbClr val="D9A97F"/>
+            </a:solidFill>
+            <a:prstDash val="dash"/>
+          </a:ln>
+        </p:spPr>
+      </p:sp>
+      <p:sp>
+        <p:nvSpPr>
+          <p:cNvPr id="18" name="Text 16"/>
+          <p:cNvSpPr txBox="1"/>
+          <p:nvPr/>
+        </p:nvSpPr>
+        <p:spPr>
+          <a:xfrm>
+            <a:off x="7187184" y="4261104"/>
+            <a:ext cx="4142232" cy="237744"/>
+          </a:xfrm>
+          <a:prstGeom prst="rect">
+            <a:avLst/>
+          </a:prstGeom>
+          <a:noFill/>
+          <a:ln/>
+        </p:spPr>
+        <p:txBody>
+          <a:bodyPr wrap="square" lIns="0" tIns="0" rIns="0" bIns="0" rtlCol="0" anchor="ctr"/>
+          <a:lstStyle/>
+          <a:p>
+            <a:pPr indent="0" marL="0">
+              <a:buNone/>
+            </a:pPr>
+            <a:r>
+              <a:rPr lang="en-US" sz="1050" b="1" spc="80" kern="0" dirty="0">
+                <a:solidFill>
+                  <a:srgbClr val="B4551F"/>
+                </a:solidFill>
+                <a:latin typeface="Meiryo" pitchFamily="34" charset="0"/>
+                <a:ea typeface="Meiryo" pitchFamily="34" charset="-122"/>
+                <a:cs typeface="Meiryo" pitchFamily="34" charset="-120"/>
+              </a:rPr>
+              <a:t>変 化</a:t>
+            </a:r>
+            <a:endParaRPr lang="en-US" sz="1050" dirty="0"/>
+          </a:p>
+        </p:txBody>
+      </p:sp>
+      <p:sp>
+        <p:nvSpPr>
+          <p:cNvPr id="19" name="Text 17"/>
+          <p:cNvSpPr txBox="1"/>
+          <p:nvPr/>
+        </p:nvSpPr>
+        <p:spPr>
+          <a:xfrm>
+            <a:off x="7187184" y="4526280"/>
+            <a:ext cx="4142232" cy="420624"/>
+          </a:xfrm>
+          <a:prstGeom prst="rect">
+            <a:avLst/>
+          </a:prstGeom>
+          <a:noFill/>
+          <a:ln/>
+        </p:spPr>
+        <p:txBody>
+          <a:bodyPr wrap="square" lIns="0" tIns="0" rIns="0" bIns="0" rtlCol="0" anchor="ctr"/>
+          <a:lstStyle/>
+          <a:p>
+            <a:pPr indent="0" marL="0">
+              <a:lnSpc>
+                <a:spcPts val="1700"/>
+              </a:lnSpc>
+              <a:buNone/>
+            </a:pPr>
+            <a:r>
+              <a:rPr lang="en-US" sz="1150" dirty="0">
+                <a:solidFill>
+                  <a:srgbClr val="A2795C"/>
+                </a:solidFill>
+                <a:latin typeface="Meiryo" pitchFamily="34" charset="0"/>
+                <a:ea typeface="Meiryo" pitchFamily="34" charset="-122"/>
+                <a:cs typeface="Meiryo" pitchFamily="34" charset="-120"/>
+              </a:rPr>
+              <a:t>1年間で −◯◯件（−◯◯％）</a:t>
+            </a:r>
+            <a:endParaRPr lang="en-US" sz="1150" dirty="0"/>
+          </a:p>
+        </p:txBody>
+      </p:sp>
+      <p:sp>
+        <p:nvSpPr>
+          <p:cNvPr id="20" name="Shape 18"/>
+          <p:cNvSpPr/>
+          <p:nvPr/>
+        </p:nvSpPr>
+        <p:spPr>
+          <a:xfrm>
+            <a:off x="640080" y="5349240"/>
+            <a:ext cx="10911535" cy="621792"/>
+          </a:xfrm>
+          <a:prstGeom prst="roundRect">
+            <a:avLst>
+              <a:gd name="adj" fmla="val 7353"/>
             </a:avLst>
           </a:prstGeom>
           <a:solidFill>
             <a:srgbClr val="E2EEF0"/>
           </a:solidFill>
-          <a:ln w="9525">
+          <a:ln w="12700">
             <a:solidFill>
               <a:srgbClr val="E2EEF0"/>
             </a:solidFill>
@@ -7421,30 +7150,30 @@
       </p:sp>
       <p:sp>
         <p:nvSpPr>
-          <p:cNvPr id="30" name="Text 28"/>
-          <p:cNvSpPr txBox="1"/>
-          <p:nvPr/>
-        </p:nvSpPr>
-        <p:spPr>
-          <a:xfrm>
-            <a:off x="7223760" y="3913632"/>
-            <a:ext cx="4069080" cy="237744"/>
-          </a:xfrm>
-          <a:prstGeom prst="rect">
-            <a:avLst/>
-          </a:prstGeom>
-          <a:noFill/>
-          <a:ln/>
-        </p:spPr>
-        <p:txBody>
-          <a:bodyPr wrap="square" lIns="0" tIns="0" rIns="0" bIns="0" rtlCol="0" anchor="ctr"/>
-          <a:lstStyle/>
-          <a:p>
-            <a:pPr indent="0" marL="0">
-              <a:buNone/>
-            </a:pPr>
-            <a:r>
-              <a:rPr lang="en-US" sz="1050" b="1" spc="100" kern="0" dirty="0">
+          <p:cNvPr id="21" name="Text 19"/>
+          <p:cNvSpPr txBox="1"/>
+          <p:nvPr/>
+        </p:nvSpPr>
+        <p:spPr>
+          <a:xfrm>
+            <a:off x="914400" y="5349240"/>
+            <a:ext cx="10362895" cy="621792"/>
+          </a:xfrm>
+          <a:prstGeom prst="rect">
+            <a:avLst/>
+          </a:prstGeom>
+          <a:noFill/>
+          <a:ln/>
+        </p:spPr>
+        <p:txBody>
+          <a:bodyPr wrap="square" lIns="0" tIns="0" rIns="0" bIns="0" rtlCol="0" anchor="ctr"/>
+          <a:lstStyle/>
+          <a:p>
+            <a:pPr algn="ctr" indent="0" marL="0">
+              <a:buNone/>
+            </a:pPr>
+            <a:r>
+              <a:rPr lang="en-US" sz="1400" b="1" dirty="0">
                 <a:solidFill>
                   <a:srgbClr val="0F5A6B"/>
                 </a:solidFill>
@@ -7452,143 +7181,7 @@
                 <a:ea typeface="Meiryo" pitchFamily="34" charset="-122"/>
                 <a:cs typeface="Meiryo" pitchFamily="34" charset="-120"/>
               </a:rPr>
-              <a:t>こ こ か ら 考 え ら れ る 打 ち 手</a:t>
-            </a:r>
-            <a:endParaRPr lang="en-US" sz="1050" dirty="0"/>
-          </a:p>
-        </p:txBody>
-      </p:sp>
-      <p:sp>
-        <p:nvSpPr>
-          <p:cNvPr id="31" name="Text 29"/>
-          <p:cNvSpPr txBox="1"/>
-          <p:nvPr/>
-        </p:nvSpPr>
-        <p:spPr>
-          <a:xfrm>
-            <a:off x="7223760" y="4169664"/>
-            <a:ext cx="4069080" cy="822960"/>
-          </a:xfrm>
-          <a:prstGeom prst="rect">
-            <a:avLst/>
-          </a:prstGeom>
-          <a:noFill/>
-          <a:ln/>
-        </p:spPr>
-        <p:txBody>
-          <a:bodyPr wrap="square" lIns="0" tIns="0" rIns="0" bIns="0" rtlCol="0" anchor="ctr"/>
-          <a:lstStyle/>
-          <a:p>
-            <a:pPr marL="342900" indent="-342900">
-              <a:lnSpc>
-                <a:spcPts val="1600"/>
-              </a:lnSpc>
-              <a:spcAft>
-                <a:spcPts val="600"/>
-              </a:spcAft>
-              <a:buSzPct val="100000"/>
-              <a:buChar char="•"/>
-            </a:pPr>
-            <a:r>
-              <a:rPr lang="en-US" sz="1150" dirty="0">
-                <a:solidFill>
-                  <a:srgbClr val="0F5A6B"/>
-                </a:solidFill>
-                <a:latin typeface="Meiryo" pitchFamily="34" charset="0"/>
-                <a:ea typeface="Meiryo" pitchFamily="34" charset="-122"/>
-                <a:cs typeface="Meiryo" pitchFamily="34" charset="-120"/>
-              </a:rPr>
-              <a:t>伸びが小さい年代には、ATMでの振込・振替の際にIBを案内する</a:t>
-            </a:r>
-            <a:endParaRPr lang="en-US" sz="1150" dirty="0"/>
-          </a:p>
-          <a:p>
-            <a:pPr marL="342900" indent="-342900">
-              <a:lnSpc>
-                <a:spcPts val="1600"/>
-              </a:lnSpc>
-              <a:spcAft>
-                <a:spcPts val="600"/>
-              </a:spcAft>
-              <a:buSzPct val="100000"/>
-              <a:buChar char="•"/>
-            </a:pPr>
-            <a:r>
-              <a:rPr lang="en-US" sz="1150" dirty="0">
-                <a:solidFill>
-                  <a:srgbClr val="0F5A6B"/>
-                </a:solidFill>
-                <a:latin typeface="Meiryo" pitchFamily="34" charset="0"/>
-                <a:ea typeface="Meiryo" pitchFamily="34" charset="-122"/>
-                <a:cs typeface="Meiryo" pitchFamily="34" charset="-120"/>
-              </a:rPr>
-              <a:t>すでに伸びている年代には、扱える手続きの幅を広げる</a:t>
-            </a:r>
-            <a:endParaRPr lang="en-US" sz="1150" dirty="0"/>
-          </a:p>
-        </p:txBody>
-      </p:sp>
-      <p:sp>
-        <p:nvSpPr>
-          <p:cNvPr id="32" name="Shape 30"/>
-          <p:cNvSpPr/>
-          <p:nvPr/>
-        </p:nvSpPr>
-        <p:spPr>
-          <a:xfrm>
-            <a:off x="640080" y="5285232"/>
-            <a:ext cx="10911535" cy="621792"/>
-          </a:xfrm>
-          <a:prstGeom prst="roundRect">
-            <a:avLst>
-              <a:gd name="adj" fmla="val 7353"/>
-            </a:avLst>
-          </a:prstGeom>
-          <a:solidFill>
-            <a:srgbClr val="F3F6F7"/>
-          </a:solidFill>
-          <a:ln w="12700">
-            <a:solidFill>
-              <a:srgbClr val="F3F6F7"/>
-            </a:solidFill>
-            <a:prstDash val="solid"/>
-          </a:ln>
-        </p:spPr>
-      </p:sp>
-      <p:sp>
-        <p:nvSpPr>
-          <p:cNvPr id="33" name="Text 31"/>
-          <p:cNvSpPr txBox="1"/>
-          <p:nvPr/>
-        </p:nvSpPr>
-        <p:spPr>
-          <a:xfrm>
-            <a:off x="914400" y="5285232"/>
-            <a:ext cx="10362895" cy="621792"/>
-          </a:xfrm>
-          <a:prstGeom prst="rect">
-            <a:avLst/>
-          </a:prstGeom>
-          <a:noFill/>
-          <a:ln/>
-        </p:spPr>
-        <p:txBody>
-          <a:bodyPr wrap="square" lIns="0" tIns="0" rIns="0" bIns="0" rtlCol="0" anchor="ctr"/>
-          <a:lstStyle/>
-          <a:p>
-            <a:pPr algn="ctr" indent="0" marL="0">
-              <a:buNone/>
-            </a:pPr>
-            <a:r>
-              <a:rPr lang="en-US" sz="1400" b="1" dirty="0">
-                <a:solidFill>
-                  <a:srgbClr val="1A2B33"/>
-                </a:solidFill>
-                <a:latin typeface="Meiryo" pitchFamily="34" charset="0"/>
-                <a:ea typeface="Meiryo" pitchFamily="34" charset="-122"/>
-                <a:cs typeface="Meiryo" pitchFamily="34" charset="-120"/>
-              </a:rPr>
-              <a:t>年代まで分かると、誰にどう案内するかという具体的な打ち手まで検討できる</a:t>
+              <a:t>IBは増加、ATM側は減少　→　同じ取引がIBへ移りつつあると読める</a:t>
             </a:r>
             <a:endParaRPr lang="en-US" sz="1400" dirty="0"/>
           </a:p>
@@ -7723,7 +7316,7 @@
                 <a:ea typeface="Meiryo" pitchFamily="34" charset="-122"/>
                 <a:cs typeface="Meiryo" pitchFamily="34" charset="-120"/>
               </a:rPr>
-              <a:t>ま と め</a:t>
+              <a:t>考 察</a:t>
             </a:r>
             <a:endParaRPr lang="en-US" sz="1050" dirty="0"/>
           </a:p>
@@ -7762,7 +7355,7 @@
                 <a:ea typeface="Meiryo" pitchFamily="34" charset="-122"/>
                 <a:cs typeface="Meiryo" pitchFamily="34" charset="-120"/>
               </a:rPr>
-              <a:t>データを次の一手につなげるまで</a:t>
+              <a:t>どの年代で利用が広がったのか</a:t>
             </a:r>
             <a:endParaRPr lang="en-US" sz="2600" dirty="0"/>
           </a:p>
@@ -7801,7 +7394,7 @@
                 <a:ea typeface="Meiryo" pitchFamily="34" charset="-122"/>
                 <a:cs typeface="Meiryo" pitchFamily="34" charset="-120"/>
               </a:rPr>
-              <a:t>今回のワークで行ったことを、ひとつの流れにまとめる</a:t>
+              <a:t>全体の動きが分かった次に知りたくなるのは「誰が使うようになったのか」。今回は年代を5つに分けて確認</a:t>
             </a:r>
             <a:endParaRPr lang="en-US" sz="1250" dirty="0"/>
           </a:p>
@@ -7841,6 +7434,1201 @@
                 <a:cs typeface="Meiryo" pitchFamily="34" charset="-120"/>
               </a:rPr>
               <a:t>08</a:t>
+            </a:r>
+            <a:endParaRPr lang="en-US" sz="1000" dirty="0"/>
+          </a:p>
+        </p:txBody>
+      </p:sp>
+      <p:sp>
+        <p:nvSpPr>
+          <p:cNvPr id="8" name="Shape 6"/>
+          <p:cNvSpPr/>
+          <p:nvPr/>
+        </p:nvSpPr>
+        <p:spPr>
+          <a:xfrm>
+            <a:off x="640080" y="1874520"/>
+            <a:ext cx="1993392" cy="676656"/>
+          </a:xfrm>
+          <a:prstGeom prst="roundRect">
+            <a:avLst>
+              <a:gd name="adj" fmla="val 6757"/>
+            </a:avLst>
+          </a:prstGeom>
+          <a:solidFill>
+            <a:srgbClr val="F3F6F7"/>
+          </a:solidFill>
+          <a:ln w="9525">
+            <a:solidFill>
+              <a:srgbClr val="F3F6F7"/>
+            </a:solidFill>
+            <a:prstDash val="solid"/>
+          </a:ln>
+        </p:spPr>
+      </p:sp>
+      <p:sp>
+        <p:nvSpPr>
+          <p:cNvPr id="9" name="Text 7"/>
+          <p:cNvSpPr txBox="1"/>
+          <p:nvPr/>
+        </p:nvSpPr>
+        <p:spPr>
+          <a:xfrm>
+            <a:off x="640080" y="1965960"/>
+            <a:ext cx="1993392" cy="256032"/>
+          </a:xfrm>
+          <a:prstGeom prst="rect">
+            <a:avLst/>
+          </a:prstGeom>
+          <a:noFill/>
+          <a:ln/>
+        </p:spPr>
+        <p:txBody>
+          <a:bodyPr wrap="square" lIns="0" tIns="0" rIns="0" bIns="0" rtlCol="0" anchor="ctr"/>
+          <a:lstStyle/>
+          <a:p>
+            <a:pPr algn="ctr" indent="0" marL="0">
+              <a:buNone/>
+            </a:pPr>
+            <a:r>
+              <a:rPr lang="en-US" sz="1250" b="1" dirty="0">
+                <a:solidFill>
+                  <a:srgbClr val="1A2B33"/>
+                </a:solidFill>
+                <a:latin typeface="Meiryo" pitchFamily="34" charset="0"/>
+                <a:ea typeface="Meiryo" pitchFamily="34" charset="-122"/>
+                <a:cs typeface="Meiryo" pitchFamily="34" charset="-120"/>
+              </a:rPr>
+              <a:t>未成年</a:t>
+            </a:r>
+            <a:endParaRPr lang="en-US" sz="1250" dirty="0"/>
+          </a:p>
+        </p:txBody>
+      </p:sp>
+      <p:sp>
+        <p:nvSpPr>
+          <p:cNvPr id="10" name="Text 8"/>
+          <p:cNvSpPr txBox="1"/>
+          <p:nvPr/>
+        </p:nvSpPr>
+        <p:spPr>
+          <a:xfrm>
+            <a:off x="640080" y="2240280"/>
+            <a:ext cx="1993392" cy="237744"/>
+          </a:xfrm>
+          <a:prstGeom prst="rect">
+            <a:avLst/>
+          </a:prstGeom>
+          <a:noFill/>
+          <a:ln/>
+        </p:spPr>
+        <p:txBody>
+          <a:bodyPr wrap="square" lIns="0" tIns="0" rIns="0" bIns="0" rtlCol="0" anchor="ctr"/>
+          <a:lstStyle/>
+          <a:p>
+            <a:pPr algn="ctr" indent="0" marL="0">
+              <a:buNone/>
+            </a:pPr>
+            <a:r>
+              <a:rPr lang="en-US" sz="1100" dirty="0">
+                <a:solidFill>
+                  <a:srgbClr val="8497A0"/>
+                </a:solidFill>
+                <a:latin typeface="Meiryo" pitchFamily="34" charset="0"/>
+                <a:ea typeface="Meiryo" pitchFamily="34" charset="-122"/>
+                <a:cs typeface="Meiryo" pitchFamily="34" charset="-120"/>
+              </a:rPr>
+              <a:t>0〜17歳</a:t>
+            </a:r>
+            <a:endParaRPr lang="en-US" sz="1100" dirty="0"/>
+          </a:p>
+        </p:txBody>
+      </p:sp>
+      <p:sp>
+        <p:nvSpPr>
+          <p:cNvPr id="11" name="Shape 9"/>
+          <p:cNvSpPr/>
+          <p:nvPr/>
+        </p:nvSpPr>
+        <p:spPr>
+          <a:xfrm>
+            <a:off x="2862072" y="1874520"/>
+            <a:ext cx="1993392" cy="676656"/>
+          </a:xfrm>
+          <a:prstGeom prst="roundRect">
+            <a:avLst>
+              <a:gd name="adj" fmla="val 6757"/>
+            </a:avLst>
+          </a:prstGeom>
+          <a:solidFill>
+            <a:srgbClr val="F3F6F7"/>
+          </a:solidFill>
+          <a:ln w="9525">
+            <a:solidFill>
+              <a:srgbClr val="F3F6F7"/>
+            </a:solidFill>
+            <a:prstDash val="solid"/>
+          </a:ln>
+        </p:spPr>
+      </p:sp>
+      <p:sp>
+        <p:nvSpPr>
+          <p:cNvPr id="12" name="Text 10"/>
+          <p:cNvSpPr txBox="1"/>
+          <p:nvPr/>
+        </p:nvSpPr>
+        <p:spPr>
+          <a:xfrm>
+            <a:off x="2862072" y="1965960"/>
+            <a:ext cx="1993392" cy="256032"/>
+          </a:xfrm>
+          <a:prstGeom prst="rect">
+            <a:avLst/>
+          </a:prstGeom>
+          <a:noFill/>
+          <a:ln/>
+        </p:spPr>
+        <p:txBody>
+          <a:bodyPr wrap="square" lIns="0" tIns="0" rIns="0" bIns="0" rtlCol="0" anchor="ctr"/>
+          <a:lstStyle/>
+          <a:p>
+            <a:pPr algn="ctr" indent="0" marL="0">
+              <a:buNone/>
+            </a:pPr>
+            <a:r>
+              <a:rPr lang="en-US" sz="1250" b="1" dirty="0">
+                <a:solidFill>
+                  <a:srgbClr val="1A2B33"/>
+                </a:solidFill>
+                <a:latin typeface="Meiryo" pitchFamily="34" charset="0"/>
+                <a:ea typeface="Meiryo" pitchFamily="34" charset="-122"/>
+                <a:cs typeface="Meiryo" pitchFamily="34" charset="-120"/>
+              </a:rPr>
+              <a:t>若手成人</a:t>
+            </a:r>
+            <a:endParaRPr lang="en-US" sz="1250" dirty="0"/>
+          </a:p>
+        </p:txBody>
+      </p:sp>
+      <p:sp>
+        <p:nvSpPr>
+          <p:cNvPr id="13" name="Text 11"/>
+          <p:cNvSpPr txBox="1"/>
+          <p:nvPr/>
+        </p:nvSpPr>
+        <p:spPr>
+          <a:xfrm>
+            <a:off x="2862072" y="2240280"/>
+            <a:ext cx="1993392" cy="237744"/>
+          </a:xfrm>
+          <a:prstGeom prst="rect">
+            <a:avLst/>
+          </a:prstGeom>
+          <a:noFill/>
+          <a:ln/>
+        </p:spPr>
+        <p:txBody>
+          <a:bodyPr wrap="square" lIns="0" tIns="0" rIns="0" bIns="0" rtlCol="0" anchor="ctr"/>
+          <a:lstStyle/>
+          <a:p>
+            <a:pPr algn="ctr" indent="0" marL="0">
+              <a:buNone/>
+            </a:pPr>
+            <a:r>
+              <a:rPr lang="en-US" sz="1100" dirty="0">
+                <a:solidFill>
+                  <a:srgbClr val="8497A0"/>
+                </a:solidFill>
+                <a:latin typeface="Meiryo" pitchFamily="34" charset="0"/>
+                <a:ea typeface="Meiryo" pitchFamily="34" charset="-122"/>
+                <a:cs typeface="Meiryo" pitchFamily="34" charset="-120"/>
+              </a:rPr>
+              <a:t>18〜29歳</a:t>
+            </a:r>
+            <a:endParaRPr lang="en-US" sz="1100" dirty="0"/>
+          </a:p>
+        </p:txBody>
+      </p:sp>
+      <p:sp>
+        <p:nvSpPr>
+          <p:cNvPr id="14" name="Shape 12"/>
+          <p:cNvSpPr/>
+          <p:nvPr/>
+        </p:nvSpPr>
+        <p:spPr>
+          <a:xfrm>
+            <a:off x="5084064" y="1874520"/>
+            <a:ext cx="1993392" cy="676656"/>
+          </a:xfrm>
+          <a:prstGeom prst="roundRect">
+            <a:avLst>
+              <a:gd name="adj" fmla="val 6757"/>
+            </a:avLst>
+          </a:prstGeom>
+          <a:solidFill>
+            <a:srgbClr val="F3F6F7"/>
+          </a:solidFill>
+          <a:ln w="9525">
+            <a:solidFill>
+              <a:srgbClr val="F3F6F7"/>
+            </a:solidFill>
+            <a:prstDash val="solid"/>
+          </a:ln>
+        </p:spPr>
+      </p:sp>
+      <p:sp>
+        <p:nvSpPr>
+          <p:cNvPr id="15" name="Text 13"/>
+          <p:cNvSpPr txBox="1"/>
+          <p:nvPr/>
+        </p:nvSpPr>
+        <p:spPr>
+          <a:xfrm>
+            <a:off x="5084064" y="1965960"/>
+            <a:ext cx="1993392" cy="256032"/>
+          </a:xfrm>
+          <a:prstGeom prst="rect">
+            <a:avLst/>
+          </a:prstGeom>
+          <a:noFill/>
+          <a:ln/>
+        </p:spPr>
+        <p:txBody>
+          <a:bodyPr wrap="square" lIns="0" tIns="0" rIns="0" bIns="0" rtlCol="0" anchor="ctr"/>
+          <a:lstStyle/>
+          <a:p>
+            <a:pPr algn="ctr" indent="0" marL="0">
+              <a:buNone/>
+            </a:pPr>
+            <a:r>
+              <a:rPr lang="en-US" sz="1250" b="1" dirty="0">
+                <a:solidFill>
+                  <a:srgbClr val="1A2B33"/>
+                </a:solidFill>
+                <a:latin typeface="Meiryo" pitchFamily="34" charset="0"/>
+                <a:ea typeface="Meiryo" pitchFamily="34" charset="-122"/>
+                <a:cs typeface="Meiryo" pitchFamily="34" charset="-120"/>
+              </a:rPr>
+              <a:t>働き手①</a:t>
+            </a:r>
+            <a:endParaRPr lang="en-US" sz="1250" dirty="0"/>
+          </a:p>
+        </p:txBody>
+      </p:sp>
+      <p:sp>
+        <p:nvSpPr>
+          <p:cNvPr id="16" name="Text 14"/>
+          <p:cNvSpPr txBox="1"/>
+          <p:nvPr/>
+        </p:nvSpPr>
+        <p:spPr>
+          <a:xfrm>
+            <a:off x="5084064" y="2240280"/>
+            <a:ext cx="1993392" cy="237744"/>
+          </a:xfrm>
+          <a:prstGeom prst="rect">
+            <a:avLst/>
+          </a:prstGeom>
+          <a:noFill/>
+          <a:ln/>
+        </p:spPr>
+        <p:txBody>
+          <a:bodyPr wrap="square" lIns="0" tIns="0" rIns="0" bIns="0" rtlCol="0" anchor="ctr"/>
+          <a:lstStyle/>
+          <a:p>
+            <a:pPr algn="ctr" indent="0" marL="0">
+              <a:buNone/>
+            </a:pPr>
+            <a:r>
+              <a:rPr lang="en-US" sz="1100" dirty="0">
+                <a:solidFill>
+                  <a:srgbClr val="8497A0"/>
+                </a:solidFill>
+                <a:latin typeface="Meiryo" pitchFamily="34" charset="0"/>
+                <a:ea typeface="Meiryo" pitchFamily="34" charset="-122"/>
+                <a:cs typeface="Meiryo" pitchFamily="34" charset="-120"/>
+              </a:rPr>
+              <a:t>30〜44歳</a:t>
+            </a:r>
+            <a:endParaRPr lang="en-US" sz="1100" dirty="0"/>
+          </a:p>
+        </p:txBody>
+      </p:sp>
+      <p:sp>
+        <p:nvSpPr>
+          <p:cNvPr id="17" name="Shape 15"/>
+          <p:cNvSpPr/>
+          <p:nvPr/>
+        </p:nvSpPr>
+        <p:spPr>
+          <a:xfrm>
+            <a:off x="7306056" y="1874520"/>
+            <a:ext cx="1993392" cy="676656"/>
+          </a:xfrm>
+          <a:prstGeom prst="roundRect">
+            <a:avLst>
+              <a:gd name="adj" fmla="val 6757"/>
+            </a:avLst>
+          </a:prstGeom>
+          <a:solidFill>
+            <a:srgbClr val="F3F6F7"/>
+          </a:solidFill>
+          <a:ln w="9525">
+            <a:solidFill>
+              <a:srgbClr val="F3F6F7"/>
+            </a:solidFill>
+            <a:prstDash val="solid"/>
+          </a:ln>
+        </p:spPr>
+      </p:sp>
+      <p:sp>
+        <p:nvSpPr>
+          <p:cNvPr id="18" name="Text 16"/>
+          <p:cNvSpPr txBox="1"/>
+          <p:nvPr/>
+        </p:nvSpPr>
+        <p:spPr>
+          <a:xfrm>
+            <a:off x="7306056" y="1965960"/>
+            <a:ext cx="1993392" cy="256032"/>
+          </a:xfrm>
+          <a:prstGeom prst="rect">
+            <a:avLst/>
+          </a:prstGeom>
+          <a:noFill/>
+          <a:ln/>
+        </p:spPr>
+        <p:txBody>
+          <a:bodyPr wrap="square" lIns="0" tIns="0" rIns="0" bIns="0" rtlCol="0" anchor="ctr"/>
+          <a:lstStyle/>
+          <a:p>
+            <a:pPr algn="ctr" indent="0" marL="0">
+              <a:buNone/>
+            </a:pPr>
+            <a:r>
+              <a:rPr lang="en-US" sz="1250" b="1" dirty="0">
+                <a:solidFill>
+                  <a:srgbClr val="1A2B33"/>
+                </a:solidFill>
+                <a:latin typeface="Meiryo" pitchFamily="34" charset="0"/>
+                <a:ea typeface="Meiryo" pitchFamily="34" charset="-122"/>
+                <a:cs typeface="Meiryo" pitchFamily="34" charset="-120"/>
+              </a:rPr>
+              <a:t>働き手②</a:t>
+            </a:r>
+            <a:endParaRPr lang="en-US" sz="1250" dirty="0"/>
+          </a:p>
+        </p:txBody>
+      </p:sp>
+      <p:sp>
+        <p:nvSpPr>
+          <p:cNvPr id="19" name="Text 17"/>
+          <p:cNvSpPr txBox="1"/>
+          <p:nvPr/>
+        </p:nvSpPr>
+        <p:spPr>
+          <a:xfrm>
+            <a:off x="7306056" y="2240280"/>
+            <a:ext cx="1993392" cy="237744"/>
+          </a:xfrm>
+          <a:prstGeom prst="rect">
+            <a:avLst/>
+          </a:prstGeom>
+          <a:noFill/>
+          <a:ln/>
+        </p:spPr>
+        <p:txBody>
+          <a:bodyPr wrap="square" lIns="0" tIns="0" rIns="0" bIns="0" rtlCol="0" anchor="ctr"/>
+          <a:lstStyle/>
+          <a:p>
+            <a:pPr algn="ctr" indent="0" marL="0">
+              <a:buNone/>
+            </a:pPr>
+            <a:r>
+              <a:rPr lang="en-US" sz="1100" dirty="0">
+                <a:solidFill>
+                  <a:srgbClr val="8497A0"/>
+                </a:solidFill>
+                <a:latin typeface="Meiryo" pitchFamily="34" charset="0"/>
+                <a:ea typeface="Meiryo" pitchFamily="34" charset="-122"/>
+                <a:cs typeface="Meiryo" pitchFamily="34" charset="-120"/>
+              </a:rPr>
+              <a:t>45〜64歳</a:t>
+            </a:r>
+            <a:endParaRPr lang="en-US" sz="1100" dirty="0"/>
+          </a:p>
+        </p:txBody>
+      </p:sp>
+      <p:sp>
+        <p:nvSpPr>
+          <p:cNvPr id="20" name="Shape 18"/>
+          <p:cNvSpPr/>
+          <p:nvPr/>
+        </p:nvSpPr>
+        <p:spPr>
+          <a:xfrm>
+            <a:off x="9528048" y="1874520"/>
+            <a:ext cx="1993392" cy="676656"/>
+          </a:xfrm>
+          <a:prstGeom prst="roundRect">
+            <a:avLst>
+              <a:gd name="adj" fmla="val 6757"/>
+            </a:avLst>
+          </a:prstGeom>
+          <a:solidFill>
+            <a:srgbClr val="F3F6F7"/>
+          </a:solidFill>
+          <a:ln w="9525">
+            <a:solidFill>
+              <a:srgbClr val="F3F6F7"/>
+            </a:solidFill>
+            <a:prstDash val="solid"/>
+          </a:ln>
+        </p:spPr>
+      </p:sp>
+      <p:sp>
+        <p:nvSpPr>
+          <p:cNvPr id="21" name="Text 19"/>
+          <p:cNvSpPr txBox="1"/>
+          <p:nvPr/>
+        </p:nvSpPr>
+        <p:spPr>
+          <a:xfrm>
+            <a:off x="9528048" y="1965960"/>
+            <a:ext cx="1993392" cy="256032"/>
+          </a:xfrm>
+          <a:prstGeom prst="rect">
+            <a:avLst/>
+          </a:prstGeom>
+          <a:noFill/>
+          <a:ln/>
+        </p:spPr>
+        <p:txBody>
+          <a:bodyPr wrap="square" lIns="0" tIns="0" rIns="0" bIns="0" rtlCol="0" anchor="ctr"/>
+          <a:lstStyle/>
+          <a:p>
+            <a:pPr algn="ctr" indent="0" marL="0">
+              <a:buNone/>
+            </a:pPr>
+            <a:r>
+              <a:rPr lang="en-US" sz="1250" b="1" dirty="0">
+                <a:solidFill>
+                  <a:srgbClr val="1A2B33"/>
+                </a:solidFill>
+                <a:latin typeface="Meiryo" pitchFamily="34" charset="0"/>
+                <a:ea typeface="Meiryo" pitchFamily="34" charset="-122"/>
+                <a:cs typeface="Meiryo" pitchFamily="34" charset="-120"/>
+              </a:rPr>
+              <a:t>高齢者</a:t>
+            </a:r>
+            <a:endParaRPr lang="en-US" sz="1250" dirty="0"/>
+          </a:p>
+        </p:txBody>
+      </p:sp>
+      <p:sp>
+        <p:nvSpPr>
+          <p:cNvPr id="22" name="Text 20"/>
+          <p:cNvSpPr txBox="1"/>
+          <p:nvPr/>
+        </p:nvSpPr>
+        <p:spPr>
+          <a:xfrm>
+            <a:off x="9528048" y="2240280"/>
+            <a:ext cx="1993392" cy="237744"/>
+          </a:xfrm>
+          <a:prstGeom prst="rect">
+            <a:avLst/>
+          </a:prstGeom>
+          <a:noFill/>
+          <a:ln/>
+        </p:spPr>
+        <p:txBody>
+          <a:bodyPr wrap="square" lIns="0" tIns="0" rIns="0" bIns="0" rtlCol="0" anchor="ctr"/>
+          <a:lstStyle/>
+          <a:p>
+            <a:pPr algn="ctr" indent="0" marL="0">
+              <a:buNone/>
+            </a:pPr>
+            <a:r>
+              <a:rPr lang="en-US" sz="1100" dirty="0">
+                <a:solidFill>
+                  <a:srgbClr val="8497A0"/>
+                </a:solidFill>
+                <a:latin typeface="Meiryo" pitchFamily="34" charset="0"/>
+                <a:ea typeface="Meiryo" pitchFamily="34" charset="-122"/>
+                <a:cs typeface="Meiryo" pitchFamily="34" charset="-120"/>
+              </a:rPr>
+              <a:t>65歳以上</a:t>
+            </a:r>
+            <a:endParaRPr lang="en-US" sz="1100" dirty="0"/>
+          </a:p>
+        </p:txBody>
+      </p:sp>
+      <p:sp>
+        <p:nvSpPr>
+          <p:cNvPr id="23" name="Shape 21"/>
+          <p:cNvSpPr/>
+          <p:nvPr/>
+        </p:nvSpPr>
+        <p:spPr>
+          <a:xfrm>
+            <a:off x="640080" y="2724912"/>
+            <a:ext cx="5989320" cy="2331720"/>
+          </a:xfrm>
+          <a:prstGeom prst="roundRect">
+            <a:avLst>
+              <a:gd name="adj" fmla="val 1961"/>
+            </a:avLst>
+          </a:prstGeom>
+          <a:solidFill>
+            <a:srgbClr val="F3F6F7"/>
+          </a:solidFill>
+          <a:ln w="15875">
+            <a:solidFill>
+              <a:srgbClr val="BFCCD1"/>
+            </a:solidFill>
+            <a:prstDash val="dash"/>
+          </a:ln>
+        </p:spPr>
+      </p:sp>
+      <p:sp>
+        <p:nvSpPr>
+          <p:cNvPr id="24" name="Text 22"/>
+          <p:cNvSpPr txBox="1"/>
+          <p:nvPr/>
+        </p:nvSpPr>
+        <p:spPr>
+          <a:xfrm>
+            <a:off x="640080" y="3506724"/>
+            <a:ext cx="5989320" cy="292608"/>
+          </a:xfrm>
+          <a:prstGeom prst="rect">
+            <a:avLst/>
+          </a:prstGeom>
+          <a:noFill/>
+          <a:ln/>
+        </p:spPr>
+        <p:txBody>
+          <a:bodyPr wrap="square" lIns="0" tIns="0" rIns="0" bIns="0" rtlCol="0" anchor="ctr"/>
+          <a:lstStyle/>
+          <a:p>
+            <a:pPr algn="ctr" indent="0" marL="0">
+              <a:buNone/>
+            </a:pPr>
+            <a:r>
+              <a:rPr lang="en-US" sz="1300" b="1" dirty="0">
+                <a:solidFill>
+                  <a:srgbClr val="0F5A6B"/>
+                </a:solidFill>
+                <a:latin typeface="Meiryo" pitchFamily="34" charset="0"/>
+                <a:ea typeface="Meiryo" pitchFamily="34" charset="-122"/>
+                <a:cs typeface="Meiryo" pitchFamily="34" charset="-120"/>
+              </a:rPr>
+              <a:t>グラフ貼付エリア</a:t>
+            </a:r>
+            <a:endParaRPr lang="en-US" sz="1300" dirty="0"/>
+          </a:p>
+        </p:txBody>
+      </p:sp>
+      <p:sp>
+        <p:nvSpPr>
+          <p:cNvPr id="25" name="Text 23"/>
+          <p:cNvSpPr txBox="1"/>
+          <p:nvPr/>
+        </p:nvSpPr>
+        <p:spPr>
+          <a:xfrm>
+            <a:off x="914400" y="3854196"/>
+            <a:ext cx="5440680" cy="685800"/>
+          </a:xfrm>
+          <a:prstGeom prst="rect">
+            <a:avLst/>
+          </a:prstGeom>
+          <a:noFill/>
+          <a:ln/>
+        </p:spPr>
+        <p:txBody>
+          <a:bodyPr wrap="square" lIns="0" tIns="0" rIns="0" bIns="0" rtlCol="0" anchor="ctr"/>
+          <a:lstStyle/>
+          <a:p>
+            <a:pPr algn="ctr" indent="0" marL="0">
+              <a:lnSpc>
+                <a:spcPts val="1700"/>
+              </a:lnSpc>
+              <a:buNone/>
+            </a:pPr>
+            <a:r>
+              <a:rPr lang="en-US" sz="1100" dirty="0">
+                <a:solidFill>
+                  <a:srgbClr val="8497A0"/>
+                </a:solidFill>
+                <a:latin typeface="Meiryo" pitchFamily="34" charset="0"/>
+                <a:ea typeface="Meiryo" pitchFamily="34" charset="-122"/>
+                <a:cs typeface="Meiryo" pitchFamily="34" charset="-120"/>
+              </a:rPr>
+              <a:t>年代別 IB利用件数の増加率（棒グラフ）</a:t>
+            </a:r>
+            <a:endParaRPr lang="en-US" sz="1100" dirty="0"/>
+          </a:p>
+        </p:txBody>
+      </p:sp>
+      <p:sp>
+        <p:nvSpPr>
+          <p:cNvPr id="26" name="Shape 24"/>
+          <p:cNvSpPr/>
+          <p:nvPr/>
+        </p:nvSpPr>
+        <p:spPr>
+          <a:xfrm>
+            <a:off x="6967728" y="2724912"/>
+            <a:ext cx="4581144" cy="868680"/>
+          </a:xfrm>
+          <a:prstGeom prst="roundRect">
+            <a:avLst>
+              <a:gd name="adj" fmla="val 5263"/>
+            </a:avLst>
+          </a:prstGeom>
+          <a:solidFill>
+            <a:srgbClr val="F8EBE1"/>
+          </a:solidFill>
+          <a:ln w="15875">
+            <a:solidFill>
+              <a:srgbClr val="D9A97F"/>
+            </a:solidFill>
+            <a:prstDash val="dash"/>
+          </a:ln>
+        </p:spPr>
+      </p:sp>
+      <p:sp>
+        <p:nvSpPr>
+          <p:cNvPr id="27" name="Text 25"/>
+          <p:cNvSpPr txBox="1"/>
+          <p:nvPr/>
+        </p:nvSpPr>
+        <p:spPr>
+          <a:xfrm>
+            <a:off x="7187184" y="2862072"/>
+            <a:ext cx="4142232" cy="237744"/>
+          </a:xfrm>
+          <a:prstGeom prst="rect">
+            <a:avLst/>
+          </a:prstGeom>
+          <a:noFill/>
+          <a:ln/>
+        </p:spPr>
+        <p:txBody>
+          <a:bodyPr wrap="square" lIns="0" tIns="0" rIns="0" bIns="0" rtlCol="0" anchor="ctr"/>
+          <a:lstStyle/>
+          <a:p>
+            <a:pPr indent="0" marL="0">
+              <a:buNone/>
+            </a:pPr>
+            <a:r>
+              <a:rPr lang="en-US" sz="1050" b="1" spc="80" kern="0" dirty="0">
+                <a:solidFill>
+                  <a:srgbClr val="B4551F"/>
+                </a:solidFill>
+                <a:latin typeface="Meiryo" pitchFamily="34" charset="0"/>
+                <a:ea typeface="Meiryo" pitchFamily="34" charset="-122"/>
+                <a:cs typeface="Meiryo" pitchFamily="34" charset="-120"/>
+              </a:rPr>
+              <a:t>読 み 取 り</a:t>
+            </a:r>
+            <a:endParaRPr lang="en-US" sz="1050" dirty="0"/>
+          </a:p>
+        </p:txBody>
+      </p:sp>
+      <p:sp>
+        <p:nvSpPr>
+          <p:cNvPr id="28" name="Text 26"/>
+          <p:cNvSpPr txBox="1"/>
+          <p:nvPr/>
+        </p:nvSpPr>
+        <p:spPr>
+          <a:xfrm>
+            <a:off x="7187184" y="3127248"/>
+            <a:ext cx="4142232" cy="338328"/>
+          </a:xfrm>
+          <a:prstGeom prst="rect">
+            <a:avLst/>
+          </a:prstGeom>
+          <a:noFill/>
+          <a:ln/>
+        </p:spPr>
+        <p:txBody>
+          <a:bodyPr wrap="square" lIns="0" tIns="0" rIns="0" bIns="0" rtlCol="0" anchor="ctr"/>
+          <a:lstStyle/>
+          <a:p>
+            <a:pPr indent="0" marL="0">
+              <a:lnSpc>
+                <a:spcPts val="1700"/>
+              </a:lnSpc>
+              <a:buNone/>
+            </a:pPr>
+            <a:r>
+              <a:rPr lang="en-US" sz="1150" dirty="0">
+                <a:solidFill>
+                  <a:srgbClr val="A2795C"/>
+                </a:solidFill>
+                <a:latin typeface="Meiryo" pitchFamily="34" charset="0"/>
+                <a:ea typeface="Meiryo" pitchFamily="34" charset="-122"/>
+                <a:cs typeface="Meiryo" pitchFamily="34" charset="-120"/>
+              </a:rPr>
+              <a:t>どの年代の増加率が最も高かったか／他の年代はどうだったか</a:t>
+            </a:r>
+            <a:endParaRPr lang="en-US" sz="1150" dirty="0"/>
+          </a:p>
+        </p:txBody>
+      </p:sp>
+      <p:sp>
+        <p:nvSpPr>
+          <p:cNvPr id="29" name="Shape 27"/>
+          <p:cNvSpPr/>
+          <p:nvPr/>
+        </p:nvSpPr>
+        <p:spPr>
+          <a:xfrm>
+            <a:off x="6967728" y="3776472"/>
+            <a:ext cx="4581144" cy="1280160"/>
+          </a:xfrm>
+          <a:prstGeom prst="roundRect">
+            <a:avLst>
+              <a:gd name="adj" fmla="val 3571"/>
+            </a:avLst>
+          </a:prstGeom>
+          <a:solidFill>
+            <a:srgbClr val="E2EEF0"/>
+          </a:solidFill>
+          <a:ln w="9525">
+            <a:solidFill>
+              <a:srgbClr val="E2EEF0"/>
+            </a:solidFill>
+            <a:prstDash val="solid"/>
+          </a:ln>
+        </p:spPr>
+      </p:sp>
+      <p:sp>
+        <p:nvSpPr>
+          <p:cNvPr id="30" name="Text 28"/>
+          <p:cNvSpPr txBox="1"/>
+          <p:nvPr/>
+        </p:nvSpPr>
+        <p:spPr>
+          <a:xfrm>
+            <a:off x="7223760" y="3913632"/>
+            <a:ext cx="4069080" cy="237744"/>
+          </a:xfrm>
+          <a:prstGeom prst="rect">
+            <a:avLst/>
+          </a:prstGeom>
+          <a:noFill/>
+          <a:ln/>
+        </p:spPr>
+        <p:txBody>
+          <a:bodyPr wrap="square" lIns="0" tIns="0" rIns="0" bIns="0" rtlCol="0" anchor="ctr"/>
+          <a:lstStyle/>
+          <a:p>
+            <a:pPr indent="0" marL="0">
+              <a:buNone/>
+            </a:pPr>
+            <a:r>
+              <a:rPr lang="en-US" sz="1050" b="1" spc="100" kern="0" dirty="0">
+                <a:solidFill>
+                  <a:srgbClr val="0F5A6B"/>
+                </a:solidFill>
+                <a:latin typeface="Meiryo" pitchFamily="34" charset="0"/>
+                <a:ea typeface="Meiryo" pitchFamily="34" charset="-122"/>
+                <a:cs typeface="Meiryo" pitchFamily="34" charset="-120"/>
+              </a:rPr>
+              <a:t>こ こ か ら 考 え ら れ る 打 ち 手</a:t>
+            </a:r>
+            <a:endParaRPr lang="en-US" sz="1050" dirty="0"/>
+          </a:p>
+        </p:txBody>
+      </p:sp>
+      <p:sp>
+        <p:nvSpPr>
+          <p:cNvPr id="31" name="Text 29"/>
+          <p:cNvSpPr txBox="1"/>
+          <p:nvPr/>
+        </p:nvSpPr>
+        <p:spPr>
+          <a:xfrm>
+            <a:off x="7223760" y="4169664"/>
+            <a:ext cx="4069080" cy="822960"/>
+          </a:xfrm>
+          <a:prstGeom prst="rect">
+            <a:avLst/>
+          </a:prstGeom>
+          <a:noFill/>
+          <a:ln/>
+        </p:spPr>
+        <p:txBody>
+          <a:bodyPr wrap="square" lIns="0" tIns="0" rIns="0" bIns="0" rtlCol="0" anchor="ctr"/>
+          <a:lstStyle/>
+          <a:p>
+            <a:pPr marL="342900" indent="-342900">
+              <a:lnSpc>
+                <a:spcPts val="1600"/>
+              </a:lnSpc>
+              <a:spcAft>
+                <a:spcPts val="600"/>
+              </a:spcAft>
+              <a:buSzPct val="100000"/>
+              <a:buChar char="•"/>
+            </a:pPr>
+            <a:r>
+              <a:rPr lang="en-US" sz="1150" dirty="0">
+                <a:solidFill>
+                  <a:srgbClr val="0F5A6B"/>
+                </a:solidFill>
+                <a:latin typeface="Meiryo" pitchFamily="34" charset="0"/>
+                <a:ea typeface="Meiryo" pitchFamily="34" charset="-122"/>
+                <a:cs typeface="Meiryo" pitchFamily="34" charset="-120"/>
+              </a:rPr>
+              <a:t>伸びが小さい年代には、ATMでの振込・振替の際にIBを案内する</a:t>
+            </a:r>
+            <a:endParaRPr lang="en-US" sz="1150" dirty="0"/>
+          </a:p>
+          <a:p>
+            <a:pPr marL="342900" indent="-342900">
+              <a:lnSpc>
+                <a:spcPts val="1600"/>
+              </a:lnSpc>
+              <a:spcAft>
+                <a:spcPts val="600"/>
+              </a:spcAft>
+              <a:buSzPct val="100000"/>
+              <a:buChar char="•"/>
+            </a:pPr>
+            <a:r>
+              <a:rPr lang="en-US" sz="1150" dirty="0">
+                <a:solidFill>
+                  <a:srgbClr val="0F5A6B"/>
+                </a:solidFill>
+                <a:latin typeface="Meiryo" pitchFamily="34" charset="0"/>
+                <a:ea typeface="Meiryo" pitchFamily="34" charset="-122"/>
+                <a:cs typeface="Meiryo" pitchFamily="34" charset="-120"/>
+              </a:rPr>
+              <a:t>すでに伸びている年代には、扱える手続きの幅を広げる</a:t>
+            </a:r>
+            <a:endParaRPr lang="en-US" sz="1150" dirty="0"/>
+          </a:p>
+        </p:txBody>
+      </p:sp>
+      <p:sp>
+        <p:nvSpPr>
+          <p:cNvPr id="32" name="Shape 30"/>
+          <p:cNvSpPr/>
+          <p:nvPr/>
+        </p:nvSpPr>
+        <p:spPr>
+          <a:xfrm>
+            <a:off x="640080" y="5285232"/>
+            <a:ext cx="10911535" cy="621792"/>
+          </a:xfrm>
+          <a:prstGeom prst="roundRect">
+            <a:avLst>
+              <a:gd name="adj" fmla="val 7353"/>
+            </a:avLst>
+          </a:prstGeom>
+          <a:solidFill>
+            <a:srgbClr val="F3F6F7"/>
+          </a:solidFill>
+          <a:ln w="12700">
+            <a:solidFill>
+              <a:srgbClr val="F3F6F7"/>
+            </a:solidFill>
+            <a:prstDash val="solid"/>
+          </a:ln>
+        </p:spPr>
+      </p:sp>
+      <p:sp>
+        <p:nvSpPr>
+          <p:cNvPr id="33" name="Text 31"/>
+          <p:cNvSpPr txBox="1"/>
+          <p:nvPr/>
+        </p:nvSpPr>
+        <p:spPr>
+          <a:xfrm>
+            <a:off x="914400" y="5285232"/>
+            <a:ext cx="10362895" cy="621792"/>
+          </a:xfrm>
+          <a:prstGeom prst="rect">
+            <a:avLst/>
+          </a:prstGeom>
+          <a:noFill/>
+          <a:ln/>
+        </p:spPr>
+        <p:txBody>
+          <a:bodyPr wrap="square" lIns="0" tIns="0" rIns="0" bIns="0" rtlCol="0" anchor="ctr"/>
+          <a:lstStyle/>
+          <a:p>
+            <a:pPr algn="ctr" indent="0" marL="0">
+              <a:buNone/>
+            </a:pPr>
+            <a:r>
+              <a:rPr lang="en-US" sz="1400" b="1" dirty="0">
+                <a:solidFill>
+                  <a:srgbClr val="1A2B33"/>
+                </a:solidFill>
+                <a:latin typeface="Meiryo" pitchFamily="34" charset="0"/>
+                <a:ea typeface="Meiryo" pitchFamily="34" charset="-122"/>
+                <a:cs typeface="Meiryo" pitchFamily="34" charset="-120"/>
+              </a:rPr>
+              <a:t>年代まで分かると、誰にどう案内するかという具体的な打ち手まで検討できる</a:t>
+            </a:r>
+            <a:endParaRPr lang="en-US" sz="1400" dirty="0"/>
+          </a:p>
+        </p:txBody>
+      </p:sp>
+    </p:spTree>
+  </p:cSld>
+  <p:clrMapOvr>
+    <a:masterClrMapping/>
+  </p:clrMapOvr>
+</p:sld>
+</file>
+
+<file path=ppt/slides/slide9.xml><?xml version="1.0" encoding="utf-8"?>
+<p:sld xmlns:a="http://schemas.openxmlformats.org/drawingml/2006/main" xmlns:r="http://schemas.openxmlformats.org/officeDocument/2006/relationships" xmlns:p="http://schemas.openxmlformats.org/presentationml/2006/main">
+  <p:cSld name="Slide 9">
+    <p:bg>
+      <p:bgPr>
+        <a:solidFill>
+          <a:srgbClr val="FFFFFF"/>
+        </a:solidFill>
+      </p:bgPr>
+    </p:bg>
+    <p:spTree>
+      <p:nvGrpSpPr>
+        <p:cNvPr id="1" name=""/>
+        <p:cNvGrpSpPr/>
+        <p:nvPr/>
+      </p:nvGrpSpPr>
+      <p:grpSpPr>
+        <a:xfrm>
+          <a:off x="0" y="0"/>
+          <a:ext cx="0" cy="0"/>
+          <a:chOff x="0" y="0"/>
+          <a:chExt cx="0" cy="0"/>
+        </a:xfrm>
+      </p:grpSpPr>
+      <p:sp>
+        <p:nvSpPr>
+          <p:cNvPr id="2" name="Shape 0"/>
+          <p:cNvSpPr/>
+          <p:nvPr/>
+        </p:nvSpPr>
+        <p:spPr>
+          <a:xfrm>
+            <a:off x="640080" y="566928"/>
+            <a:ext cx="402336" cy="402336"/>
+          </a:xfrm>
+          <a:prstGeom prst="ellipse">
+            <a:avLst/>
+          </a:prstGeom>
+          <a:solidFill>
+            <a:srgbClr val="0F5A6B"/>
+          </a:solidFill>
+          <a:ln w="12700">
+            <a:solidFill>
+              <a:srgbClr val="0F5A6B"/>
+            </a:solidFill>
+            <a:prstDash val="solid"/>
+          </a:ln>
+        </p:spPr>
+      </p:sp>
+      <p:sp>
+        <p:nvSpPr>
+          <p:cNvPr id="3" name="Text 1"/>
+          <p:cNvSpPr txBox="1"/>
+          <p:nvPr/>
+        </p:nvSpPr>
+        <p:spPr>
+          <a:xfrm>
+            <a:off x="640080" y="566928"/>
+            <a:ext cx="402336" cy="402336"/>
+          </a:xfrm>
+          <a:prstGeom prst="rect">
+            <a:avLst/>
+          </a:prstGeom>
+          <a:noFill/>
+          <a:ln/>
+        </p:spPr>
+        <p:txBody>
+          <a:bodyPr wrap="square" lIns="0" tIns="0" rIns="0" bIns="0" rtlCol="0" anchor="ctr"/>
+          <a:lstStyle/>
+          <a:p>
+            <a:pPr algn="ctr" indent="0" marL="0">
+              <a:buNone/>
+            </a:pPr>
+            <a:r>
+              <a:rPr lang="en-US" sz="1150" b="1" dirty="0">
+                <a:solidFill>
+                  <a:srgbClr val="FFFFFF"/>
+                </a:solidFill>
+                <a:latin typeface="Meiryo" pitchFamily="34" charset="0"/>
+                <a:ea typeface="Meiryo" pitchFamily="34" charset="-122"/>
+                <a:cs typeface="Meiryo" pitchFamily="34" charset="-120"/>
+              </a:rPr>
+              <a:t>09</a:t>
+            </a:r>
+            <a:endParaRPr lang="en-US" sz="1150" dirty="0"/>
+          </a:p>
+        </p:txBody>
+      </p:sp>
+      <p:sp>
+        <p:nvSpPr>
+          <p:cNvPr id="4" name="Text 2"/>
+          <p:cNvSpPr txBox="1"/>
+          <p:nvPr/>
+        </p:nvSpPr>
+        <p:spPr>
+          <a:xfrm>
+            <a:off x="1225296" y="402336"/>
+            <a:ext cx="6400800" cy="228600"/>
+          </a:xfrm>
+          <a:prstGeom prst="rect">
+            <a:avLst/>
+          </a:prstGeom>
+          <a:noFill/>
+          <a:ln/>
+        </p:spPr>
+        <p:txBody>
+          <a:bodyPr wrap="square" lIns="0" tIns="0" rIns="0" bIns="0" rtlCol="0" anchor="ctr"/>
+          <a:lstStyle/>
+          <a:p>
+            <a:pPr indent="0" marL="0">
+              <a:buNone/>
+            </a:pPr>
+            <a:r>
+              <a:rPr lang="en-US" sz="1050" b="1" spc="150" kern="0" dirty="0">
+                <a:solidFill>
+                  <a:srgbClr val="0F5A6B"/>
+                </a:solidFill>
+                <a:latin typeface="Meiryo" pitchFamily="34" charset="0"/>
+                <a:ea typeface="Meiryo" pitchFamily="34" charset="-122"/>
+                <a:cs typeface="Meiryo" pitchFamily="34" charset="-120"/>
+              </a:rPr>
+              <a:t>ま と め</a:t>
+            </a:r>
+            <a:endParaRPr lang="en-US" sz="1050" dirty="0"/>
+          </a:p>
+        </p:txBody>
+      </p:sp>
+      <p:sp>
+        <p:nvSpPr>
+          <p:cNvPr id="5" name="Text 3"/>
+          <p:cNvSpPr txBox="1"/>
+          <p:nvPr/>
+        </p:nvSpPr>
+        <p:spPr>
+          <a:xfrm>
+            <a:off x="1225296" y="603504"/>
+            <a:ext cx="10326319" cy="548640"/>
+          </a:xfrm>
+          <a:prstGeom prst="rect">
+            <a:avLst/>
+          </a:prstGeom>
+          <a:noFill/>
+          <a:ln/>
+        </p:spPr>
+        <p:txBody>
+          <a:bodyPr wrap="square" lIns="0" tIns="0" rIns="0" bIns="0" rtlCol="0" anchor="ctr"/>
+          <a:lstStyle/>
+          <a:p>
+            <a:pPr indent="0" marL="0">
+              <a:buNone/>
+            </a:pPr>
+            <a:r>
+              <a:rPr lang="en-US" sz="2600" b="1" dirty="0">
+                <a:solidFill>
+                  <a:srgbClr val="1A2B33"/>
+                </a:solidFill>
+                <a:latin typeface="Meiryo" pitchFamily="34" charset="0"/>
+                <a:ea typeface="Meiryo" pitchFamily="34" charset="-122"/>
+                <a:cs typeface="Meiryo" pitchFamily="34" charset="-120"/>
+              </a:rPr>
+              <a:t>データを次の一手につなげるまで</a:t>
+            </a:r>
+            <a:endParaRPr lang="en-US" sz="2600" dirty="0"/>
+          </a:p>
+        </p:txBody>
+      </p:sp>
+      <p:sp>
+        <p:nvSpPr>
+          <p:cNvPr id="6" name="Text 4"/>
+          <p:cNvSpPr txBox="1"/>
+          <p:nvPr/>
+        </p:nvSpPr>
+        <p:spPr>
+          <a:xfrm>
+            <a:off x="1225296" y="1170432"/>
+            <a:ext cx="10326319" cy="347472"/>
+          </a:xfrm>
+          <a:prstGeom prst="rect">
+            <a:avLst/>
+          </a:prstGeom>
+          <a:noFill/>
+          <a:ln/>
+        </p:spPr>
+        <p:txBody>
+          <a:bodyPr wrap="square" lIns="0" tIns="0" rIns="0" bIns="0" rtlCol="0" anchor="ctr"/>
+          <a:lstStyle/>
+          <a:p>
+            <a:pPr indent="0" marL="0">
+              <a:buNone/>
+            </a:pPr>
+            <a:r>
+              <a:rPr lang="en-US" sz="1250" dirty="0">
+                <a:solidFill>
+                  <a:srgbClr val="8497A0"/>
+                </a:solidFill>
+                <a:latin typeface="Meiryo" pitchFamily="34" charset="0"/>
+                <a:ea typeface="Meiryo" pitchFamily="34" charset="-122"/>
+                <a:cs typeface="Meiryo" pitchFamily="34" charset="-120"/>
+              </a:rPr>
+              <a:t>今回のワークで行ったことを、ひとつの流れにまとめる</a:t>
+            </a:r>
+            <a:endParaRPr lang="en-US" sz="1250" dirty="0"/>
+          </a:p>
+        </p:txBody>
+      </p:sp>
+      <p:sp>
+        <p:nvSpPr>
+          <p:cNvPr id="7" name="Text 5"/>
+          <p:cNvSpPr txBox="1"/>
+          <p:nvPr/>
+        </p:nvSpPr>
+        <p:spPr>
+          <a:xfrm>
+            <a:off x="11130991" y="6217920"/>
+            <a:ext cx="548640" cy="256032"/>
+          </a:xfrm>
+          <a:prstGeom prst="rect">
+            <a:avLst/>
+          </a:prstGeom>
+          <a:noFill/>
+          <a:ln/>
+        </p:spPr>
+        <p:txBody>
+          <a:bodyPr wrap="square" lIns="0" tIns="0" rIns="0" bIns="0" rtlCol="0" anchor="ctr"/>
+          <a:lstStyle/>
+          <a:p>
+            <a:pPr algn="r" indent="0" marL="0">
+              <a:buNone/>
+            </a:pPr>
+            <a:r>
+              <a:rPr lang="en-US" sz="1000" spc="100" kern="0" dirty="0">
+                <a:solidFill>
+                  <a:srgbClr val="8497A0"/>
+                </a:solidFill>
+                <a:latin typeface="Meiryo" pitchFamily="34" charset="0"/>
+                <a:ea typeface="Meiryo" pitchFamily="34" charset="-122"/>
+                <a:cs typeface="Meiryo" pitchFamily="34" charset="-120"/>
+              </a:rPr>
+              <a:t>09</a:t>
             </a:r>
             <a:endParaRPr lang="en-US" sz="1000" dirty="0"/>
           </a:p>

--- a/presentation/DYNATREK_成果発表.pptx
+++ b/presentation/DYNATREK_成果発表.pptx
@@ -601,9 +601,9 @@
             <a:r>
               <a:rPr lang="en-US" dirty="0"/>
               <a:t>では、どの問いを選んだか。銀行が実際に力を入れている領域から選びました。
-あいちフィナンシャルグループの第2次中期経営計画では、基本戦略のひとつに「DX戦略の加速化」が掲げられ、その重点施策として、バンキングアプリやインターネット支店といった非対面チャネルの有効活用が挙げられています。
-非対面チャネルのひとつがインターネットバンキング、IBです。これがどれだけ使われるようになったかは、計画の狙いがどこまで進んでいるかを示す手がかりになります。
-【作成時】重点施策の番号と本文は計画の原本で確認して記入する。確認できなければ「重点施策のひとつ」と書けば事実関係は崩れない。KPIの数値には触れない。</a:t>
+あいちフィナンシャルグループの第2次中期経営計画では、基本戦略Ⅲ「DX戦略の加速化」のもとに、重点施策⑦「顧客の利便性・先進性の向上」が置かれています。その取組方針が「顧客サービスの強化」で、バンキングアプリやインターネット支店のリニューアル、そして若年層など新たな顧客層へのアプローチ強化が挙げられています。
+こうした非対面のチャネルがどれだけ使われているかは、この狙いがどこまで進んでいるかを示します。今回はそのうち、インターネットバンキング、IBを対象にしました。
+※「若年層へのアプローチ強化」は8枚目の年代別分析につながる伏線。ここで一度触れておく。</a:t>
             </a:r>
             <a:endParaRPr lang="en-US" dirty="0"/>
           </a:p>
@@ -691,9 +691,9 @@
           <a:p>
             <a:r>
               <a:rPr lang="en-US" dirty="0"/>
-              <a:t>背景をふまえて、確かめることをこう定めました。2025年と2026年の同じ時期を比べて、IBの利用件数がどれだけ増えたかを確認することです。
+              <a:t>確かめることは、2025年と2026年の同じ時期を比べて、IBの利用件数がどれだけ増えたかを確認することです。
 比べ方は同じ4〜6月どうし。月によって取引の量は変わるので、同じ季節どうしで比べます。
-もうひとつ、IBの件数だけでなく、ATMで行われている「IBでも代替できる取引」も合わせて見ることにしました。理由は結果のところで説明します。</a:t>
+もうひとつ、IBの件数だけでなく、ATM側の「IBでも代替できる取引」も合わせて見ることにしました。理由は結果のところで説明します。</a:t>
             </a:r>
             <a:endParaRPr lang="en-US" dirty="0"/>
           </a:p>
@@ -781,9 +781,9 @@
           <a:p>
             <a:r>
               <a:rPr lang="en-US" dirty="0"/>
-              <a:t>使ったデータは、2025年と2026年の4月・5月・6月です。
-元になったのは取引履歴（流動）で、そこから入出金テーブルを作成し、DYNATREKで条件を指定して集計できる形にしました。
-取引履歴そのままでは項目が多く、目的のデータを追いにくい。逆に、一度この形にしてしまえば、以降は条件を指定するだけでいろいろな角度から見られるようになります。</a:t>
+              <a:t>使ったのは、取引履歴（流動）をもとに作成された入出金テーブルです。私が作ったものではなく、既にある形のものを使わせていただきました。
+対象期間は、2025年と2026年の4月・5月・6月です。
+このテーブルに対して、DYNATREKで条件を指定して集計していきます。</a:t>
             </a:r>
             <a:endParaRPr lang="en-US" dirty="0"/>
           </a:p>
@@ -872,8 +872,8 @@
             <a:r>
               <a:rPr lang="en-US" dirty="0"/>
               <a:t>実際の画面です。左で、期間やチャネル、取引の種類といった条件を指定します。すると右のように、その条件で集計された結果がそのまま出てきます。
-ここは長く説明しません。お伝えしたいのは、一度テーブルを整えてしまえば、あとは条件を変えるだけで別の切り口でも確認できる、という点です。この後の分析は、すべてこの繰り返しになります。
-【作成時】スクリーンショット②が結果スライドのグラフと同じものになる場合は、②には集計表など別の出力を貼るか、②を小さめに配置して重複感を避ける。</a:t>
+ここは長く説明しません。お伝えしたいのは、条件を変えるだけで別の切り口でも確認できる、という点です。この後の分析は、すべてこの繰り返しになります。
+【作成時】スクリーンショット②が6枚目のグラフと同じものになる場合は、②には集計表など別の出力を貼るか、②を小さめに配置して重複感を避ける。</a:t>
             </a:r>
             <a:endParaRPr lang="en-US" dirty="0"/>
           </a:p>
@@ -1144,10 +1144,11 @@
           <a:p>
             <a:r>
               <a:rPr lang="en-US" dirty="0"/>
-              <a:t>IBへ移りつつあることが分かると、次に知りたくなるのは「では、誰が使うようになったのか」です。これも同じテーブルに年代の条件を足すだけで確認できました。
-年代は5つに分けています。未成年、若手成人、働き手①、働き手②、高齢者です。
+              <a:t>IBへ移りつつあることが分かると、次に知りたくなるのは「では、誰が使うようになったのか」です。
+2枚目で触れたとおり、計画では若年層など新たな顧客層へのアプローチ強化が掲げられています。年代別に見れば、その狙いが実際に進んでいるかを確認できます。
+年代は5つに分けました。未成年、若手成人、働き手①、働き手②、高齢者です。
 （読み取りを説明する）
-ここまで分かると、伸びていない年代にどう案内するか、といった具体的な打ち手の話ができるようになります。
+ここまで分かると、計画の狙いの進み具合と、次に誰へ案内すべきかが同時に見えてきます。
 【作成時】打ち手の2行は、実際の読み取りに合わせて書き換えること。</a:t>
             </a:r>
             <a:endParaRPr lang="en-US" dirty="0"/>
@@ -1237,8 +1238,8 @@
             <a:r>
               <a:rPr lang="en-US" dirty="0"/>
               <a:t>最後に、今回の流れをまとめます。
-「IBの利用は広がっているか」という問いを立て、取引履歴（流動）から入出金テーブルを整え、IBが増えATM側が減っていることを確かめ、さらに年代別まで深掘りして、最後は誰にどう案内するかという打ち手の検討まで進みました。
-行内にあるデータも、条件を指定して見られる形に整えれば、業務上の問いに答えて、次の施策を考える材料になります。今回のワークで学んだのは、この一連のプロセスです。</a:t>
+「IBの利用は広がっているか」という問いを立て、入出金テーブルから必要な集計を取り出し、IBが増えATM側が減っていることを確かめ、さらに年代別まで深掘りして、最後は誰にどう案内するかという打ち手の検討まで進みました。
+行内にあるデータも、条件を指定して見られる形にすれば、業務上の問いに答えて、次の施策を考える材料になります。今回のワークで学んだのは、この一連のプロセスです。</a:t>
             </a:r>
             <a:endParaRPr lang="en-US" dirty="0"/>
           </a:p>
@@ -1619,8 +1620,8 @@
         </p:nvSpPr>
         <p:spPr>
           <a:xfrm>
-            <a:off x="640080" y="566928"/>
-            <a:ext cx="402336" cy="402336"/>
+            <a:off x="640080" y="512064"/>
+            <a:ext cx="420624" cy="420624"/>
           </a:xfrm>
           <a:prstGeom prst="ellipse">
             <a:avLst/>
@@ -1644,8 +1645,8 @@
         </p:nvSpPr>
         <p:spPr>
           <a:xfrm>
-            <a:off x="640080" y="566928"/>
-            <a:ext cx="402336" cy="402336"/>
+            <a:off x="640080" y="512064"/>
+            <a:ext cx="420624" cy="420624"/>
           </a:xfrm>
           <a:prstGeom prst="rect">
             <a:avLst/>
@@ -1661,7 +1662,7 @@
               <a:buNone/>
             </a:pPr>
             <a:r>
-              <a:rPr lang="en-US" sz="1150" b="1" dirty="0">
+              <a:rPr lang="en-US" sz="1200" b="1" dirty="0">
                 <a:solidFill>
                   <a:srgbClr val="FFFFFF"/>
                 </a:solidFill>
@@ -1671,7 +1672,7 @@
               </a:rPr>
               <a:t>01</a:t>
             </a:r>
-            <a:endParaRPr lang="en-US" sz="1150" dirty="0"/>
+            <a:endParaRPr lang="en-US" sz="1200" dirty="0"/>
           </a:p>
         </p:txBody>
       </p:sp>
@@ -1683,8 +1684,8 @@
         </p:nvSpPr>
         <p:spPr>
           <a:xfrm>
-            <a:off x="1225296" y="402336"/>
-            <a:ext cx="6400800" cy="228600"/>
+            <a:off x="1243584" y="475488"/>
+            <a:ext cx="10308031" cy="548640"/>
           </a:xfrm>
           <a:prstGeom prst="rect">
             <a:avLst/>
@@ -1700,17 +1701,17 @@
               <a:buNone/>
             </a:pPr>
             <a:r>
-              <a:rPr lang="en-US" sz="1050" b="1" spc="150" kern="0" dirty="0">
-                <a:solidFill>
-                  <a:srgbClr val="0F5A6B"/>
-                </a:solidFill>
-                <a:latin typeface="Meiryo" pitchFamily="34" charset="0"/>
-                <a:ea typeface="Meiryo" pitchFamily="34" charset="-122"/>
-                <a:cs typeface="Meiryo" pitchFamily="34" charset="-120"/>
-              </a:rPr>
-              <a:t>は じ め に</a:t>
-            </a:r>
-            <a:endParaRPr lang="en-US" sz="1050" dirty="0"/>
+              <a:rPr lang="en-US" sz="2600" b="1" dirty="0">
+                <a:solidFill>
+                  <a:srgbClr val="1A2B33"/>
+                </a:solidFill>
+                <a:latin typeface="Meiryo" pitchFamily="34" charset="0"/>
+                <a:ea typeface="Meiryo" pitchFamily="34" charset="-122"/>
+                <a:cs typeface="Meiryo" pitchFamily="34" charset="-120"/>
+              </a:rPr>
+              <a:t>はじめに</a:t>
+            </a:r>
+            <a:endParaRPr lang="en-US" sz="2600" dirty="0"/>
           </a:p>
         </p:txBody>
       </p:sp>
@@ -1722,8 +1723,8 @@
         </p:nvSpPr>
         <p:spPr>
           <a:xfrm>
-            <a:off x="1225296" y="603504"/>
-            <a:ext cx="10326319" cy="548640"/>
+            <a:off x="1243584" y="1133856"/>
+            <a:ext cx="10308031" cy="384048"/>
           </a:xfrm>
           <a:prstGeom prst="rect">
             <a:avLst/>
@@ -1739,62 +1740,23 @@
               <a:buNone/>
             </a:pPr>
             <a:r>
-              <a:rPr lang="en-US" sz="2600" b="1" dirty="0">
-                <a:solidFill>
-                  <a:srgbClr val="1A2B33"/>
-                </a:solidFill>
-                <a:latin typeface="Meiryo" pitchFamily="34" charset="0"/>
-                <a:ea typeface="Meiryo" pitchFamily="34" charset="-122"/>
-                <a:cs typeface="Meiryo" pitchFamily="34" charset="-120"/>
-              </a:rPr>
-              <a:t>データはあっても答えはすぐに出ない</a:t>
-            </a:r>
-            <a:endParaRPr lang="en-US" sz="2600" dirty="0"/>
+              <a:rPr lang="en-US" sz="1400" dirty="0">
+                <a:solidFill>
+                  <a:srgbClr val="465A63"/>
+                </a:solidFill>
+                <a:latin typeface="Meiryo" pitchFamily="34" charset="0"/>
+                <a:ea typeface="Meiryo" pitchFamily="34" charset="-122"/>
+                <a:cs typeface="Meiryo" pitchFamily="34" charset="-120"/>
+              </a:rPr>
+              <a:t>本インターンのテーマは、銀行内で保有する各種データを分析し、どのような価値に変換していくかのプロセスを学ぶこと</a:t>
+            </a:r>
+            <a:endParaRPr lang="en-US" sz="1400" dirty="0"/>
           </a:p>
         </p:txBody>
       </p:sp>
       <p:sp>
         <p:nvSpPr>
           <p:cNvPr id="6" name="Text 4"/>
-          <p:cNvSpPr txBox="1"/>
-          <p:nvPr/>
-        </p:nvSpPr>
-        <p:spPr>
-          <a:xfrm>
-            <a:off x="1225296" y="1170432"/>
-            <a:ext cx="10326319" cy="347472"/>
-          </a:xfrm>
-          <a:prstGeom prst="rect">
-            <a:avLst/>
-          </a:prstGeom>
-          <a:noFill/>
-          <a:ln/>
-        </p:spPr>
-        <p:txBody>
-          <a:bodyPr wrap="square" lIns="0" tIns="0" rIns="0" bIns="0" rtlCol="0" anchor="ctr"/>
-          <a:lstStyle/>
-          <a:p>
-            <a:pPr indent="0" marL="0">
-              <a:buNone/>
-            </a:pPr>
-            <a:r>
-              <a:rPr lang="en-US" sz="1250" dirty="0">
-                <a:solidFill>
-                  <a:srgbClr val="8497A0"/>
-                </a:solidFill>
-                <a:latin typeface="Meiryo" pitchFamily="34" charset="0"/>
-                <a:ea typeface="Meiryo" pitchFamily="34" charset="-122"/>
-                <a:cs typeface="Meiryo" pitchFamily="34" charset="-120"/>
-              </a:rPr>
-              <a:t>本インターンのテーマ ── 銀行内で保有する各種データを分析し、どのような価値に変換していくかのプロセスを学ぶ</a:t>
-            </a:r>
-            <a:endParaRPr lang="en-US" sz="1250" dirty="0"/>
-          </a:p>
-        </p:txBody>
-      </p:sp>
-      <p:sp>
-        <p:nvSpPr>
-          <p:cNvPr id="7" name="Text 5"/>
           <p:cNvSpPr txBox="1"/>
           <p:nvPr/>
         </p:nvSpPr>
@@ -1833,7 +1795,7 @@
       </p:sp>
       <p:sp>
         <p:nvSpPr>
-          <p:cNvPr id="8" name="Shape 6"/>
+          <p:cNvPr id="7" name="Shape 5"/>
           <p:cNvSpPr/>
           <p:nvPr/>
         </p:nvSpPr>
@@ -1860,7 +1822,7 @@
       </p:sp>
       <p:sp>
         <p:nvSpPr>
-          <p:cNvPr id="9" name="Text 7"/>
+          <p:cNvPr id="8" name="Text 6"/>
           <p:cNvSpPr txBox="1"/>
           <p:nvPr/>
         </p:nvSpPr>
@@ -1899,7 +1861,7 @@
       </p:sp>
       <p:sp>
         <p:nvSpPr>
-          <p:cNvPr id="10" name="Text 8"/>
+          <p:cNvPr id="9" name="Text 7"/>
           <p:cNvSpPr txBox="1"/>
           <p:nvPr/>
         </p:nvSpPr>
@@ -1941,7 +1903,7 @@
       </p:sp>
       <p:sp>
         <p:nvSpPr>
-          <p:cNvPr id="11" name="Shape 9"/>
+          <p:cNvPr id="10" name="Shape 8"/>
           <p:cNvSpPr/>
           <p:nvPr/>
         </p:nvSpPr>
@@ -1966,7 +1928,7 @@
       </p:sp>
       <p:sp>
         <p:nvSpPr>
-          <p:cNvPr id="12" name="Shape 10"/>
+          <p:cNvPr id="11" name="Shape 9"/>
           <p:cNvSpPr/>
           <p:nvPr/>
         </p:nvSpPr>
@@ -1993,7 +1955,7 @@
       </p:sp>
       <p:sp>
         <p:nvSpPr>
-          <p:cNvPr id="13" name="Text 11"/>
+          <p:cNvPr id="12" name="Text 10"/>
           <p:cNvSpPr txBox="1"/>
           <p:nvPr/>
         </p:nvSpPr>
@@ -2032,7 +1994,7 @@
       </p:sp>
       <p:sp>
         <p:nvSpPr>
-          <p:cNvPr id="14" name="Text 12"/>
+          <p:cNvPr id="13" name="Text 11"/>
           <p:cNvSpPr txBox="1"/>
           <p:nvPr/>
         </p:nvSpPr>
@@ -2074,7 +2036,7 @@
       </p:sp>
       <p:sp>
         <p:nvSpPr>
-          <p:cNvPr id="15" name="Shape 13"/>
+          <p:cNvPr id="14" name="Shape 12"/>
           <p:cNvSpPr/>
           <p:nvPr/>
         </p:nvSpPr>
@@ -2099,7 +2061,7 @@
       </p:sp>
       <p:sp>
         <p:nvSpPr>
-          <p:cNvPr id="16" name="Shape 14"/>
+          <p:cNvPr id="15" name="Shape 13"/>
           <p:cNvSpPr/>
           <p:nvPr/>
         </p:nvSpPr>
@@ -2126,7 +2088,7 @@
       </p:sp>
       <p:sp>
         <p:nvSpPr>
-          <p:cNvPr id="17" name="Text 15"/>
+          <p:cNvPr id="16" name="Text 14"/>
           <p:cNvSpPr txBox="1"/>
           <p:nvPr/>
         </p:nvSpPr>
@@ -2165,7 +2127,7 @@
       </p:sp>
       <p:sp>
         <p:nvSpPr>
-          <p:cNvPr id="18" name="Text 16"/>
+          <p:cNvPr id="17" name="Text 15"/>
           <p:cNvSpPr txBox="1"/>
           <p:nvPr/>
         </p:nvSpPr>
@@ -2207,7 +2169,7 @@
       </p:sp>
       <p:sp>
         <p:nvSpPr>
-          <p:cNvPr id="19" name="Shape 17"/>
+          <p:cNvPr id="18" name="Shape 16"/>
           <p:cNvSpPr/>
           <p:nvPr/>
         </p:nvSpPr>
@@ -2234,7 +2196,7 @@
       </p:sp>
       <p:sp>
         <p:nvSpPr>
-          <p:cNvPr id="20" name="Text 18"/>
+          <p:cNvPr id="19" name="Text 17"/>
           <p:cNvSpPr txBox="1"/>
           <p:nvPr/>
         </p:nvSpPr>
@@ -2273,7 +2235,7 @@
       </p:sp>
       <p:sp>
         <p:nvSpPr>
-          <p:cNvPr id="21" name="Text 19"/>
+          <p:cNvPr id="20" name="Text 18"/>
           <p:cNvSpPr txBox="1"/>
           <p:nvPr/>
         </p:nvSpPr>
@@ -2335,7 +2297,7 @@
       </p:sp>
       <p:sp>
         <p:nvSpPr>
-          <p:cNvPr id="22" name="Shape 20"/>
+          <p:cNvPr id="21" name="Shape 19"/>
           <p:cNvSpPr/>
           <p:nvPr/>
         </p:nvSpPr>
@@ -2360,7 +2322,7 @@
       </p:sp>
       <p:sp>
         <p:nvSpPr>
-          <p:cNvPr id="23" name="Text 21"/>
+          <p:cNvPr id="22" name="Text 20"/>
           <p:cNvSpPr txBox="1"/>
           <p:nvPr/>
         </p:nvSpPr>
@@ -2460,8 +2422,8 @@
         </p:nvSpPr>
         <p:spPr>
           <a:xfrm>
-            <a:off x="640080" y="566928"/>
-            <a:ext cx="402336" cy="402336"/>
+            <a:off x="640080" y="512064"/>
+            <a:ext cx="420624" cy="420624"/>
           </a:xfrm>
           <a:prstGeom prst="ellipse">
             <a:avLst/>
@@ -2485,8 +2447,8 @@
         </p:nvSpPr>
         <p:spPr>
           <a:xfrm>
-            <a:off x="640080" y="566928"/>
-            <a:ext cx="402336" cy="402336"/>
+            <a:off x="640080" y="512064"/>
+            <a:ext cx="420624" cy="420624"/>
           </a:xfrm>
           <a:prstGeom prst="rect">
             <a:avLst/>
@@ -2502,7 +2464,7 @@
               <a:buNone/>
             </a:pPr>
             <a:r>
-              <a:rPr lang="en-US" sz="1150" b="1" dirty="0">
+              <a:rPr lang="en-US" sz="1200" b="1" dirty="0">
                 <a:solidFill>
                   <a:srgbClr val="FFFFFF"/>
                 </a:solidFill>
@@ -2512,7 +2474,7 @@
               </a:rPr>
               <a:t>02</a:t>
             </a:r>
-            <a:endParaRPr lang="en-US" sz="1150" dirty="0"/>
+            <a:endParaRPr lang="en-US" sz="1200" dirty="0"/>
           </a:p>
         </p:txBody>
       </p:sp>
@@ -2524,8 +2486,8 @@
         </p:nvSpPr>
         <p:spPr>
           <a:xfrm>
-            <a:off x="1225296" y="402336"/>
-            <a:ext cx="6400800" cy="228600"/>
+            <a:off x="1243584" y="475488"/>
+            <a:ext cx="10308031" cy="548640"/>
           </a:xfrm>
           <a:prstGeom prst="rect">
             <a:avLst/>
@@ -2541,17 +2503,17 @@
               <a:buNone/>
             </a:pPr>
             <a:r>
-              <a:rPr lang="en-US" sz="1050" b="1" spc="150" kern="0" dirty="0">
-                <a:solidFill>
-                  <a:srgbClr val="0F5A6B"/>
-                </a:solidFill>
-                <a:latin typeface="Meiryo" pitchFamily="34" charset="0"/>
-                <a:ea typeface="Meiryo" pitchFamily="34" charset="-122"/>
-                <a:cs typeface="Meiryo" pitchFamily="34" charset="-120"/>
-              </a:rPr>
-              <a:t>背 景</a:t>
-            </a:r>
-            <a:endParaRPr lang="en-US" sz="1050" dirty="0"/>
+              <a:rPr lang="en-US" sz="2600" b="1" dirty="0">
+                <a:solidFill>
+                  <a:srgbClr val="1A2B33"/>
+                </a:solidFill>
+                <a:latin typeface="Meiryo" pitchFamily="34" charset="0"/>
+                <a:ea typeface="Meiryo" pitchFamily="34" charset="-122"/>
+                <a:cs typeface="Meiryo" pitchFamily="34" charset="-120"/>
+              </a:rPr>
+              <a:t>背景</a:t>
+            </a:r>
+            <a:endParaRPr lang="en-US" sz="2600" dirty="0"/>
           </a:p>
         </p:txBody>
       </p:sp>
@@ -2563,8 +2525,8 @@
         </p:nvSpPr>
         <p:spPr>
           <a:xfrm>
-            <a:off x="1225296" y="603504"/>
-            <a:ext cx="10326319" cy="548640"/>
+            <a:off x="1243584" y="1133856"/>
+            <a:ext cx="10308031" cy="384048"/>
           </a:xfrm>
           <a:prstGeom prst="rect">
             <a:avLst/>
@@ -2580,62 +2542,23 @@
               <a:buNone/>
             </a:pPr>
             <a:r>
-              <a:rPr lang="en-US" sz="2600" b="1" dirty="0">
-                <a:solidFill>
-                  <a:srgbClr val="1A2B33"/>
-                </a:solidFill>
-                <a:latin typeface="Meiryo" pitchFamily="34" charset="0"/>
-                <a:ea typeface="Meiryo" pitchFamily="34" charset="-122"/>
-                <a:cs typeface="Meiryo" pitchFamily="34" charset="-120"/>
-              </a:rPr>
-              <a:t>非対面チャネルの利用拡大という狙い</a:t>
-            </a:r>
-            <a:endParaRPr lang="en-US" sz="2600" dirty="0"/>
+              <a:rPr lang="en-US" sz="1400" dirty="0">
+                <a:solidFill>
+                  <a:srgbClr val="465A63"/>
+                </a:solidFill>
+                <a:latin typeface="Meiryo" pitchFamily="34" charset="0"/>
+                <a:ea typeface="Meiryo" pitchFamily="34" charset="-122"/>
+                <a:cs typeface="Meiryo" pitchFamily="34" charset="-120"/>
+              </a:rPr>
+              <a:t>あいち銀行では、デジタルサービスの強化を中期経営計画の重点施策に掲げている</a:t>
+            </a:r>
+            <a:endParaRPr lang="en-US" sz="1400" dirty="0"/>
           </a:p>
         </p:txBody>
       </p:sp>
       <p:sp>
         <p:nvSpPr>
           <p:cNvPr id="6" name="Text 4"/>
-          <p:cNvSpPr txBox="1"/>
-          <p:nvPr/>
-        </p:nvSpPr>
-        <p:spPr>
-          <a:xfrm>
-            <a:off x="1225296" y="1170432"/>
-            <a:ext cx="10326319" cy="347472"/>
-          </a:xfrm>
-          <a:prstGeom prst="rect">
-            <a:avLst/>
-          </a:prstGeom>
-          <a:noFill/>
-          <a:ln/>
-        </p:spPr>
-        <p:txBody>
-          <a:bodyPr wrap="square" lIns="0" tIns="0" rIns="0" bIns="0" rtlCol="0" anchor="ctr"/>
-          <a:lstStyle/>
-          <a:p>
-            <a:pPr indent="0" marL="0">
-              <a:buNone/>
-            </a:pPr>
-            <a:r>
-              <a:rPr lang="en-US" sz="1250" dirty="0">
-                <a:solidFill>
-                  <a:srgbClr val="8497A0"/>
-                </a:solidFill>
-                <a:latin typeface="Meiryo" pitchFamily="34" charset="0"/>
-                <a:ea typeface="Meiryo" pitchFamily="34" charset="-122"/>
-                <a:cs typeface="Meiryo" pitchFamily="34" charset="-120"/>
-              </a:rPr>
-              <a:t>数ある問いのうち、銀行が実際に力を入れている領域からテーマを選んだ</a:t>
-            </a:r>
-            <a:endParaRPr lang="en-US" sz="1250" dirty="0"/>
-          </a:p>
-        </p:txBody>
-      </p:sp>
-      <p:sp>
-        <p:nvSpPr>
-          <p:cNvPr id="7" name="Text 5"/>
           <p:cNvSpPr txBox="1"/>
           <p:nvPr/>
         </p:nvSpPr>
@@ -2674,14 +2597,14 @@
       </p:sp>
       <p:sp>
         <p:nvSpPr>
-          <p:cNvPr id="8" name="Shape 6"/>
+          <p:cNvPr id="7" name="Shape 5"/>
           <p:cNvSpPr/>
           <p:nvPr/>
         </p:nvSpPr>
         <p:spPr>
           <a:xfrm>
             <a:off x="640080" y="1874520"/>
-            <a:ext cx="6309360" cy="777240"/>
+            <a:ext cx="6172200" cy="777240"/>
           </a:xfrm>
           <a:prstGeom prst="roundRect">
             <a:avLst>
@@ -2701,14 +2624,53 @@
       </p:sp>
       <p:sp>
         <p:nvSpPr>
+          <p:cNvPr id="8" name="Text 6"/>
+          <p:cNvSpPr txBox="1"/>
+          <p:nvPr/>
+        </p:nvSpPr>
+        <p:spPr>
+          <a:xfrm>
+            <a:off x="896112" y="1993392"/>
+            <a:ext cx="2011680" cy="237744"/>
+          </a:xfrm>
+          <a:prstGeom prst="rect">
+            <a:avLst/>
+          </a:prstGeom>
+          <a:noFill/>
+          <a:ln/>
+        </p:spPr>
+        <p:txBody>
+          <a:bodyPr wrap="square" lIns="0" tIns="0" rIns="0" bIns="0" rtlCol="0" anchor="ctr"/>
+          <a:lstStyle/>
+          <a:p>
+            <a:pPr indent="0" marL="0">
+              <a:buNone/>
+            </a:pPr>
+            <a:r>
+              <a:rPr lang="en-US" sz="1000" b="1" spc="100" kern="0" dirty="0">
+                <a:solidFill>
+                  <a:srgbClr val="8497A0"/>
+                </a:solidFill>
+                <a:latin typeface="Meiryo" pitchFamily="34" charset="0"/>
+                <a:ea typeface="Meiryo" pitchFamily="34" charset="-122"/>
+                <a:cs typeface="Meiryo" pitchFamily="34" charset="-120"/>
+              </a:rPr>
+              <a:t>計 画</a:t>
+            </a:r>
+            <a:endParaRPr lang="en-US" sz="1000" dirty="0"/>
+          </a:p>
+        </p:txBody>
+      </p:sp>
+      <p:sp>
+        <p:nvSpPr>
           <p:cNvPr id="9" name="Text 7"/>
           <p:cNvSpPr txBox="1"/>
           <p:nvPr/>
         </p:nvSpPr>
         <p:spPr>
           <a:xfrm>
-            <a:off x="896112" y="1993392"/>
-            <a:ext cx="1645920" cy="237744"/>
+            <a:off x="896112" y="2240280"/>
+            <a:ext cx="5660136" cy="310896"/>
           </a:xfrm>
           <a:prstGeom prst="rect">
             <a:avLst/>
@@ -2724,45 +2686,6 @@
               <a:buNone/>
             </a:pPr>
             <a:r>
-              <a:rPr lang="en-US" sz="1000" b="1" spc="100" kern="0" dirty="0">
-                <a:solidFill>
-                  <a:srgbClr val="8497A0"/>
-                </a:solidFill>
-                <a:latin typeface="Meiryo" pitchFamily="34" charset="0"/>
-                <a:ea typeface="Meiryo" pitchFamily="34" charset="-122"/>
-                <a:cs typeface="Meiryo" pitchFamily="34" charset="-120"/>
-              </a:rPr>
-              <a:t>計 画</a:t>
-            </a:r>
-            <a:endParaRPr lang="en-US" sz="1000" dirty="0"/>
-          </a:p>
-        </p:txBody>
-      </p:sp>
-      <p:sp>
-        <p:nvSpPr>
-          <p:cNvPr id="10" name="Text 8"/>
-          <p:cNvSpPr txBox="1"/>
-          <p:nvPr/>
-        </p:nvSpPr>
-        <p:spPr>
-          <a:xfrm>
-            <a:off x="896112" y="2240280"/>
-            <a:ext cx="5797296" cy="310896"/>
-          </a:xfrm>
-          <a:prstGeom prst="rect">
-            <a:avLst/>
-          </a:prstGeom>
-          <a:noFill/>
-          <a:ln/>
-        </p:spPr>
-        <p:txBody>
-          <a:bodyPr wrap="square" lIns="0" tIns="0" rIns="0" bIns="0" rtlCol="0" anchor="ctr"/>
-          <a:lstStyle/>
-          <a:p>
-            <a:pPr indent="0" marL="0">
-              <a:buNone/>
-            </a:pPr>
-            <a:r>
               <a:rPr lang="en-US" sz="1300" dirty="0">
                 <a:solidFill>
                   <a:srgbClr val="1A2B33"/>
@@ -2779,7 +2702,7 @@
       </p:sp>
       <p:sp>
         <p:nvSpPr>
-          <p:cNvPr id="11" name="Shape 9"/>
+          <p:cNvPr id="10" name="Shape 8"/>
           <p:cNvSpPr/>
           <p:nvPr/>
         </p:nvSpPr>
@@ -2804,14 +2727,14 @@
       </p:sp>
       <p:sp>
         <p:nvSpPr>
-          <p:cNvPr id="12" name="Shape 10"/>
+          <p:cNvPr id="11" name="Shape 9"/>
           <p:cNvSpPr/>
           <p:nvPr/>
         </p:nvSpPr>
         <p:spPr>
           <a:xfrm>
             <a:off x="960120" y="2834640"/>
-            <a:ext cx="5989320" cy="777240"/>
+            <a:ext cx="5852160" cy="777240"/>
           </a:xfrm>
           <a:prstGeom prst="roundRect">
             <a:avLst>
@@ -2831,14 +2754,53 @@
       </p:sp>
       <p:sp>
         <p:nvSpPr>
+          <p:cNvPr id="12" name="Text 10"/>
+          <p:cNvSpPr txBox="1"/>
+          <p:nvPr/>
+        </p:nvSpPr>
+        <p:spPr>
+          <a:xfrm>
+            <a:off x="1216152" y="2953512"/>
+            <a:ext cx="2011680" cy="237744"/>
+          </a:xfrm>
+          <a:prstGeom prst="rect">
+            <a:avLst/>
+          </a:prstGeom>
+          <a:noFill/>
+          <a:ln/>
+        </p:spPr>
+        <p:txBody>
+          <a:bodyPr wrap="square" lIns="0" tIns="0" rIns="0" bIns="0" rtlCol="0" anchor="ctr"/>
+          <a:lstStyle/>
+          <a:p>
+            <a:pPr indent="0" marL="0">
+              <a:buNone/>
+            </a:pPr>
+            <a:r>
+              <a:rPr lang="en-US" sz="1000" b="1" spc="100" kern="0" dirty="0">
+                <a:solidFill>
+                  <a:srgbClr val="8497A0"/>
+                </a:solidFill>
+                <a:latin typeface="Meiryo" pitchFamily="34" charset="0"/>
+                <a:ea typeface="Meiryo" pitchFamily="34" charset="-122"/>
+                <a:cs typeface="Meiryo" pitchFamily="34" charset="-120"/>
+              </a:rPr>
+              <a:t>基本戦略Ⅲ</a:t>
+            </a:r>
+            <a:endParaRPr lang="en-US" sz="1000" dirty="0"/>
+          </a:p>
+        </p:txBody>
+      </p:sp>
+      <p:sp>
+        <p:nvSpPr>
           <p:cNvPr id="13" name="Text 11"/>
           <p:cNvSpPr txBox="1"/>
           <p:nvPr/>
         </p:nvSpPr>
         <p:spPr>
           <a:xfrm>
-            <a:off x="1216152" y="2953512"/>
-            <a:ext cx="1645920" cy="237744"/>
+            <a:off x="1216152" y="3200400"/>
+            <a:ext cx="5340096" cy="310896"/>
           </a:xfrm>
           <a:prstGeom prst="rect">
             <a:avLst/>
@@ -2854,45 +2816,6 @@
               <a:buNone/>
             </a:pPr>
             <a:r>
-              <a:rPr lang="en-US" sz="1000" b="1" spc="100" kern="0" dirty="0">
-                <a:solidFill>
-                  <a:srgbClr val="8497A0"/>
-                </a:solidFill>
-                <a:latin typeface="Meiryo" pitchFamily="34" charset="0"/>
-                <a:ea typeface="Meiryo" pitchFamily="34" charset="-122"/>
-                <a:cs typeface="Meiryo" pitchFamily="34" charset="-120"/>
-              </a:rPr>
-              <a:t>基本戦略</a:t>
-            </a:r>
-            <a:endParaRPr lang="en-US" sz="1000" dirty="0"/>
-          </a:p>
-        </p:txBody>
-      </p:sp>
-      <p:sp>
-        <p:nvSpPr>
-          <p:cNvPr id="14" name="Text 12"/>
-          <p:cNvSpPr txBox="1"/>
-          <p:nvPr/>
-        </p:nvSpPr>
-        <p:spPr>
-          <a:xfrm>
-            <a:off x="1216152" y="3200400"/>
-            <a:ext cx="5477256" cy="310896"/>
-          </a:xfrm>
-          <a:prstGeom prst="rect">
-            <a:avLst/>
-          </a:prstGeom>
-          <a:noFill/>
-          <a:ln/>
-        </p:spPr>
-        <p:txBody>
-          <a:bodyPr wrap="square" lIns="0" tIns="0" rIns="0" bIns="0" rtlCol="0" anchor="ctr"/>
-          <a:lstStyle/>
-          <a:p>
-            <a:pPr indent="0" marL="0">
-              <a:buNone/>
-            </a:pPr>
-            <a:r>
               <a:rPr lang="en-US" sz="1300" dirty="0">
                 <a:solidFill>
                   <a:srgbClr val="1A2B33"/>
@@ -2901,7 +2824,7 @@
                 <a:ea typeface="Meiryo" pitchFamily="34" charset="-122"/>
                 <a:cs typeface="Meiryo" pitchFamily="34" charset="-120"/>
               </a:rPr>
-              <a:t>Ⅲ「DX戦略の加速化」</a:t>
+              <a:t>DX戦略の加速化</a:t>
             </a:r>
             <a:endParaRPr lang="en-US" sz="1300" dirty="0"/>
           </a:p>
@@ -2909,7 +2832,7 @@
       </p:sp>
       <p:sp>
         <p:nvSpPr>
-          <p:cNvPr id="15" name="Shape 13"/>
+          <p:cNvPr id="14" name="Shape 12"/>
           <p:cNvSpPr/>
           <p:nvPr/>
         </p:nvSpPr>
@@ -2934,14 +2857,14 @@
       </p:sp>
       <p:sp>
         <p:nvSpPr>
-          <p:cNvPr id="16" name="Shape 14"/>
+          <p:cNvPr id="15" name="Shape 13"/>
           <p:cNvSpPr/>
           <p:nvPr/>
         </p:nvSpPr>
         <p:spPr>
           <a:xfrm>
             <a:off x="1280160" y="3794760"/>
-            <a:ext cx="5669280" cy="777240"/>
+            <a:ext cx="5532120" cy="777240"/>
           </a:xfrm>
           <a:prstGeom prst="roundRect">
             <a:avLst>
@@ -2949,11 +2872,11 @@
             </a:avLst>
           </a:prstGeom>
           <a:solidFill>
-            <a:srgbClr val="F8EBE1"/>
+            <a:srgbClr val="0F5A6B"/>
           </a:solidFill>
-          <a:ln w="15875">
+          <a:ln w="9525">
             <a:solidFill>
-              <a:srgbClr val="D9A97F"/>
+              <a:srgbClr val="0F5A6B"/>
             </a:solidFill>
             <a:prstDash val="solid"/>
           </a:ln>
@@ -2961,14 +2884,53 @@
       </p:sp>
       <p:sp>
         <p:nvSpPr>
+          <p:cNvPr id="16" name="Text 14"/>
+          <p:cNvSpPr txBox="1"/>
+          <p:nvPr/>
+        </p:nvSpPr>
+        <p:spPr>
+          <a:xfrm>
+            <a:off x="1536192" y="3913632"/>
+            <a:ext cx="2011680" cy="237744"/>
+          </a:xfrm>
+          <a:prstGeom prst="rect">
+            <a:avLst/>
+          </a:prstGeom>
+          <a:noFill/>
+          <a:ln/>
+        </p:spPr>
+        <p:txBody>
+          <a:bodyPr wrap="square" lIns="0" tIns="0" rIns="0" bIns="0" rtlCol="0" anchor="ctr"/>
+          <a:lstStyle/>
+          <a:p>
+            <a:pPr indent="0" marL="0">
+              <a:buNone/>
+            </a:pPr>
+            <a:r>
+              <a:rPr lang="en-US" sz="1000" b="1" spc="100" kern="0" dirty="0">
+                <a:solidFill>
+                  <a:srgbClr val="9CC8CF"/>
+                </a:solidFill>
+                <a:latin typeface="Meiryo" pitchFamily="34" charset="0"/>
+                <a:ea typeface="Meiryo" pitchFamily="34" charset="-122"/>
+                <a:cs typeface="Meiryo" pitchFamily="34" charset="-120"/>
+              </a:rPr>
+              <a:t>重点施策⑦</a:t>
+            </a:r>
+            <a:endParaRPr lang="en-US" sz="1000" dirty="0"/>
+          </a:p>
+        </p:txBody>
+      </p:sp>
+      <p:sp>
+        <p:nvSpPr>
           <p:cNvPr id="17" name="Text 15"/>
           <p:cNvSpPr txBox="1"/>
           <p:nvPr/>
         </p:nvSpPr>
         <p:spPr>
           <a:xfrm>
-            <a:off x="1536192" y="3913632"/>
-            <a:ext cx="1645920" cy="237744"/>
+            <a:off x="1536192" y="4160520"/>
+            <a:ext cx="5020056" cy="310896"/>
           </a:xfrm>
           <a:prstGeom prst="rect">
             <a:avLst/>
@@ -2984,17 +2946,17 @@
               <a:buNone/>
             </a:pPr>
             <a:r>
-              <a:rPr lang="en-US" sz="1000" b="1" spc="100" kern="0" dirty="0">
-                <a:solidFill>
-                  <a:srgbClr val="B4551F"/>
-                </a:solidFill>
-                <a:latin typeface="Meiryo" pitchFamily="34" charset="0"/>
-                <a:ea typeface="Meiryo" pitchFamily="34" charset="-122"/>
-                <a:cs typeface="Meiryo" pitchFamily="34" charset="-120"/>
-              </a:rPr>
-              <a:t>重点施策</a:t>
-            </a:r>
-            <a:endParaRPr lang="en-US" sz="1000" dirty="0"/>
+              <a:rPr lang="en-US" sz="1400" b="1" dirty="0">
+                <a:solidFill>
+                  <a:srgbClr val="FFFFFF"/>
+                </a:solidFill>
+                <a:latin typeface="Meiryo" pitchFamily="34" charset="0"/>
+                <a:ea typeface="Meiryo" pitchFamily="34" charset="-122"/>
+                <a:cs typeface="Meiryo" pitchFamily="34" charset="-120"/>
+              </a:rPr>
+              <a:t>顧客の利便性・先進性の向上</a:t>
+            </a:r>
+            <a:endParaRPr lang="en-US" sz="1400" dirty="0"/>
           </a:p>
         </p:txBody>
       </p:sp>
@@ -3006,8 +2968,8 @@
         </p:nvSpPr>
         <p:spPr>
           <a:xfrm>
-            <a:off x="1536192" y="4160520"/>
-            <a:ext cx="5157216" cy="310896"/>
+            <a:off x="1280160" y="4626864"/>
+            <a:ext cx="5532120" cy="329184"/>
           </a:xfrm>
           <a:prstGeom prst="rect">
             <a:avLst/>
@@ -3023,73 +2985,34 @@
               <a:buNone/>
             </a:pPr>
             <a:r>
-              <a:rPr lang="en-US" sz="1300" b="1" dirty="0">
-                <a:solidFill>
-                  <a:srgbClr val="B4551F"/>
-                </a:solidFill>
-                <a:latin typeface="Meiryo" pitchFamily="34" charset="0"/>
-                <a:ea typeface="Meiryo" pitchFamily="34" charset="-122"/>
-                <a:cs typeface="Meiryo" pitchFamily="34" charset="-120"/>
-              </a:rPr>
-              <a:t>⑦　〔　計画本文の表現を記入　〕</a:t>
-            </a:r>
-            <a:endParaRPr lang="en-US" sz="1300" dirty="0"/>
-          </a:p>
-        </p:txBody>
-      </p:sp>
-      <p:sp>
-        <p:nvSpPr>
-          <p:cNvPr id="19" name="Text 17"/>
-          <p:cNvSpPr txBox="1"/>
-          <p:nvPr/>
-        </p:nvSpPr>
-        <p:spPr>
-          <a:xfrm>
-            <a:off x="1280160" y="4626864"/>
-            <a:ext cx="5669280" cy="292608"/>
-          </a:xfrm>
-          <a:prstGeom prst="rect">
-            <a:avLst/>
-          </a:prstGeom>
-          <a:noFill/>
-          <a:ln/>
-        </p:spPr>
-        <p:txBody>
-          <a:bodyPr wrap="square" lIns="0" tIns="0" rIns="0" bIns="0" rtlCol="0" anchor="ctr"/>
-          <a:lstStyle/>
-          <a:p>
-            <a:pPr indent="0" marL="0">
-              <a:buNone/>
-            </a:pPr>
-            <a:r>
-              <a:rPr lang="en-US" sz="1200" dirty="0">
-                <a:solidFill>
-                  <a:srgbClr val="465A63"/>
-                </a:solidFill>
-                <a:latin typeface="Meiryo" pitchFamily="34" charset="0"/>
-                <a:ea typeface="Meiryo" pitchFamily="34" charset="-122"/>
-                <a:cs typeface="Meiryo" pitchFamily="34" charset="-120"/>
-              </a:rPr>
-              <a:t>非対面チャネル（バンキングアプリ、インターネット支店 など）の有効活用</a:t>
-            </a:r>
-            <a:endParaRPr lang="en-US" sz="1200" dirty="0"/>
-          </a:p>
-        </p:txBody>
-      </p:sp>
-      <p:sp>
-        <p:nvSpPr>
-          <p:cNvPr id="20" name="Shape 18"/>
+              <a:rPr lang="en-US" sz="1150" dirty="0">
+                <a:solidFill>
+                  <a:srgbClr val="8497A0"/>
+                </a:solidFill>
+                <a:latin typeface="Meiryo" pitchFamily="34" charset="0"/>
+                <a:ea typeface="Meiryo" pitchFamily="34" charset="-122"/>
+                <a:cs typeface="Meiryo" pitchFamily="34" charset="-120"/>
+              </a:rPr>
+              <a:t>「すべてのお客さまに便利に使っていただける金融サービスを提供する」</a:t>
+            </a:r>
+            <a:endParaRPr lang="en-US" sz="1150" dirty="0"/>
+          </a:p>
+        </p:txBody>
+      </p:sp>
+      <p:sp>
+        <p:nvSpPr>
+          <p:cNvPr id="19" name="Shape 17"/>
           <p:cNvSpPr/>
           <p:nvPr/>
         </p:nvSpPr>
         <p:spPr>
           <a:xfrm>
-            <a:off x="7269480" y="1874520"/>
-            <a:ext cx="4279392" cy="2697480"/>
+            <a:off x="7059168" y="1874520"/>
+            <a:ext cx="4489704" cy="3017520"/>
           </a:xfrm>
           <a:prstGeom prst="roundRect">
             <a:avLst>
-              <a:gd name="adj" fmla="val 1695"/>
+              <a:gd name="adj" fmla="val 1515"/>
             </a:avLst>
           </a:prstGeom>
           <a:solidFill>
@@ -3105,14 +3028,14 @@
       </p:sp>
       <p:sp>
         <p:nvSpPr>
-          <p:cNvPr id="21" name="Text 19"/>
-          <p:cNvSpPr txBox="1"/>
-          <p:nvPr/>
-        </p:nvSpPr>
-        <p:spPr>
-          <a:xfrm>
-            <a:off x="7543800" y="2057400"/>
-            <a:ext cx="3730752" cy="237744"/>
+          <p:cNvPr id="20" name="Text 18"/>
+          <p:cNvSpPr txBox="1"/>
+          <p:nvPr/>
+        </p:nvSpPr>
+        <p:spPr>
+          <a:xfrm>
+            <a:off x="7333488" y="2066544"/>
+            <a:ext cx="3941064" cy="237744"/>
           </a:xfrm>
           <a:prstGeom prst="rect">
             <a:avLst/>
@@ -3128,7 +3051,7 @@
               <a:buNone/>
             </a:pPr>
             <a:r>
-              <a:rPr lang="en-US" sz="1250" b="1" spc="100" kern="0" dirty="0">
+              <a:rPr lang="en-US" sz="1050" b="1" spc="100" kern="0" dirty="0">
                 <a:solidFill>
                   <a:srgbClr val="8497A0"/>
                 </a:solidFill>
@@ -3136,26 +3059,26 @@
                 <a:ea typeface="Meiryo" pitchFamily="34" charset="-122"/>
                 <a:cs typeface="Meiryo" pitchFamily="34" charset="-120"/>
               </a:rPr>
-              <a:t>非対面チャネル</a:t>
-            </a:r>
-            <a:endParaRPr lang="en-US" sz="1250" dirty="0"/>
-          </a:p>
-        </p:txBody>
-      </p:sp>
-      <p:sp>
-        <p:nvSpPr>
-          <p:cNvPr id="22" name="Shape 20"/>
+              <a:t>取 組 方 針 ⑯ 　顧 客 サ ー ビ ス の 強 化</a:t>
+            </a:r>
+            <a:endParaRPr lang="en-US" sz="1050" dirty="0"/>
+          </a:p>
+        </p:txBody>
+      </p:sp>
+      <p:sp>
+        <p:nvSpPr>
+          <p:cNvPr id="21" name="Shape 19"/>
           <p:cNvSpPr/>
           <p:nvPr/>
         </p:nvSpPr>
         <p:spPr>
           <a:xfrm>
-            <a:off x="7543800" y="2450592"/>
-            <a:ext cx="3730752" cy="548640"/>
+            <a:off x="7333488" y="2450592"/>
+            <a:ext cx="3941064" cy="621792"/>
           </a:xfrm>
           <a:prstGeom prst="roundRect">
             <a:avLst>
-              <a:gd name="adj" fmla="val 8333"/>
+              <a:gd name="adj" fmla="val 7353"/>
             </a:avLst>
           </a:prstGeom>
           <a:solidFill>
@@ -3171,30 +3094,33 @@
       </p:sp>
       <p:sp>
         <p:nvSpPr>
-          <p:cNvPr id="23" name="Text 21"/>
-          <p:cNvSpPr txBox="1"/>
-          <p:nvPr/>
-        </p:nvSpPr>
-        <p:spPr>
-          <a:xfrm>
-            <a:off x="7543800" y="2450592"/>
-            <a:ext cx="3730752" cy="548640"/>
-          </a:xfrm>
-          <a:prstGeom prst="rect">
-            <a:avLst/>
-          </a:prstGeom>
-          <a:noFill/>
-          <a:ln/>
-        </p:spPr>
-        <p:txBody>
-          <a:bodyPr wrap="square" lIns="0" tIns="0" rIns="0" bIns="0" rtlCol="0" anchor="ctr"/>
-          <a:lstStyle/>
-          <a:p>
-            <a:pPr algn="ctr" indent="0" marL="0">
-              <a:buNone/>
-            </a:pPr>
-            <a:r>
-              <a:rPr lang="en-US" sz="1200" dirty="0">
+          <p:cNvPr id="22" name="Text 20"/>
+          <p:cNvSpPr txBox="1"/>
+          <p:nvPr/>
+        </p:nvSpPr>
+        <p:spPr>
+          <a:xfrm>
+            <a:off x="7498080" y="2450592"/>
+            <a:ext cx="3611880" cy="621792"/>
+          </a:xfrm>
+          <a:prstGeom prst="rect">
+            <a:avLst/>
+          </a:prstGeom>
+          <a:noFill/>
+          <a:ln/>
+        </p:spPr>
+        <p:txBody>
+          <a:bodyPr wrap="square" lIns="0" tIns="0" rIns="0" bIns="0" rtlCol="0" anchor="ctr"/>
+          <a:lstStyle/>
+          <a:p>
+            <a:pPr indent="0" marL="0">
+              <a:lnSpc>
+                <a:spcPts val="1600"/>
+              </a:lnSpc>
+              <a:buNone/>
+            </a:pPr>
+            <a:r>
+              <a:rPr lang="en-US" sz="1150" dirty="0">
                 <a:solidFill>
                   <a:srgbClr val="465A63"/>
                 </a:solidFill>
@@ -3202,26 +3128,95 @@
                 <a:ea typeface="Meiryo" pitchFamily="34" charset="-122"/>
                 <a:cs typeface="Meiryo" pitchFamily="34" charset="-120"/>
               </a:rPr>
-              <a:t>バンキングアプリ</a:t>
-            </a:r>
-            <a:endParaRPr lang="en-US" sz="1200" dirty="0"/>
-          </a:p>
-        </p:txBody>
-      </p:sp>
-      <p:sp>
-        <p:nvSpPr>
-          <p:cNvPr id="24" name="Shape 22"/>
+              <a:t>バンキングアプリ・インターネット支店をリニューアル</a:t>
+            </a:r>
+            <a:endParaRPr lang="en-US" sz="1150" dirty="0"/>
+          </a:p>
+        </p:txBody>
+      </p:sp>
+      <p:sp>
+        <p:nvSpPr>
+          <p:cNvPr id="23" name="Shape 21"/>
           <p:cNvSpPr/>
           <p:nvPr/>
         </p:nvSpPr>
         <p:spPr>
           <a:xfrm>
-            <a:off x="7543800" y="3108960"/>
-            <a:ext cx="3730752" cy="548640"/>
+            <a:off x="7333488" y="3182112"/>
+            <a:ext cx="3941064" cy="621792"/>
           </a:xfrm>
           <a:prstGeom prst="roundRect">
             <a:avLst>
-              <a:gd name="adj" fmla="val 8333"/>
+              <a:gd name="adj" fmla="val 7353"/>
+            </a:avLst>
+          </a:prstGeom>
+          <a:solidFill>
+            <a:srgbClr val="F8EBE1"/>
+          </a:solidFill>
+          <a:ln w="12700">
+            <a:solidFill>
+              <a:srgbClr val="D9A97F"/>
+            </a:solidFill>
+            <a:prstDash val="solid"/>
+          </a:ln>
+        </p:spPr>
+      </p:sp>
+      <p:sp>
+        <p:nvSpPr>
+          <p:cNvPr id="24" name="Text 22"/>
+          <p:cNvSpPr txBox="1"/>
+          <p:nvPr/>
+        </p:nvSpPr>
+        <p:spPr>
+          <a:xfrm>
+            <a:off x="7498080" y="3182112"/>
+            <a:ext cx="3611880" cy="621792"/>
+          </a:xfrm>
+          <a:prstGeom prst="rect">
+            <a:avLst/>
+          </a:prstGeom>
+          <a:noFill/>
+          <a:ln/>
+        </p:spPr>
+        <p:txBody>
+          <a:bodyPr wrap="square" lIns="0" tIns="0" rIns="0" bIns="0" rtlCol="0" anchor="ctr"/>
+          <a:lstStyle/>
+          <a:p>
+            <a:pPr indent="0" marL="0">
+              <a:lnSpc>
+                <a:spcPts val="1600"/>
+              </a:lnSpc>
+              <a:buNone/>
+            </a:pPr>
+            <a:r>
+              <a:rPr lang="en-US" sz="1150" b="1" dirty="0">
+                <a:solidFill>
+                  <a:srgbClr val="B4551F"/>
+                </a:solidFill>
+                <a:latin typeface="Meiryo" pitchFamily="34" charset="0"/>
+                <a:ea typeface="Meiryo" pitchFamily="34" charset="-122"/>
+                <a:cs typeface="Meiryo" pitchFamily="34" charset="-120"/>
+              </a:rPr>
+              <a:t>若年層等の新たな顧客層へのアプローチを強化</a:t>
+            </a:r>
+            <a:endParaRPr lang="en-US" sz="1150" dirty="0"/>
+          </a:p>
+        </p:txBody>
+      </p:sp>
+      <p:sp>
+        <p:nvSpPr>
+          <p:cNvPr id="25" name="Shape 23"/>
+          <p:cNvSpPr/>
+          <p:nvPr/>
+        </p:nvSpPr>
+        <p:spPr>
+          <a:xfrm>
+            <a:off x="7333488" y="3913632"/>
+            <a:ext cx="3941064" cy="621792"/>
+          </a:xfrm>
+          <a:prstGeom prst="roundRect">
+            <a:avLst>
+              <a:gd name="adj" fmla="val 7353"/>
             </a:avLst>
           </a:prstGeom>
           <a:solidFill>
@@ -3237,14 +3232,56 @@
       </p:sp>
       <p:sp>
         <p:nvSpPr>
-          <p:cNvPr id="25" name="Text 23"/>
-          <p:cNvSpPr txBox="1"/>
-          <p:nvPr/>
-        </p:nvSpPr>
-        <p:spPr>
-          <a:xfrm>
-            <a:off x="7543800" y="3108960"/>
-            <a:ext cx="3730752" cy="548640"/>
+          <p:cNvPr id="26" name="Text 24"/>
+          <p:cNvSpPr txBox="1"/>
+          <p:nvPr/>
+        </p:nvSpPr>
+        <p:spPr>
+          <a:xfrm>
+            <a:off x="7498080" y="3913632"/>
+            <a:ext cx="3611880" cy="621792"/>
+          </a:xfrm>
+          <a:prstGeom prst="rect">
+            <a:avLst/>
+          </a:prstGeom>
+          <a:noFill/>
+          <a:ln/>
+        </p:spPr>
+        <p:txBody>
+          <a:bodyPr wrap="square" lIns="0" tIns="0" rIns="0" bIns="0" rtlCol="0" anchor="ctr"/>
+          <a:lstStyle/>
+          <a:p>
+            <a:pPr indent="0" marL="0">
+              <a:lnSpc>
+                <a:spcPts val="1600"/>
+              </a:lnSpc>
+              <a:buNone/>
+            </a:pPr>
+            <a:r>
+              <a:rPr lang="en-US" sz="1150" dirty="0">
+                <a:solidFill>
+                  <a:srgbClr val="465A63"/>
+                </a:solidFill>
+                <a:latin typeface="Meiryo" pitchFamily="34" charset="0"/>
+                <a:ea typeface="Meiryo" pitchFamily="34" charset="-122"/>
+                <a:cs typeface="Meiryo" pitchFamily="34" charset="-120"/>
+              </a:rPr>
+              <a:t>法人向けにライト版法人IBを導入</a:t>
+            </a:r>
+            <a:endParaRPr lang="en-US" sz="1150" dirty="0"/>
+          </a:p>
+        </p:txBody>
+      </p:sp>
+      <p:sp>
+        <p:nvSpPr>
+          <p:cNvPr id="27" name="Text 25"/>
+          <p:cNvSpPr txBox="1"/>
+          <p:nvPr/>
+        </p:nvSpPr>
+        <p:spPr>
+          <a:xfrm>
+            <a:off x="7059168" y="4663440"/>
+            <a:ext cx="4489704" cy="237744"/>
           </a:xfrm>
           <a:prstGeom prst="rect">
             <a:avLst/>
@@ -3260,128 +3297,23 @@
               <a:buNone/>
             </a:pPr>
             <a:r>
-              <a:rPr lang="en-US" sz="1200" dirty="0">
-                <a:solidFill>
-                  <a:srgbClr val="465A63"/>
-                </a:solidFill>
-                <a:latin typeface="Meiryo" pitchFamily="34" charset="0"/>
-                <a:ea typeface="Meiryo" pitchFamily="34" charset="-122"/>
-                <a:cs typeface="Meiryo" pitchFamily="34" charset="-120"/>
-              </a:rPr>
-              <a:t>インターネット支店</a:t>
-            </a:r>
-            <a:endParaRPr lang="en-US" sz="1200" dirty="0"/>
-          </a:p>
-        </p:txBody>
-      </p:sp>
-      <p:sp>
-        <p:nvSpPr>
-          <p:cNvPr id="26" name="Shape 24"/>
-          <p:cNvSpPr/>
-          <p:nvPr/>
-        </p:nvSpPr>
-        <p:spPr>
-          <a:xfrm>
-            <a:off x="7543800" y="3767328"/>
-            <a:ext cx="3730752" cy="548640"/>
-          </a:xfrm>
-          <a:prstGeom prst="roundRect">
-            <a:avLst>
-              <a:gd name="adj" fmla="val 8333"/>
-            </a:avLst>
-          </a:prstGeom>
-          <a:solidFill>
-            <a:srgbClr val="0F5A6B"/>
-          </a:solidFill>
-          <a:ln w="12700">
-            <a:solidFill>
-              <a:srgbClr val="0F5A6B"/>
-            </a:solidFill>
-            <a:prstDash val="solid"/>
-          </a:ln>
-        </p:spPr>
-      </p:sp>
-      <p:sp>
-        <p:nvSpPr>
-          <p:cNvPr id="27" name="Text 25"/>
-          <p:cNvSpPr txBox="1"/>
-          <p:nvPr/>
-        </p:nvSpPr>
-        <p:spPr>
-          <a:xfrm>
-            <a:off x="7543800" y="3767328"/>
-            <a:ext cx="3730752" cy="548640"/>
-          </a:xfrm>
-          <a:prstGeom prst="rect">
-            <a:avLst/>
-          </a:prstGeom>
-          <a:noFill/>
-          <a:ln/>
-        </p:spPr>
-        <p:txBody>
-          <a:bodyPr wrap="square" lIns="0" tIns="0" rIns="0" bIns="0" rtlCol="0" anchor="ctr"/>
-          <a:lstStyle/>
-          <a:p>
-            <a:pPr algn="ctr" indent="0" marL="0">
-              <a:buNone/>
-            </a:pPr>
-            <a:r>
-              <a:rPr lang="en-US" sz="1250" b="1" dirty="0">
-                <a:solidFill>
-                  <a:srgbClr val="FFFFFF"/>
-                </a:solidFill>
-                <a:latin typeface="Meiryo" pitchFamily="34" charset="0"/>
-                <a:ea typeface="Meiryo" pitchFamily="34" charset="-122"/>
-                <a:cs typeface="Meiryo" pitchFamily="34" charset="-120"/>
-              </a:rPr>
-              <a:t>インターネットバンキング（IB）</a:t>
-            </a:r>
-            <a:endParaRPr lang="en-US" sz="1250" dirty="0"/>
-          </a:p>
-        </p:txBody>
-      </p:sp>
-      <p:sp>
-        <p:nvSpPr>
-          <p:cNvPr id="28" name="Text 26"/>
-          <p:cNvSpPr txBox="1"/>
-          <p:nvPr/>
-        </p:nvSpPr>
-        <p:spPr>
-          <a:xfrm>
-            <a:off x="7269480" y="4626864"/>
-            <a:ext cx="4279392" cy="274320"/>
-          </a:xfrm>
-          <a:prstGeom prst="rect">
-            <a:avLst/>
-          </a:prstGeom>
-          <a:noFill/>
-          <a:ln/>
-        </p:spPr>
-        <p:txBody>
-          <a:bodyPr wrap="square" lIns="0" tIns="0" rIns="0" bIns="0" rtlCol="0" anchor="ctr"/>
-          <a:lstStyle/>
-          <a:p>
-            <a:pPr algn="ctr" indent="0" marL="0">
-              <a:buNone/>
-            </a:pPr>
-            <a:r>
-              <a:rPr lang="en-US" sz="1150" b="1" dirty="0">
-                <a:solidFill>
-                  <a:srgbClr val="0F5A6B"/>
-                </a:solidFill>
-                <a:latin typeface="Meiryo" pitchFamily="34" charset="0"/>
-                <a:ea typeface="Meiryo" pitchFamily="34" charset="-122"/>
-                <a:cs typeface="Meiryo" pitchFamily="34" charset="-120"/>
-              </a:rPr>
-              <a:t>↑　今回の分析対象</a:t>
-            </a:r>
-            <a:endParaRPr lang="en-US" sz="1150" dirty="0"/>
-          </a:p>
-        </p:txBody>
-      </p:sp>
-      <p:sp>
-        <p:nvSpPr>
-          <p:cNvPr id="29" name="Shape 27"/>
+              <a:rPr lang="en-US" sz="950" dirty="0">
+                <a:solidFill>
+                  <a:srgbClr val="8497A0"/>
+                </a:solidFill>
+                <a:latin typeface="Meiryo" pitchFamily="34" charset="0"/>
+                <a:ea typeface="Meiryo" pitchFamily="34" charset="-122"/>
+                <a:cs typeface="Meiryo" pitchFamily="34" charset="-120"/>
+              </a:rPr>
+              <a:t>出典：あいちFG「第2次中期経営計画」p.31</a:t>
+            </a:r>
+            <a:endParaRPr lang="en-US" sz="950" dirty="0"/>
+          </a:p>
+        </p:txBody>
+      </p:sp>
+      <p:sp>
+        <p:nvSpPr>
+          <p:cNvPr id="28" name="Shape 26"/>
           <p:cNvSpPr/>
           <p:nvPr/>
         </p:nvSpPr>
@@ -3408,7 +3340,7 @@
       </p:sp>
       <p:sp>
         <p:nvSpPr>
-          <p:cNvPr id="30" name="Text 28"/>
+          <p:cNvPr id="29" name="Text 27"/>
           <p:cNvSpPr txBox="1"/>
           <p:nvPr/>
         </p:nvSpPr>
@@ -3431,7 +3363,7 @@
               <a:buNone/>
             </a:pPr>
             <a:r>
-              <a:rPr lang="en-US" sz="1400" b="1" dirty="0">
+              <a:rPr lang="en-US" sz="1350" b="1" dirty="0">
                 <a:solidFill>
                   <a:srgbClr val="0F5A6B"/>
                 </a:solidFill>
@@ -3439,9 +3371,9 @@
                 <a:ea typeface="Meiryo" pitchFamily="34" charset="-122"/>
                 <a:cs typeface="Meiryo" pitchFamily="34" charset="-120"/>
               </a:rPr>
-              <a:t>非対面チャネルがどれだけ使われるようになったかは、計画の狙いがどこまで進んでいるかを示す手がかりになる</a:t>
-            </a:r>
-            <a:endParaRPr lang="en-US" sz="1400" dirty="0"/>
+              <a:t>非対面のチャネルがどれだけ使われているかは、この狙いの進み具合を示す　→　今回はインターネットバンキング（IB）を対象にした</a:t>
+            </a:r>
+            <a:endParaRPr lang="en-US" sz="1350" dirty="0"/>
           </a:p>
         </p:txBody>
       </p:sp>
@@ -3485,8 +3417,8 @@
         </p:nvSpPr>
         <p:spPr>
           <a:xfrm>
-            <a:off x="640080" y="566928"/>
-            <a:ext cx="402336" cy="402336"/>
+            <a:off x="640080" y="512064"/>
+            <a:ext cx="420624" cy="420624"/>
           </a:xfrm>
           <a:prstGeom prst="ellipse">
             <a:avLst/>
@@ -3510,8 +3442,8 @@
         </p:nvSpPr>
         <p:spPr>
           <a:xfrm>
-            <a:off x="640080" y="566928"/>
-            <a:ext cx="402336" cy="402336"/>
+            <a:off x="640080" y="512064"/>
+            <a:ext cx="420624" cy="420624"/>
           </a:xfrm>
           <a:prstGeom prst="rect">
             <a:avLst/>
@@ -3527,7 +3459,7 @@
               <a:buNone/>
             </a:pPr>
             <a:r>
-              <a:rPr lang="en-US" sz="1150" b="1" dirty="0">
+              <a:rPr lang="en-US" sz="1200" b="1" dirty="0">
                 <a:solidFill>
                   <a:srgbClr val="FFFFFF"/>
                 </a:solidFill>
@@ -3537,7 +3469,7 @@
               </a:rPr>
               <a:t>03</a:t>
             </a:r>
-            <a:endParaRPr lang="en-US" sz="1150" dirty="0"/>
+            <a:endParaRPr lang="en-US" sz="1200" dirty="0"/>
           </a:p>
         </p:txBody>
       </p:sp>
@@ -3549,8 +3481,8 @@
         </p:nvSpPr>
         <p:spPr>
           <a:xfrm>
-            <a:off x="1225296" y="402336"/>
-            <a:ext cx="6400800" cy="228600"/>
+            <a:off x="1243584" y="475488"/>
+            <a:ext cx="10308031" cy="548640"/>
           </a:xfrm>
           <a:prstGeom prst="rect">
             <a:avLst/>
@@ -3566,17 +3498,17 @@
               <a:buNone/>
             </a:pPr>
             <a:r>
-              <a:rPr lang="en-US" sz="1050" b="1" spc="150" kern="0" dirty="0">
-                <a:solidFill>
-                  <a:srgbClr val="0F5A6B"/>
-                </a:solidFill>
-                <a:latin typeface="Meiryo" pitchFamily="34" charset="0"/>
-                <a:ea typeface="Meiryo" pitchFamily="34" charset="-122"/>
-                <a:cs typeface="Meiryo" pitchFamily="34" charset="-120"/>
-              </a:rPr>
-              <a:t>目 的</a:t>
-            </a:r>
-            <a:endParaRPr lang="en-US" sz="1050" dirty="0"/>
+              <a:rPr lang="en-US" sz="2600" b="1" dirty="0">
+                <a:solidFill>
+                  <a:srgbClr val="1A2B33"/>
+                </a:solidFill>
+                <a:latin typeface="Meiryo" pitchFamily="34" charset="0"/>
+                <a:ea typeface="Meiryo" pitchFamily="34" charset="-122"/>
+                <a:cs typeface="Meiryo" pitchFamily="34" charset="-120"/>
+              </a:rPr>
+              <a:t>目的</a:t>
+            </a:r>
+            <a:endParaRPr lang="en-US" sz="2600" dirty="0"/>
           </a:p>
         </p:txBody>
       </p:sp>
@@ -3588,8 +3520,8 @@
         </p:nvSpPr>
         <p:spPr>
           <a:xfrm>
-            <a:off x="1225296" y="603504"/>
-            <a:ext cx="10326319" cy="548640"/>
+            <a:off x="1243584" y="1133856"/>
+            <a:ext cx="10308031" cy="384048"/>
           </a:xfrm>
           <a:prstGeom prst="rect">
             <a:avLst/>
@@ -3605,62 +3537,23 @@
               <a:buNone/>
             </a:pPr>
             <a:r>
-              <a:rPr lang="en-US" sz="2600" b="1" dirty="0">
-                <a:solidFill>
-                  <a:srgbClr val="1A2B33"/>
-                </a:solidFill>
-                <a:latin typeface="Meiryo" pitchFamily="34" charset="0"/>
-                <a:ea typeface="Meiryo" pitchFamily="34" charset="-122"/>
-                <a:cs typeface="Meiryo" pitchFamily="34" charset="-120"/>
-              </a:rPr>
-              <a:t>IBの利用がどれだけ広がったかを確かめる</a:t>
-            </a:r>
-            <a:endParaRPr lang="en-US" sz="2600" dirty="0"/>
+              <a:rPr lang="en-US" sz="1400" dirty="0">
+                <a:solidFill>
+                  <a:srgbClr val="465A63"/>
+                </a:solidFill>
+                <a:latin typeface="Meiryo" pitchFamily="34" charset="0"/>
+                <a:ea typeface="Meiryo" pitchFamily="34" charset="-122"/>
+                <a:cs typeface="Meiryo" pitchFamily="34" charset="-120"/>
+              </a:rPr>
+              <a:t>IBの利用が1年間でどれだけ広がったかを、2つの期間の比較で確認する</a:t>
+            </a:r>
+            <a:endParaRPr lang="en-US" sz="1400" dirty="0"/>
           </a:p>
         </p:txBody>
       </p:sp>
       <p:sp>
         <p:nvSpPr>
           <p:cNvPr id="6" name="Text 4"/>
-          <p:cNvSpPr txBox="1"/>
-          <p:nvPr/>
-        </p:nvSpPr>
-        <p:spPr>
-          <a:xfrm>
-            <a:off x="1225296" y="1170432"/>
-            <a:ext cx="10326319" cy="347472"/>
-          </a:xfrm>
-          <a:prstGeom prst="rect">
-            <a:avLst/>
-          </a:prstGeom>
-          <a:noFill/>
-          <a:ln/>
-        </p:spPr>
-        <p:txBody>
-          <a:bodyPr wrap="square" lIns="0" tIns="0" rIns="0" bIns="0" rtlCol="0" anchor="ctr"/>
-          <a:lstStyle/>
-          <a:p>
-            <a:pPr indent="0" marL="0">
-              <a:buNone/>
-            </a:pPr>
-            <a:r>
-              <a:rPr lang="en-US" sz="1250" dirty="0">
-                <a:solidFill>
-                  <a:srgbClr val="8497A0"/>
-                </a:solidFill>
-                <a:latin typeface="Meiryo" pitchFamily="34" charset="0"/>
-                <a:ea typeface="Meiryo" pitchFamily="34" charset="-122"/>
-                <a:cs typeface="Meiryo" pitchFamily="34" charset="-120"/>
-              </a:rPr>
-              <a:t>背景をふまえ、今回のワークで確かめることを次のように定めた</a:t>
-            </a:r>
-            <a:endParaRPr lang="en-US" sz="1250" dirty="0"/>
-          </a:p>
-        </p:txBody>
-      </p:sp>
-      <p:sp>
-        <p:nvSpPr>
-          <p:cNvPr id="7" name="Text 5"/>
           <p:cNvSpPr txBox="1"/>
           <p:nvPr/>
         </p:nvSpPr>
@@ -3699,7 +3592,7 @@
       </p:sp>
       <p:sp>
         <p:nvSpPr>
-          <p:cNvPr id="8" name="Shape 6"/>
+          <p:cNvPr id="7" name="Shape 5"/>
           <p:cNvSpPr/>
           <p:nvPr/>
         </p:nvSpPr>
@@ -3726,7 +3619,7 @@
       </p:sp>
       <p:sp>
         <p:nvSpPr>
-          <p:cNvPr id="9" name="Text 7"/>
+          <p:cNvPr id="8" name="Text 6"/>
           <p:cNvSpPr txBox="1"/>
           <p:nvPr/>
         </p:nvSpPr>
@@ -3765,7 +3658,7 @@
       </p:sp>
       <p:sp>
         <p:nvSpPr>
-          <p:cNvPr id="10" name="Text 8"/>
+          <p:cNvPr id="9" name="Text 7"/>
           <p:cNvSpPr txBox="1"/>
           <p:nvPr/>
         </p:nvSpPr>
@@ -3804,7 +3697,7 @@
       </p:sp>
       <p:sp>
         <p:nvSpPr>
-          <p:cNvPr id="11" name="Shape 9"/>
+          <p:cNvPr id="10" name="Shape 8"/>
           <p:cNvSpPr/>
           <p:nvPr/>
         </p:nvSpPr>
@@ -3831,7 +3724,7 @@
       </p:sp>
       <p:sp>
         <p:nvSpPr>
-          <p:cNvPr id="12" name="Text 10"/>
+          <p:cNvPr id="11" name="Text 9"/>
           <p:cNvSpPr txBox="1"/>
           <p:nvPr/>
         </p:nvSpPr>
@@ -3870,7 +3763,7 @@
       </p:sp>
       <p:sp>
         <p:nvSpPr>
-          <p:cNvPr id="13" name="Text 11"/>
+          <p:cNvPr id="12" name="Text 10"/>
           <p:cNvSpPr txBox="1"/>
           <p:nvPr/>
         </p:nvSpPr>
@@ -3932,7 +3825,7 @@
       </p:sp>
       <p:sp>
         <p:nvSpPr>
-          <p:cNvPr id="14" name="Shape 12"/>
+          <p:cNvPr id="13" name="Shape 11"/>
           <p:cNvSpPr/>
           <p:nvPr/>
         </p:nvSpPr>
@@ -3959,7 +3852,7 @@
       </p:sp>
       <p:sp>
         <p:nvSpPr>
-          <p:cNvPr id="15" name="Text 13"/>
+          <p:cNvPr id="14" name="Text 12"/>
           <p:cNvSpPr txBox="1"/>
           <p:nvPr/>
         </p:nvSpPr>
@@ -3998,7 +3891,7 @@
       </p:sp>
       <p:sp>
         <p:nvSpPr>
-          <p:cNvPr id="16" name="Text 14"/>
+          <p:cNvPr id="15" name="Text 13"/>
           <p:cNvSpPr txBox="1"/>
           <p:nvPr/>
         </p:nvSpPr>
@@ -4098,8 +3991,8 @@
         </p:nvSpPr>
         <p:spPr>
           <a:xfrm>
-            <a:off x="640080" y="566928"/>
-            <a:ext cx="402336" cy="402336"/>
+            <a:off x="640080" y="512064"/>
+            <a:ext cx="420624" cy="420624"/>
           </a:xfrm>
           <a:prstGeom prst="ellipse">
             <a:avLst/>
@@ -4123,8 +4016,8 @@
         </p:nvSpPr>
         <p:spPr>
           <a:xfrm>
-            <a:off x="640080" y="566928"/>
-            <a:ext cx="402336" cy="402336"/>
+            <a:off x="640080" y="512064"/>
+            <a:ext cx="420624" cy="420624"/>
           </a:xfrm>
           <a:prstGeom prst="rect">
             <a:avLst/>
@@ -4140,7 +4033,7 @@
               <a:buNone/>
             </a:pPr>
             <a:r>
-              <a:rPr lang="en-US" sz="1150" b="1" dirty="0">
+              <a:rPr lang="en-US" sz="1200" b="1" dirty="0">
                 <a:solidFill>
                   <a:srgbClr val="FFFFFF"/>
                 </a:solidFill>
@@ -4150,7 +4043,7 @@
               </a:rPr>
               <a:t>04</a:t>
             </a:r>
-            <a:endParaRPr lang="en-US" sz="1150" dirty="0"/>
+            <a:endParaRPr lang="en-US" sz="1200" dirty="0"/>
           </a:p>
         </p:txBody>
       </p:sp>
@@ -4162,8 +4055,8 @@
         </p:nvSpPr>
         <p:spPr>
           <a:xfrm>
-            <a:off x="1225296" y="402336"/>
-            <a:ext cx="6400800" cy="228600"/>
+            <a:off x="1243584" y="475488"/>
+            <a:ext cx="10308031" cy="548640"/>
           </a:xfrm>
           <a:prstGeom prst="rect">
             <a:avLst/>
@@ -4179,17 +4072,17 @@
               <a:buNone/>
             </a:pPr>
             <a:r>
-              <a:rPr lang="en-US" sz="1050" b="1" spc="150" kern="0" dirty="0">
-                <a:solidFill>
-                  <a:srgbClr val="0F5A6B"/>
-                </a:solidFill>
-                <a:latin typeface="Meiryo" pitchFamily="34" charset="0"/>
-                <a:ea typeface="Meiryo" pitchFamily="34" charset="-122"/>
-                <a:cs typeface="Meiryo" pitchFamily="34" charset="-120"/>
-              </a:rPr>
-              <a:t>使 用 デ ー タ</a:t>
-            </a:r>
-            <a:endParaRPr lang="en-US" sz="1050" dirty="0"/>
+              <a:rPr lang="en-US" sz="2600" b="1" dirty="0">
+                <a:solidFill>
+                  <a:srgbClr val="1A2B33"/>
+                </a:solidFill>
+                <a:latin typeface="Meiryo" pitchFamily="34" charset="0"/>
+                <a:ea typeface="Meiryo" pitchFamily="34" charset="-122"/>
+                <a:cs typeface="Meiryo" pitchFamily="34" charset="-120"/>
+              </a:rPr>
+              <a:t>使用したデータ</a:t>
+            </a:r>
+            <a:endParaRPr lang="en-US" sz="2600" dirty="0"/>
           </a:p>
         </p:txBody>
       </p:sp>
@@ -4201,8 +4094,8 @@
         </p:nvSpPr>
         <p:spPr>
           <a:xfrm>
-            <a:off x="1225296" y="603504"/>
-            <a:ext cx="10326319" cy="548640"/>
+            <a:off x="1243584" y="1133856"/>
+            <a:ext cx="10308031" cy="384048"/>
           </a:xfrm>
           <a:prstGeom prst="rect">
             <a:avLst/>
@@ -4218,62 +4111,23 @@
               <a:buNone/>
             </a:pPr>
             <a:r>
-              <a:rPr lang="en-US" sz="2600" b="1" dirty="0">
-                <a:solidFill>
-                  <a:srgbClr val="1A2B33"/>
-                </a:solidFill>
-                <a:latin typeface="Meiryo" pitchFamily="34" charset="0"/>
-                <a:ea typeface="Meiryo" pitchFamily="34" charset="-122"/>
-                <a:cs typeface="Meiryo" pitchFamily="34" charset="-120"/>
-              </a:rPr>
-              <a:t>取引履歴（流動）から入出金テーブルを作成</a:t>
-            </a:r>
-            <a:endParaRPr lang="en-US" sz="2600" dirty="0"/>
+              <a:rPr lang="en-US" sz="1400" dirty="0">
+                <a:solidFill>
+                  <a:srgbClr val="465A63"/>
+                </a:solidFill>
+                <a:latin typeface="Meiryo" pitchFamily="34" charset="0"/>
+                <a:ea typeface="Meiryo" pitchFamily="34" charset="-122"/>
+                <a:cs typeface="Meiryo" pitchFamily="34" charset="-120"/>
+              </a:rPr>
+              <a:t>取引履歴（流動）をもとに作成された入出金テーブルを使用した</a:t>
+            </a:r>
+            <a:endParaRPr lang="en-US" sz="1400" dirty="0"/>
           </a:p>
         </p:txBody>
       </p:sp>
       <p:sp>
         <p:nvSpPr>
           <p:cNvPr id="6" name="Text 4"/>
-          <p:cNvSpPr txBox="1"/>
-          <p:nvPr/>
-        </p:nvSpPr>
-        <p:spPr>
-          <a:xfrm>
-            <a:off x="1225296" y="1170432"/>
-            <a:ext cx="10326319" cy="347472"/>
-          </a:xfrm>
-          <a:prstGeom prst="rect">
-            <a:avLst/>
-          </a:prstGeom>
-          <a:noFill/>
-          <a:ln/>
-        </p:spPr>
-        <p:txBody>
-          <a:bodyPr wrap="square" lIns="0" tIns="0" rIns="0" bIns="0" rtlCol="0" anchor="ctr"/>
-          <a:lstStyle/>
-          <a:p>
-            <a:pPr indent="0" marL="0">
-              <a:buNone/>
-            </a:pPr>
-            <a:r>
-              <a:rPr lang="en-US" sz="1250" dirty="0">
-                <a:solidFill>
-                  <a:srgbClr val="8497A0"/>
-                </a:solidFill>
-                <a:latin typeface="Meiryo" pitchFamily="34" charset="0"/>
-                <a:ea typeface="Meiryo" pitchFamily="34" charset="-122"/>
-                <a:cs typeface="Meiryo" pitchFamily="34" charset="-120"/>
-              </a:rPr>
-              <a:t>分析に使ったデータと、DYNATREKで扱える形にするまでの準備</a:t>
-            </a:r>
-            <a:endParaRPr lang="en-US" sz="1250" dirty="0"/>
-          </a:p>
-        </p:txBody>
-      </p:sp>
-      <p:sp>
-        <p:nvSpPr>
-          <p:cNvPr id="7" name="Text 5"/>
           <p:cNvSpPr txBox="1"/>
           <p:nvPr/>
         </p:nvSpPr>
@@ -4312,18 +4166,201 @@
       </p:sp>
       <p:sp>
         <p:nvSpPr>
-          <p:cNvPr id="8" name="Shape 6"/>
+          <p:cNvPr id="7" name="Shape 5"/>
           <p:cNvSpPr/>
           <p:nvPr/>
         </p:nvSpPr>
         <p:spPr>
           <a:xfrm>
             <a:off x="640080" y="1874520"/>
-            <a:ext cx="3246120" cy="1481328"/>
+            <a:ext cx="5989320" cy="2103120"/>
           </a:xfrm>
           <a:prstGeom prst="roundRect">
             <a:avLst>
-              <a:gd name="adj" fmla="val 3086"/>
+              <a:gd name="adj" fmla="val 2174"/>
+            </a:avLst>
+          </a:prstGeom>
+          <a:solidFill>
+            <a:srgbClr val="E2EEF0"/>
+          </a:solidFill>
+          <a:ln w="9525">
+            <a:solidFill>
+              <a:srgbClr val="E2EEF0"/>
+            </a:solidFill>
+            <a:prstDash val="solid"/>
+          </a:ln>
+        </p:spPr>
+      </p:sp>
+      <p:sp>
+        <p:nvSpPr>
+          <p:cNvPr id="8" name="Text 6"/>
+          <p:cNvSpPr txBox="1"/>
+          <p:nvPr/>
+        </p:nvSpPr>
+        <p:spPr>
+          <a:xfrm>
+            <a:off x="1005840" y="2103120"/>
+            <a:ext cx="5257800" cy="237744"/>
+          </a:xfrm>
+          <a:prstGeom prst="rect">
+            <a:avLst/>
+          </a:prstGeom>
+          <a:noFill/>
+          <a:ln/>
+        </p:spPr>
+        <p:txBody>
+          <a:bodyPr wrap="square" lIns="0" tIns="0" rIns="0" bIns="0" rtlCol="0" anchor="ctr"/>
+          <a:lstStyle/>
+          <a:p>
+            <a:pPr indent="0" marL="0">
+              <a:buNone/>
+            </a:pPr>
+            <a:r>
+              <a:rPr lang="en-US" sz="1050" b="1" spc="100" kern="0" dirty="0">
+                <a:solidFill>
+                  <a:srgbClr val="0F5A6B"/>
+                </a:solidFill>
+                <a:latin typeface="Meiryo" pitchFamily="34" charset="0"/>
+                <a:ea typeface="Meiryo" pitchFamily="34" charset="-122"/>
+                <a:cs typeface="Meiryo" pitchFamily="34" charset="-120"/>
+              </a:rPr>
+              <a:t>使 用 デ ー タ</a:t>
+            </a:r>
+            <a:endParaRPr lang="en-US" sz="1050" dirty="0"/>
+          </a:p>
+        </p:txBody>
+      </p:sp>
+      <p:sp>
+        <p:nvSpPr>
+          <p:cNvPr id="9" name="Text 7"/>
+          <p:cNvSpPr txBox="1"/>
+          <p:nvPr/>
+        </p:nvSpPr>
+        <p:spPr>
+          <a:xfrm>
+            <a:off x="1005840" y="2450592"/>
+            <a:ext cx="5257800" cy="457200"/>
+          </a:xfrm>
+          <a:prstGeom prst="rect">
+            <a:avLst/>
+          </a:prstGeom>
+          <a:noFill/>
+          <a:ln/>
+        </p:spPr>
+        <p:txBody>
+          <a:bodyPr wrap="square" lIns="0" tIns="0" rIns="0" bIns="0" rtlCol="0" anchor="ctr"/>
+          <a:lstStyle/>
+          <a:p>
+            <a:pPr indent="0" marL="0">
+              <a:buNone/>
+            </a:pPr>
+            <a:r>
+              <a:rPr lang="en-US" sz="2400" b="1" dirty="0">
+                <a:solidFill>
+                  <a:srgbClr val="0F5A6B"/>
+                </a:solidFill>
+                <a:latin typeface="Meiryo" pitchFamily="34" charset="0"/>
+                <a:ea typeface="Meiryo" pitchFamily="34" charset="-122"/>
+                <a:cs typeface="Meiryo" pitchFamily="34" charset="-120"/>
+              </a:rPr>
+              <a:t>入出金テーブル</a:t>
+            </a:r>
+            <a:endParaRPr lang="en-US" sz="2400" dirty="0"/>
+          </a:p>
+        </p:txBody>
+      </p:sp>
+      <p:sp>
+        <p:nvSpPr>
+          <p:cNvPr id="10" name="Text 8"/>
+          <p:cNvSpPr txBox="1"/>
+          <p:nvPr/>
+        </p:nvSpPr>
+        <p:spPr>
+          <a:xfrm>
+            <a:off x="1005840" y="3035808"/>
+            <a:ext cx="5257800" cy="310896"/>
+          </a:xfrm>
+          <a:prstGeom prst="rect">
+            <a:avLst/>
+          </a:prstGeom>
+          <a:noFill/>
+          <a:ln/>
+        </p:spPr>
+        <p:txBody>
+          <a:bodyPr wrap="square" lIns="0" tIns="0" rIns="0" bIns="0" rtlCol="0" anchor="ctr"/>
+          <a:lstStyle/>
+          <a:p>
+            <a:pPr indent="0" marL="0">
+              <a:buNone/>
+            </a:pPr>
+            <a:r>
+              <a:rPr lang="en-US" sz="1300" dirty="0">
+                <a:solidFill>
+                  <a:srgbClr val="0F5A6B"/>
+                </a:solidFill>
+                <a:latin typeface="Meiryo" pitchFamily="34" charset="0"/>
+                <a:ea typeface="Meiryo" pitchFamily="34" charset="-122"/>
+                <a:cs typeface="Meiryo" pitchFamily="34" charset="-120"/>
+              </a:rPr>
+              <a:t>取引履歴（流動）をもとに作成されたもの</a:t>
+            </a:r>
+            <a:endParaRPr lang="en-US" sz="1300" dirty="0"/>
+          </a:p>
+        </p:txBody>
+      </p:sp>
+      <p:sp>
+        <p:nvSpPr>
+          <p:cNvPr id="11" name="Text 9"/>
+          <p:cNvSpPr txBox="1"/>
+          <p:nvPr/>
+        </p:nvSpPr>
+        <p:spPr>
+          <a:xfrm>
+            <a:off x="1005840" y="3401568"/>
+            <a:ext cx="5257800" cy="310896"/>
+          </a:xfrm>
+          <a:prstGeom prst="rect">
+            <a:avLst/>
+          </a:prstGeom>
+          <a:noFill/>
+          <a:ln/>
+        </p:spPr>
+        <p:txBody>
+          <a:bodyPr wrap="square" lIns="0" tIns="0" rIns="0" bIns="0" rtlCol="0" anchor="ctr"/>
+          <a:lstStyle/>
+          <a:p>
+            <a:pPr indent="0" marL="0">
+              <a:buNone/>
+            </a:pPr>
+            <a:r>
+              <a:rPr lang="en-US" sz="1200" dirty="0">
+                <a:solidFill>
+                  <a:srgbClr val="465A63"/>
+                </a:solidFill>
+                <a:latin typeface="Meiryo" pitchFamily="34" charset="0"/>
+                <a:ea typeface="Meiryo" pitchFamily="34" charset="-122"/>
+                <a:cs typeface="Meiryo" pitchFamily="34" charset="-120"/>
+              </a:rPr>
+              <a:t>入出金の状況を、条件を指定して確認できる形になっている</a:t>
+            </a:r>
+            <a:endParaRPr lang="en-US" sz="1200" dirty="0"/>
+          </a:p>
+        </p:txBody>
+      </p:sp>
+      <p:sp>
+        <p:nvSpPr>
+          <p:cNvPr id="12" name="Shape 10"/>
+          <p:cNvSpPr/>
+          <p:nvPr/>
+        </p:nvSpPr>
+        <p:spPr>
+          <a:xfrm>
+            <a:off x="6967728" y="1874520"/>
+            <a:ext cx="4581144" cy="2103120"/>
+          </a:xfrm>
+          <a:prstGeom prst="roundRect">
+            <a:avLst>
+              <a:gd name="adj" fmla="val 2174"/>
             </a:avLst>
           </a:prstGeom>
           <a:solidFill>
@@ -4339,26 +4376,26 @@
       </p:sp>
       <p:sp>
         <p:nvSpPr>
-          <p:cNvPr id="9" name="Text 7"/>
-          <p:cNvSpPr txBox="1"/>
-          <p:nvPr/>
-        </p:nvSpPr>
-        <p:spPr>
-          <a:xfrm>
-            <a:off x="640080" y="2130552"/>
-            <a:ext cx="3246120" cy="237744"/>
-          </a:xfrm>
-          <a:prstGeom prst="rect">
-            <a:avLst/>
-          </a:prstGeom>
-          <a:noFill/>
-          <a:ln/>
-        </p:spPr>
-        <p:txBody>
-          <a:bodyPr wrap="square" lIns="0" tIns="0" rIns="0" bIns="0" rtlCol="0" anchor="ctr"/>
-          <a:lstStyle/>
-          <a:p>
-            <a:pPr algn="ctr" indent="0" marL="0">
+          <p:cNvPr id="13" name="Text 11"/>
+          <p:cNvSpPr txBox="1"/>
+          <p:nvPr/>
+        </p:nvSpPr>
+        <p:spPr>
+          <a:xfrm>
+            <a:off x="7296912" y="2103120"/>
+            <a:ext cx="3922776" cy="237744"/>
+          </a:xfrm>
+          <a:prstGeom prst="rect">
+            <a:avLst/>
+          </a:prstGeom>
+          <a:noFill/>
+          <a:ln/>
+        </p:spPr>
+        <p:txBody>
+          <a:bodyPr wrap="square" lIns="0" tIns="0" rIns="0" bIns="0" rtlCol="0" anchor="ctr"/>
+          <a:lstStyle/>
+          <a:p>
+            <a:pPr indent="0" marL="0">
               <a:buNone/>
             </a:pPr>
             <a:r>
@@ -4370,7 +4407,7 @@
                 <a:ea typeface="Meiryo" pitchFamily="34" charset="-122"/>
                 <a:cs typeface="Meiryo" pitchFamily="34" charset="-120"/>
               </a:rPr>
-              <a:t>元データ</a:t>
+              <a:t>対 象 期 間</a:t>
             </a:r>
             <a:endParaRPr lang="en-US" sz="1050" dirty="0"/>
           </a:p>
@@ -4378,412 +4415,18 @@
       </p:sp>
       <p:sp>
         <p:nvSpPr>
-          <p:cNvPr id="10" name="Text 8"/>
-          <p:cNvSpPr txBox="1"/>
-          <p:nvPr/>
-        </p:nvSpPr>
-        <p:spPr>
-          <a:xfrm>
-            <a:off x="822960" y="2496312"/>
-            <a:ext cx="2880360" cy="640080"/>
-          </a:xfrm>
-          <a:prstGeom prst="rect">
-            <a:avLst/>
-          </a:prstGeom>
-          <a:noFill/>
-          <a:ln/>
-        </p:spPr>
-        <p:txBody>
-          <a:bodyPr wrap="square" lIns="0" tIns="0" rIns="0" bIns="0" rtlCol="0" anchor="ctr"/>
-          <a:lstStyle/>
-          <a:p>
-            <a:pPr algn="ctr" indent="0" marL="0">
-              <a:lnSpc>
-                <a:spcPts val="2200"/>
-              </a:lnSpc>
-              <a:buNone/>
-            </a:pPr>
-            <a:r>
-              <a:rPr lang="en-US" sz="1500" b="1" dirty="0">
-                <a:solidFill>
-                  <a:srgbClr val="1A2B33"/>
-                </a:solidFill>
-                <a:latin typeface="Meiryo" pitchFamily="34" charset="0"/>
-                <a:ea typeface="Meiryo" pitchFamily="34" charset="-122"/>
-                <a:cs typeface="Meiryo" pitchFamily="34" charset="-120"/>
-              </a:rPr>
-              <a:t>取引履歴（流動）</a:t>
-            </a:r>
-            <a:endParaRPr lang="en-US" sz="1500" dirty="0"/>
-          </a:p>
-        </p:txBody>
-      </p:sp>
-      <p:sp>
-        <p:nvSpPr>
-          <p:cNvPr id="11" name="Shape 9"/>
+          <p:cNvPr id="14" name="Shape 12"/>
           <p:cNvSpPr/>
           <p:nvPr/>
         </p:nvSpPr>
         <p:spPr>
           <a:xfrm>
-            <a:off x="4050792" y="2505456"/>
-            <a:ext cx="256032" cy="219456"/>
-          </a:xfrm>
-          <a:prstGeom prst="rightArrow">
-            <a:avLst/>
-          </a:prstGeom>
-          <a:solidFill>
-            <a:srgbClr val="C2CFD3"/>
-          </a:solidFill>
-          <a:ln w="12700">
-            <a:solidFill>
-              <a:srgbClr val="C2CFD3"/>
-            </a:solidFill>
-            <a:prstDash val="solid"/>
-          </a:ln>
-        </p:spPr>
-      </p:sp>
-      <p:sp>
-        <p:nvSpPr>
-          <p:cNvPr id="12" name="Shape 10"/>
-          <p:cNvSpPr/>
-          <p:nvPr/>
-        </p:nvSpPr>
-        <p:spPr>
-          <a:xfrm>
-            <a:off x="4471416" y="1874520"/>
-            <a:ext cx="3246120" cy="1481328"/>
+            <a:off x="7296912" y="2450592"/>
+            <a:ext cx="3922776" cy="585216"/>
           </a:xfrm>
           <a:prstGeom prst="roundRect">
             <a:avLst>
-              <a:gd name="adj" fmla="val 3086"/>
-            </a:avLst>
-          </a:prstGeom>
-          <a:solidFill>
-            <a:srgbClr val="F3F6F7"/>
-          </a:solidFill>
-          <a:ln w="9525">
-            <a:solidFill>
-              <a:srgbClr val="F3F6F7"/>
-            </a:solidFill>
-            <a:prstDash val="solid"/>
-          </a:ln>
-        </p:spPr>
-      </p:sp>
-      <p:sp>
-        <p:nvSpPr>
-          <p:cNvPr id="13" name="Text 11"/>
-          <p:cNvSpPr txBox="1"/>
-          <p:nvPr/>
-        </p:nvSpPr>
-        <p:spPr>
-          <a:xfrm>
-            <a:off x="4471416" y="2130552"/>
-            <a:ext cx="3246120" cy="237744"/>
-          </a:xfrm>
-          <a:prstGeom prst="rect">
-            <a:avLst/>
-          </a:prstGeom>
-          <a:noFill/>
-          <a:ln/>
-        </p:spPr>
-        <p:txBody>
-          <a:bodyPr wrap="square" lIns="0" tIns="0" rIns="0" bIns="0" rtlCol="0" anchor="ctr"/>
-          <a:lstStyle/>
-          <a:p>
-            <a:pPr algn="ctr" indent="0" marL="0">
-              <a:buNone/>
-            </a:pPr>
-            <a:r>
-              <a:rPr lang="en-US" sz="1050" b="1" spc="100" kern="0" dirty="0">
-                <a:solidFill>
-                  <a:srgbClr val="8497A0"/>
-                </a:solidFill>
-                <a:latin typeface="Meiryo" pitchFamily="34" charset="0"/>
-                <a:ea typeface="Meiryo" pitchFamily="34" charset="-122"/>
-                <a:cs typeface="Meiryo" pitchFamily="34" charset="-120"/>
-              </a:rPr>
-              <a:t>作成したもの</a:t>
-            </a:r>
-            <a:endParaRPr lang="en-US" sz="1050" dirty="0"/>
-          </a:p>
-        </p:txBody>
-      </p:sp>
-      <p:sp>
-        <p:nvSpPr>
-          <p:cNvPr id="14" name="Text 12"/>
-          <p:cNvSpPr txBox="1"/>
-          <p:nvPr/>
-        </p:nvSpPr>
-        <p:spPr>
-          <a:xfrm>
-            <a:off x="4654296" y="2496312"/>
-            <a:ext cx="2880360" cy="640080"/>
-          </a:xfrm>
-          <a:prstGeom prst="rect">
-            <a:avLst/>
-          </a:prstGeom>
-          <a:noFill/>
-          <a:ln/>
-        </p:spPr>
-        <p:txBody>
-          <a:bodyPr wrap="square" lIns="0" tIns="0" rIns="0" bIns="0" rtlCol="0" anchor="ctr"/>
-          <a:lstStyle/>
-          <a:p>
-            <a:pPr algn="ctr" indent="0" marL="0">
-              <a:lnSpc>
-                <a:spcPts val="2200"/>
-              </a:lnSpc>
-              <a:buNone/>
-            </a:pPr>
-            <a:r>
-              <a:rPr lang="en-US" sz="1500" b="1" dirty="0">
-                <a:solidFill>
-                  <a:srgbClr val="1A2B33"/>
-                </a:solidFill>
-                <a:latin typeface="Meiryo" pitchFamily="34" charset="0"/>
-                <a:ea typeface="Meiryo" pitchFamily="34" charset="-122"/>
-                <a:cs typeface="Meiryo" pitchFamily="34" charset="-120"/>
-              </a:rPr>
-              <a:t>入出金テーブル</a:t>
-            </a:r>
-            <a:endParaRPr lang="en-US" sz="1500" dirty="0"/>
-          </a:p>
-        </p:txBody>
-      </p:sp>
-      <p:sp>
-        <p:nvSpPr>
-          <p:cNvPr id="15" name="Shape 13"/>
-          <p:cNvSpPr/>
-          <p:nvPr/>
-        </p:nvSpPr>
-        <p:spPr>
-          <a:xfrm>
-            <a:off x="7882128" y="2505456"/>
-            <a:ext cx="256032" cy="219456"/>
-          </a:xfrm>
-          <a:prstGeom prst="rightArrow">
-            <a:avLst/>
-          </a:prstGeom>
-          <a:solidFill>
-            <a:srgbClr val="C2CFD3"/>
-          </a:solidFill>
-          <a:ln w="12700">
-            <a:solidFill>
-              <a:srgbClr val="C2CFD3"/>
-            </a:solidFill>
-            <a:prstDash val="solid"/>
-          </a:ln>
-        </p:spPr>
-      </p:sp>
-      <p:sp>
-        <p:nvSpPr>
-          <p:cNvPr id="16" name="Shape 14"/>
-          <p:cNvSpPr/>
-          <p:nvPr/>
-        </p:nvSpPr>
-        <p:spPr>
-          <a:xfrm>
-            <a:off x="8302752" y="1874520"/>
-            <a:ext cx="3246120" cy="1481328"/>
-          </a:xfrm>
-          <a:prstGeom prst="roundRect">
-            <a:avLst>
-              <a:gd name="adj" fmla="val 3086"/>
-            </a:avLst>
-          </a:prstGeom>
-          <a:solidFill>
-            <a:srgbClr val="E2EEF0"/>
-          </a:solidFill>
-          <a:ln w="9525">
-            <a:solidFill>
-              <a:srgbClr val="E2EEF0"/>
-            </a:solidFill>
-            <a:prstDash val="solid"/>
-          </a:ln>
-        </p:spPr>
-      </p:sp>
-      <p:sp>
-        <p:nvSpPr>
-          <p:cNvPr id="17" name="Text 15"/>
-          <p:cNvSpPr txBox="1"/>
-          <p:nvPr/>
-        </p:nvSpPr>
-        <p:spPr>
-          <a:xfrm>
-            <a:off x="8302752" y="2130552"/>
-            <a:ext cx="3246120" cy="237744"/>
-          </a:xfrm>
-          <a:prstGeom prst="rect">
-            <a:avLst/>
-          </a:prstGeom>
-          <a:noFill/>
-          <a:ln/>
-        </p:spPr>
-        <p:txBody>
-          <a:bodyPr wrap="square" lIns="0" tIns="0" rIns="0" bIns="0" rtlCol="0" anchor="ctr"/>
-          <a:lstStyle/>
-          <a:p>
-            <a:pPr algn="ctr" indent="0" marL="0">
-              <a:buNone/>
-            </a:pPr>
-            <a:r>
-              <a:rPr lang="en-US" sz="1050" b="1" spc="100" kern="0" dirty="0">
-                <a:solidFill>
-                  <a:srgbClr val="0F5A6B"/>
-                </a:solidFill>
-                <a:latin typeface="Meiryo" pitchFamily="34" charset="0"/>
-                <a:ea typeface="Meiryo" pitchFamily="34" charset="-122"/>
-                <a:cs typeface="Meiryo" pitchFamily="34" charset="-120"/>
-              </a:rPr>
-              <a:t>分 析</a:t>
-            </a:r>
-            <a:endParaRPr lang="en-US" sz="1050" dirty="0"/>
-          </a:p>
-        </p:txBody>
-      </p:sp>
-      <p:sp>
-        <p:nvSpPr>
-          <p:cNvPr id="18" name="Text 16"/>
-          <p:cNvSpPr txBox="1"/>
-          <p:nvPr/>
-        </p:nvSpPr>
-        <p:spPr>
-          <a:xfrm>
-            <a:off x="8485632" y="2496312"/>
-            <a:ext cx="2880360" cy="640080"/>
-          </a:xfrm>
-          <a:prstGeom prst="rect">
-            <a:avLst/>
-          </a:prstGeom>
-          <a:noFill/>
-          <a:ln/>
-        </p:spPr>
-        <p:txBody>
-          <a:bodyPr wrap="square" lIns="0" tIns="0" rIns="0" bIns="0" rtlCol="0" anchor="ctr"/>
-          <a:lstStyle/>
-          <a:p>
-            <a:pPr algn="ctr" indent="0" marL="0">
-              <a:lnSpc>
-                <a:spcPts val="2200"/>
-              </a:lnSpc>
-              <a:buNone/>
-            </a:pPr>
-            <a:r>
-              <a:rPr lang="en-US" sz="1500" b="1" dirty="0">
-                <a:solidFill>
-                  <a:srgbClr val="0F5A6B"/>
-                </a:solidFill>
-                <a:latin typeface="Meiryo" pitchFamily="34" charset="0"/>
-                <a:ea typeface="Meiryo" pitchFamily="34" charset="-122"/>
-                <a:cs typeface="Meiryo" pitchFamily="34" charset="-120"/>
-              </a:rPr>
-              <a:t>DYNATREKで</a:t>
-            </a:r>
-            <a:endParaRPr lang="en-US" sz="1500" dirty="0"/>
-          </a:p>
-          <a:p>
-            <a:pPr algn="ctr" indent="0" marL="0">
-              <a:lnSpc>
-                <a:spcPts val="2200"/>
-              </a:lnSpc>
-              <a:buNone/>
-            </a:pPr>
-            <a:r>
-              <a:rPr lang="en-US" sz="1500" b="1" dirty="0">
-                <a:solidFill>
-                  <a:srgbClr val="0F5A6B"/>
-                </a:solidFill>
-                <a:latin typeface="Meiryo" pitchFamily="34" charset="0"/>
-                <a:ea typeface="Meiryo" pitchFamily="34" charset="-122"/>
-                <a:cs typeface="Meiryo" pitchFamily="34" charset="-120"/>
-              </a:rPr>
-              <a:t>条件を指定して集計</a:t>
-            </a:r>
-            <a:endParaRPr lang="en-US" sz="1500" dirty="0"/>
-          </a:p>
-        </p:txBody>
-      </p:sp>
-      <p:sp>
-        <p:nvSpPr>
-          <p:cNvPr id="19" name="Shape 17"/>
-          <p:cNvSpPr/>
-          <p:nvPr/>
-        </p:nvSpPr>
-        <p:spPr>
-          <a:xfrm>
-            <a:off x="640080" y="3703320"/>
-            <a:ext cx="10911535" cy="1097280"/>
-          </a:xfrm>
-          <a:prstGeom prst="roundRect">
-            <a:avLst>
-              <a:gd name="adj" fmla="val 4167"/>
-            </a:avLst>
-          </a:prstGeom>
-          <a:solidFill>
-            <a:srgbClr val="F3F6F7"/>
-          </a:solidFill>
-          <a:ln w="9525">
-            <a:solidFill>
-              <a:srgbClr val="F3F6F7"/>
-            </a:solidFill>
-            <a:prstDash val="solid"/>
-          </a:ln>
-        </p:spPr>
-      </p:sp>
-      <p:sp>
-        <p:nvSpPr>
-          <p:cNvPr id="20" name="Text 18"/>
-          <p:cNvSpPr txBox="1"/>
-          <p:nvPr/>
-        </p:nvSpPr>
-        <p:spPr>
-          <a:xfrm>
-            <a:off x="1005840" y="3913632"/>
-            <a:ext cx="1737360" cy="237744"/>
-          </a:xfrm>
-          <a:prstGeom prst="rect">
-            <a:avLst/>
-          </a:prstGeom>
-          <a:noFill/>
-          <a:ln/>
-        </p:spPr>
-        <p:txBody>
-          <a:bodyPr wrap="square" lIns="0" tIns="0" rIns="0" bIns="0" rtlCol="0" anchor="ctr"/>
-          <a:lstStyle/>
-          <a:p>
-            <a:pPr indent="0" marL="0">
-              <a:buNone/>
-            </a:pPr>
-            <a:r>
-              <a:rPr lang="en-US" sz="1050" b="1" spc="100" kern="0" dirty="0">
-                <a:solidFill>
-                  <a:srgbClr val="8497A0"/>
-                </a:solidFill>
-                <a:latin typeface="Meiryo" pitchFamily="34" charset="0"/>
-                <a:ea typeface="Meiryo" pitchFamily="34" charset="-122"/>
-                <a:cs typeface="Meiryo" pitchFamily="34" charset="-120"/>
-              </a:rPr>
-              <a:t>対 象 期 間</a:t>
-            </a:r>
-            <a:endParaRPr lang="en-US" sz="1050" dirty="0"/>
-          </a:p>
-        </p:txBody>
-      </p:sp>
-      <p:sp>
-        <p:nvSpPr>
-          <p:cNvPr id="21" name="Shape 19"/>
-          <p:cNvSpPr/>
-          <p:nvPr/>
-        </p:nvSpPr>
-        <p:spPr>
-          <a:xfrm>
-            <a:off x="3063240" y="3913632"/>
-            <a:ext cx="3566160" cy="658368"/>
-          </a:xfrm>
-          <a:prstGeom prst="roundRect">
-            <a:avLst>
-              <a:gd name="adj" fmla="val 6944"/>
+              <a:gd name="adj" fmla="val 7813"/>
             </a:avLst>
           </a:prstGeom>
           <a:solidFill>
@@ -4799,14 +4442,14 @@
       </p:sp>
       <p:sp>
         <p:nvSpPr>
-          <p:cNvPr id="22" name="Text 20"/>
-          <p:cNvSpPr txBox="1"/>
-          <p:nvPr/>
-        </p:nvSpPr>
-        <p:spPr>
-          <a:xfrm>
-            <a:off x="3063240" y="3913632"/>
-            <a:ext cx="3566160" cy="658368"/>
+          <p:cNvPr id="15" name="Text 13"/>
+          <p:cNvSpPr txBox="1"/>
+          <p:nvPr/>
+        </p:nvSpPr>
+        <p:spPr>
+          <a:xfrm>
+            <a:off x="7296912" y="2450592"/>
+            <a:ext cx="3922776" cy="585216"/>
           </a:xfrm>
           <a:prstGeom prst="rect">
             <a:avLst/>
@@ -4838,18 +4481,18 @@
       </p:sp>
       <p:sp>
         <p:nvSpPr>
-          <p:cNvPr id="23" name="Shape 21"/>
+          <p:cNvPr id="16" name="Shape 14"/>
           <p:cNvSpPr/>
           <p:nvPr/>
         </p:nvSpPr>
         <p:spPr>
           <a:xfrm>
-            <a:off x="6995160" y="3913632"/>
-            <a:ext cx="3566160" cy="658368"/>
+            <a:off x="7296912" y="3145536"/>
+            <a:ext cx="3922776" cy="585216"/>
           </a:xfrm>
           <a:prstGeom prst="roundRect">
             <a:avLst>
-              <a:gd name="adj" fmla="val 6944"/>
+              <a:gd name="adj" fmla="val 7813"/>
             </a:avLst>
           </a:prstGeom>
           <a:solidFill>
@@ -4865,14 +4508,14 @@
       </p:sp>
       <p:sp>
         <p:nvSpPr>
-          <p:cNvPr id="24" name="Text 22"/>
-          <p:cNvSpPr txBox="1"/>
-          <p:nvPr/>
-        </p:nvSpPr>
-        <p:spPr>
-          <a:xfrm>
-            <a:off x="6995160" y="3913632"/>
-            <a:ext cx="3566160" cy="658368"/>
+          <p:cNvPr id="17" name="Text 15"/>
+          <p:cNvSpPr txBox="1"/>
+          <p:nvPr/>
+        </p:nvSpPr>
+        <p:spPr>
+          <a:xfrm>
+            <a:off x="7296912" y="3145536"/>
+            <a:ext cx="3922776" cy="585216"/>
           </a:xfrm>
           <a:prstGeom prst="rect">
             <a:avLst/>
@@ -4904,18 +4547,18 @@
       </p:sp>
       <p:sp>
         <p:nvSpPr>
-          <p:cNvPr id="25" name="Shape 23"/>
+          <p:cNvPr id="18" name="Shape 16"/>
           <p:cNvSpPr/>
           <p:nvPr/>
         </p:nvSpPr>
         <p:spPr>
           <a:xfrm>
-            <a:off x="640080" y="5120640"/>
-            <a:ext cx="10911535" cy="914400"/>
+            <a:off x="640080" y="4251960"/>
+            <a:ext cx="10911535" cy="960120"/>
           </a:xfrm>
           <a:prstGeom prst="roundRect">
             <a:avLst>
-              <a:gd name="adj" fmla="val 5000"/>
+              <a:gd name="adj" fmla="val 4762"/>
             </a:avLst>
           </a:prstGeom>
           <a:solidFill>
@@ -4931,13 +4574,13 @@
       </p:sp>
       <p:sp>
         <p:nvSpPr>
-          <p:cNvPr id="26" name="Text 24"/>
-          <p:cNvSpPr txBox="1"/>
-          <p:nvPr/>
-        </p:nvSpPr>
-        <p:spPr>
-          <a:xfrm>
-            <a:off x="859536" y="5257800"/>
+          <p:cNvPr id="19" name="Text 17"/>
+          <p:cNvSpPr txBox="1"/>
+          <p:nvPr/>
+        </p:nvSpPr>
+        <p:spPr>
+          <a:xfrm>
+            <a:off x="859536" y="4389120"/>
             <a:ext cx="10472623" cy="237744"/>
           </a:xfrm>
           <a:prstGeom prst="rect">
@@ -4970,14 +4613,14 @@
       </p:sp>
       <p:sp>
         <p:nvSpPr>
-          <p:cNvPr id="27" name="Text 25"/>
-          <p:cNvSpPr txBox="1"/>
-          <p:nvPr/>
-        </p:nvSpPr>
-        <p:spPr>
-          <a:xfrm>
-            <a:off x="859536" y="5522976"/>
-            <a:ext cx="10472623" cy="384048"/>
+          <p:cNvPr id="20" name="Text 18"/>
+          <p:cNvSpPr txBox="1"/>
+          <p:nvPr/>
+        </p:nvSpPr>
+        <p:spPr>
+          <a:xfrm>
+            <a:off x="859536" y="4654296"/>
+            <a:ext cx="10472623" cy="429768"/>
           </a:xfrm>
           <a:prstGeom prst="rect">
             <a:avLst/>
@@ -5004,9 +4647,75 @@
                 <a:ea typeface="Meiryo" pitchFamily="34" charset="-122"/>
                 <a:cs typeface="Meiryo" pitchFamily="34" charset="-120"/>
               </a:rPr>
-              <a:t>入出金テーブルに持たせた主な項目（例：日付／チャネル／取引種別／年代 など、実際に使ったものを記載）</a:t>
+              <a:t>入出金テーブルの主な項目（例：日付／チャネル／取引種別／年代 など、実際に使ったものを記載）</a:t>
             </a:r>
             <a:endParaRPr lang="en-US" sz="1150" dirty="0"/>
+          </a:p>
+        </p:txBody>
+      </p:sp>
+      <p:sp>
+        <p:nvSpPr>
+          <p:cNvPr id="21" name="Shape 19"/>
+          <p:cNvSpPr/>
+          <p:nvPr/>
+        </p:nvSpPr>
+        <p:spPr>
+          <a:xfrm>
+            <a:off x="640080" y="5486400"/>
+            <a:ext cx="10911535" cy="566928"/>
+          </a:xfrm>
+          <a:prstGeom prst="roundRect">
+            <a:avLst>
+              <a:gd name="adj" fmla="val 8065"/>
+            </a:avLst>
+          </a:prstGeom>
+          <a:solidFill>
+            <a:srgbClr val="F3F6F7"/>
+          </a:solidFill>
+          <a:ln w="12700">
+            <a:solidFill>
+              <a:srgbClr val="F3F6F7"/>
+            </a:solidFill>
+            <a:prstDash val="solid"/>
+          </a:ln>
+        </p:spPr>
+      </p:sp>
+      <p:sp>
+        <p:nvSpPr>
+          <p:cNvPr id="22" name="Text 20"/>
+          <p:cNvSpPr txBox="1"/>
+          <p:nvPr/>
+        </p:nvSpPr>
+        <p:spPr>
+          <a:xfrm>
+            <a:off x="914400" y="5486400"/>
+            <a:ext cx="10362895" cy="566928"/>
+          </a:xfrm>
+          <a:prstGeom prst="rect">
+            <a:avLst/>
+          </a:prstGeom>
+          <a:noFill/>
+          <a:ln/>
+        </p:spPr>
+        <p:txBody>
+          <a:bodyPr wrap="square" lIns="0" tIns="0" rIns="0" bIns="0" rtlCol="0" anchor="ctr"/>
+          <a:lstStyle/>
+          <a:p>
+            <a:pPr algn="ctr" indent="0" marL="0">
+              <a:buNone/>
+            </a:pPr>
+            <a:r>
+              <a:rPr lang="en-US" sz="1400" b="1" dirty="0">
+                <a:solidFill>
+                  <a:srgbClr val="1A2B33"/>
+                </a:solidFill>
+                <a:latin typeface="Meiryo" pitchFamily="34" charset="0"/>
+                <a:ea typeface="Meiryo" pitchFamily="34" charset="-122"/>
+                <a:cs typeface="Meiryo" pitchFamily="34" charset="-120"/>
+              </a:rPr>
+              <a:t>このテーブルに対して、DYNATREKで条件を指定して集計する</a:t>
+            </a:r>
+            <a:endParaRPr lang="en-US" sz="1400" dirty="0"/>
           </a:p>
         </p:txBody>
       </p:sp>
@@ -5050,8 +4759,8 @@
         </p:nvSpPr>
         <p:spPr>
           <a:xfrm>
-            <a:off x="640080" y="566928"/>
-            <a:ext cx="402336" cy="402336"/>
+            <a:off x="640080" y="512064"/>
+            <a:ext cx="420624" cy="420624"/>
           </a:xfrm>
           <a:prstGeom prst="ellipse">
             <a:avLst/>
@@ -5075,8 +4784,8 @@
         </p:nvSpPr>
         <p:spPr>
           <a:xfrm>
-            <a:off x="640080" y="566928"/>
-            <a:ext cx="402336" cy="402336"/>
+            <a:off x="640080" y="512064"/>
+            <a:ext cx="420624" cy="420624"/>
           </a:xfrm>
           <a:prstGeom prst="rect">
             <a:avLst/>
@@ -5092,7 +4801,7 @@
               <a:buNone/>
             </a:pPr>
             <a:r>
-              <a:rPr lang="en-US" sz="1150" b="1" dirty="0">
+              <a:rPr lang="en-US" sz="1200" b="1" dirty="0">
                 <a:solidFill>
                   <a:srgbClr val="FFFFFF"/>
                 </a:solidFill>
@@ -5102,7 +4811,7 @@
               </a:rPr>
               <a:t>05</a:t>
             </a:r>
-            <a:endParaRPr lang="en-US" sz="1150" dirty="0"/>
+            <a:endParaRPr lang="en-US" sz="1200" dirty="0"/>
           </a:p>
         </p:txBody>
       </p:sp>
@@ -5114,8 +4823,8 @@
         </p:nvSpPr>
         <p:spPr>
           <a:xfrm>
-            <a:off x="1225296" y="402336"/>
-            <a:ext cx="6400800" cy="228600"/>
+            <a:off x="1243584" y="475488"/>
+            <a:ext cx="10308031" cy="548640"/>
           </a:xfrm>
           <a:prstGeom prst="rect">
             <a:avLst/>
@@ -5131,17 +4840,17 @@
               <a:buNone/>
             </a:pPr>
             <a:r>
-              <a:rPr lang="en-US" sz="1050" b="1" spc="150" kern="0" dirty="0">
-                <a:solidFill>
-                  <a:srgbClr val="0F5A6B"/>
-                </a:solidFill>
-                <a:latin typeface="Meiryo" pitchFamily="34" charset="0"/>
-                <a:ea typeface="Meiryo" pitchFamily="34" charset="-122"/>
-                <a:cs typeface="Meiryo" pitchFamily="34" charset="-120"/>
-              </a:rPr>
-              <a:t>分 析 方 法</a:t>
-            </a:r>
-            <a:endParaRPr lang="en-US" sz="1050" dirty="0"/>
+              <a:rPr lang="en-US" sz="2600" b="1" dirty="0">
+                <a:solidFill>
+                  <a:srgbClr val="1A2B33"/>
+                </a:solidFill>
+                <a:latin typeface="Meiryo" pitchFamily="34" charset="0"/>
+                <a:ea typeface="Meiryo" pitchFamily="34" charset="-122"/>
+                <a:cs typeface="Meiryo" pitchFamily="34" charset="-120"/>
+              </a:rPr>
+              <a:t>分析方法</a:t>
+            </a:r>
+            <a:endParaRPr lang="en-US" sz="2600" dirty="0"/>
           </a:p>
         </p:txBody>
       </p:sp>
@@ -5153,8 +4862,8 @@
         </p:nvSpPr>
         <p:spPr>
           <a:xfrm>
-            <a:off x="1225296" y="603504"/>
-            <a:ext cx="10326319" cy="548640"/>
+            <a:off x="1243584" y="1133856"/>
+            <a:ext cx="10308031" cy="384048"/>
           </a:xfrm>
           <a:prstGeom prst="rect">
             <a:avLst/>
@@ -5170,62 +4879,23 @@
               <a:buNone/>
             </a:pPr>
             <a:r>
-              <a:rPr lang="en-US" sz="2600" b="1" dirty="0">
-                <a:solidFill>
-                  <a:srgbClr val="1A2B33"/>
-                </a:solidFill>
-                <a:latin typeface="Meiryo" pitchFamily="34" charset="0"/>
-                <a:ea typeface="Meiryo" pitchFamily="34" charset="-122"/>
-                <a:cs typeface="Meiryo" pitchFamily="34" charset="-120"/>
-              </a:rPr>
-              <a:t>条件を指定して必要な集計を取り出す</a:t>
-            </a:r>
-            <a:endParaRPr lang="en-US" sz="2600" dirty="0"/>
+              <a:rPr lang="en-US" sz="1400" dirty="0">
+                <a:solidFill>
+                  <a:srgbClr val="465A63"/>
+                </a:solidFill>
+                <a:latin typeface="Meiryo" pitchFamily="34" charset="0"/>
+                <a:ea typeface="Meiryo" pitchFamily="34" charset="-122"/>
+                <a:cs typeface="Meiryo" pitchFamily="34" charset="-120"/>
+              </a:rPr>
+              <a:t>入出金テーブルに条件を指定するだけで、必要な集計を取り出せる</a:t>
+            </a:r>
+            <a:endParaRPr lang="en-US" sz="1400" dirty="0"/>
           </a:p>
         </p:txBody>
       </p:sp>
       <p:sp>
         <p:nvSpPr>
           <p:cNvPr id="6" name="Text 4"/>
-          <p:cNvSpPr txBox="1"/>
-          <p:nvPr/>
-        </p:nvSpPr>
-        <p:spPr>
-          <a:xfrm>
-            <a:off x="1225296" y="1170432"/>
-            <a:ext cx="10326319" cy="347472"/>
-          </a:xfrm>
-          <a:prstGeom prst="rect">
-            <a:avLst/>
-          </a:prstGeom>
-          <a:noFill/>
-          <a:ln/>
-        </p:spPr>
-        <p:txBody>
-          <a:bodyPr wrap="square" lIns="0" tIns="0" rIns="0" bIns="0" rtlCol="0" anchor="ctr"/>
-          <a:lstStyle/>
-          <a:p>
-            <a:pPr indent="0" marL="0">
-              <a:buNone/>
-            </a:pPr>
-            <a:r>
-              <a:rPr lang="en-US" sz="1250" dirty="0">
-                <a:solidFill>
-                  <a:srgbClr val="8497A0"/>
-                </a:solidFill>
-                <a:latin typeface="Meiryo" pitchFamily="34" charset="0"/>
-                <a:ea typeface="Meiryo" pitchFamily="34" charset="-122"/>
-                <a:cs typeface="Meiryo" pitchFamily="34" charset="-120"/>
-              </a:rPr>
-              <a:t>作成した入出金テーブルに対し、画面上で条件を指定するだけで集計結果が得られる</a:t>
-            </a:r>
-            <a:endParaRPr lang="en-US" sz="1250" dirty="0"/>
-          </a:p>
-        </p:txBody>
-      </p:sp>
-      <p:sp>
-        <p:nvSpPr>
-          <p:cNvPr id="7" name="Text 5"/>
           <p:cNvSpPr txBox="1"/>
           <p:nvPr/>
         </p:nvSpPr>
@@ -5264,7 +4934,7 @@
       </p:sp>
       <p:sp>
         <p:nvSpPr>
-          <p:cNvPr id="8" name="Shape 6"/>
+          <p:cNvPr id="7" name="Shape 5"/>
           <p:cNvSpPr/>
           <p:nvPr/>
         </p:nvSpPr>
@@ -5291,7 +4961,7 @@
       </p:sp>
       <p:sp>
         <p:nvSpPr>
-          <p:cNvPr id="9" name="Text 7"/>
+          <p:cNvPr id="8" name="Text 6"/>
           <p:cNvSpPr txBox="1"/>
           <p:nvPr/>
         </p:nvSpPr>
@@ -5330,14 +5000,14 @@
       </p:sp>
       <p:sp>
         <p:nvSpPr>
-          <p:cNvPr id="10" name="Text 8"/>
+          <p:cNvPr id="9" name="Text 7"/>
           <p:cNvSpPr txBox="1"/>
           <p:nvPr/>
         </p:nvSpPr>
         <p:spPr>
           <a:xfrm>
             <a:off x="914400" y="3300984"/>
-            <a:ext cx="4480560" cy="685800"/>
+            <a:ext cx="4480560" cy="713232"/>
           </a:xfrm>
           <a:prstGeom prst="rect">
             <a:avLst/>
@@ -5392,7 +5062,7 @@
       </p:sp>
       <p:sp>
         <p:nvSpPr>
-          <p:cNvPr id="11" name="Shape 9"/>
+          <p:cNvPr id="10" name="Shape 8"/>
           <p:cNvSpPr/>
           <p:nvPr/>
         </p:nvSpPr>
@@ -5419,7 +5089,7 @@
       </p:sp>
       <p:sp>
         <p:nvSpPr>
-          <p:cNvPr id="12" name="Text 10"/>
+          <p:cNvPr id="11" name="Text 9"/>
           <p:cNvSpPr txBox="1"/>
           <p:nvPr/>
         </p:nvSpPr>
@@ -5458,14 +5128,14 @@
       </p:sp>
       <p:sp>
         <p:nvSpPr>
-          <p:cNvPr id="13" name="Text 11"/>
+          <p:cNvPr id="12" name="Text 10"/>
           <p:cNvSpPr txBox="1"/>
           <p:nvPr/>
         </p:nvSpPr>
         <p:spPr>
           <a:xfrm>
             <a:off x="6796735" y="3300984"/>
-            <a:ext cx="4480560" cy="685800"/>
+            <a:ext cx="4480560" cy="713232"/>
           </a:xfrm>
           <a:prstGeom prst="rect">
             <a:avLst/>
@@ -5500,7 +5170,7 @@
       </p:sp>
       <p:sp>
         <p:nvSpPr>
-          <p:cNvPr id="14" name="Shape 12"/>
+          <p:cNvPr id="13" name="Shape 11"/>
           <p:cNvSpPr/>
           <p:nvPr/>
         </p:nvSpPr>
@@ -5525,7 +5195,7 @@
       </p:sp>
       <p:sp>
         <p:nvSpPr>
-          <p:cNvPr id="15" name="Text 13"/>
+          <p:cNvPr id="14" name="Text 12"/>
           <p:cNvSpPr txBox="1"/>
           <p:nvPr/>
         </p:nvSpPr>
@@ -5564,7 +5234,7 @@
       </p:sp>
       <p:sp>
         <p:nvSpPr>
-          <p:cNvPr id="16" name="Text 14"/>
+          <p:cNvPr id="15" name="Text 13"/>
           <p:cNvSpPr txBox="1"/>
           <p:nvPr/>
         </p:nvSpPr>
@@ -5603,7 +5273,7 @@
       </p:sp>
       <p:sp>
         <p:nvSpPr>
-          <p:cNvPr id="17" name="Shape 15"/>
+          <p:cNvPr id="16" name="Shape 14"/>
           <p:cNvSpPr/>
           <p:nvPr/>
         </p:nvSpPr>
@@ -5630,7 +5300,7 @@
       </p:sp>
       <p:sp>
         <p:nvSpPr>
-          <p:cNvPr id="18" name="Text 16"/>
+          <p:cNvPr id="17" name="Text 15"/>
           <p:cNvSpPr txBox="1"/>
           <p:nvPr/>
         </p:nvSpPr>
@@ -5661,7 +5331,7 @@
                 <a:ea typeface="Meiryo" pitchFamily="34" charset="-122"/>
                 <a:cs typeface="Meiryo" pitchFamily="34" charset="-120"/>
               </a:rPr>
-              <a:t>一度テーブルを整えれば、条件を変えるだけで別の切り口でも確認できる</a:t>
+              <a:t>条件を変えるだけで、別の切り口でも確認できる</a:t>
             </a:r>
             <a:endParaRPr lang="en-US" sz="1400" dirty="0"/>
           </a:p>
@@ -5707,8 +5377,8 @@
         </p:nvSpPr>
         <p:spPr>
           <a:xfrm>
-            <a:off x="640080" y="566928"/>
-            <a:ext cx="402336" cy="402336"/>
+            <a:off x="640080" y="512064"/>
+            <a:ext cx="420624" cy="420624"/>
           </a:xfrm>
           <a:prstGeom prst="ellipse">
             <a:avLst/>
@@ -5732,8 +5402,8 @@
         </p:nvSpPr>
         <p:spPr>
           <a:xfrm>
-            <a:off x="640080" y="566928"/>
-            <a:ext cx="402336" cy="402336"/>
+            <a:off x="640080" y="512064"/>
+            <a:ext cx="420624" cy="420624"/>
           </a:xfrm>
           <a:prstGeom prst="rect">
             <a:avLst/>
@@ -5749,7 +5419,7 @@
               <a:buNone/>
             </a:pPr>
             <a:r>
-              <a:rPr lang="en-US" sz="1150" b="1" dirty="0">
+              <a:rPr lang="en-US" sz="1200" b="1" dirty="0">
                 <a:solidFill>
                   <a:srgbClr val="FFFFFF"/>
                 </a:solidFill>
@@ -5759,7 +5429,7 @@
               </a:rPr>
               <a:t>06</a:t>
             </a:r>
-            <a:endParaRPr lang="en-US" sz="1150" dirty="0"/>
+            <a:endParaRPr lang="en-US" sz="1200" dirty="0"/>
           </a:p>
         </p:txBody>
       </p:sp>
@@ -5771,8 +5441,8 @@
         </p:nvSpPr>
         <p:spPr>
           <a:xfrm>
-            <a:off x="1225296" y="402336"/>
-            <a:ext cx="6400800" cy="228600"/>
+            <a:off x="1243584" y="475488"/>
+            <a:ext cx="10308031" cy="548640"/>
           </a:xfrm>
           <a:prstGeom prst="rect">
             <a:avLst/>
@@ -5788,17 +5458,17 @@
               <a:buNone/>
             </a:pPr>
             <a:r>
-              <a:rPr lang="en-US" sz="1050" b="1" spc="150" kern="0" dirty="0">
-                <a:solidFill>
-                  <a:srgbClr val="0F5A6B"/>
-                </a:solidFill>
-                <a:latin typeface="Meiryo" pitchFamily="34" charset="0"/>
-                <a:ea typeface="Meiryo" pitchFamily="34" charset="-122"/>
-                <a:cs typeface="Meiryo" pitchFamily="34" charset="-120"/>
-              </a:rPr>
-              <a:t>結 果 ①</a:t>
-            </a:r>
-            <a:endParaRPr lang="en-US" sz="1050" dirty="0"/>
+              <a:rPr lang="en-US" sz="2600" b="1" dirty="0">
+                <a:solidFill>
+                  <a:srgbClr val="1A2B33"/>
+                </a:solidFill>
+                <a:latin typeface="Meiryo" pitchFamily="34" charset="0"/>
+                <a:ea typeface="Meiryo" pitchFamily="34" charset="-122"/>
+                <a:cs typeface="Meiryo" pitchFamily="34" charset="-120"/>
+              </a:rPr>
+              <a:t>結果①　IBの利用件数</a:t>
+            </a:r>
+            <a:endParaRPr lang="en-US" sz="2600" dirty="0"/>
           </a:p>
         </p:txBody>
       </p:sp>
@@ -5810,8 +5480,8 @@
         </p:nvSpPr>
         <p:spPr>
           <a:xfrm>
-            <a:off x="1225296" y="603504"/>
-            <a:ext cx="10326319" cy="548640"/>
+            <a:off x="1243584" y="1133856"/>
+            <a:ext cx="10308031" cy="384048"/>
           </a:xfrm>
           <a:prstGeom prst="rect">
             <a:avLst/>
@@ -5827,62 +5497,23 @@
               <a:buNone/>
             </a:pPr>
             <a:r>
-              <a:rPr lang="en-US" sz="2600" b="1" dirty="0">
-                <a:solidFill>
-                  <a:srgbClr val="1A2B33"/>
-                </a:solidFill>
-                <a:latin typeface="Meiryo" pitchFamily="34" charset="0"/>
-                <a:ea typeface="Meiryo" pitchFamily="34" charset="-122"/>
-                <a:cs typeface="Meiryo" pitchFamily="34" charset="-120"/>
-              </a:rPr>
-              <a:t>IBの利用件数は増加していた</a:t>
-            </a:r>
-            <a:endParaRPr lang="en-US" sz="2600" dirty="0"/>
+              <a:rPr lang="en-US" sz="1400" dirty="0">
+                <a:solidFill>
+                  <a:srgbClr val="465A63"/>
+                </a:solidFill>
+                <a:latin typeface="Meiryo" pitchFamily="34" charset="0"/>
+                <a:ea typeface="Meiryo" pitchFamily="34" charset="-122"/>
+                <a:cs typeface="Meiryo" pitchFamily="34" charset="-120"/>
+              </a:rPr>
+              <a:t>IBで行われた取引の件数は、1年間で増加していた</a:t>
+            </a:r>
+            <a:endParaRPr lang="en-US" sz="1400" dirty="0"/>
           </a:p>
         </p:txBody>
       </p:sp>
       <p:sp>
         <p:nvSpPr>
           <p:cNvPr id="6" name="Text 4"/>
-          <p:cNvSpPr txBox="1"/>
-          <p:nvPr/>
-        </p:nvSpPr>
-        <p:spPr>
-          <a:xfrm>
-            <a:off x="1225296" y="1170432"/>
-            <a:ext cx="10326319" cy="347472"/>
-          </a:xfrm>
-          <a:prstGeom prst="rect">
-            <a:avLst/>
-          </a:prstGeom>
-          <a:noFill/>
-          <a:ln/>
-        </p:spPr>
-        <p:txBody>
-          <a:bodyPr wrap="square" lIns="0" tIns="0" rIns="0" bIns="0" rtlCol="0" anchor="ctr"/>
-          <a:lstStyle/>
-          <a:p>
-            <a:pPr indent="0" marL="0">
-              <a:buNone/>
-            </a:pPr>
-            <a:r>
-              <a:rPr lang="en-US" sz="1250" dirty="0">
-                <a:solidFill>
-                  <a:srgbClr val="8497A0"/>
-                </a:solidFill>
-                <a:latin typeface="Meiryo" pitchFamily="34" charset="0"/>
-                <a:ea typeface="Meiryo" pitchFamily="34" charset="-122"/>
-                <a:cs typeface="Meiryo" pitchFamily="34" charset="-120"/>
-              </a:rPr>
-              <a:t>まず、IBで行われた取引の件数を2つの期間で比較</a:t>
-            </a:r>
-            <a:endParaRPr lang="en-US" sz="1250" dirty="0"/>
-          </a:p>
-        </p:txBody>
-      </p:sp>
-      <p:sp>
-        <p:nvSpPr>
-          <p:cNvPr id="7" name="Text 5"/>
           <p:cNvSpPr txBox="1"/>
           <p:nvPr/>
         </p:nvSpPr>
@@ -5921,7 +5552,7 @@
       </p:sp>
       <p:sp>
         <p:nvSpPr>
-          <p:cNvPr id="8" name="Shape 6"/>
+          <p:cNvPr id="7" name="Shape 5"/>
           <p:cNvSpPr/>
           <p:nvPr/>
         </p:nvSpPr>
@@ -5948,7 +5579,7 @@
       </p:sp>
       <p:sp>
         <p:nvSpPr>
-          <p:cNvPr id="9" name="Text 7"/>
+          <p:cNvPr id="8" name="Text 6"/>
           <p:cNvSpPr txBox="1"/>
           <p:nvPr/>
         </p:nvSpPr>
@@ -5987,14 +5618,14 @@
       </p:sp>
       <p:sp>
         <p:nvSpPr>
-          <p:cNvPr id="10" name="Text 8"/>
+          <p:cNvPr id="9" name="Text 7"/>
           <p:cNvSpPr txBox="1"/>
           <p:nvPr/>
         </p:nvSpPr>
         <p:spPr>
           <a:xfrm>
             <a:off x="914400" y="3438144"/>
-            <a:ext cx="5440680" cy="685800"/>
+            <a:ext cx="5440680" cy="713232"/>
           </a:xfrm>
           <a:prstGeom prst="rect">
             <a:avLst/>
@@ -6029,7 +5660,7 @@
       </p:sp>
       <p:sp>
         <p:nvSpPr>
-          <p:cNvPr id="11" name="Shape 9"/>
+          <p:cNvPr id="10" name="Shape 8"/>
           <p:cNvSpPr/>
           <p:nvPr/>
         </p:nvSpPr>
@@ -6056,7 +5687,7 @@
       </p:sp>
       <p:sp>
         <p:nvSpPr>
-          <p:cNvPr id="12" name="Text 10"/>
+          <p:cNvPr id="11" name="Text 9"/>
           <p:cNvSpPr txBox="1"/>
           <p:nvPr/>
         </p:nvSpPr>
@@ -6095,7 +5726,7 @@
       </p:sp>
       <p:sp>
         <p:nvSpPr>
-          <p:cNvPr id="13" name="Text 11"/>
+          <p:cNvPr id="12" name="Text 10"/>
           <p:cNvSpPr txBox="1"/>
           <p:nvPr/>
         </p:nvSpPr>
@@ -6137,7 +5768,7 @@
       </p:sp>
       <p:sp>
         <p:nvSpPr>
-          <p:cNvPr id="14" name="Shape 12"/>
+          <p:cNvPr id="13" name="Shape 11"/>
           <p:cNvSpPr/>
           <p:nvPr/>
         </p:nvSpPr>
@@ -6164,7 +5795,7 @@
       </p:sp>
       <p:sp>
         <p:nvSpPr>
-          <p:cNvPr id="15" name="Text 13"/>
+          <p:cNvPr id="14" name="Text 12"/>
           <p:cNvSpPr txBox="1"/>
           <p:nvPr/>
         </p:nvSpPr>
@@ -6203,7 +5834,7 @@
       </p:sp>
       <p:sp>
         <p:nvSpPr>
-          <p:cNvPr id="16" name="Text 14"/>
+          <p:cNvPr id="15" name="Text 13"/>
           <p:cNvSpPr txBox="1"/>
           <p:nvPr/>
         </p:nvSpPr>
@@ -6245,7 +5876,7 @@
       </p:sp>
       <p:sp>
         <p:nvSpPr>
-          <p:cNvPr id="17" name="Shape 15"/>
+          <p:cNvPr id="16" name="Shape 14"/>
           <p:cNvSpPr/>
           <p:nvPr/>
         </p:nvSpPr>
@@ -6272,7 +5903,7 @@
       </p:sp>
       <p:sp>
         <p:nvSpPr>
-          <p:cNvPr id="18" name="Text 16"/>
+          <p:cNvPr id="17" name="Text 15"/>
           <p:cNvSpPr txBox="1"/>
           <p:nvPr/>
         </p:nvSpPr>
@@ -6311,7 +5942,7 @@
       </p:sp>
       <p:sp>
         <p:nvSpPr>
-          <p:cNvPr id="19" name="Text 17"/>
+          <p:cNvPr id="18" name="Text 16"/>
           <p:cNvSpPr txBox="1"/>
           <p:nvPr/>
         </p:nvSpPr>
@@ -6353,7 +5984,7 @@
       </p:sp>
       <p:sp>
         <p:nvSpPr>
-          <p:cNvPr id="20" name="Shape 18"/>
+          <p:cNvPr id="19" name="Shape 17"/>
           <p:cNvSpPr/>
           <p:nvPr/>
         </p:nvSpPr>
@@ -6380,7 +6011,7 @@
       </p:sp>
       <p:sp>
         <p:nvSpPr>
-          <p:cNvPr id="21" name="Text 19"/>
+          <p:cNvPr id="20" name="Text 18"/>
           <p:cNvSpPr txBox="1"/>
           <p:nvPr/>
         </p:nvSpPr>
@@ -6457,8 +6088,8 @@
         </p:nvSpPr>
         <p:spPr>
           <a:xfrm>
-            <a:off x="640080" y="566928"/>
-            <a:ext cx="402336" cy="402336"/>
+            <a:off x="640080" y="512064"/>
+            <a:ext cx="420624" cy="420624"/>
           </a:xfrm>
           <a:prstGeom prst="ellipse">
             <a:avLst/>
@@ -6482,8 +6113,8 @@
         </p:nvSpPr>
         <p:spPr>
           <a:xfrm>
-            <a:off x="640080" y="566928"/>
-            <a:ext cx="402336" cy="402336"/>
+            <a:off x="640080" y="512064"/>
+            <a:ext cx="420624" cy="420624"/>
           </a:xfrm>
           <a:prstGeom prst="rect">
             <a:avLst/>
@@ -6499,7 +6130,7 @@
               <a:buNone/>
             </a:pPr>
             <a:r>
-              <a:rPr lang="en-US" sz="1150" b="1" dirty="0">
+              <a:rPr lang="en-US" sz="1200" b="1" dirty="0">
                 <a:solidFill>
                   <a:srgbClr val="FFFFFF"/>
                 </a:solidFill>
@@ -6509,7 +6140,7 @@
               </a:rPr>
               <a:t>07</a:t>
             </a:r>
-            <a:endParaRPr lang="en-US" sz="1150" dirty="0"/>
+            <a:endParaRPr lang="en-US" sz="1200" dirty="0"/>
           </a:p>
         </p:txBody>
       </p:sp>
@@ -6521,8 +6152,8 @@
         </p:nvSpPr>
         <p:spPr>
           <a:xfrm>
-            <a:off x="1225296" y="402336"/>
-            <a:ext cx="6400800" cy="228600"/>
+            <a:off x="1243584" y="475488"/>
+            <a:ext cx="10308031" cy="548640"/>
           </a:xfrm>
           <a:prstGeom prst="rect">
             <a:avLst/>
@@ -6538,17 +6169,17 @@
               <a:buNone/>
             </a:pPr>
             <a:r>
-              <a:rPr lang="en-US" sz="1050" b="1" spc="150" kern="0" dirty="0">
-                <a:solidFill>
-                  <a:srgbClr val="0F5A6B"/>
-                </a:solidFill>
-                <a:latin typeface="Meiryo" pitchFamily="34" charset="0"/>
-                <a:ea typeface="Meiryo" pitchFamily="34" charset="-122"/>
-                <a:cs typeface="Meiryo" pitchFamily="34" charset="-120"/>
-              </a:rPr>
-              <a:t>結 果 ②</a:t>
-            </a:r>
-            <a:endParaRPr lang="en-US" sz="1050" dirty="0"/>
+              <a:rPr lang="en-US" sz="2600" b="1" dirty="0">
+                <a:solidFill>
+                  <a:srgbClr val="1A2B33"/>
+                </a:solidFill>
+                <a:latin typeface="Meiryo" pitchFamily="34" charset="0"/>
+                <a:ea typeface="Meiryo" pitchFamily="34" charset="-122"/>
+                <a:cs typeface="Meiryo" pitchFamily="34" charset="-120"/>
+              </a:rPr>
+              <a:t>結果②　ATMでIBに代替できる取引</a:t>
+            </a:r>
+            <a:endParaRPr lang="en-US" sz="2600" dirty="0"/>
           </a:p>
         </p:txBody>
       </p:sp>
@@ -6560,8 +6191,8 @@
         </p:nvSpPr>
         <p:spPr>
           <a:xfrm>
-            <a:off x="1225296" y="603504"/>
-            <a:ext cx="10326319" cy="548640"/>
+            <a:off x="1243584" y="1133856"/>
+            <a:ext cx="10308031" cy="384048"/>
           </a:xfrm>
           <a:prstGeom prst="rect">
             <a:avLst/>
@@ -6577,62 +6208,23 @@
               <a:buNone/>
             </a:pPr>
             <a:r>
-              <a:rPr lang="en-US" sz="2600" b="1" dirty="0">
-                <a:solidFill>
-                  <a:srgbClr val="1A2B33"/>
-                </a:solidFill>
-                <a:latin typeface="Meiryo" pitchFamily="34" charset="0"/>
-                <a:ea typeface="Meiryo" pitchFamily="34" charset="-122"/>
-                <a:cs typeface="Meiryo" pitchFamily="34" charset="-120"/>
-              </a:rPr>
-              <a:t>ATMでIBに代替できる取引は減少していた</a:t>
-            </a:r>
-            <a:endParaRPr lang="en-US" sz="2600" dirty="0"/>
+              <a:rPr lang="en-US" sz="1400" dirty="0">
+                <a:solidFill>
+                  <a:srgbClr val="465A63"/>
+                </a:solidFill>
+                <a:latin typeface="Meiryo" pitchFamily="34" charset="0"/>
+                <a:ea typeface="Meiryo" pitchFamily="34" charset="-122"/>
+                <a:cs typeface="Meiryo" pitchFamily="34" charset="-120"/>
+              </a:rPr>
+              <a:t>IBへ移っているかを判断するため、ATM側の同種の取引も確認した</a:t>
+            </a:r>
+            <a:endParaRPr lang="en-US" sz="1400" dirty="0"/>
           </a:p>
         </p:txBody>
       </p:sp>
       <p:sp>
         <p:nvSpPr>
           <p:cNvPr id="6" name="Text 4"/>
-          <p:cNvSpPr txBox="1"/>
-          <p:nvPr/>
-        </p:nvSpPr>
-        <p:spPr>
-          <a:xfrm>
-            <a:off x="1225296" y="1170432"/>
-            <a:ext cx="10326319" cy="347472"/>
-          </a:xfrm>
-          <a:prstGeom prst="rect">
-            <a:avLst/>
-          </a:prstGeom>
-          <a:noFill/>
-          <a:ln/>
-        </p:spPr>
-        <p:txBody>
-          <a:bodyPr wrap="square" lIns="0" tIns="0" rIns="0" bIns="0" rtlCol="0" anchor="ctr"/>
-          <a:lstStyle/>
-          <a:p>
-            <a:pPr indent="0" marL="0">
-              <a:buNone/>
-            </a:pPr>
-            <a:r>
-              <a:rPr lang="en-US" sz="1250" dirty="0">
-                <a:solidFill>
-                  <a:srgbClr val="8497A0"/>
-                </a:solidFill>
-                <a:latin typeface="Meiryo" pitchFamily="34" charset="0"/>
-                <a:ea typeface="Meiryo" pitchFamily="34" charset="-122"/>
-                <a:cs typeface="Meiryo" pitchFamily="34" charset="-120"/>
-              </a:rPr>
-              <a:t>IBへ移っているのかどうかを判断するため、ATM側の同種の取引も確認</a:t>
-            </a:r>
-            <a:endParaRPr lang="en-US" sz="1250" dirty="0"/>
-          </a:p>
-        </p:txBody>
-      </p:sp>
-      <p:sp>
-        <p:nvSpPr>
-          <p:cNvPr id="7" name="Text 5"/>
           <p:cNvSpPr txBox="1"/>
           <p:nvPr/>
         </p:nvSpPr>
@@ -6671,7 +6263,7 @@
       </p:sp>
       <p:sp>
         <p:nvSpPr>
-          <p:cNvPr id="8" name="Shape 6"/>
+          <p:cNvPr id="7" name="Shape 5"/>
           <p:cNvSpPr/>
           <p:nvPr/>
         </p:nvSpPr>
@@ -6698,7 +6290,7 @@
       </p:sp>
       <p:sp>
         <p:nvSpPr>
-          <p:cNvPr id="9" name="Text 7"/>
+          <p:cNvPr id="8" name="Text 6"/>
           <p:cNvSpPr txBox="1"/>
           <p:nvPr/>
         </p:nvSpPr>
@@ -6737,14 +6329,14 @@
       </p:sp>
       <p:sp>
         <p:nvSpPr>
-          <p:cNvPr id="10" name="Text 8"/>
+          <p:cNvPr id="9" name="Text 7"/>
           <p:cNvSpPr txBox="1"/>
           <p:nvPr/>
         </p:nvSpPr>
         <p:spPr>
           <a:xfrm>
             <a:off x="914400" y="3438144"/>
-            <a:ext cx="5440680" cy="685800"/>
+            <a:ext cx="5440680" cy="713232"/>
           </a:xfrm>
           <a:prstGeom prst="rect">
             <a:avLst/>
@@ -6779,7 +6371,7 @@
       </p:sp>
       <p:sp>
         <p:nvSpPr>
-          <p:cNvPr id="11" name="Shape 9"/>
+          <p:cNvPr id="10" name="Shape 8"/>
           <p:cNvSpPr/>
           <p:nvPr/>
         </p:nvSpPr>
@@ -6806,7 +6398,7 @@
       </p:sp>
       <p:sp>
         <p:nvSpPr>
-          <p:cNvPr id="12" name="Text 10"/>
+          <p:cNvPr id="11" name="Text 9"/>
           <p:cNvSpPr txBox="1"/>
           <p:nvPr/>
         </p:nvSpPr>
@@ -6845,7 +6437,7 @@
       </p:sp>
       <p:sp>
         <p:nvSpPr>
-          <p:cNvPr id="13" name="Text 11"/>
+          <p:cNvPr id="12" name="Text 10"/>
           <p:cNvSpPr txBox="1"/>
           <p:nvPr/>
         </p:nvSpPr>
@@ -6907,7 +6499,7 @@
       </p:sp>
       <p:sp>
         <p:nvSpPr>
-          <p:cNvPr id="14" name="Shape 12"/>
+          <p:cNvPr id="13" name="Shape 11"/>
           <p:cNvSpPr/>
           <p:nvPr/>
         </p:nvSpPr>
@@ -6934,7 +6526,7 @@
       </p:sp>
       <p:sp>
         <p:nvSpPr>
-          <p:cNvPr id="15" name="Text 13"/>
+          <p:cNvPr id="14" name="Text 12"/>
           <p:cNvSpPr txBox="1"/>
           <p:nvPr/>
         </p:nvSpPr>
@@ -6973,7 +6565,7 @@
       </p:sp>
       <p:sp>
         <p:nvSpPr>
-          <p:cNvPr id="16" name="Text 14"/>
+          <p:cNvPr id="15" name="Text 13"/>
           <p:cNvSpPr txBox="1"/>
           <p:nvPr/>
         </p:nvSpPr>
@@ -7015,7 +6607,7 @@
       </p:sp>
       <p:sp>
         <p:nvSpPr>
-          <p:cNvPr id="17" name="Shape 15"/>
+          <p:cNvPr id="16" name="Shape 14"/>
           <p:cNvSpPr/>
           <p:nvPr/>
         </p:nvSpPr>
@@ -7042,7 +6634,7 @@
       </p:sp>
       <p:sp>
         <p:nvSpPr>
-          <p:cNvPr id="18" name="Text 16"/>
+          <p:cNvPr id="17" name="Text 15"/>
           <p:cNvSpPr txBox="1"/>
           <p:nvPr/>
         </p:nvSpPr>
@@ -7081,7 +6673,7 @@
       </p:sp>
       <p:sp>
         <p:nvSpPr>
-          <p:cNvPr id="19" name="Text 17"/>
+          <p:cNvPr id="18" name="Text 16"/>
           <p:cNvSpPr txBox="1"/>
           <p:nvPr/>
         </p:nvSpPr>
@@ -7123,7 +6715,7 @@
       </p:sp>
       <p:sp>
         <p:nvSpPr>
-          <p:cNvPr id="20" name="Shape 18"/>
+          <p:cNvPr id="19" name="Shape 17"/>
           <p:cNvSpPr/>
           <p:nvPr/>
         </p:nvSpPr>
@@ -7150,7 +6742,7 @@
       </p:sp>
       <p:sp>
         <p:nvSpPr>
-          <p:cNvPr id="21" name="Text 19"/>
+          <p:cNvPr id="20" name="Text 18"/>
           <p:cNvSpPr txBox="1"/>
           <p:nvPr/>
         </p:nvSpPr>
@@ -7227,8 +6819,8 @@
         </p:nvSpPr>
         <p:spPr>
           <a:xfrm>
-            <a:off x="640080" y="566928"/>
-            <a:ext cx="402336" cy="402336"/>
+            <a:off x="640080" y="512064"/>
+            <a:ext cx="420624" cy="420624"/>
           </a:xfrm>
           <a:prstGeom prst="ellipse">
             <a:avLst/>
@@ -7252,8 +6844,8 @@
         </p:nvSpPr>
         <p:spPr>
           <a:xfrm>
-            <a:off x="640080" y="566928"/>
-            <a:ext cx="402336" cy="402336"/>
+            <a:off x="640080" y="512064"/>
+            <a:ext cx="420624" cy="420624"/>
           </a:xfrm>
           <a:prstGeom prst="rect">
             <a:avLst/>
@@ -7269,7 +6861,7 @@
               <a:buNone/>
             </a:pPr>
             <a:r>
-              <a:rPr lang="en-US" sz="1150" b="1" dirty="0">
+              <a:rPr lang="en-US" sz="1200" b="1" dirty="0">
                 <a:solidFill>
                   <a:srgbClr val="FFFFFF"/>
                 </a:solidFill>
@@ -7279,7 +6871,7 @@
               </a:rPr>
               <a:t>08</a:t>
             </a:r>
-            <a:endParaRPr lang="en-US" sz="1150" dirty="0"/>
+            <a:endParaRPr lang="en-US" sz="1200" dirty="0"/>
           </a:p>
         </p:txBody>
       </p:sp>
@@ -7291,8 +6883,8 @@
         </p:nvSpPr>
         <p:spPr>
           <a:xfrm>
-            <a:off x="1225296" y="402336"/>
-            <a:ext cx="6400800" cy="228600"/>
+            <a:off x="1243584" y="475488"/>
+            <a:ext cx="10308031" cy="548640"/>
           </a:xfrm>
           <a:prstGeom prst="rect">
             <a:avLst/>
@@ -7308,17 +6900,17 @@
               <a:buNone/>
             </a:pPr>
             <a:r>
-              <a:rPr lang="en-US" sz="1050" b="1" spc="150" kern="0" dirty="0">
-                <a:solidFill>
-                  <a:srgbClr val="0F5A6B"/>
-                </a:solidFill>
-                <a:latin typeface="Meiryo" pitchFamily="34" charset="0"/>
-                <a:ea typeface="Meiryo" pitchFamily="34" charset="-122"/>
-                <a:cs typeface="Meiryo" pitchFamily="34" charset="-120"/>
-              </a:rPr>
-              <a:t>考 察</a:t>
-            </a:r>
-            <a:endParaRPr lang="en-US" sz="1050" dirty="0"/>
+              <a:rPr lang="en-US" sz="2600" b="1" dirty="0">
+                <a:solidFill>
+                  <a:srgbClr val="1A2B33"/>
+                </a:solidFill>
+                <a:latin typeface="Meiryo" pitchFamily="34" charset="0"/>
+                <a:ea typeface="Meiryo" pitchFamily="34" charset="-122"/>
+                <a:cs typeface="Meiryo" pitchFamily="34" charset="-120"/>
+              </a:rPr>
+              <a:t>考察</a:t>
+            </a:r>
+            <a:endParaRPr lang="en-US" sz="2600" dirty="0"/>
           </a:p>
         </p:txBody>
       </p:sp>
@@ -7330,8 +6922,8 @@
         </p:nvSpPr>
         <p:spPr>
           <a:xfrm>
-            <a:off x="1225296" y="603504"/>
-            <a:ext cx="10326319" cy="548640"/>
+            <a:off x="1243584" y="1133856"/>
+            <a:ext cx="10308031" cy="384048"/>
           </a:xfrm>
           <a:prstGeom prst="rect">
             <a:avLst/>
@@ -7347,62 +6939,23 @@
               <a:buNone/>
             </a:pPr>
             <a:r>
-              <a:rPr lang="en-US" sz="2600" b="1" dirty="0">
-                <a:solidFill>
-                  <a:srgbClr val="1A2B33"/>
-                </a:solidFill>
-                <a:latin typeface="Meiryo" pitchFamily="34" charset="0"/>
-                <a:ea typeface="Meiryo" pitchFamily="34" charset="-122"/>
-                <a:cs typeface="Meiryo" pitchFamily="34" charset="-120"/>
-              </a:rPr>
-              <a:t>どの年代で利用が広がったのか</a:t>
-            </a:r>
-            <a:endParaRPr lang="en-US" sz="2600" dirty="0"/>
+              <a:rPr lang="en-US" sz="1400" dirty="0">
+                <a:solidFill>
+                  <a:srgbClr val="465A63"/>
+                </a:solidFill>
+                <a:latin typeface="Meiryo" pitchFamily="34" charset="0"/>
+                <a:ea typeface="Meiryo" pitchFamily="34" charset="-122"/>
+                <a:cs typeface="Meiryo" pitchFamily="34" charset="-120"/>
+              </a:rPr>
+              <a:t>計画が掲げる「若年層へのアプローチ強化」が進んでいるかを、年代別に確認した</a:t>
+            </a:r>
+            <a:endParaRPr lang="en-US" sz="1400" dirty="0"/>
           </a:p>
         </p:txBody>
       </p:sp>
       <p:sp>
         <p:nvSpPr>
           <p:cNvPr id="6" name="Text 4"/>
-          <p:cNvSpPr txBox="1"/>
-          <p:nvPr/>
-        </p:nvSpPr>
-        <p:spPr>
-          <a:xfrm>
-            <a:off x="1225296" y="1170432"/>
-            <a:ext cx="10326319" cy="347472"/>
-          </a:xfrm>
-          <a:prstGeom prst="rect">
-            <a:avLst/>
-          </a:prstGeom>
-          <a:noFill/>
-          <a:ln/>
-        </p:spPr>
-        <p:txBody>
-          <a:bodyPr wrap="square" lIns="0" tIns="0" rIns="0" bIns="0" rtlCol="0" anchor="ctr"/>
-          <a:lstStyle/>
-          <a:p>
-            <a:pPr indent="0" marL="0">
-              <a:buNone/>
-            </a:pPr>
-            <a:r>
-              <a:rPr lang="en-US" sz="1250" dirty="0">
-                <a:solidFill>
-                  <a:srgbClr val="8497A0"/>
-                </a:solidFill>
-                <a:latin typeface="Meiryo" pitchFamily="34" charset="0"/>
-                <a:ea typeface="Meiryo" pitchFamily="34" charset="-122"/>
-                <a:cs typeface="Meiryo" pitchFamily="34" charset="-120"/>
-              </a:rPr>
-              <a:t>全体の動きが分かった次に知りたくなるのは「誰が使うようになったのか」。今回は年代を5つに分けて確認</a:t>
-            </a:r>
-            <a:endParaRPr lang="en-US" sz="1250" dirty="0"/>
-          </a:p>
-        </p:txBody>
-      </p:sp>
-      <p:sp>
-        <p:nvSpPr>
-          <p:cNvPr id="7" name="Text 5"/>
           <p:cNvSpPr txBox="1"/>
           <p:nvPr/>
         </p:nvSpPr>
@@ -7441,7 +6994,7 @@
       </p:sp>
       <p:sp>
         <p:nvSpPr>
-          <p:cNvPr id="8" name="Shape 6"/>
+          <p:cNvPr id="7" name="Shape 5"/>
           <p:cNvSpPr/>
           <p:nvPr/>
         </p:nvSpPr>
@@ -7468,7 +7021,7 @@
       </p:sp>
       <p:sp>
         <p:nvSpPr>
-          <p:cNvPr id="9" name="Text 7"/>
+          <p:cNvPr id="8" name="Text 6"/>
           <p:cNvSpPr txBox="1"/>
           <p:nvPr/>
         </p:nvSpPr>
@@ -7507,7 +7060,7 @@
       </p:sp>
       <p:sp>
         <p:nvSpPr>
-          <p:cNvPr id="10" name="Text 8"/>
+          <p:cNvPr id="9" name="Text 7"/>
           <p:cNvSpPr txBox="1"/>
           <p:nvPr/>
         </p:nvSpPr>
@@ -7546,7 +7099,7 @@
       </p:sp>
       <p:sp>
         <p:nvSpPr>
-          <p:cNvPr id="11" name="Shape 9"/>
+          <p:cNvPr id="10" name="Shape 8"/>
           <p:cNvSpPr/>
           <p:nvPr/>
         </p:nvSpPr>
@@ -7573,7 +7126,7 @@
       </p:sp>
       <p:sp>
         <p:nvSpPr>
-          <p:cNvPr id="12" name="Text 10"/>
+          <p:cNvPr id="11" name="Text 9"/>
           <p:cNvSpPr txBox="1"/>
           <p:nvPr/>
         </p:nvSpPr>
@@ -7612,7 +7165,7 @@
       </p:sp>
       <p:sp>
         <p:nvSpPr>
-          <p:cNvPr id="13" name="Text 11"/>
+          <p:cNvPr id="12" name="Text 10"/>
           <p:cNvSpPr txBox="1"/>
           <p:nvPr/>
         </p:nvSpPr>
@@ -7651,7 +7204,7 @@
       </p:sp>
       <p:sp>
         <p:nvSpPr>
-          <p:cNvPr id="14" name="Shape 12"/>
+          <p:cNvPr id="13" name="Shape 11"/>
           <p:cNvSpPr/>
           <p:nvPr/>
         </p:nvSpPr>
@@ -7678,7 +7231,7 @@
       </p:sp>
       <p:sp>
         <p:nvSpPr>
-          <p:cNvPr id="15" name="Text 13"/>
+          <p:cNvPr id="14" name="Text 12"/>
           <p:cNvSpPr txBox="1"/>
           <p:nvPr/>
         </p:nvSpPr>
@@ -7717,7 +7270,7 @@
       </p:sp>
       <p:sp>
         <p:nvSpPr>
-          <p:cNvPr id="16" name="Text 14"/>
+          <p:cNvPr id="15" name="Text 13"/>
           <p:cNvSpPr txBox="1"/>
           <p:nvPr/>
         </p:nvSpPr>
@@ -7756,7 +7309,7 @@
       </p:sp>
       <p:sp>
         <p:nvSpPr>
-          <p:cNvPr id="17" name="Shape 15"/>
+          <p:cNvPr id="16" name="Shape 14"/>
           <p:cNvSpPr/>
           <p:nvPr/>
         </p:nvSpPr>
@@ -7783,7 +7336,7 @@
       </p:sp>
       <p:sp>
         <p:nvSpPr>
-          <p:cNvPr id="18" name="Text 16"/>
+          <p:cNvPr id="17" name="Text 15"/>
           <p:cNvSpPr txBox="1"/>
           <p:nvPr/>
         </p:nvSpPr>
@@ -7822,7 +7375,7 @@
       </p:sp>
       <p:sp>
         <p:nvSpPr>
-          <p:cNvPr id="19" name="Text 17"/>
+          <p:cNvPr id="18" name="Text 16"/>
           <p:cNvSpPr txBox="1"/>
           <p:nvPr/>
         </p:nvSpPr>
@@ -7861,7 +7414,7 @@
       </p:sp>
       <p:sp>
         <p:nvSpPr>
-          <p:cNvPr id="20" name="Shape 18"/>
+          <p:cNvPr id="19" name="Shape 17"/>
           <p:cNvSpPr/>
           <p:nvPr/>
         </p:nvSpPr>
@@ -7888,7 +7441,7 @@
       </p:sp>
       <p:sp>
         <p:nvSpPr>
-          <p:cNvPr id="21" name="Text 19"/>
+          <p:cNvPr id="20" name="Text 18"/>
           <p:cNvSpPr txBox="1"/>
           <p:nvPr/>
         </p:nvSpPr>
@@ -7927,7 +7480,7 @@
       </p:sp>
       <p:sp>
         <p:nvSpPr>
-          <p:cNvPr id="22" name="Text 20"/>
+          <p:cNvPr id="21" name="Text 19"/>
           <p:cNvSpPr txBox="1"/>
           <p:nvPr/>
         </p:nvSpPr>
@@ -7966,7 +7519,7 @@
       </p:sp>
       <p:sp>
         <p:nvSpPr>
-          <p:cNvPr id="23" name="Shape 21"/>
+          <p:cNvPr id="22" name="Shape 20"/>
           <p:cNvSpPr/>
           <p:nvPr/>
         </p:nvSpPr>
@@ -7993,7 +7546,7 @@
       </p:sp>
       <p:sp>
         <p:nvSpPr>
-          <p:cNvPr id="24" name="Text 22"/>
+          <p:cNvPr id="23" name="Text 21"/>
           <p:cNvSpPr txBox="1"/>
           <p:nvPr/>
         </p:nvSpPr>
@@ -8032,14 +7585,14 @@
       </p:sp>
       <p:sp>
         <p:nvSpPr>
-          <p:cNvPr id="25" name="Text 23"/>
+          <p:cNvPr id="24" name="Text 22"/>
           <p:cNvSpPr txBox="1"/>
           <p:nvPr/>
         </p:nvSpPr>
         <p:spPr>
           <a:xfrm>
             <a:off x="914400" y="3854196"/>
-            <a:ext cx="5440680" cy="685800"/>
+            <a:ext cx="5440680" cy="713232"/>
           </a:xfrm>
           <a:prstGeom prst="rect">
             <a:avLst/>
@@ -8074,7 +7627,7 @@
       </p:sp>
       <p:sp>
         <p:nvSpPr>
-          <p:cNvPr id="26" name="Shape 24"/>
+          <p:cNvPr id="25" name="Shape 23"/>
           <p:cNvSpPr/>
           <p:nvPr/>
         </p:nvSpPr>
@@ -8101,7 +7654,7 @@
       </p:sp>
       <p:sp>
         <p:nvSpPr>
-          <p:cNvPr id="27" name="Text 25"/>
+          <p:cNvPr id="26" name="Text 24"/>
           <p:cNvSpPr txBox="1"/>
           <p:nvPr/>
         </p:nvSpPr>
@@ -8140,7 +7693,7 @@
       </p:sp>
       <p:sp>
         <p:nvSpPr>
-          <p:cNvPr id="28" name="Text 26"/>
+          <p:cNvPr id="27" name="Text 25"/>
           <p:cNvSpPr txBox="1"/>
           <p:nvPr/>
         </p:nvSpPr>
@@ -8182,7 +7735,7 @@
       </p:sp>
       <p:sp>
         <p:nvSpPr>
-          <p:cNvPr id="29" name="Shape 27"/>
+          <p:cNvPr id="28" name="Shape 26"/>
           <p:cNvSpPr/>
           <p:nvPr/>
         </p:nvSpPr>
@@ -8209,7 +7762,7 @@
       </p:sp>
       <p:sp>
         <p:nvSpPr>
-          <p:cNvPr id="30" name="Text 28"/>
+          <p:cNvPr id="29" name="Text 27"/>
           <p:cNvSpPr txBox="1"/>
           <p:nvPr/>
         </p:nvSpPr>
@@ -8248,7 +7801,7 @@
       </p:sp>
       <p:sp>
         <p:nvSpPr>
-          <p:cNvPr id="31" name="Text 29"/>
+          <p:cNvPr id="30" name="Text 28"/>
           <p:cNvSpPr txBox="1"/>
           <p:nvPr/>
         </p:nvSpPr>
@@ -8318,7 +7871,7 @@
       </p:sp>
       <p:sp>
         <p:nvSpPr>
-          <p:cNvPr id="32" name="Shape 30"/>
+          <p:cNvPr id="31" name="Shape 29"/>
           <p:cNvSpPr/>
           <p:nvPr/>
         </p:nvSpPr>
@@ -8333,11 +7886,11 @@
             </a:avLst>
           </a:prstGeom>
           <a:solidFill>
-            <a:srgbClr val="F3F6F7"/>
+            <a:srgbClr val="E2EEF0"/>
           </a:solidFill>
           <a:ln w="12700">
             <a:solidFill>
-              <a:srgbClr val="F3F6F7"/>
+              <a:srgbClr val="E2EEF0"/>
             </a:solidFill>
             <a:prstDash val="solid"/>
           </a:ln>
@@ -8345,7 +7898,7 @@
       </p:sp>
       <p:sp>
         <p:nvSpPr>
-          <p:cNvPr id="33" name="Text 31"/>
+          <p:cNvPr id="32" name="Text 30"/>
           <p:cNvSpPr txBox="1"/>
           <p:nvPr/>
         </p:nvSpPr>
@@ -8370,13 +7923,13 @@
             <a:r>
               <a:rPr lang="en-US" sz="1400" b="1" dirty="0">
                 <a:solidFill>
-                  <a:srgbClr val="1A2B33"/>
-                </a:solidFill>
-                <a:latin typeface="Meiryo" pitchFamily="34" charset="0"/>
-                <a:ea typeface="Meiryo" pitchFamily="34" charset="-122"/>
-                <a:cs typeface="Meiryo" pitchFamily="34" charset="-120"/>
-              </a:rPr>
-              <a:t>年代まで分かると、誰にどう案内するかという具体的な打ち手まで検討できる</a:t>
+                  <a:srgbClr val="0F5A6B"/>
+                </a:solidFill>
+                <a:latin typeface="Meiryo" pitchFamily="34" charset="0"/>
+                <a:ea typeface="Meiryo" pitchFamily="34" charset="-122"/>
+                <a:cs typeface="Meiryo" pitchFamily="34" charset="-120"/>
+              </a:rPr>
+              <a:t>年代まで分かると、計画の狙いがどこまで進んでいるかと、次に誰へ案内すべきかが同時に見える</a:t>
             </a:r>
             <a:endParaRPr lang="en-US" sz="1400" dirty="0"/>
           </a:p>
@@ -8422,8 +7975,8 @@
         </p:nvSpPr>
         <p:spPr>
           <a:xfrm>
-            <a:off x="640080" y="566928"/>
-            <a:ext cx="402336" cy="402336"/>
+            <a:off x="640080" y="512064"/>
+            <a:ext cx="420624" cy="420624"/>
           </a:xfrm>
           <a:prstGeom prst="ellipse">
             <a:avLst/>
@@ -8447,8 +8000,8 @@
         </p:nvSpPr>
         <p:spPr>
           <a:xfrm>
-            <a:off x="640080" y="566928"/>
-            <a:ext cx="402336" cy="402336"/>
+            <a:off x="640080" y="512064"/>
+            <a:ext cx="420624" cy="420624"/>
           </a:xfrm>
           <a:prstGeom prst="rect">
             <a:avLst/>
@@ -8464,7 +8017,7 @@
               <a:buNone/>
             </a:pPr>
             <a:r>
-              <a:rPr lang="en-US" sz="1150" b="1" dirty="0">
+              <a:rPr lang="en-US" sz="1200" b="1" dirty="0">
                 <a:solidFill>
                   <a:srgbClr val="FFFFFF"/>
                 </a:solidFill>
@@ -8474,7 +8027,7 @@
               </a:rPr>
               <a:t>09</a:t>
             </a:r>
-            <a:endParaRPr lang="en-US" sz="1150" dirty="0"/>
+            <a:endParaRPr lang="en-US" sz="1200" dirty="0"/>
           </a:p>
         </p:txBody>
       </p:sp>
@@ -8486,8 +8039,8 @@
         </p:nvSpPr>
         <p:spPr>
           <a:xfrm>
-            <a:off x="1225296" y="402336"/>
-            <a:ext cx="6400800" cy="228600"/>
+            <a:off x="1243584" y="475488"/>
+            <a:ext cx="10308031" cy="548640"/>
           </a:xfrm>
           <a:prstGeom prst="rect">
             <a:avLst/>
@@ -8503,17 +8056,17 @@
               <a:buNone/>
             </a:pPr>
             <a:r>
-              <a:rPr lang="en-US" sz="1050" b="1" spc="150" kern="0" dirty="0">
-                <a:solidFill>
-                  <a:srgbClr val="0F5A6B"/>
-                </a:solidFill>
-                <a:latin typeface="Meiryo" pitchFamily="34" charset="0"/>
-                <a:ea typeface="Meiryo" pitchFamily="34" charset="-122"/>
-                <a:cs typeface="Meiryo" pitchFamily="34" charset="-120"/>
-              </a:rPr>
-              <a:t>ま と め</a:t>
-            </a:r>
-            <a:endParaRPr lang="en-US" sz="1050" dirty="0"/>
+              <a:rPr lang="en-US" sz="2600" b="1" dirty="0">
+                <a:solidFill>
+                  <a:srgbClr val="1A2B33"/>
+                </a:solidFill>
+                <a:latin typeface="Meiryo" pitchFamily="34" charset="0"/>
+                <a:ea typeface="Meiryo" pitchFamily="34" charset="-122"/>
+                <a:cs typeface="Meiryo" pitchFamily="34" charset="-120"/>
+              </a:rPr>
+              <a:t>まとめ</a:t>
+            </a:r>
+            <a:endParaRPr lang="en-US" sz="2600" dirty="0"/>
           </a:p>
         </p:txBody>
       </p:sp>
@@ -8525,8 +8078,8 @@
         </p:nvSpPr>
         <p:spPr>
           <a:xfrm>
-            <a:off x="1225296" y="603504"/>
-            <a:ext cx="10326319" cy="548640"/>
+            <a:off x="1243584" y="1133856"/>
+            <a:ext cx="10308031" cy="384048"/>
           </a:xfrm>
           <a:prstGeom prst="rect">
             <a:avLst/>
@@ -8542,62 +8095,23 @@
               <a:buNone/>
             </a:pPr>
             <a:r>
-              <a:rPr lang="en-US" sz="2600" b="1" dirty="0">
-                <a:solidFill>
-                  <a:srgbClr val="1A2B33"/>
-                </a:solidFill>
-                <a:latin typeface="Meiryo" pitchFamily="34" charset="0"/>
-                <a:ea typeface="Meiryo" pitchFamily="34" charset="-122"/>
-                <a:cs typeface="Meiryo" pitchFamily="34" charset="-120"/>
-              </a:rPr>
-              <a:t>データを次の一手につなげるまで</a:t>
-            </a:r>
-            <a:endParaRPr lang="en-US" sz="2600" dirty="0"/>
+              <a:rPr lang="en-US" sz="1400" dirty="0">
+                <a:solidFill>
+                  <a:srgbClr val="465A63"/>
+                </a:solidFill>
+                <a:latin typeface="Meiryo" pitchFamily="34" charset="0"/>
+                <a:ea typeface="Meiryo" pitchFamily="34" charset="-122"/>
+                <a:cs typeface="Meiryo" pitchFamily="34" charset="-120"/>
+              </a:rPr>
+              <a:t>今回のワークで行ったことを、ひとつの流れにまとめる</a:t>
+            </a:r>
+            <a:endParaRPr lang="en-US" sz="1400" dirty="0"/>
           </a:p>
         </p:txBody>
       </p:sp>
       <p:sp>
         <p:nvSpPr>
           <p:cNvPr id="6" name="Text 4"/>
-          <p:cNvSpPr txBox="1"/>
-          <p:nvPr/>
-        </p:nvSpPr>
-        <p:spPr>
-          <a:xfrm>
-            <a:off x="1225296" y="1170432"/>
-            <a:ext cx="10326319" cy="347472"/>
-          </a:xfrm>
-          <a:prstGeom prst="rect">
-            <a:avLst/>
-          </a:prstGeom>
-          <a:noFill/>
-          <a:ln/>
-        </p:spPr>
-        <p:txBody>
-          <a:bodyPr wrap="square" lIns="0" tIns="0" rIns="0" bIns="0" rtlCol="0" anchor="ctr"/>
-          <a:lstStyle/>
-          <a:p>
-            <a:pPr indent="0" marL="0">
-              <a:buNone/>
-            </a:pPr>
-            <a:r>
-              <a:rPr lang="en-US" sz="1250" dirty="0">
-                <a:solidFill>
-                  <a:srgbClr val="8497A0"/>
-                </a:solidFill>
-                <a:latin typeface="Meiryo" pitchFamily="34" charset="0"/>
-                <a:ea typeface="Meiryo" pitchFamily="34" charset="-122"/>
-                <a:cs typeface="Meiryo" pitchFamily="34" charset="-120"/>
-              </a:rPr>
-              <a:t>今回のワークで行ったことを、ひとつの流れにまとめる</a:t>
-            </a:r>
-            <a:endParaRPr lang="en-US" sz="1250" dirty="0"/>
-          </a:p>
-        </p:txBody>
-      </p:sp>
-      <p:sp>
-        <p:nvSpPr>
-          <p:cNvPr id="7" name="Text 5"/>
           <p:cNvSpPr txBox="1"/>
           <p:nvPr/>
         </p:nvSpPr>
@@ -8636,7 +8150,7 @@
       </p:sp>
       <p:sp>
         <p:nvSpPr>
-          <p:cNvPr id="8" name="Shape 6"/>
+          <p:cNvPr id="7" name="Shape 5"/>
           <p:cNvSpPr/>
           <p:nvPr/>
         </p:nvSpPr>
@@ -8663,7 +8177,7 @@
       </p:sp>
       <p:sp>
         <p:nvSpPr>
-          <p:cNvPr id="9" name="Text 7"/>
+          <p:cNvPr id="8" name="Text 6"/>
           <p:cNvSpPr txBox="1"/>
           <p:nvPr/>
         </p:nvSpPr>
@@ -8702,46 +8216,46 @@
       </p:sp>
       <p:sp>
         <p:nvSpPr>
+          <p:cNvPr id="9" name="Text 7"/>
+          <p:cNvSpPr txBox="1"/>
+          <p:nvPr/>
+        </p:nvSpPr>
+        <p:spPr>
+          <a:xfrm>
+            <a:off x="676656" y="2679192"/>
+            <a:ext cx="1856232" cy="274320"/>
+          </a:xfrm>
+          <a:prstGeom prst="rect">
+            <a:avLst/>
+          </a:prstGeom>
+          <a:noFill/>
+          <a:ln/>
+        </p:spPr>
+        <p:txBody>
+          <a:bodyPr wrap="square" lIns="0" tIns="0" rIns="0" bIns="0" rtlCol="0" anchor="ctr"/>
+          <a:lstStyle/>
+          <a:p>
+            <a:pPr algn="ctr" indent="0" marL="0">
+              <a:buNone/>
+            </a:pPr>
+            <a:r>
+              <a:rPr lang="en-US" sz="1100" b="1" spc="20" kern="0" dirty="0">
+                <a:solidFill>
+                  <a:srgbClr val="1A2B33"/>
+                </a:solidFill>
+                <a:latin typeface="Meiryo" pitchFamily="34" charset="0"/>
+                <a:ea typeface="Meiryo" pitchFamily="34" charset="-122"/>
+                <a:cs typeface="Meiryo" pitchFamily="34" charset="-120"/>
+              </a:rPr>
+              <a:t>問 い を 立 て る</a:t>
+            </a:r>
+            <a:endParaRPr lang="en-US" sz="1100" dirty="0"/>
+          </a:p>
+        </p:txBody>
+      </p:sp>
+      <p:sp>
+        <p:nvSpPr>
           <p:cNvPr id="10" name="Text 8"/>
-          <p:cNvSpPr txBox="1"/>
-          <p:nvPr/>
-        </p:nvSpPr>
-        <p:spPr>
-          <a:xfrm>
-            <a:off x="694944" y="2679192"/>
-            <a:ext cx="1819656" cy="274320"/>
-          </a:xfrm>
-          <a:prstGeom prst="rect">
-            <a:avLst/>
-          </a:prstGeom>
-          <a:noFill/>
-          <a:ln/>
-        </p:spPr>
-        <p:txBody>
-          <a:bodyPr wrap="square" lIns="0" tIns="0" rIns="0" bIns="0" rtlCol="0" anchor="ctr"/>
-          <a:lstStyle/>
-          <a:p>
-            <a:pPr algn="ctr" indent="0" marL="0">
-              <a:buNone/>
-            </a:pPr>
-            <a:r>
-              <a:rPr lang="en-US" sz="1150" b="1" spc="40" kern="0" dirty="0">
-                <a:solidFill>
-                  <a:srgbClr val="1A2B33"/>
-                </a:solidFill>
-                <a:latin typeface="Meiryo" pitchFamily="34" charset="0"/>
-                <a:ea typeface="Meiryo" pitchFamily="34" charset="-122"/>
-                <a:cs typeface="Meiryo" pitchFamily="34" charset="-120"/>
-              </a:rPr>
-              <a:t>問 い を 立 て る</a:t>
-            </a:r>
-            <a:endParaRPr lang="en-US" sz="1150" dirty="0"/>
-          </a:p>
-        </p:txBody>
-      </p:sp>
-      <p:sp>
-        <p:nvSpPr>
-          <p:cNvPr id="11" name="Text 9"/>
           <p:cNvSpPr txBox="1"/>
           <p:nvPr/>
         </p:nvSpPr>
@@ -8803,7 +8317,7 @@
       </p:sp>
       <p:sp>
         <p:nvSpPr>
-          <p:cNvPr id="12" name="Shape 10"/>
+          <p:cNvPr id="11" name="Shape 9"/>
           <p:cNvSpPr/>
           <p:nvPr/>
         </p:nvSpPr>
@@ -8828,7 +8342,7 @@
       </p:sp>
       <p:sp>
         <p:nvSpPr>
-          <p:cNvPr id="13" name="Shape 11"/>
+          <p:cNvPr id="12" name="Shape 10"/>
           <p:cNvSpPr/>
           <p:nvPr/>
         </p:nvSpPr>
@@ -8855,7 +8369,7 @@
       </p:sp>
       <p:sp>
         <p:nvSpPr>
-          <p:cNvPr id="14" name="Text 12"/>
+          <p:cNvPr id="13" name="Text 11"/>
           <p:cNvSpPr txBox="1"/>
           <p:nvPr/>
         </p:nvSpPr>
@@ -8894,46 +8408,46 @@
       </p:sp>
       <p:sp>
         <p:nvSpPr>
+          <p:cNvPr id="14" name="Text 12"/>
+          <p:cNvSpPr txBox="1"/>
+          <p:nvPr/>
+        </p:nvSpPr>
+        <p:spPr>
+          <a:xfrm>
+            <a:off x="2916936" y="2679192"/>
+            <a:ext cx="1856232" cy="274320"/>
+          </a:xfrm>
+          <a:prstGeom prst="rect">
+            <a:avLst/>
+          </a:prstGeom>
+          <a:noFill/>
+          <a:ln/>
+        </p:spPr>
+        <p:txBody>
+          <a:bodyPr wrap="square" lIns="0" tIns="0" rIns="0" bIns="0" rtlCol="0" anchor="ctr"/>
+          <a:lstStyle/>
+          <a:p>
+            <a:pPr algn="ctr" indent="0" marL="0">
+              <a:buNone/>
+            </a:pPr>
+            <a:r>
+              <a:rPr lang="en-US" sz="1100" b="1" spc="20" kern="0" dirty="0">
+                <a:solidFill>
+                  <a:srgbClr val="1A2B33"/>
+                </a:solidFill>
+                <a:latin typeface="Meiryo" pitchFamily="34" charset="0"/>
+                <a:ea typeface="Meiryo" pitchFamily="34" charset="-122"/>
+                <a:cs typeface="Meiryo" pitchFamily="34" charset="-120"/>
+              </a:rPr>
+              <a:t>条 件 を 指 定 す る</a:t>
+            </a:r>
+            <a:endParaRPr lang="en-US" sz="1100" dirty="0"/>
+          </a:p>
+        </p:txBody>
+      </p:sp>
+      <p:sp>
+        <p:nvSpPr>
           <p:cNvPr id="15" name="Text 13"/>
-          <p:cNvSpPr txBox="1"/>
-          <p:nvPr/>
-        </p:nvSpPr>
-        <p:spPr>
-          <a:xfrm>
-            <a:off x="2935224" y="2679192"/>
-            <a:ext cx="1819656" cy="274320"/>
-          </a:xfrm>
-          <a:prstGeom prst="rect">
-            <a:avLst/>
-          </a:prstGeom>
-          <a:noFill/>
-          <a:ln/>
-        </p:spPr>
-        <p:txBody>
-          <a:bodyPr wrap="square" lIns="0" tIns="0" rIns="0" bIns="0" rtlCol="0" anchor="ctr"/>
-          <a:lstStyle/>
-          <a:p>
-            <a:pPr algn="ctr" indent="0" marL="0">
-              <a:buNone/>
-            </a:pPr>
-            <a:r>
-              <a:rPr lang="en-US" sz="1150" b="1" spc="40" kern="0" dirty="0">
-                <a:solidFill>
-                  <a:srgbClr val="1A2B33"/>
-                </a:solidFill>
-                <a:latin typeface="Meiryo" pitchFamily="34" charset="0"/>
-                <a:ea typeface="Meiryo" pitchFamily="34" charset="-122"/>
-                <a:cs typeface="Meiryo" pitchFamily="34" charset="-120"/>
-              </a:rPr>
-              <a:t>整 え る</a:t>
-            </a:r>
-            <a:endParaRPr lang="en-US" sz="1150" dirty="0"/>
-          </a:p>
-        </p:txBody>
-      </p:sp>
-      <p:sp>
-        <p:nvSpPr>
-          <p:cNvPr id="16" name="Text 14"/>
           <p:cNvSpPr txBox="1"/>
           <p:nvPr/>
         </p:nvSpPr>
@@ -8967,7 +8481,7 @@
                 <a:ea typeface="Meiryo" pitchFamily="34" charset="-122"/>
                 <a:cs typeface="Meiryo" pitchFamily="34" charset="-120"/>
               </a:rPr>
-              <a:t>取引履歴（流動）から</a:t>
+              <a:t>入出金テーブルから</a:t>
             </a:r>
             <a:endParaRPr lang="en-US" sz="1150" dirty="0"/>
           </a:p>
@@ -8987,7 +8501,7 @@
                 <a:ea typeface="Meiryo" pitchFamily="34" charset="-122"/>
                 <a:cs typeface="Meiryo" pitchFamily="34" charset="-120"/>
               </a:rPr>
-              <a:t>入出金テーブルを作成</a:t>
+              <a:t>必要な集計を取り出す</a:t>
             </a:r>
             <a:endParaRPr lang="en-US" sz="1150" dirty="0"/>
           </a:p>
@@ -8995,7 +8509,7 @@
       </p:sp>
       <p:sp>
         <p:nvSpPr>
-          <p:cNvPr id="17" name="Shape 15"/>
+          <p:cNvPr id="16" name="Shape 14"/>
           <p:cNvSpPr/>
           <p:nvPr/>
         </p:nvSpPr>
@@ -9020,7 +8534,7 @@
       </p:sp>
       <p:sp>
         <p:nvSpPr>
-          <p:cNvPr id="18" name="Shape 16"/>
+          <p:cNvPr id="17" name="Shape 15"/>
           <p:cNvSpPr/>
           <p:nvPr/>
         </p:nvSpPr>
@@ -9047,7 +8561,7 @@
       </p:sp>
       <p:sp>
         <p:nvSpPr>
-          <p:cNvPr id="19" name="Text 17"/>
+          <p:cNvPr id="18" name="Text 16"/>
           <p:cNvSpPr txBox="1"/>
           <p:nvPr/>
         </p:nvSpPr>
@@ -9086,46 +8600,46 @@
       </p:sp>
       <p:sp>
         <p:nvSpPr>
+          <p:cNvPr id="19" name="Text 17"/>
+          <p:cNvSpPr txBox="1"/>
+          <p:nvPr/>
+        </p:nvSpPr>
+        <p:spPr>
+          <a:xfrm>
+            <a:off x="5157216" y="2679192"/>
+            <a:ext cx="1856232" cy="274320"/>
+          </a:xfrm>
+          <a:prstGeom prst="rect">
+            <a:avLst/>
+          </a:prstGeom>
+          <a:noFill/>
+          <a:ln/>
+        </p:spPr>
+        <p:txBody>
+          <a:bodyPr wrap="square" lIns="0" tIns="0" rIns="0" bIns="0" rtlCol="0" anchor="ctr"/>
+          <a:lstStyle/>
+          <a:p>
+            <a:pPr algn="ctr" indent="0" marL="0">
+              <a:buNone/>
+            </a:pPr>
+            <a:r>
+              <a:rPr lang="en-US" sz="1100" b="1" spc="20" kern="0" dirty="0">
+                <a:solidFill>
+                  <a:srgbClr val="1A2B33"/>
+                </a:solidFill>
+                <a:latin typeface="Meiryo" pitchFamily="34" charset="0"/>
+                <a:ea typeface="Meiryo" pitchFamily="34" charset="-122"/>
+                <a:cs typeface="Meiryo" pitchFamily="34" charset="-120"/>
+              </a:rPr>
+              <a:t>確 か め る</a:t>
+            </a:r>
+            <a:endParaRPr lang="en-US" sz="1100" dirty="0"/>
+          </a:p>
+        </p:txBody>
+      </p:sp>
+      <p:sp>
+        <p:nvSpPr>
           <p:cNvPr id="20" name="Text 18"/>
-          <p:cNvSpPr txBox="1"/>
-          <p:nvPr/>
-        </p:nvSpPr>
-        <p:spPr>
-          <a:xfrm>
-            <a:off x="5175504" y="2679192"/>
-            <a:ext cx="1819656" cy="274320"/>
-          </a:xfrm>
-          <a:prstGeom prst="rect">
-            <a:avLst/>
-          </a:prstGeom>
-          <a:noFill/>
-          <a:ln/>
-        </p:spPr>
-        <p:txBody>
-          <a:bodyPr wrap="square" lIns="0" tIns="0" rIns="0" bIns="0" rtlCol="0" anchor="ctr"/>
-          <a:lstStyle/>
-          <a:p>
-            <a:pPr algn="ctr" indent="0" marL="0">
-              <a:buNone/>
-            </a:pPr>
-            <a:r>
-              <a:rPr lang="en-US" sz="1150" b="1" spc="40" kern="0" dirty="0">
-                <a:solidFill>
-                  <a:srgbClr val="1A2B33"/>
-                </a:solidFill>
-                <a:latin typeface="Meiryo" pitchFamily="34" charset="0"/>
-                <a:ea typeface="Meiryo" pitchFamily="34" charset="-122"/>
-                <a:cs typeface="Meiryo" pitchFamily="34" charset="-120"/>
-              </a:rPr>
-              <a:t>確 か め る</a:t>
-            </a:r>
-            <a:endParaRPr lang="en-US" sz="1150" dirty="0"/>
-          </a:p>
-        </p:txBody>
-      </p:sp>
-      <p:sp>
-        <p:nvSpPr>
-          <p:cNvPr id="21" name="Text 19"/>
           <p:cNvSpPr txBox="1"/>
           <p:nvPr/>
         </p:nvSpPr>
@@ -9187,7 +8701,7 @@
       </p:sp>
       <p:sp>
         <p:nvSpPr>
-          <p:cNvPr id="22" name="Shape 20"/>
+          <p:cNvPr id="21" name="Shape 19"/>
           <p:cNvSpPr/>
           <p:nvPr/>
         </p:nvSpPr>
@@ -9212,7 +8726,7 @@
       </p:sp>
       <p:sp>
         <p:nvSpPr>
-          <p:cNvPr id="23" name="Shape 21"/>
+          <p:cNvPr id="22" name="Shape 20"/>
           <p:cNvSpPr/>
           <p:nvPr/>
         </p:nvSpPr>
@@ -9239,7 +8753,7 @@
       </p:sp>
       <p:sp>
         <p:nvSpPr>
-          <p:cNvPr id="24" name="Text 22"/>
+          <p:cNvPr id="23" name="Text 21"/>
           <p:cNvSpPr txBox="1"/>
           <p:nvPr/>
         </p:nvSpPr>
@@ -9278,46 +8792,46 @@
       </p:sp>
       <p:sp>
         <p:nvSpPr>
+          <p:cNvPr id="24" name="Text 22"/>
+          <p:cNvSpPr txBox="1"/>
+          <p:nvPr/>
+        </p:nvSpPr>
+        <p:spPr>
+          <a:xfrm>
+            <a:off x="7397496" y="2679192"/>
+            <a:ext cx="1856232" cy="274320"/>
+          </a:xfrm>
+          <a:prstGeom prst="rect">
+            <a:avLst/>
+          </a:prstGeom>
+          <a:noFill/>
+          <a:ln/>
+        </p:spPr>
+        <p:txBody>
+          <a:bodyPr wrap="square" lIns="0" tIns="0" rIns="0" bIns="0" rtlCol="0" anchor="ctr"/>
+          <a:lstStyle/>
+          <a:p>
+            <a:pPr algn="ctr" indent="0" marL="0">
+              <a:buNone/>
+            </a:pPr>
+            <a:r>
+              <a:rPr lang="en-US" sz="1100" b="1" spc="20" kern="0" dirty="0">
+                <a:solidFill>
+                  <a:srgbClr val="1A2B33"/>
+                </a:solidFill>
+                <a:latin typeface="Meiryo" pitchFamily="34" charset="0"/>
+                <a:ea typeface="Meiryo" pitchFamily="34" charset="-122"/>
+                <a:cs typeface="Meiryo" pitchFamily="34" charset="-120"/>
+              </a:rPr>
+              <a:t>深 掘 る</a:t>
+            </a:r>
+            <a:endParaRPr lang="en-US" sz="1100" dirty="0"/>
+          </a:p>
+        </p:txBody>
+      </p:sp>
+      <p:sp>
+        <p:nvSpPr>
           <p:cNvPr id="25" name="Text 23"/>
-          <p:cNvSpPr txBox="1"/>
-          <p:nvPr/>
-        </p:nvSpPr>
-        <p:spPr>
-          <a:xfrm>
-            <a:off x="7415784" y="2679192"/>
-            <a:ext cx="1819656" cy="274320"/>
-          </a:xfrm>
-          <a:prstGeom prst="rect">
-            <a:avLst/>
-          </a:prstGeom>
-          <a:noFill/>
-          <a:ln/>
-        </p:spPr>
-        <p:txBody>
-          <a:bodyPr wrap="square" lIns="0" tIns="0" rIns="0" bIns="0" rtlCol="0" anchor="ctr"/>
-          <a:lstStyle/>
-          <a:p>
-            <a:pPr algn="ctr" indent="0" marL="0">
-              <a:buNone/>
-            </a:pPr>
-            <a:r>
-              <a:rPr lang="en-US" sz="1150" b="1" spc="40" kern="0" dirty="0">
-                <a:solidFill>
-                  <a:srgbClr val="1A2B33"/>
-                </a:solidFill>
-                <a:latin typeface="Meiryo" pitchFamily="34" charset="0"/>
-                <a:ea typeface="Meiryo" pitchFamily="34" charset="-122"/>
-                <a:cs typeface="Meiryo" pitchFamily="34" charset="-120"/>
-              </a:rPr>
-              <a:t>深 掘 る</a:t>
-            </a:r>
-            <a:endParaRPr lang="en-US" sz="1150" dirty="0"/>
-          </a:p>
-        </p:txBody>
-      </p:sp>
-      <p:sp>
-        <p:nvSpPr>
-          <p:cNvPr id="26" name="Text 24"/>
           <p:cNvSpPr txBox="1"/>
           <p:nvPr/>
         </p:nvSpPr>
@@ -9379,7 +8893,7 @@
       </p:sp>
       <p:sp>
         <p:nvSpPr>
-          <p:cNvPr id="27" name="Shape 25"/>
+          <p:cNvPr id="26" name="Shape 24"/>
           <p:cNvSpPr/>
           <p:nvPr/>
         </p:nvSpPr>
@@ -9404,7 +8918,7 @@
       </p:sp>
       <p:sp>
         <p:nvSpPr>
-          <p:cNvPr id="28" name="Shape 26"/>
+          <p:cNvPr id="27" name="Shape 25"/>
           <p:cNvSpPr/>
           <p:nvPr/>
         </p:nvSpPr>
@@ -9431,7 +8945,7 @@
       </p:sp>
       <p:sp>
         <p:nvSpPr>
-          <p:cNvPr id="29" name="Text 27"/>
+          <p:cNvPr id="28" name="Text 26"/>
           <p:cNvSpPr txBox="1"/>
           <p:nvPr/>
         </p:nvSpPr>
@@ -9470,46 +8984,46 @@
       </p:sp>
       <p:sp>
         <p:nvSpPr>
+          <p:cNvPr id="29" name="Text 27"/>
+          <p:cNvSpPr txBox="1"/>
+          <p:nvPr/>
+        </p:nvSpPr>
+        <p:spPr>
+          <a:xfrm>
+            <a:off x="9637776" y="2679192"/>
+            <a:ext cx="1856232" cy="274320"/>
+          </a:xfrm>
+          <a:prstGeom prst="rect">
+            <a:avLst/>
+          </a:prstGeom>
+          <a:noFill/>
+          <a:ln/>
+        </p:spPr>
+        <p:txBody>
+          <a:bodyPr wrap="square" lIns="0" tIns="0" rIns="0" bIns="0" rtlCol="0" anchor="ctr"/>
+          <a:lstStyle/>
+          <a:p>
+            <a:pPr algn="ctr" indent="0" marL="0">
+              <a:buNone/>
+            </a:pPr>
+            <a:r>
+              <a:rPr lang="en-US" sz="1100" b="1" spc="20" kern="0" dirty="0">
+                <a:solidFill>
+                  <a:srgbClr val="FFFFFF"/>
+                </a:solidFill>
+                <a:latin typeface="Meiryo" pitchFamily="34" charset="0"/>
+                <a:ea typeface="Meiryo" pitchFamily="34" charset="-122"/>
+                <a:cs typeface="Meiryo" pitchFamily="34" charset="-120"/>
+              </a:rPr>
+              <a:t>次 の 一 手</a:t>
+            </a:r>
+            <a:endParaRPr lang="en-US" sz="1100" dirty="0"/>
+          </a:p>
+        </p:txBody>
+      </p:sp>
+      <p:sp>
+        <p:nvSpPr>
           <p:cNvPr id="30" name="Text 28"/>
-          <p:cNvSpPr txBox="1"/>
-          <p:nvPr/>
-        </p:nvSpPr>
-        <p:spPr>
-          <a:xfrm>
-            <a:off x="9656064" y="2679192"/>
-            <a:ext cx="1819656" cy="274320"/>
-          </a:xfrm>
-          <a:prstGeom prst="rect">
-            <a:avLst/>
-          </a:prstGeom>
-          <a:noFill/>
-          <a:ln/>
-        </p:spPr>
-        <p:txBody>
-          <a:bodyPr wrap="square" lIns="0" tIns="0" rIns="0" bIns="0" rtlCol="0" anchor="ctr"/>
-          <a:lstStyle/>
-          <a:p>
-            <a:pPr algn="ctr" indent="0" marL="0">
-              <a:buNone/>
-            </a:pPr>
-            <a:r>
-              <a:rPr lang="en-US" sz="1150" b="1" spc="40" kern="0" dirty="0">
-                <a:solidFill>
-                  <a:srgbClr val="FFFFFF"/>
-                </a:solidFill>
-                <a:latin typeface="Meiryo" pitchFamily="34" charset="0"/>
-                <a:ea typeface="Meiryo" pitchFamily="34" charset="-122"/>
-                <a:cs typeface="Meiryo" pitchFamily="34" charset="-120"/>
-              </a:rPr>
-              <a:t>次 の 一 手</a:t>
-            </a:r>
-            <a:endParaRPr lang="en-US" sz="1150" dirty="0"/>
-          </a:p>
-        </p:txBody>
-      </p:sp>
-      <p:sp>
-        <p:nvSpPr>
-          <p:cNvPr id="31" name="Text 29"/>
           <p:cNvSpPr txBox="1"/>
           <p:nvPr/>
         </p:nvSpPr>
@@ -9571,7 +9085,7 @@
       </p:sp>
       <p:sp>
         <p:nvSpPr>
-          <p:cNvPr id="32" name="Shape 30"/>
+          <p:cNvPr id="31" name="Shape 29"/>
           <p:cNvSpPr/>
           <p:nvPr/>
         </p:nvSpPr>
@@ -9598,7 +9112,7 @@
       </p:sp>
       <p:sp>
         <p:nvSpPr>
-          <p:cNvPr id="33" name="Text 31"/>
+          <p:cNvPr id="32" name="Text 30"/>
           <p:cNvSpPr txBox="1"/>
           <p:nvPr/>
         </p:nvSpPr>
@@ -9629,7 +9143,7 @@
                 <a:ea typeface="Meiryo" pitchFamily="34" charset="-122"/>
                 <a:cs typeface="Meiryo" pitchFamily="34" charset="-120"/>
               </a:rPr>
-              <a:t>行内にあるデータも、条件を指定して見られる形に整えれば、業務上の問いに答え、次の施策を考える材料になる</a:t>
+              <a:t>行内にあるデータも、条件を指定して見られる形にすれば、業務上の問いに答え、次の施策を考える材料になる</a:t>
             </a:r>
             <a:endParaRPr lang="en-US" sz="1500" dirty="0"/>
           </a:p>
@@ -9637,7 +9151,7 @@
       </p:sp>
       <p:sp>
         <p:nvSpPr>
-          <p:cNvPr id="34" name="Text 32"/>
+          <p:cNvPr id="33" name="Text 31"/>
           <p:cNvSpPr txBox="1"/>
           <p:nvPr/>
         </p:nvSpPr>
